--- a/docs/휴가증 자동 반영 프로그램 안내 (작업자용).pptx
+++ b/docs/휴가증 자동 반영 프로그램 안내 (작업자용).pptx
@@ -11,9 +11,6 @@
     <p:sldId id="259" r:id="rId10"/>
     <p:sldId id="260" r:id="rId11"/>
     <p:sldId id="261" r:id="rId12"/>
-    <p:sldId id="262" r:id="rId13"/>
-    <p:sldId id="263" r:id="rId14"/>
-    <p:sldId id="264" r:id="rId15"/>
   </p:sldIdLst>
   <p:sldSz cx="12191695" cy="6858000" type="screen4x3"/>
   <p:notesSz cx="6858000" cy="9144000"/>
@@ -3105,50 +3102,6 @@
         <p:spPr>
           <a:xfrm>
             <a:off x="0" y="0"/>
-            <a:ext cx="12191695" cy="6858000"/>
-          </a:xfrm>
-          <a:prstGeom prst="rect">
-            <a:avLst/>
-          </a:prstGeom>
-          <a:solidFill>
-            <a:srgbClr val="FFFFFF"/>
-          </a:solidFill>
-          <a:ln>
-            <a:noFill/>
-          </a:ln>
-          <a:effectLst/>
-        </p:spPr>
-        <p:style>
-          <a:lnRef idx="1">
-            <a:schemeClr val="accent1"/>
-          </a:lnRef>
-          <a:fillRef idx="3">
-            <a:schemeClr val="accent1"/>
-          </a:fillRef>
-          <a:effectRef idx="2">
-            <a:schemeClr val="accent1"/>
-          </a:effectRef>
-          <a:fontRef idx="minor">
-            <a:schemeClr val="lt1"/>
-          </a:fontRef>
-        </p:style>
-        <p:txBody>
-          <a:bodyPr rtlCol="0" anchor="ctr"/>
-          <a:lstStyle/>
-          <a:p>
-            <a:pPr algn="ctr"/>
-          </a:p>
-        </p:txBody>
-      </p:sp>
-      <p:sp>
-        <p:nvSpPr>
-          <p:cNvPr id="3" name="Rectangle 2"/>
-          <p:cNvSpPr/>
-          <p:nvPr/>
-        </p:nvSpPr>
-        <p:spPr>
-          <a:xfrm>
-            <a:off x="0" y="0"/>
             <a:ext cx="365760" cy="6858000"/>
           </a:xfrm>
           <a:prstGeom prst="rect">
@@ -3186,7 +3139,7 @@
       </p:sp>
       <p:sp>
         <p:nvSpPr>
-          <p:cNvPr id="4" name="TextBox 3"/>
+          <p:cNvPr id="3" name="TextBox 2"/>
           <p:cNvSpPr txBox="1"/>
           <p:nvPr/>
         </p:nvSpPr>
@@ -3221,7 +3174,7 @@
       </p:sp>
       <p:sp>
         <p:nvSpPr>
-          <p:cNvPr id="5" name="TextBox 4"/>
+          <p:cNvPr id="4" name="TextBox 3"/>
           <p:cNvSpPr txBox="1"/>
           <p:nvPr/>
         </p:nvSpPr>
@@ -3256,7 +3209,7 @@
       </p:sp>
       <p:sp>
         <p:nvSpPr>
-          <p:cNvPr id="6" name="TextBox 5"/>
+          <p:cNvPr id="5" name="TextBox 4"/>
           <p:cNvSpPr txBox="1"/>
           <p:nvPr/>
         </p:nvSpPr>
@@ -3291,7 +3244,7 @@
       </p:sp>
       <p:sp>
         <p:nvSpPr>
-          <p:cNvPr id="7" name="Rectangle 6"/>
+          <p:cNvPr id="6" name="Rectangle 5"/>
           <p:cNvSpPr/>
           <p:nvPr/>
         </p:nvSpPr>
@@ -3335,7 +3288,7 @@
       </p:sp>
       <p:sp>
         <p:nvSpPr>
-          <p:cNvPr id="8" name="TextBox 7"/>
+          <p:cNvPr id="7" name="TextBox 6"/>
           <p:cNvSpPr txBox="1"/>
           <p:nvPr/>
         </p:nvSpPr>
@@ -3370,7 +3323,7 @@
       </p:sp>
       <p:sp>
         <p:nvSpPr>
-          <p:cNvPr id="9" name="TextBox 8"/>
+          <p:cNvPr id="8" name="TextBox 7"/>
           <p:cNvSpPr txBox="1"/>
           <p:nvPr/>
         </p:nvSpPr>
@@ -3509,11 +3462,11 @@
         <p:spPr>
           <a:xfrm>
             <a:off x="731520" y="1554480"/>
-            <a:ext cx="5212080" cy="4114800"/>
+            <a:ext cx="5212080" cy="3931920"/>
           </a:xfrm>
           <a:prstGeom prst="roundRect">
             <a:avLst>
-              <a:gd name="adj" fmla="val 15000"/>
+              <a:gd name="adj" fmla="val 12000"/>
             </a:avLst>
           </a:prstGeom>
           <a:solidFill>
@@ -3614,7 +3567,7 @@
               <a:t>• 종이 휴가증 작성
 • 휴가증함에 제출
 • 담당자가 매일 수거
-• 서무가 그룹웨어에 일일이 입력</a:t>
+• 서무가 일일이 입력</a:t>
             </a:r>
           </a:p>
         </p:txBody>
@@ -3628,11 +3581,11 @@
         <p:spPr>
           <a:xfrm>
             <a:off x="6217920" y="1554480"/>
-            <a:ext cx="5212080" cy="4114800"/>
+            <a:ext cx="5212080" cy="3931920"/>
           </a:xfrm>
           <a:prstGeom prst="roundRect">
             <a:avLst>
-              <a:gd name="adj" fmla="val 15000"/>
+              <a:gd name="adj" fmla="val 12000"/>
             </a:avLst>
           </a:prstGeom>
           <a:solidFill>
@@ -3746,8 +3699,8 @@
         </p:nvSpPr>
         <p:spPr>
           <a:xfrm>
-            <a:off x="731520" y="5852160"/>
-            <a:ext cx="10698480" cy="548640"/>
+            <a:off x="731520" y="5760720"/>
+            <a:ext cx="10698480" cy="457200"/>
           </a:xfrm>
           <a:prstGeom prst="rect">
             <a:avLst/>
@@ -3803,7 +3756,7 @@
                 </a:solidFill>
                 <a:latin typeface="맑은 고딕"/>
               </a:rPr>
-              <a:t>COSMAX · 생산3팀 파우더 성형실    |    2 / 9</a:t>
+              <a:t>COSMAX · 생산3팀 파우더 성형실    |    2 / 6</a:t>
             </a:r>
           </a:p>
         </p:txBody>
@@ -3900,7 +3853,7 @@
                 </a:solidFill>
                 <a:latin typeface="맑은 고딕"/>
               </a:rPr>
-              <a:t>1. 사이트 접속하기</a:t>
+              <a:t>1. 접속 &amp; 로그인</a:t>
             </a:r>
           </a:p>
         </p:txBody>
@@ -3913,12 +3866,12 @@
         </p:nvSpPr>
         <p:spPr>
           <a:xfrm>
-            <a:off x="1371600" y="1828800"/>
-            <a:ext cx="9418320" cy="1097280"/>
+            <a:off x="914400" y="1371600"/>
+            <a:ext cx="10332720" cy="822960"/>
           </a:xfrm>
           <a:prstGeom prst="roundRect">
             <a:avLst>
-              <a:gd name="adj" fmla="val 15000"/>
+              <a:gd name="adj" fmla="val 12000"/>
             </a:avLst>
           </a:prstGeom>
           <a:solidFill>
@@ -3959,8 +3912,8 @@
         </p:nvSpPr>
         <p:spPr>
           <a:xfrm>
-            <a:off x="1371600" y="1828800"/>
-            <a:ext cx="9418320" cy="1097280"/>
+            <a:off x="914400" y="1371600"/>
+            <a:ext cx="10332720" cy="822960"/>
           </a:xfrm>
           <a:prstGeom prst="rect">
             <a:avLst/>
@@ -3975,7 +3928,7 @@
           <a:p>
             <a:pPr algn="ctr"/>
             <a:r>
-              <a:rPr sz="2000" b="1">
+              <a:rPr sz="1700" b="1">
                 <a:solidFill>
                   <a:srgbClr val="C8102E"/>
                 </a:solidFill>
@@ -3988,53 +3941,471 @@
       </p:sp>
       <p:sp>
         <p:nvSpPr>
-          <p:cNvPr id="6" name="TextBox 5"/>
-          <p:cNvSpPr txBox="1"/>
-          <p:nvPr/>
-        </p:nvSpPr>
-        <p:spPr>
-          <a:xfrm>
-            <a:off x="914400" y="3291840"/>
-            <a:ext cx="10332720" cy="548640"/>
-          </a:xfrm>
-          <a:prstGeom prst="rect">
-            <a:avLst/>
-          </a:prstGeom>
-          <a:noFill/>
-        </p:spPr>
-        <p:txBody>
-          <a:bodyPr wrap="square" lIns="25400" rIns="25400" tIns="25400" bIns="25400" anchor="t">
-            <a:spAutoFit/>
-          </a:bodyPr>
-          <a:lstStyle/>
-          <a:p>
-            <a:pPr algn="l"/>
-            <a:r>
-              <a:rPr sz="1800" b="0">
-                <a:solidFill>
-                  <a:srgbClr val="1A1A1A"/>
-                </a:solidFill>
-                <a:latin typeface="맑은 고딕"/>
-              </a:rPr>
-              <a:t>휴대폰 브라우저(Safari / Chrome)에서 위 주소로 접속</a:t>
-            </a:r>
-          </a:p>
-        </p:txBody>
-      </p:sp>
-      <p:sp>
-        <p:nvSpPr>
-          <p:cNvPr id="7" name="Rounded Rectangle 6"/>
+          <p:cNvPr id="6" name="Rounded Rectangle 5"/>
           <p:cNvSpPr/>
           <p:nvPr/>
         </p:nvSpPr>
         <p:spPr>
           <a:xfrm>
-            <a:off x="914400" y="4114800"/>
-            <a:ext cx="10332720" cy="1828800"/>
+            <a:off x="731520" y="2560320"/>
+            <a:ext cx="3566160" cy="2377440"/>
           </a:xfrm>
           <a:prstGeom prst="roundRect">
             <a:avLst>
-              <a:gd name="adj" fmla="val 15000"/>
+              <a:gd name="adj" fmla="val 12000"/>
+            </a:avLst>
+          </a:prstGeom>
+          <a:solidFill>
+            <a:srgbClr val="FFF5F5"/>
+          </a:solidFill>
+          <a:ln>
+            <a:noFill/>
+          </a:ln>
+          <a:effectLst/>
+        </p:spPr>
+        <p:style>
+          <a:lnRef idx="1">
+            <a:schemeClr val="accent1"/>
+          </a:lnRef>
+          <a:fillRef idx="3">
+            <a:schemeClr val="accent1"/>
+          </a:fillRef>
+          <a:effectRef idx="2">
+            <a:schemeClr val="accent1"/>
+          </a:effectRef>
+          <a:fontRef idx="minor">
+            <a:schemeClr val="lt1"/>
+          </a:fontRef>
+        </p:style>
+        <p:txBody>
+          <a:bodyPr rtlCol="0" anchor="ctr"/>
+          <a:lstStyle/>
+          <a:p>
+            <a:pPr algn="ctr"/>
+          </a:p>
+        </p:txBody>
+      </p:sp>
+      <p:sp>
+        <p:nvSpPr>
+          <p:cNvPr id="7" name="TextBox 6"/>
+          <p:cNvSpPr txBox="1"/>
+          <p:nvPr/>
+        </p:nvSpPr>
+        <p:spPr>
+          <a:xfrm>
+            <a:off x="731520" y="2743200"/>
+            <a:ext cx="3566160" cy="640080"/>
+          </a:xfrm>
+          <a:prstGeom prst="rect">
+            <a:avLst/>
+          </a:prstGeom>
+          <a:noFill/>
+        </p:spPr>
+        <p:txBody>
+          <a:bodyPr wrap="square" lIns="25400" rIns="25400" tIns="25400" bIns="25400" anchor="t">
+            <a:spAutoFit/>
+          </a:bodyPr>
+          <a:lstStyle/>
+          <a:p>
+            <a:pPr algn="ctr"/>
+            <a:r>
+              <a:rPr sz="3600" b="1">
+                <a:solidFill>
+                  <a:srgbClr val="C8102E"/>
+                </a:solidFill>
+                <a:latin typeface="맑은 고딕"/>
+              </a:rPr>
+              <a:t>①</a:t>
+            </a:r>
+          </a:p>
+        </p:txBody>
+      </p:sp>
+      <p:sp>
+        <p:nvSpPr>
+          <p:cNvPr id="8" name="TextBox 7"/>
+          <p:cNvSpPr txBox="1"/>
+          <p:nvPr/>
+        </p:nvSpPr>
+        <p:spPr>
+          <a:xfrm>
+            <a:off x="731520" y="3566160"/>
+            <a:ext cx="3566160" cy="457200"/>
+          </a:xfrm>
+          <a:prstGeom prst="rect">
+            <a:avLst/>
+          </a:prstGeom>
+          <a:noFill/>
+        </p:spPr>
+        <p:txBody>
+          <a:bodyPr wrap="square" lIns="25400" rIns="25400" tIns="25400" bIns="25400" anchor="t">
+            <a:spAutoFit/>
+          </a:bodyPr>
+          <a:lstStyle/>
+          <a:p>
+            <a:pPr algn="ctr"/>
+            <a:r>
+              <a:rPr sz="1800" b="1">
+                <a:solidFill>
+                  <a:srgbClr val="1A1A1A"/>
+                </a:solidFill>
+                <a:latin typeface="맑은 고딕"/>
+              </a:rPr>
+              <a:t>휴대폰으로 접속</a:t>
+            </a:r>
+          </a:p>
+        </p:txBody>
+      </p:sp>
+      <p:sp>
+        <p:nvSpPr>
+          <p:cNvPr id="9" name="TextBox 8"/>
+          <p:cNvSpPr txBox="1"/>
+          <p:nvPr/>
+        </p:nvSpPr>
+        <p:spPr>
+          <a:xfrm>
+            <a:off x="731520" y="4114800"/>
+            <a:ext cx="3566160" cy="548640"/>
+          </a:xfrm>
+          <a:prstGeom prst="rect">
+            <a:avLst/>
+          </a:prstGeom>
+          <a:noFill/>
+        </p:spPr>
+        <p:txBody>
+          <a:bodyPr wrap="square" lIns="25400" rIns="25400" tIns="25400" bIns="25400" anchor="t">
+            <a:spAutoFit/>
+          </a:bodyPr>
+          <a:lstStyle/>
+          <a:p>
+            <a:pPr algn="ctr"/>
+            <a:r>
+              <a:rPr sz="1300" b="0">
+                <a:solidFill>
+                  <a:srgbClr val="777777"/>
+                </a:solidFill>
+                <a:latin typeface="맑은 고딕"/>
+              </a:rPr>
+              <a:t>Safari / Chrome</a:t>
+            </a:r>
+          </a:p>
+        </p:txBody>
+      </p:sp>
+      <p:sp>
+        <p:nvSpPr>
+          <p:cNvPr id="10" name="Rounded Rectangle 9"/>
+          <p:cNvSpPr/>
+          <p:nvPr/>
+        </p:nvSpPr>
+        <p:spPr>
+          <a:xfrm>
+            <a:off x="4572000" y="2560320"/>
+            <a:ext cx="3566160" cy="2377440"/>
+          </a:xfrm>
+          <a:prstGeom prst="roundRect">
+            <a:avLst>
+              <a:gd name="adj" fmla="val 12000"/>
+            </a:avLst>
+          </a:prstGeom>
+          <a:solidFill>
+            <a:srgbClr val="FFF5F5"/>
+          </a:solidFill>
+          <a:ln>
+            <a:noFill/>
+          </a:ln>
+          <a:effectLst/>
+        </p:spPr>
+        <p:style>
+          <a:lnRef idx="1">
+            <a:schemeClr val="accent1"/>
+          </a:lnRef>
+          <a:fillRef idx="3">
+            <a:schemeClr val="accent1"/>
+          </a:fillRef>
+          <a:effectRef idx="2">
+            <a:schemeClr val="accent1"/>
+          </a:effectRef>
+          <a:fontRef idx="minor">
+            <a:schemeClr val="lt1"/>
+          </a:fontRef>
+        </p:style>
+        <p:txBody>
+          <a:bodyPr rtlCol="0" anchor="ctr"/>
+          <a:lstStyle/>
+          <a:p>
+            <a:pPr algn="ctr"/>
+          </a:p>
+        </p:txBody>
+      </p:sp>
+      <p:sp>
+        <p:nvSpPr>
+          <p:cNvPr id="11" name="TextBox 10"/>
+          <p:cNvSpPr txBox="1"/>
+          <p:nvPr/>
+        </p:nvSpPr>
+        <p:spPr>
+          <a:xfrm>
+            <a:off x="4572000" y="2743200"/>
+            <a:ext cx="3566160" cy="640080"/>
+          </a:xfrm>
+          <a:prstGeom prst="rect">
+            <a:avLst/>
+          </a:prstGeom>
+          <a:noFill/>
+        </p:spPr>
+        <p:txBody>
+          <a:bodyPr wrap="square" lIns="25400" rIns="25400" tIns="25400" bIns="25400" anchor="t">
+            <a:spAutoFit/>
+          </a:bodyPr>
+          <a:lstStyle/>
+          <a:p>
+            <a:pPr algn="ctr"/>
+            <a:r>
+              <a:rPr sz="3600" b="1">
+                <a:solidFill>
+                  <a:srgbClr val="C8102E"/>
+                </a:solidFill>
+                <a:latin typeface="맑은 고딕"/>
+              </a:rPr>
+              <a:t>②</a:t>
+            </a:r>
+          </a:p>
+        </p:txBody>
+      </p:sp>
+      <p:sp>
+        <p:nvSpPr>
+          <p:cNvPr id="12" name="TextBox 11"/>
+          <p:cNvSpPr txBox="1"/>
+          <p:nvPr/>
+        </p:nvSpPr>
+        <p:spPr>
+          <a:xfrm>
+            <a:off x="4572000" y="3566160"/>
+            <a:ext cx="3566160" cy="457200"/>
+          </a:xfrm>
+          <a:prstGeom prst="rect">
+            <a:avLst/>
+          </a:prstGeom>
+          <a:noFill/>
+        </p:spPr>
+        <p:txBody>
+          <a:bodyPr wrap="square" lIns="25400" rIns="25400" tIns="25400" bIns="25400" anchor="t">
+            <a:spAutoFit/>
+          </a:bodyPr>
+          <a:lstStyle/>
+          <a:p>
+            <a:pPr algn="ctr"/>
+            <a:r>
+              <a:rPr sz="1800" b="1">
+                <a:solidFill>
+                  <a:srgbClr val="1A1A1A"/>
+                </a:solidFill>
+                <a:latin typeface="맑은 고딕"/>
+              </a:rPr>
+              <a:t>사번 + 1234</a:t>
+            </a:r>
+          </a:p>
+        </p:txBody>
+      </p:sp>
+      <p:sp>
+        <p:nvSpPr>
+          <p:cNvPr id="13" name="TextBox 12"/>
+          <p:cNvSpPr txBox="1"/>
+          <p:nvPr/>
+        </p:nvSpPr>
+        <p:spPr>
+          <a:xfrm>
+            <a:off x="4572000" y="4114800"/>
+            <a:ext cx="3566160" cy="548640"/>
+          </a:xfrm>
+          <a:prstGeom prst="rect">
+            <a:avLst/>
+          </a:prstGeom>
+          <a:noFill/>
+        </p:spPr>
+        <p:txBody>
+          <a:bodyPr wrap="square" lIns="25400" rIns="25400" tIns="25400" bIns="25400" anchor="t">
+            <a:spAutoFit/>
+          </a:bodyPr>
+          <a:lstStyle/>
+          <a:p>
+            <a:pPr algn="ctr"/>
+            <a:r>
+              <a:rPr sz="1300" b="0">
+                <a:solidFill>
+                  <a:srgbClr val="777777"/>
+                </a:solidFill>
+                <a:latin typeface="맑은 고딕"/>
+              </a:rPr>
+              <a:t>초기 비밀번호</a:t>
+            </a:r>
+          </a:p>
+        </p:txBody>
+      </p:sp>
+      <p:sp>
+        <p:nvSpPr>
+          <p:cNvPr id="14" name="Rounded Rectangle 13"/>
+          <p:cNvSpPr/>
+          <p:nvPr/>
+        </p:nvSpPr>
+        <p:spPr>
+          <a:xfrm>
+            <a:off x="8412480" y="2560320"/>
+            <a:ext cx="3566160" cy="2377440"/>
+          </a:xfrm>
+          <a:prstGeom prst="roundRect">
+            <a:avLst>
+              <a:gd name="adj" fmla="val 12000"/>
+            </a:avLst>
+          </a:prstGeom>
+          <a:solidFill>
+            <a:srgbClr val="FFF5F5"/>
+          </a:solidFill>
+          <a:ln>
+            <a:noFill/>
+          </a:ln>
+          <a:effectLst/>
+        </p:spPr>
+        <p:style>
+          <a:lnRef idx="1">
+            <a:schemeClr val="accent1"/>
+          </a:lnRef>
+          <a:fillRef idx="3">
+            <a:schemeClr val="accent1"/>
+          </a:fillRef>
+          <a:effectRef idx="2">
+            <a:schemeClr val="accent1"/>
+          </a:effectRef>
+          <a:fontRef idx="minor">
+            <a:schemeClr val="lt1"/>
+          </a:fontRef>
+        </p:style>
+        <p:txBody>
+          <a:bodyPr rtlCol="0" anchor="ctr"/>
+          <a:lstStyle/>
+          <a:p>
+            <a:pPr algn="ctr"/>
+          </a:p>
+        </p:txBody>
+      </p:sp>
+      <p:sp>
+        <p:nvSpPr>
+          <p:cNvPr id="15" name="TextBox 14"/>
+          <p:cNvSpPr txBox="1"/>
+          <p:nvPr/>
+        </p:nvSpPr>
+        <p:spPr>
+          <a:xfrm>
+            <a:off x="8412480" y="2743200"/>
+            <a:ext cx="3566160" cy="640080"/>
+          </a:xfrm>
+          <a:prstGeom prst="rect">
+            <a:avLst/>
+          </a:prstGeom>
+          <a:noFill/>
+        </p:spPr>
+        <p:txBody>
+          <a:bodyPr wrap="square" lIns="25400" rIns="25400" tIns="25400" bIns="25400" anchor="t">
+            <a:spAutoFit/>
+          </a:bodyPr>
+          <a:lstStyle/>
+          <a:p>
+            <a:pPr algn="ctr"/>
+            <a:r>
+              <a:rPr sz="3600" b="1">
+                <a:solidFill>
+                  <a:srgbClr val="C8102E"/>
+                </a:solidFill>
+                <a:latin typeface="맑은 고딕"/>
+              </a:rPr>
+              <a:t>③</a:t>
+            </a:r>
+          </a:p>
+        </p:txBody>
+      </p:sp>
+      <p:sp>
+        <p:nvSpPr>
+          <p:cNvPr id="16" name="TextBox 15"/>
+          <p:cNvSpPr txBox="1"/>
+          <p:nvPr/>
+        </p:nvSpPr>
+        <p:spPr>
+          <a:xfrm>
+            <a:off x="8412480" y="3566160"/>
+            <a:ext cx="3566160" cy="457200"/>
+          </a:xfrm>
+          <a:prstGeom prst="rect">
+            <a:avLst/>
+          </a:prstGeom>
+          <a:noFill/>
+        </p:spPr>
+        <p:txBody>
+          <a:bodyPr wrap="square" lIns="25400" rIns="25400" tIns="25400" bIns="25400" anchor="t">
+            <a:spAutoFit/>
+          </a:bodyPr>
+          <a:lstStyle/>
+          <a:p>
+            <a:pPr algn="ctr"/>
+            <a:r>
+              <a:rPr sz="1800" b="1">
+                <a:solidFill>
+                  <a:srgbClr val="1A1A1A"/>
+                </a:solidFill>
+                <a:latin typeface="맑은 고딕"/>
+              </a:rPr>
+              <a:t>로그인</a:t>
+            </a:r>
+          </a:p>
+        </p:txBody>
+      </p:sp>
+      <p:sp>
+        <p:nvSpPr>
+          <p:cNvPr id="17" name="TextBox 16"/>
+          <p:cNvSpPr txBox="1"/>
+          <p:nvPr/>
+        </p:nvSpPr>
+        <p:spPr>
+          <a:xfrm>
+            <a:off x="8412480" y="4114800"/>
+            <a:ext cx="3566160" cy="548640"/>
+          </a:xfrm>
+          <a:prstGeom prst="rect">
+            <a:avLst/>
+          </a:prstGeom>
+          <a:noFill/>
+        </p:spPr>
+        <p:txBody>
+          <a:bodyPr wrap="square" lIns="25400" rIns="25400" tIns="25400" bIns="25400" anchor="t">
+            <a:spAutoFit/>
+          </a:bodyPr>
+          <a:lstStyle/>
+          <a:p>
+            <a:pPr algn="ctr"/>
+            <a:r>
+              <a:rPr sz="1300" b="0">
+                <a:solidFill>
+                  <a:srgbClr val="777777"/>
+                </a:solidFill>
+                <a:latin typeface="맑은 고딕"/>
+              </a:rPr>
+              <a:t>→ 메인 화면 진입</a:t>
+            </a:r>
+          </a:p>
+        </p:txBody>
+      </p:sp>
+      <p:sp>
+        <p:nvSpPr>
+          <p:cNvPr id="18" name="Rounded Rectangle 17"/>
+          <p:cNvSpPr/>
+          <p:nvPr/>
+        </p:nvSpPr>
+        <p:spPr>
+          <a:xfrm>
+            <a:off x="914400" y="5212080"/>
+            <a:ext cx="10332720" cy="1005840"/>
+          </a:xfrm>
+          <a:prstGeom prst="roundRect">
+            <a:avLst>
+              <a:gd name="adj" fmla="val 12000"/>
             </a:avLst>
           </a:prstGeom>
           <a:solidFill>
@@ -4069,78 +4440,42 @@
       </p:sp>
       <p:sp>
         <p:nvSpPr>
-          <p:cNvPr id="8" name="TextBox 7"/>
-          <p:cNvSpPr txBox="1"/>
-          <p:nvPr/>
-        </p:nvSpPr>
-        <p:spPr>
-          <a:xfrm>
-            <a:off x="1188720" y="4297680"/>
-            <a:ext cx="9875520" cy="457200"/>
-          </a:xfrm>
-          <a:prstGeom prst="rect">
-            <a:avLst/>
-          </a:prstGeom>
-          <a:noFill/>
-        </p:spPr>
-        <p:txBody>
-          <a:bodyPr wrap="square" lIns="25400" rIns="25400" tIns="25400" bIns="25400" anchor="t">
+          <p:cNvPr id="19" name="TextBox 18"/>
+          <p:cNvSpPr txBox="1"/>
+          <p:nvPr/>
+        </p:nvSpPr>
+        <p:spPr>
+          <a:xfrm>
+            <a:off x="1188720" y="5349240"/>
+            <a:ext cx="9875520" cy="731520"/>
+          </a:xfrm>
+          <a:prstGeom prst="rect">
+            <a:avLst/>
+          </a:prstGeom>
+          <a:noFill/>
+        </p:spPr>
+        <p:txBody>
+          <a:bodyPr wrap="square" lIns="25400" rIns="25400" tIns="25400" bIns="25400" anchor="ctr">
             <a:spAutoFit/>
           </a:bodyPr>
           <a:lstStyle/>
           <a:p>
             <a:pPr algn="l"/>
             <a:r>
-              <a:rPr sz="1600" b="1">
+              <a:rPr sz="1400" b="1">
                 <a:solidFill>
                   <a:srgbClr val="A30D24"/>
                 </a:solidFill>
                 <a:latin typeface="맑은 고딕"/>
               </a:rPr>
-              <a:t>💡 휴대폰 홈 화면에 추가하면 앱처럼 사용 가능</a:t>
-            </a:r>
-          </a:p>
-        </p:txBody>
-      </p:sp>
-      <p:sp>
-        <p:nvSpPr>
-          <p:cNvPr id="9" name="TextBox 8"/>
-          <p:cNvSpPr txBox="1"/>
-          <p:nvPr/>
-        </p:nvSpPr>
-        <p:spPr>
-          <a:xfrm>
-            <a:off x="1188720" y="4846320"/>
-            <a:ext cx="9875520" cy="1005840"/>
-          </a:xfrm>
-          <a:prstGeom prst="rect">
-            <a:avLst/>
-          </a:prstGeom>
-          <a:noFill/>
-        </p:spPr>
-        <p:txBody>
-          <a:bodyPr wrap="square" lIns="25400" rIns="25400" tIns="25400" bIns="25400" anchor="t">
-            <a:spAutoFit/>
-          </a:bodyPr>
-          <a:lstStyle/>
-          <a:p>
-            <a:pPr algn="l"/>
-            <a:r>
-              <a:rPr sz="1400" b="0">
-                <a:solidFill>
-                  <a:srgbClr val="1A1A1A"/>
-                </a:solidFill>
-                <a:latin typeface="맑은 고딕"/>
-              </a:rPr>
-              <a:t>• iOS Safari: 하단 공유 버튼 → "홈 화면에 추가"
-• Android Chrome: 우상단 ⋮ → "홈 화면에 추가"</a:t>
-            </a:r>
-          </a:p>
-        </p:txBody>
-      </p:sp>
-      <p:sp>
-        <p:nvSpPr>
-          <p:cNvPr id="10" name="TextBox 9"/>
+              <a:t>💡 홈 화면에 추가하면 앱처럼 사용 가능 / ⚠️ 첫 로그인 후 [비밀번호 변경] 필수</a:t>
+            </a:r>
+          </a:p>
+        </p:txBody>
+      </p:sp>
+      <p:sp>
+        <p:nvSpPr>
+          <p:cNvPr id="20" name="TextBox 19"/>
           <p:cNvSpPr txBox="1"/>
           <p:nvPr/>
         </p:nvSpPr>
@@ -4168,7 +4503,7 @@
                 </a:solidFill>
                 <a:latin typeface="맑은 고딕"/>
               </a:rPr>
-              <a:t>COSMAX · 생산3팀 파우더 성형실    |    3 / 9</a:t>
+              <a:t>COSMAX · 생산3팀 파우더 성형실    |    3 / 6</a:t>
             </a:r>
           </a:p>
         </p:txBody>
@@ -4265,25 +4600,480 @@
                 </a:solidFill>
                 <a:latin typeface="맑은 고딕"/>
               </a:rPr>
-              <a:t>2. 로그인하기</a:t>
-            </a:r>
-          </a:p>
-        </p:txBody>
-      </p:sp>
-      <p:sp>
-        <p:nvSpPr>
-          <p:cNvPr id="4" name="Rounded Rectangle 3"/>
+              <a:t>2. 휴가증 작성</a:t>
+            </a:r>
+          </a:p>
+        </p:txBody>
+      </p:sp>
+      <p:sp>
+        <p:nvSpPr>
+          <p:cNvPr id="4" name="TextBox 3"/>
+          <p:cNvSpPr txBox="1"/>
+          <p:nvPr/>
+        </p:nvSpPr>
+        <p:spPr>
+          <a:xfrm>
+            <a:off x="731520" y="1371600"/>
+            <a:ext cx="5486400" cy="457200"/>
+          </a:xfrm>
+          <a:prstGeom prst="rect">
+            <a:avLst/>
+          </a:prstGeom>
+          <a:noFill/>
+        </p:spPr>
+        <p:txBody>
+          <a:bodyPr wrap="square" lIns="25400" rIns="25400" tIns="25400" bIns="25400" anchor="t">
+            <a:spAutoFit/>
+          </a:bodyPr>
+          <a:lstStyle/>
+          <a:p>
+            <a:pPr algn="l"/>
+            <a:r>
+              <a:rPr sz="1400" b="1">
+                <a:solidFill>
+                  <a:srgbClr val="1A1A1A"/>
+                </a:solidFill>
+                <a:latin typeface="맑은 고딕"/>
+              </a:rPr>
+              <a:t>왼쪽 [휴가증 작성] 카드에서:</a:t>
+            </a:r>
+          </a:p>
+        </p:txBody>
+      </p:sp>
+      <p:sp>
+        <p:nvSpPr>
+          <p:cNvPr id="5" name="TextBox 4"/>
+          <p:cNvSpPr txBox="1"/>
+          <p:nvPr/>
+        </p:nvSpPr>
+        <p:spPr>
+          <a:xfrm>
+            <a:off x="731520" y="1920240"/>
+            <a:ext cx="365760" cy="457200"/>
+          </a:xfrm>
+          <a:prstGeom prst="rect">
+            <a:avLst/>
+          </a:prstGeom>
+          <a:noFill/>
+        </p:spPr>
+        <p:txBody>
+          <a:bodyPr wrap="square" lIns="25400" rIns="25400" tIns="25400" bIns="25400" anchor="t">
+            <a:spAutoFit/>
+          </a:bodyPr>
+          <a:lstStyle/>
+          <a:p>
+            <a:pPr algn="l"/>
+            <a:r>
+              <a:rPr sz="1500" b="1">
+                <a:solidFill>
+                  <a:srgbClr val="C8102E"/>
+                </a:solidFill>
+                <a:latin typeface="맑은 고딕"/>
+              </a:rPr>
+              <a:t>1.</a:t>
+            </a:r>
+          </a:p>
+        </p:txBody>
+      </p:sp>
+      <p:sp>
+        <p:nvSpPr>
+          <p:cNvPr id="6" name="TextBox 5"/>
+          <p:cNvSpPr txBox="1"/>
+          <p:nvPr/>
+        </p:nvSpPr>
+        <p:spPr>
+          <a:xfrm>
+            <a:off x="1188720" y="1920240"/>
+            <a:ext cx="2011680" cy="457200"/>
+          </a:xfrm>
+          <a:prstGeom prst="rect">
+            <a:avLst/>
+          </a:prstGeom>
+          <a:noFill/>
+        </p:spPr>
+        <p:txBody>
+          <a:bodyPr wrap="square" lIns="25400" rIns="25400" tIns="25400" bIns="25400" anchor="t">
+            <a:spAutoFit/>
+          </a:bodyPr>
+          <a:lstStyle/>
+          <a:p>
+            <a:pPr algn="l"/>
+            <a:r>
+              <a:rPr sz="1400" b="1">
+                <a:solidFill>
+                  <a:srgbClr val="1A1A1A"/>
+                </a:solidFill>
+                <a:latin typeface="맑은 고딕"/>
+              </a:rPr>
+              <a:t>구분 선택</a:t>
+            </a:r>
+          </a:p>
+        </p:txBody>
+      </p:sp>
+      <p:sp>
+        <p:nvSpPr>
+          <p:cNvPr id="7" name="TextBox 6"/>
+          <p:cNvSpPr txBox="1"/>
+          <p:nvPr/>
+        </p:nvSpPr>
+        <p:spPr>
+          <a:xfrm>
+            <a:off x="3291840" y="1920240"/>
+            <a:ext cx="2926080" cy="457200"/>
+          </a:xfrm>
+          <a:prstGeom prst="rect">
+            <a:avLst/>
+          </a:prstGeom>
+          <a:noFill/>
+        </p:spPr>
+        <p:txBody>
+          <a:bodyPr wrap="square" lIns="25400" rIns="25400" tIns="25400" bIns="25400" anchor="t">
+            <a:spAutoFit/>
+          </a:bodyPr>
+          <a:lstStyle/>
+          <a:p>
+            <a:pPr algn="l"/>
+            <a:r>
+              <a:rPr sz="1200" b="0">
+                <a:solidFill>
+                  <a:srgbClr val="777777"/>
+                </a:solidFill>
+                <a:latin typeface="맑은 고딕"/>
+              </a:rPr>
+              <a:t>연차, 반차, 생휴 등</a:t>
+            </a:r>
+          </a:p>
+        </p:txBody>
+      </p:sp>
+      <p:sp>
+        <p:nvSpPr>
+          <p:cNvPr id="8" name="TextBox 7"/>
+          <p:cNvSpPr txBox="1"/>
+          <p:nvPr/>
+        </p:nvSpPr>
+        <p:spPr>
+          <a:xfrm>
+            <a:off x="731520" y="2560320"/>
+            <a:ext cx="365760" cy="457200"/>
+          </a:xfrm>
+          <a:prstGeom prst="rect">
+            <a:avLst/>
+          </a:prstGeom>
+          <a:noFill/>
+        </p:spPr>
+        <p:txBody>
+          <a:bodyPr wrap="square" lIns="25400" rIns="25400" tIns="25400" bIns="25400" anchor="t">
+            <a:spAutoFit/>
+          </a:bodyPr>
+          <a:lstStyle/>
+          <a:p>
+            <a:pPr algn="l"/>
+            <a:r>
+              <a:rPr sz="1500" b="1">
+                <a:solidFill>
+                  <a:srgbClr val="C8102E"/>
+                </a:solidFill>
+                <a:latin typeface="맑은 고딕"/>
+              </a:rPr>
+              <a:t>2.</a:t>
+            </a:r>
+          </a:p>
+        </p:txBody>
+      </p:sp>
+      <p:sp>
+        <p:nvSpPr>
+          <p:cNvPr id="9" name="TextBox 8"/>
+          <p:cNvSpPr txBox="1"/>
+          <p:nvPr/>
+        </p:nvSpPr>
+        <p:spPr>
+          <a:xfrm>
+            <a:off x="1188720" y="2560320"/>
+            <a:ext cx="2011680" cy="457200"/>
+          </a:xfrm>
+          <a:prstGeom prst="rect">
+            <a:avLst/>
+          </a:prstGeom>
+          <a:noFill/>
+        </p:spPr>
+        <p:txBody>
+          <a:bodyPr wrap="square" lIns="25400" rIns="25400" tIns="25400" bIns="25400" anchor="t">
+            <a:spAutoFit/>
+          </a:bodyPr>
+          <a:lstStyle/>
+          <a:p>
+            <a:pPr algn="l"/>
+            <a:r>
+              <a:rPr sz="1400" b="1">
+                <a:solidFill>
+                  <a:srgbClr val="1A1A1A"/>
+                </a:solidFill>
+                <a:latin typeface="맑은 고딕"/>
+              </a:rPr>
+              <a:t>개수 + 기간</a:t>
+            </a:r>
+          </a:p>
+        </p:txBody>
+      </p:sp>
+      <p:sp>
+        <p:nvSpPr>
+          <p:cNvPr id="10" name="TextBox 9"/>
+          <p:cNvSpPr txBox="1"/>
+          <p:nvPr/>
+        </p:nvSpPr>
+        <p:spPr>
+          <a:xfrm>
+            <a:off x="3291840" y="2560320"/>
+            <a:ext cx="2926080" cy="457200"/>
+          </a:xfrm>
+          <a:prstGeom prst="rect">
+            <a:avLst/>
+          </a:prstGeom>
+          <a:noFill/>
+        </p:spPr>
+        <p:txBody>
+          <a:bodyPr wrap="square" lIns="25400" rIns="25400" tIns="25400" bIns="25400" anchor="t">
+            <a:spAutoFit/>
+          </a:bodyPr>
+          <a:lstStyle/>
+          <a:p>
+            <a:pPr algn="l"/>
+            <a:r>
+              <a:rPr sz="1200" b="0">
+                <a:solidFill>
+                  <a:srgbClr val="777777"/>
+                </a:solidFill>
+                <a:latin typeface="맑은 고딕"/>
+              </a:rPr>
+              <a:t>예: 연차 2개</a:t>
+            </a:r>
+          </a:p>
+        </p:txBody>
+      </p:sp>
+      <p:sp>
+        <p:nvSpPr>
+          <p:cNvPr id="11" name="TextBox 10"/>
+          <p:cNvSpPr txBox="1"/>
+          <p:nvPr/>
+        </p:nvSpPr>
+        <p:spPr>
+          <a:xfrm>
+            <a:off x="731520" y="3200400"/>
+            <a:ext cx="365760" cy="457200"/>
+          </a:xfrm>
+          <a:prstGeom prst="rect">
+            <a:avLst/>
+          </a:prstGeom>
+          <a:noFill/>
+        </p:spPr>
+        <p:txBody>
+          <a:bodyPr wrap="square" lIns="25400" rIns="25400" tIns="25400" bIns="25400" anchor="t">
+            <a:spAutoFit/>
+          </a:bodyPr>
+          <a:lstStyle/>
+          <a:p>
+            <a:pPr algn="l"/>
+            <a:r>
+              <a:rPr sz="1500" b="1">
+                <a:solidFill>
+                  <a:srgbClr val="C8102E"/>
+                </a:solidFill>
+                <a:latin typeface="맑은 고딕"/>
+              </a:rPr>
+              <a:t>3.</a:t>
+            </a:r>
+          </a:p>
+        </p:txBody>
+      </p:sp>
+      <p:sp>
+        <p:nvSpPr>
+          <p:cNvPr id="12" name="TextBox 11"/>
+          <p:cNvSpPr txBox="1"/>
+          <p:nvPr/>
+        </p:nvSpPr>
+        <p:spPr>
+          <a:xfrm>
+            <a:off x="1188720" y="3200400"/>
+            <a:ext cx="2011680" cy="457200"/>
+          </a:xfrm>
+          <a:prstGeom prst="rect">
+            <a:avLst/>
+          </a:prstGeom>
+          <a:noFill/>
+        </p:spPr>
+        <p:txBody>
+          <a:bodyPr wrap="square" lIns="25400" rIns="25400" tIns="25400" bIns="25400" anchor="t">
+            <a:spAutoFit/>
+          </a:bodyPr>
+          <a:lstStyle/>
+          <a:p>
+            <a:pPr algn="l"/>
+            <a:r>
+              <a:rPr sz="1400" b="1">
+                <a:solidFill>
+                  <a:srgbClr val="1A1A1A"/>
+                </a:solidFill>
+                <a:latin typeface="맑은 고딕"/>
+              </a:rPr>
+              <a:t>사유 입력</a:t>
+            </a:r>
+          </a:p>
+        </p:txBody>
+      </p:sp>
+      <p:sp>
+        <p:nvSpPr>
+          <p:cNvPr id="13" name="TextBox 12"/>
+          <p:cNvSpPr txBox="1"/>
+          <p:nvPr/>
+        </p:nvSpPr>
+        <p:spPr>
+          <a:xfrm>
+            <a:off x="3291840" y="3200400"/>
+            <a:ext cx="2926080" cy="457200"/>
+          </a:xfrm>
+          <a:prstGeom prst="rect">
+            <a:avLst/>
+          </a:prstGeom>
+          <a:noFill/>
+        </p:spPr>
+        <p:txBody>
+          <a:bodyPr wrap="square" lIns="25400" rIns="25400" tIns="25400" bIns="25400" anchor="t">
+            <a:spAutoFit/>
+          </a:bodyPr>
+          <a:lstStyle/>
+          <a:p>
+            <a:pPr algn="l"/>
+            <a:r>
+              <a:rPr sz="1200" b="0">
+                <a:solidFill>
+                  <a:srgbClr val="777777"/>
+                </a:solidFill>
+                <a:latin typeface="맑은 고딕"/>
+              </a:rPr>
+              <a:t>휴가 사유</a:t>
+            </a:r>
+          </a:p>
+        </p:txBody>
+      </p:sp>
+      <p:sp>
+        <p:nvSpPr>
+          <p:cNvPr id="14" name="TextBox 13"/>
+          <p:cNvSpPr txBox="1"/>
+          <p:nvPr/>
+        </p:nvSpPr>
+        <p:spPr>
+          <a:xfrm>
+            <a:off x="731520" y="3840479"/>
+            <a:ext cx="365760" cy="457200"/>
+          </a:xfrm>
+          <a:prstGeom prst="rect">
+            <a:avLst/>
+          </a:prstGeom>
+          <a:noFill/>
+        </p:spPr>
+        <p:txBody>
+          <a:bodyPr wrap="square" lIns="25400" rIns="25400" tIns="25400" bIns="25400" anchor="t">
+            <a:spAutoFit/>
+          </a:bodyPr>
+          <a:lstStyle/>
+          <a:p>
+            <a:pPr algn="l"/>
+            <a:r>
+              <a:rPr sz="1500" b="1">
+                <a:solidFill>
+                  <a:srgbClr val="C8102E"/>
+                </a:solidFill>
+                <a:latin typeface="맑은 고딕"/>
+              </a:rPr>
+              <a:t>4.</a:t>
+            </a:r>
+          </a:p>
+        </p:txBody>
+      </p:sp>
+      <p:sp>
+        <p:nvSpPr>
+          <p:cNvPr id="15" name="TextBox 14"/>
+          <p:cNvSpPr txBox="1"/>
+          <p:nvPr/>
+        </p:nvSpPr>
+        <p:spPr>
+          <a:xfrm>
+            <a:off x="1188720" y="3840479"/>
+            <a:ext cx="2011680" cy="457200"/>
+          </a:xfrm>
+          <a:prstGeom prst="rect">
+            <a:avLst/>
+          </a:prstGeom>
+          <a:noFill/>
+        </p:spPr>
+        <p:txBody>
+          <a:bodyPr wrap="square" lIns="25400" rIns="25400" tIns="25400" bIns="25400" anchor="t">
+            <a:spAutoFit/>
+          </a:bodyPr>
+          <a:lstStyle/>
+          <a:p>
+            <a:pPr algn="l"/>
+            <a:r>
+              <a:rPr sz="1400" b="1">
+                <a:solidFill>
+                  <a:srgbClr val="1A1A1A"/>
+                </a:solidFill>
+                <a:latin typeface="맑은 고딕"/>
+              </a:rPr>
+              <a:t>[+ 추가]</a:t>
+            </a:r>
+          </a:p>
+        </p:txBody>
+      </p:sp>
+      <p:sp>
+        <p:nvSpPr>
+          <p:cNvPr id="16" name="TextBox 15"/>
+          <p:cNvSpPr txBox="1"/>
+          <p:nvPr/>
+        </p:nvSpPr>
+        <p:spPr>
+          <a:xfrm>
+            <a:off x="3291840" y="3840479"/>
+            <a:ext cx="2926080" cy="457200"/>
+          </a:xfrm>
+          <a:prstGeom prst="rect">
+            <a:avLst/>
+          </a:prstGeom>
+          <a:noFill/>
+        </p:spPr>
+        <p:txBody>
+          <a:bodyPr wrap="square" lIns="25400" rIns="25400" tIns="25400" bIns="25400" anchor="t">
+            <a:spAutoFit/>
+          </a:bodyPr>
+          <a:lstStyle/>
+          <a:p>
+            <a:pPr algn="l"/>
+            <a:r>
+              <a:rPr sz="1200" b="0">
+                <a:solidFill>
+                  <a:srgbClr val="777777"/>
+                </a:solidFill>
+                <a:latin typeface="맑은 고딕"/>
+              </a:rPr>
+              <a:t>클라우드 자동 저장</a:t>
+            </a:r>
+          </a:p>
+        </p:txBody>
+      </p:sp>
+      <p:sp>
+        <p:nvSpPr>
+          <p:cNvPr id="17" name="Rounded Rectangle 16"/>
           <p:cNvSpPr/>
           <p:nvPr/>
         </p:nvSpPr>
         <p:spPr>
           <a:xfrm>
-            <a:off x="640080" y="1645920"/>
-            <a:ext cx="3657600" cy="3200400"/>
+            <a:off x="731520" y="4846320"/>
+            <a:ext cx="5486400" cy="1371600"/>
           </a:xfrm>
           <a:prstGeom prst="roundRect">
             <a:avLst>
-              <a:gd name="adj" fmla="val 15000"/>
+              <a:gd name="adj" fmla="val 12000"/>
             </a:avLst>
           </a:prstGeom>
           <a:solidFill>
@@ -4318,14 +5108,14 @@
       </p:sp>
       <p:sp>
         <p:nvSpPr>
-          <p:cNvPr id="5" name="TextBox 4"/>
-          <p:cNvSpPr txBox="1"/>
-          <p:nvPr/>
-        </p:nvSpPr>
-        <p:spPr>
-          <a:xfrm>
-            <a:off x="640080" y="1828800"/>
-            <a:ext cx="3657600" cy="731520"/>
+          <p:cNvPr id="18" name="TextBox 17"/>
+          <p:cNvSpPr txBox="1"/>
+          <p:nvPr/>
+        </p:nvSpPr>
+        <p:spPr>
+          <a:xfrm>
+            <a:off x="914400" y="4983480"/>
+            <a:ext cx="5120640" cy="1097280"/>
           </a:xfrm>
           <a:prstGeom prst="rect">
             <a:avLst/>
@@ -4338,29 +5128,31 @@
           </a:bodyPr>
           <a:lstStyle/>
           <a:p>
-            <a:pPr algn="ctr"/>
-            <a:r>
-              <a:rPr sz="4200" b="1">
-                <a:solidFill>
-                  <a:srgbClr val="C8102E"/>
-                </a:solidFill>
-                <a:latin typeface="맑은 고딕"/>
-              </a:rPr>
-              <a:t>①</a:t>
-            </a:r>
-          </a:p>
-        </p:txBody>
-      </p:sp>
-      <p:sp>
-        <p:nvSpPr>
-          <p:cNvPr id="6" name="TextBox 5"/>
-          <p:cNvSpPr txBox="1"/>
-          <p:nvPr/>
-        </p:nvSpPr>
-        <p:spPr>
-          <a:xfrm>
-            <a:off x="640080" y="2743200"/>
-            <a:ext cx="3657600" cy="457200"/>
+            <a:pPr algn="l"/>
+            <a:r>
+              <a:rPr sz="1200" b="0">
+                <a:solidFill>
+                  <a:srgbClr val="1A1A1A"/>
+                </a:solidFill>
+                <a:latin typeface="맑은 고딕"/>
+              </a:rPr>
+              <a:t>• 이름·연락처는 자동 채움 (수정 불가)
+• 여러 유형은 휴가증 따로 작성
+  (예: 연차+반차 = 2건)</a:t>
+            </a:r>
+          </a:p>
+        </p:txBody>
+      </p:sp>
+      <p:sp>
+        <p:nvSpPr>
+          <p:cNvPr id="19" name="TextBox 18"/>
+          <p:cNvSpPr txBox="1"/>
+          <p:nvPr/>
+        </p:nvSpPr>
+        <p:spPr>
+          <a:xfrm>
+            <a:off x="6583680" y="1371600"/>
+            <a:ext cx="5029200" cy="457200"/>
           </a:xfrm>
           <a:prstGeom prst="rect">
             <a:avLst/>
@@ -4373,72 +5165,35 @@
           </a:bodyPr>
           <a:lstStyle/>
           <a:p>
-            <a:pPr algn="ctr"/>
-            <a:r>
-              <a:rPr sz="2000" b="1">
+            <a:pPr algn="l"/>
+            <a:r>
+              <a:rPr sz="1400" b="1">
                 <a:solidFill>
                   <a:srgbClr val="1A1A1A"/>
                 </a:solidFill>
                 <a:latin typeface="맑은 고딕"/>
               </a:rPr>
-              <a:t>사번 입력</a:t>
-            </a:r>
-          </a:p>
-        </p:txBody>
-      </p:sp>
-      <p:sp>
-        <p:nvSpPr>
-          <p:cNvPr id="7" name="TextBox 6"/>
-          <p:cNvSpPr txBox="1"/>
-          <p:nvPr/>
-        </p:nvSpPr>
-        <p:spPr>
-          <a:xfrm>
-            <a:off x="640080" y="3383280"/>
-            <a:ext cx="3657600" cy="1371600"/>
-          </a:xfrm>
-          <a:prstGeom prst="rect">
-            <a:avLst/>
-          </a:prstGeom>
-          <a:noFill/>
-        </p:spPr>
-        <p:txBody>
-          <a:bodyPr wrap="square" lIns="25400" rIns="25400" tIns="25400" bIns="25400" anchor="t">
-            <a:spAutoFit/>
-          </a:bodyPr>
-          <a:lstStyle/>
-          <a:p>
-            <a:pPr algn="ctr"/>
-            <a:r>
-              <a:rPr sz="1400" b="0">
-                <a:solidFill>
-                  <a:srgbClr val="777777"/>
-                </a:solidFill>
-                <a:latin typeface="맑은 고딕"/>
-              </a:rPr>
-              <a:t>본인의 9자리 사번</a:t>
-            </a:r>
-          </a:p>
-        </p:txBody>
-      </p:sp>
-      <p:sp>
-        <p:nvSpPr>
-          <p:cNvPr id="8" name="Rounded Rectangle 7"/>
+              <a:t>휴가 유형:</a:t>
+            </a:r>
+          </a:p>
+        </p:txBody>
+      </p:sp>
+      <p:sp>
+        <p:nvSpPr>
+          <p:cNvPr id="20" name="Rectangle 19"/>
           <p:cNvSpPr/>
           <p:nvPr/>
         </p:nvSpPr>
         <p:spPr>
           <a:xfrm>
-            <a:off x="4480560" y="1645920"/>
-            <a:ext cx="3657600" cy="3200400"/>
-          </a:xfrm>
-          <a:prstGeom prst="roundRect">
-            <a:avLst>
-              <a:gd name="adj" fmla="val 15000"/>
-            </a:avLst>
+            <a:off x="6583680" y="1920240"/>
+            <a:ext cx="5029200" cy="502920"/>
+          </a:xfrm>
+          <a:prstGeom prst="rect">
+            <a:avLst/>
           </a:prstGeom>
           <a:solidFill>
-            <a:srgbClr val="FFF5F5"/>
+            <a:srgbClr val="C8102E"/>
           </a:solidFill>
           <a:ln>
             <a:noFill/>
@@ -4469,128 +5224,90 @@
       </p:sp>
       <p:sp>
         <p:nvSpPr>
-          <p:cNvPr id="9" name="TextBox 8"/>
-          <p:cNvSpPr txBox="1"/>
-          <p:nvPr/>
-        </p:nvSpPr>
-        <p:spPr>
-          <a:xfrm>
-            <a:off x="4480560" y="1828800"/>
-            <a:ext cx="3657600" cy="731520"/>
-          </a:xfrm>
-          <a:prstGeom prst="rect">
-            <a:avLst/>
-          </a:prstGeom>
-          <a:noFill/>
-        </p:spPr>
-        <p:txBody>
-          <a:bodyPr wrap="square" lIns="25400" rIns="25400" tIns="25400" bIns="25400" anchor="t">
-            <a:spAutoFit/>
-          </a:bodyPr>
-          <a:lstStyle/>
-          <a:p>
-            <a:pPr algn="ctr"/>
-            <a:r>
-              <a:rPr sz="4200" b="1">
-                <a:solidFill>
-                  <a:srgbClr val="C8102E"/>
-                </a:solidFill>
-                <a:latin typeface="맑은 고딕"/>
-              </a:rPr>
-              <a:t>②</a:t>
-            </a:r>
-          </a:p>
-        </p:txBody>
-      </p:sp>
-      <p:sp>
-        <p:nvSpPr>
-          <p:cNvPr id="10" name="TextBox 9"/>
-          <p:cNvSpPr txBox="1"/>
-          <p:nvPr/>
-        </p:nvSpPr>
-        <p:spPr>
-          <a:xfrm>
-            <a:off x="4480560" y="2743200"/>
-            <a:ext cx="3657600" cy="457200"/>
-          </a:xfrm>
-          <a:prstGeom prst="rect">
-            <a:avLst/>
-          </a:prstGeom>
-          <a:noFill/>
-        </p:spPr>
-        <p:txBody>
-          <a:bodyPr wrap="square" lIns="25400" rIns="25400" tIns="25400" bIns="25400" anchor="t">
-            <a:spAutoFit/>
-          </a:bodyPr>
-          <a:lstStyle/>
-          <a:p>
-            <a:pPr algn="ctr"/>
-            <a:r>
-              <a:rPr sz="2000" b="1">
-                <a:solidFill>
-                  <a:srgbClr val="1A1A1A"/>
-                </a:solidFill>
-                <a:latin typeface="맑은 고딕"/>
-              </a:rPr>
-              <a:t>비밀번호</a:t>
-            </a:r>
-          </a:p>
-        </p:txBody>
-      </p:sp>
-      <p:sp>
-        <p:nvSpPr>
-          <p:cNvPr id="11" name="TextBox 10"/>
-          <p:cNvSpPr txBox="1"/>
-          <p:nvPr/>
-        </p:nvSpPr>
-        <p:spPr>
-          <a:xfrm>
-            <a:off x="4480560" y="3383280"/>
-            <a:ext cx="3657600" cy="1371600"/>
-          </a:xfrm>
-          <a:prstGeom prst="rect">
-            <a:avLst/>
-          </a:prstGeom>
-          <a:noFill/>
-        </p:spPr>
-        <p:txBody>
-          <a:bodyPr wrap="square" lIns="25400" rIns="25400" tIns="25400" bIns="25400" anchor="t">
-            <a:spAutoFit/>
-          </a:bodyPr>
-          <a:lstStyle/>
-          <a:p>
-            <a:pPr algn="ctr"/>
-            <a:r>
-              <a:rPr sz="1400" b="0">
-                <a:solidFill>
-                  <a:srgbClr val="777777"/>
-                </a:solidFill>
-                <a:latin typeface="맑은 고딕"/>
-              </a:rPr>
-              <a:t>초기 비밀번호:
-1234</a:t>
-            </a:r>
-          </a:p>
-        </p:txBody>
-      </p:sp>
-      <p:sp>
-        <p:nvSpPr>
-          <p:cNvPr id="12" name="Rounded Rectangle 11"/>
+          <p:cNvPr id="21" name="TextBox 20"/>
+          <p:cNvSpPr txBox="1"/>
+          <p:nvPr/>
+        </p:nvSpPr>
+        <p:spPr>
+          <a:xfrm>
+            <a:off x="6766560" y="1920240"/>
+            <a:ext cx="3017520" cy="502920"/>
+          </a:xfrm>
+          <a:prstGeom prst="rect">
+            <a:avLst/>
+          </a:prstGeom>
+          <a:noFill/>
+        </p:spPr>
+        <p:txBody>
+          <a:bodyPr wrap="square" lIns="25400" rIns="25400" tIns="25400" bIns="25400" anchor="ctr">
+            <a:spAutoFit/>
+          </a:bodyPr>
+          <a:lstStyle/>
+          <a:p>
+            <a:pPr algn="l"/>
+            <a:r>
+              <a:rPr sz="1200" b="1">
+                <a:solidFill>
+                  <a:srgbClr val="FFFFFF"/>
+                </a:solidFill>
+                <a:latin typeface="맑은 고딕"/>
+              </a:rPr>
+              <a:t>구분</a:t>
+            </a:r>
+          </a:p>
+        </p:txBody>
+      </p:sp>
+      <p:sp>
+        <p:nvSpPr>
+          <p:cNvPr id="22" name="TextBox 21"/>
+          <p:cNvSpPr txBox="1"/>
+          <p:nvPr/>
+        </p:nvSpPr>
+        <p:spPr>
+          <a:xfrm>
+            <a:off x="9966960" y="1920240"/>
+            <a:ext cx="1645920" cy="502920"/>
+          </a:xfrm>
+          <a:prstGeom prst="rect">
+            <a:avLst/>
+          </a:prstGeom>
+          <a:noFill/>
+        </p:spPr>
+        <p:txBody>
+          <a:bodyPr wrap="square" lIns="25400" rIns="25400" tIns="25400" bIns="25400" anchor="ctr">
+            <a:spAutoFit/>
+          </a:bodyPr>
+          <a:lstStyle/>
+          <a:p>
+            <a:pPr algn="l"/>
+            <a:r>
+              <a:rPr sz="1200" b="1">
+                <a:solidFill>
+                  <a:srgbClr val="FFFFFF"/>
+                </a:solidFill>
+                <a:latin typeface="맑은 고딕"/>
+              </a:rPr>
+              <a:t>1개당</a:t>
+            </a:r>
+          </a:p>
+        </p:txBody>
+      </p:sp>
+      <p:sp>
+        <p:nvSpPr>
+          <p:cNvPr id="23" name="Rectangle 22"/>
           <p:cNvSpPr/>
           <p:nvPr/>
         </p:nvSpPr>
         <p:spPr>
           <a:xfrm>
-            <a:off x="8321040" y="1645920"/>
-            <a:ext cx="3657600" cy="3200400"/>
-          </a:xfrm>
-          <a:prstGeom prst="roundRect">
-            <a:avLst>
-              <a:gd name="adj" fmla="val 15000"/>
-            </a:avLst>
+            <a:off x="6583680" y="2423160"/>
+            <a:ext cx="5029200" cy="502920"/>
+          </a:xfrm>
+          <a:prstGeom prst="rect">
+            <a:avLst/>
           </a:prstGeom>
           <a:solidFill>
-            <a:srgbClr val="FFF5F5"/>
+            <a:srgbClr val="FFFFFF"/>
           </a:solidFill>
           <a:ln>
             <a:noFill/>
@@ -4621,124 +5338,87 @@
       </p:sp>
       <p:sp>
         <p:nvSpPr>
-          <p:cNvPr id="13" name="TextBox 12"/>
-          <p:cNvSpPr txBox="1"/>
-          <p:nvPr/>
-        </p:nvSpPr>
-        <p:spPr>
-          <a:xfrm>
-            <a:off x="8321040" y="1828800"/>
-            <a:ext cx="3657600" cy="731520"/>
-          </a:xfrm>
-          <a:prstGeom prst="rect">
-            <a:avLst/>
-          </a:prstGeom>
-          <a:noFill/>
-        </p:spPr>
-        <p:txBody>
-          <a:bodyPr wrap="square" lIns="25400" rIns="25400" tIns="25400" bIns="25400" anchor="t">
-            <a:spAutoFit/>
-          </a:bodyPr>
-          <a:lstStyle/>
-          <a:p>
-            <a:pPr algn="ctr"/>
-            <a:r>
-              <a:rPr sz="4200" b="1">
-                <a:solidFill>
-                  <a:srgbClr val="C8102E"/>
-                </a:solidFill>
-                <a:latin typeface="맑은 고딕"/>
-              </a:rPr>
-              <a:t>③</a:t>
-            </a:r>
-          </a:p>
-        </p:txBody>
-      </p:sp>
-      <p:sp>
-        <p:nvSpPr>
-          <p:cNvPr id="14" name="TextBox 13"/>
-          <p:cNvSpPr txBox="1"/>
-          <p:nvPr/>
-        </p:nvSpPr>
-        <p:spPr>
-          <a:xfrm>
-            <a:off x="8321040" y="2743200"/>
-            <a:ext cx="3657600" cy="457200"/>
-          </a:xfrm>
-          <a:prstGeom prst="rect">
-            <a:avLst/>
-          </a:prstGeom>
-          <a:noFill/>
-        </p:spPr>
-        <p:txBody>
-          <a:bodyPr wrap="square" lIns="25400" rIns="25400" tIns="25400" bIns="25400" anchor="t">
-            <a:spAutoFit/>
-          </a:bodyPr>
-          <a:lstStyle/>
-          <a:p>
-            <a:pPr algn="ctr"/>
-            <a:r>
-              <a:rPr sz="2000" b="1">
+          <p:cNvPr id="24" name="TextBox 23"/>
+          <p:cNvSpPr txBox="1"/>
+          <p:nvPr/>
+        </p:nvSpPr>
+        <p:spPr>
+          <a:xfrm>
+            <a:off x="6766560" y="2423160"/>
+            <a:ext cx="3017520" cy="502920"/>
+          </a:xfrm>
+          <a:prstGeom prst="rect">
+            <a:avLst/>
+          </a:prstGeom>
+          <a:noFill/>
+        </p:spPr>
+        <p:txBody>
+          <a:bodyPr wrap="square" lIns="25400" rIns="25400" tIns="25400" bIns="25400" anchor="ctr">
+            <a:spAutoFit/>
+          </a:bodyPr>
+          <a:lstStyle/>
+          <a:p>
+            <a:pPr algn="l"/>
+            <a:r>
+              <a:rPr sz="1200" b="0">
                 <a:solidFill>
                   <a:srgbClr val="1A1A1A"/>
                 </a:solidFill>
                 <a:latin typeface="맑은 고딕"/>
               </a:rPr>
-              <a:t>로그인</a:t>
-            </a:r>
-          </a:p>
-        </p:txBody>
-      </p:sp>
-      <p:sp>
-        <p:nvSpPr>
-          <p:cNvPr id="15" name="TextBox 14"/>
-          <p:cNvSpPr txBox="1"/>
-          <p:nvPr/>
-        </p:nvSpPr>
-        <p:spPr>
-          <a:xfrm>
-            <a:off x="8321040" y="3383280"/>
-            <a:ext cx="3657600" cy="1371600"/>
-          </a:xfrm>
-          <a:prstGeom prst="rect">
-            <a:avLst/>
-          </a:prstGeom>
-          <a:noFill/>
-        </p:spPr>
-        <p:txBody>
-          <a:bodyPr wrap="square" lIns="25400" rIns="25400" tIns="25400" bIns="25400" anchor="t">
-            <a:spAutoFit/>
-          </a:bodyPr>
-          <a:lstStyle/>
-          <a:p>
-            <a:pPr algn="ctr"/>
-            <a:r>
-              <a:rPr sz="1400" b="0">
-                <a:solidFill>
-                  <a:srgbClr val="777777"/>
-                </a:solidFill>
-                <a:latin typeface="맑은 고딕"/>
-              </a:rPr>
-              <a:t>[로그인] 클릭</a:t>
-            </a:r>
-          </a:p>
-        </p:txBody>
-      </p:sp>
-      <p:sp>
-        <p:nvSpPr>
-          <p:cNvPr id="16" name="Rounded Rectangle 15"/>
+              <a:t>연차</a:t>
+            </a:r>
+          </a:p>
+        </p:txBody>
+      </p:sp>
+      <p:sp>
+        <p:nvSpPr>
+          <p:cNvPr id="25" name="TextBox 24"/>
+          <p:cNvSpPr txBox="1"/>
+          <p:nvPr/>
+        </p:nvSpPr>
+        <p:spPr>
+          <a:xfrm>
+            <a:off x="9966960" y="2423160"/>
+            <a:ext cx="1645920" cy="502920"/>
+          </a:xfrm>
+          <a:prstGeom prst="rect">
+            <a:avLst/>
+          </a:prstGeom>
+          <a:noFill/>
+        </p:spPr>
+        <p:txBody>
+          <a:bodyPr wrap="square" lIns="25400" rIns="25400" tIns="25400" bIns="25400" anchor="ctr">
+            <a:spAutoFit/>
+          </a:bodyPr>
+          <a:lstStyle/>
+          <a:p>
+            <a:pPr algn="l"/>
+            <a:r>
+              <a:rPr sz="1200" b="0">
+                <a:solidFill>
+                  <a:srgbClr val="1A1A1A"/>
+                </a:solidFill>
+                <a:latin typeface="맑은 고딕"/>
+              </a:rPr>
+              <a:t>1.0일</a:t>
+            </a:r>
+          </a:p>
+        </p:txBody>
+      </p:sp>
+      <p:sp>
+        <p:nvSpPr>
+          <p:cNvPr id="26" name="Rectangle 25"/>
           <p:cNvSpPr/>
           <p:nvPr/>
         </p:nvSpPr>
         <p:spPr>
           <a:xfrm>
-            <a:off x="914400" y="5212080"/>
-            <a:ext cx="10332720" cy="1005840"/>
-          </a:xfrm>
-          <a:prstGeom prst="roundRect">
-            <a:avLst>
-              <a:gd name="adj" fmla="val 15000"/>
-            </a:avLst>
+            <a:off x="6583680" y="2926080"/>
+            <a:ext cx="5029200" cy="502920"/>
+          </a:xfrm>
+          <a:prstGeom prst="rect">
+            <a:avLst/>
           </a:prstGeom>
           <a:solidFill>
             <a:srgbClr val="F5F5F5"/>
@@ -4772,14 +5452,14 @@
       </p:sp>
       <p:sp>
         <p:nvSpPr>
-          <p:cNvPr id="17" name="TextBox 16"/>
-          <p:cNvSpPr txBox="1"/>
-          <p:nvPr/>
-        </p:nvSpPr>
-        <p:spPr>
-          <a:xfrm>
-            <a:off x="1188720" y="5349240"/>
-            <a:ext cx="9875520" cy="731520"/>
+          <p:cNvPr id="27" name="TextBox 26"/>
+          <p:cNvSpPr txBox="1"/>
+          <p:nvPr/>
+        </p:nvSpPr>
+        <p:spPr>
+          <a:xfrm>
+            <a:off x="6766560" y="2926080"/>
+            <a:ext cx="3017520" cy="502920"/>
           </a:xfrm>
           <a:prstGeom prst="rect">
             <a:avLst/>
@@ -4794,20 +5474,511 @@
           <a:p>
             <a:pPr algn="l"/>
             <a:r>
-              <a:rPr sz="1500" b="1">
-                <a:solidFill>
-                  <a:srgbClr val="A30D24"/>
-                </a:solidFill>
-                <a:latin typeface="맑은 고딕"/>
-              </a:rPr>
-              <a:t>⚠️ 첫 로그인 후 상단 [비밀번호 변경] → 새 비밀번호(숫자 6자리 이상) + 보안 질문 등록</a:t>
-            </a:r>
-          </a:p>
-        </p:txBody>
-      </p:sp>
-      <p:sp>
-        <p:nvSpPr>
-          <p:cNvPr id="18" name="TextBox 17"/>
+              <a:rPr sz="1200" b="0">
+                <a:solidFill>
+                  <a:srgbClr val="1A1A1A"/>
+                </a:solidFill>
+                <a:latin typeface="맑은 고딕"/>
+              </a:rPr>
+              <a:t>반차(오전/오후)</a:t>
+            </a:r>
+          </a:p>
+        </p:txBody>
+      </p:sp>
+      <p:sp>
+        <p:nvSpPr>
+          <p:cNvPr id="28" name="TextBox 27"/>
+          <p:cNvSpPr txBox="1"/>
+          <p:nvPr/>
+        </p:nvSpPr>
+        <p:spPr>
+          <a:xfrm>
+            <a:off x="9966960" y="2926080"/>
+            <a:ext cx="1645920" cy="502920"/>
+          </a:xfrm>
+          <a:prstGeom prst="rect">
+            <a:avLst/>
+          </a:prstGeom>
+          <a:noFill/>
+        </p:spPr>
+        <p:txBody>
+          <a:bodyPr wrap="square" lIns="25400" rIns="25400" tIns="25400" bIns="25400" anchor="ctr">
+            <a:spAutoFit/>
+          </a:bodyPr>
+          <a:lstStyle/>
+          <a:p>
+            <a:pPr algn="l"/>
+            <a:r>
+              <a:rPr sz="1200" b="0">
+                <a:solidFill>
+                  <a:srgbClr val="1A1A1A"/>
+                </a:solidFill>
+                <a:latin typeface="맑은 고딕"/>
+              </a:rPr>
+              <a:t>0.5일</a:t>
+            </a:r>
+          </a:p>
+        </p:txBody>
+      </p:sp>
+      <p:sp>
+        <p:nvSpPr>
+          <p:cNvPr id="29" name="Rectangle 28"/>
+          <p:cNvSpPr/>
+          <p:nvPr/>
+        </p:nvSpPr>
+        <p:spPr>
+          <a:xfrm>
+            <a:off x="6583680" y="3429000"/>
+            <a:ext cx="5029200" cy="502920"/>
+          </a:xfrm>
+          <a:prstGeom prst="rect">
+            <a:avLst/>
+          </a:prstGeom>
+          <a:solidFill>
+            <a:srgbClr val="FFFFFF"/>
+          </a:solidFill>
+          <a:ln>
+            <a:noFill/>
+          </a:ln>
+          <a:effectLst/>
+        </p:spPr>
+        <p:style>
+          <a:lnRef idx="1">
+            <a:schemeClr val="accent1"/>
+          </a:lnRef>
+          <a:fillRef idx="3">
+            <a:schemeClr val="accent1"/>
+          </a:fillRef>
+          <a:effectRef idx="2">
+            <a:schemeClr val="accent1"/>
+          </a:effectRef>
+          <a:fontRef idx="minor">
+            <a:schemeClr val="lt1"/>
+          </a:fontRef>
+        </p:style>
+        <p:txBody>
+          <a:bodyPr rtlCol="0" anchor="ctr"/>
+          <a:lstStyle/>
+          <a:p>
+            <a:pPr algn="ctr"/>
+          </a:p>
+        </p:txBody>
+      </p:sp>
+      <p:sp>
+        <p:nvSpPr>
+          <p:cNvPr id="30" name="TextBox 29"/>
+          <p:cNvSpPr txBox="1"/>
+          <p:nvPr/>
+        </p:nvSpPr>
+        <p:spPr>
+          <a:xfrm>
+            <a:off x="6766560" y="3429000"/>
+            <a:ext cx="3017520" cy="502920"/>
+          </a:xfrm>
+          <a:prstGeom prst="rect">
+            <a:avLst/>
+          </a:prstGeom>
+          <a:noFill/>
+        </p:spPr>
+        <p:txBody>
+          <a:bodyPr wrap="square" lIns="25400" rIns="25400" tIns="25400" bIns="25400" anchor="ctr">
+            <a:spAutoFit/>
+          </a:bodyPr>
+          <a:lstStyle/>
+          <a:p>
+            <a:pPr algn="l"/>
+            <a:r>
+              <a:rPr sz="1200" b="0">
+                <a:solidFill>
+                  <a:srgbClr val="1A1A1A"/>
+                </a:solidFill>
+                <a:latin typeface="맑은 고딕"/>
+              </a:rPr>
+              <a:t>반반차(오전/오후)</a:t>
+            </a:r>
+          </a:p>
+        </p:txBody>
+      </p:sp>
+      <p:sp>
+        <p:nvSpPr>
+          <p:cNvPr id="31" name="TextBox 30"/>
+          <p:cNvSpPr txBox="1"/>
+          <p:nvPr/>
+        </p:nvSpPr>
+        <p:spPr>
+          <a:xfrm>
+            <a:off x="9966960" y="3429000"/>
+            <a:ext cx="1645920" cy="502920"/>
+          </a:xfrm>
+          <a:prstGeom prst="rect">
+            <a:avLst/>
+          </a:prstGeom>
+          <a:noFill/>
+        </p:spPr>
+        <p:txBody>
+          <a:bodyPr wrap="square" lIns="25400" rIns="25400" tIns="25400" bIns="25400" anchor="ctr">
+            <a:spAutoFit/>
+          </a:bodyPr>
+          <a:lstStyle/>
+          <a:p>
+            <a:pPr algn="l"/>
+            <a:r>
+              <a:rPr sz="1200" b="0">
+                <a:solidFill>
+                  <a:srgbClr val="1A1A1A"/>
+                </a:solidFill>
+                <a:latin typeface="맑은 고딕"/>
+              </a:rPr>
+              <a:t>0.25일</a:t>
+            </a:r>
+          </a:p>
+        </p:txBody>
+      </p:sp>
+      <p:sp>
+        <p:nvSpPr>
+          <p:cNvPr id="32" name="Rectangle 31"/>
+          <p:cNvSpPr/>
+          <p:nvPr/>
+        </p:nvSpPr>
+        <p:spPr>
+          <a:xfrm>
+            <a:off x="6583680" y="3931920"/>
+            <a:ext cx="5029200" cy="502920"/>
+          </a:xfrm>
+          <a:prstGeom prst="rect">
+            <a:avLst/>
+          </a:prstGeom>
+          <a:solidFill>
+            <a:srgbClr val="F5F5F5"/>
+          </a:solidFill>
+          <a:ln>
+            <a:noFill/>
+          </a:ln>
+          <a:effectLst/>
+        </p:spPr>
+        <p:style>
+          <a:lnRef idx="1">
+            <a:schemeClr val="accent1"/>
+          </a:lnRef>
+          <a:fillRef idx="3">
+            <a:schemeClr val="accent1"/>
+          </a:fillRef>
+          <a:effectRef idx="2">
+            <a:schemeClr val="accent1"/>
+          </a:effectRef>
+          <a:fontRef idx="minor">
+            <a:schemeClr val="lt1"/>
+          </a:fontRef>
+        </p:style>
+        <p:txBody>
+          <a:bodyPr rtlCol="0" anchor="ctr"/>
+          <a:lstStyle/>
+          <a:p>
+            <a:pPr algn="ctr"/>
+          </a:p>
+        </p:txBody>
+      </p:sp>
+      <p:sp>
+        <p:nvSpPr>
+          <p:cNvPr id="33" name="TextBox 32"/>
+          <p:cNvSpPr txBox="1"/>
+          <p:nvPr/>
+        </p:nvSpPr>
+        <p:spPr>
+          <a:xfrm>
+            <a:off x="6766560" y="3931920"/>
+            <a:ext cx="3017520" cy="502920"/>
+          </a:xfrm>
+          <a:prstGeom prst="rect">
+            <a:avLst/>
+          </a:prstGeom>
+          <a:noFill/>
+        </p:spPr>
+        <p:txBody>
+          <a:bodyPr wrap="square" lIns="25400" rIns="25400" tIns="25400" bIns="25400" anchor="ctr">
+            <a:spAutoFit/>
+          </a:bodyPr>
+          <a:lstStyle/>
+          <a:p>
+            <a:pPr algn="l"/>
+            <a:r>
+              <a:rPr sz="1200" b="0">
+                <a:solidFill>
+                  <a:srgbClr val="1A1A1A"/>
+                </a:solidFill>
+                <a:latin typeface="맑은 고딕"/>
+              </a:rPr>
+              <a:t>생휴</a:t>
+            </a:r>
+          </a:p>
+        </p:txBody>
+      </p:sp>
+      <p:sp>
+        <p:nvSpPr>
+          <p:cNvPr id="34" name="TextBox 33"/>
+          <p:cNvSpPr txBox="1"/>
+          <p:nvPr/>
+        </p:nvSpPr>
+        <p:spPr>
+          <a:xfrm>
+            <a:off x="9966960" y="3931920"/>
+            <a:ext cx="1645920" cy="502920"/>
+          </a:xfrm>
+          <a:prstGeom prst="rect">
+            <a:avLst/>
+          </a:prstGeom>
+          <a:noFill/>
+        </p:spPr>
+        <p:txBody>
+          <a:bodyPr wrap="square" lIns="25400" rIns="25400" tIns="25400" bIns="25400" anchor="ctr">
+            <a:spAutoFit/>
+          </a:bodyPr>
+          <a:lstStyle/>
+          <a:p>
+            <a:pPr algn="l"/>
+            <a:r>
+              <a:rPr sz="1200" b="0">
+                <a:solidFill>
+                  <a:srgbClr val="1A1A1A"/>
+                </a:solidFill>
+                <a:latin typeface="맑은 고딕"/>
+              </a:rPr>
+              <a:t>1.0일</a:t>
+            </a:r>
+          </a:p>
+        </p:txBody>
+      </p:sp>
+      <p:sp>
+        <p:nvSpPr>
+          <p:cNvPr id="35" name="Rectangle 34"/>
+          <p:cNvSpPr/>
+          <p:nvPr/>
+        </p:nvSpPr>
+        <p:spPr>
+          <a:xfrm>
+            <a:off x="6583680" y="4434840"/>
+            <a:ext cx="5029200" cy="502920"/>
+          </a:xfrm>
+          <a:prstGeom prst="rect">
+            <a:avLst/>
+          </a:prstGeom>
+          <a:solidFill>
+            <a:srgbClr val="FFFFFF"/>
+          </a:solidFill>
+          <a:ln>
+            <a:noFill/>
+          </a:ln>
+          <a:effectLst/>
+        </p:spPr>
+        <p:style>
+          <a:lnRef idx="1">
+            <a:schemeClr val="accent1"/>
+          </a:lnRef>
+          <a:fillRef idx="3">
+            <a:schemeClr val="accent1"/>
+          </a:fillRef>
+          <a:effectRef idx="2">
+            <a:schemeClr val="accent1"/>
+          </a:effectRef>
+          <a:fontRef idx="minor">
+            <a:schemeClr val="lt1"/>
+          </a:fontRef>
+        </p:style>
+        <p:txBody>
+          <a:bodyPr rtlCol="0" anchor="ctr"/>
+          <a:lstStyle/>
+          <a:p>
+            <a:pPr algn="ctr"/>
+          </a:p>
+        </p:txBody>
+      </p:sp>
+      <p:sp>
+        <p:nvSpPr>
+          <p:cNvPr id="36" name="TextBox 35"/>
+          <p:cNvSpPr txBox="1"/>
+          <p:nvPr/>
+        </p:nvSpPr>
+        <p:spPr>
+          <a:xfrm>
+            <a:off x="6766560" y="4434840"/>
+            <a:ext cx="3017520" cy="502920"/>
+          </a:xfrm>
+          <a:prstGeom prst="rect">
+            <a:avLst/>
+          </a:prstGeom>
+          <a:noFill/>
+        </p:spPr>
+        <p:txBody>
+          <a:bodyPr wrap="square" lIns="25400" rIns="25400" tIns="25400" bIns="25400" anchor="ctr">
+            <a:spAutoFit/>
+          </a:bodyPr>
+          <a:lstStyle/>
+          <a:p>
+            <a:pPr algn="l"/>
+            <a:r>
+              <a:rPr sz="1200" b="0">
+                <a:solidFill>
+                  <a:srgbClr val="1A1A1A"/>
+                </a:solidFill>
+                <a:latin typeface="맑은 고딕"/>
+              </a:rPr>
+              <a:t>하기휴가</a:t>
+            </a:r>
+          </a:p>
+        </p:txBody>
+      </p:sp>
+      <p:sp>
+        <p:nvSpPr>
+          <p:cNvPr id="37" name="TextBox 36"/>
+          <p:cNvSpPr txBox="1"/>
+          <p:nvPr/>
+        </p:nvSpPr>
+        <p:spPr>
+          <a:xfrm>
+            <a:off x="9966960" y="4434840"/>
+            <a:ext cx="1645920" cy="502920"/>
+          </a:xfrm>
+          <a:prstGeom prst="rect">
+            <a:avLst/>
+          </a:prstGeom>
+          <a:noFill/>
+        </p:spPr>
+        <p:txBody>
+          <a:bodyPr wrap="square" lIns="25400" rIns="25400" tIns="25400" bIns="25400" anchor="ctr">
+            <a:spAutoFit/>
+          </a:bodyPr>
+          <a:lstStyle/>
+          <a:p>
+            <a:pPr algn="l"/>
+            <a:r>
+              <a:rPr sz="1200" b="0">
+                <a:solidFill>
+                  <a:srgbClr val="1A1A1A"/>
+                </a:solidFill>
+                <a:latin typeface="맑은 고딕"/>
+              </a:rPr>
+              <a:t>3.0일</a:t>
+            </a:r>
+          </a:p>
+        </p:txBody>
+      </p:sp>
+      <p:sp>
+        <p:nvSpPr>
+          <p:cNvPr id="38" name="Rectangle 37"/>
+          <p:cNvSpPr/>
+          <p:nvPr/>
+        </p:nvSpPr>
+        <p:spPr>
+          <a:xfrm>
+            <a:off x="6583680" y="4937760"/>
+            <a:ext cx="5029200" cy="502920"/>
+          </a:xfrm>
+          <a:prstGeom prst="rect">
+            <a:avLst/>
+          </a:prstGeom>
+          <a:solidFill>
+            <a:srgbClr val="F5F5F5"/>
+          </a:solidFill>
+          <a:ln>
+            <a:noFill/>
+          </a:ln>
+          <a:effectLst/>
+        </p:spPr>
+        <p:style>
+          <a:lnRef idx="1">
+            <a:schemeClr val="accent1"/>
+          </a:lnRef>
+          <a:fillRef idx="3">
+            <a:schemeClr val="accent1"/>
+          </a:fillRef>
+          <a:effectRef idx="2">
+            <a:schemeClr val="accent1"/>
+          </a:effectRef>
+          <a:fontRef idx="minor">
+            <a:schemeClr val="lt1"/>
+          </a:fontRef>
+        </p:style>
+        <p:txBody>
+          <a:bodyPr rtlCol="0" anchor="ctr"/>
+          <a:lstStyle/>
+          <a:p>
+            <a:pPr algn="ctr"/>
+          </a:p>
+        </p:txBody>
+      </p:sp>
+      <p:sp>
+        <p:nvSpPr>
+          <p:cNvPr id="39" name="TextBox 38"/>
+          <p:cNvSpPr txBox="1"/>
+          <p:nvPr/>
+        </p:nvSpPr>
+        <p:spPr>
+          <a:xfrm>
+            <a:off x="6766560" y="4937760"/>
+            <a:ext cx="3017520" cy="502920"/>
+          </a:xfrm>
+          <a:prstGeom prst="rect">
+            <a:avLst/>
+          </a:prstGeom>
+          <a:noFill/>
+        </p:spPr>
+        <p:txBody>
+          <a:bodyPr wrap="square" lIns="25400" rIns="25400" tIns="25400" bIns="25400" anchor="ctr">
+            <a:spAutoFit/>
+          </a:bodyPr>
+          <a:lstStyle/>
+          <a:p>
+            <a:pPr algn="l"/>
+            <a:r>
+              <a:rPr sz="1200" b="0">
+                <a:solidFill>
+                  <a:srgbClr val="1A1A1A"/>
+                </a:solidFill>
+                <a:latin typeface="맑은 고딕"/>
+              </a:rPr>
+              <a:t>결근(전/오전/오후)</a:t>
+            </a:r>
+          </a:p>
+        </p:txBody>
+      </p:sp>
+      <p:sp>
+        <p:nvSpPr>
+          <p:cNvPr id="40" name="TextBox 39"/>
+          <p:cNvSpPr txBox="1"/>
+          <p:nvPr/>
+        </p:nvSpPr>
+        <p:spPr>
+          <a:xfrm>
+            <a:off x="9966960" y="4937760"/>
+            <a:ext cx="1645920" cy="502920"/>
+          </a:xfrm>
+          <a:prstGeom prst="rect">
+            <a:avLst/>
+          </a:prstGeom>
+          <a:noFill/>
+        </p:spPr>
+        <p:txBody>
+          <a:bodyPr wrap="square" lIns="25400" rIns="25400" tIns="25400" bIns="25400" anchor="ctr">
+            <a:spAutoFit/>
+          </a:bodyPr>
+          <a:lstStyle/>
+          <a:p>
+            <a:pPr algn="l"/>
+            <a:r>
+              <a:rPr sz="1200" b="0">
+                <a:solidFill>
+                  <a:srgbClr val="1A1A1A"/>
+                </a:solidFill>
+                <a:latin typeface="맑은 고딕"/>
+              </a:rPr>
+              <a:t>1.0/0.5일</a:t>
+            </a:r>
+          </a:p>
+        </p:txBody>
+      </p:sp>
+      <p:sp>
+        <p:nvSpPr>
+          <p:cNvPr id="41" name="TextBox 40"/>
           <p:cNvSpPr txBox="1"/>
           <p:nvPr/>
         </p:nvSpPr>
@@ -4835,7 +6006,7 @@
                 </a:solidFill>
                 <a:latin typeface="맑은 고딕"/>
               </a:rPr>
-              <a:t>COSMAX · 생산3팀 파우더 성형실    |    4 / 9</a:t>
+              <a:t>COSMAX · 생산3팀 파우더 성형실    |    4 / 6</a:t>
             </a:r>
           </a:p>
         </p:txBody>
@@ -4932,7 +6103,7 @@
                 </a:solidFill>
                 <a:latin typeface="맑은 고딕"/>
               </a:rPr>
-              <a:t>3. 휴가증 작성하기</a:t>
+              <a:t>3. 내 휴가증 확인 &amp; FAQ</a:t>
             </a:r>
           </a:p>
         </p:txBody>
@@ -4945,8 +6116,8 @@
         </p:nvSpPr>
         <p:spPr>
           <a:xfrm>
-            <a:off x="731520" y="1371600"/>
-            <a:ext cx="6400800" cy="457200"/>
+            <a:off x="731520" y="1280160"/>
+            <a:ext cx="5486400" cy="457200"/>
           </a:xfrm>
           <a:prstGeom prst="rect">
             <a:avLst/>
@@ -4963,554 +6134,29 @@
             <a:r>
               <a:rPr sz="1600" b="1">
                 <a:solidFill>
-                  <a:srgbClr val="1A1A1A"/>
-                </a:solidFill>
-                <a:latin typeface="맑은 고딕"/>
-              </a:rPr>
-              <a:t>왼쪽 [휴가증 작성] 카드에서:</a:t>
-            </a:r>
-          </a:p>
-        </p:txBody>
-      </p:sp>
-      <p:sp>
-        <p:nvSpPr>
-          <p:cNvPr id="5" name="TextBox 4"/>
-          <p:cNvSpPr txBox="1"/>
-          <p:nvPr/>
-        </p:nvSpPr>
-        <p:spPr>
-          <a:xfrm>
-            <a:off x="731520" y="2011680"/>
-            <a:ext cx="457200" cy="548640"/>
-          </a:xfrm>
-          <a:prstGeom prst="rect">
-            <a:avLst/>
-          </a:prstGeom>
-          <a:noFill/>
-        </p:spPr>
-        <p:txBody>
-          <a:bodyPr wrap="square" lIns="25400" rIns="25400" tIns="25400" bIns="25400" anchor="t">
-            <a:spAutoFit/>
-          </a:bodyPr>
-          <a:lstStyle/>
-          <a:p>
-            <a:pPr algn="l"/>
-            <a:r>
-              <a:rPr sz="1800" b="1">
-                <a:solidFill>
                   <a:srgbClr val="C8102E"/>
                 </a:solidFill>
                 <a:latin typeface="맑은 고딕"/>
               </a:rPr>
-              <a:t>1.</a:t>
-            </a:r>
-          </a:p>
-        </p:txBody>
-      </p:sp>
-      <p:sp>
-        <p:nvSpPr>
-          <p:cNvPr id="6" name="TextBox 5"/>
-          <p:cNvSpPr txBox="1"/>
-          <p:nvPr/>
-        </p:nvSpPr>
-        <p:spPr>
-          <a:xfrm>
-            <a:off x="1280160" y="2011680"/>
-            <a:ext cx="2286000" cy="548640"/>
-          </a:xfrm>
-          <a:prstGeom prst="rect">
-            <a:avLst/>
-          </a:prstGeom>
-          <a:noFill/>
-        </p:spPr>
-        <p:txBody>
-          <a:bodyPr wrap="square" lIns="25400" rIns="25400" tIns="25400" bIns="25400" anchor="t">
-            <a:spAutoFit/>
-          </a:bodyPr>
-          <a:lstStyle/>
-          <a:p>
-            <a:pPr algn="l"/>
-            <a:r>
-              <a:rPr sz="1600" b="1">
-                <a:solidFill>
-                  <a:srgbClr val="1A1A1A"/>
-                </a:solidFill>
-                <a:latin typeface="맑은 고딕"/>
-              </a:rPr>
-              <a:t>구분 선택</a:t>
-            </a:r>
-          </a:p>
-        </p:txBody>
-      </p:sp>
-      <p:sp>
-        <p:nvSpPr>
-          <p:cNvPr id="7" name="TextBox 6"/>
-          <p:cNvSpPr txBox="1"/>
-          <p:nvPr/>
-        </p:nvSpPr>
-        <p:spPr>
-          <a:xfrm>
-            <a:off x="3657600" y="2011680"/>
-            <a:ext cx="3657600" cy="548640"/>
-          </a:xfrm>
-          <a:prstGeom prst="rect">
-            <a:avLst/>
-          </a:prstGeom>
-          <a:noFill/>
-        </p:spPr>
-        <p:txBody>
-          <a:bodyPr wrap="square" lIns="25400" rIns="25400" tIns="25400" bIns="25400" anchor="t">
-            <a:spAutoFit/>
-          </a:bodyPr>
-          <a:lstStyle/>
-          <a:p>
-            <a:pPr algn="l"/>
-            <a:r>
-              <a:rPr sz="1400" b="0">
-                <a:solidFill>
-                  <a:srgbClr val="777777"/>
-                </a:solidFill>
-                <a:latin typeface="맑은 고딕"/>
-              </a:rPr>
-              <a:t>연차 / 반차 / 반반차 / 생휴 / 하기휴가 / 결근</a:t>
-            </a:r>
-          </a:p>
-        </p:txBody>
-      </p:sp>
-      <p:sp>
-        <p:nvSpPr>
-          <p:cNvPr id="8" name="TextBox 7"/>
-          <p:cNvSpPr txBox="1"/>
-          <p:nvPr/>
-        </p:nvSpPr>
-        <p:spPr>
-          <a:xfrm>
-            <a:off x="731520" y="2743200"/>
-            <a:ext cx="457200" cy="548640"/>
-          </a:xfrm>
-          <a:prstGeom prst="rect">
-            <a:avLst/>
-          </a:prstGeom>
-          <a:noFill/>
-        </p:spPr>
-        <p:txBody>
-          <a:bodyPr wrap="square" lIns="25400" rIns="25400" tIns="25400" bIns="25400" anchor="t">
-            <a:spAutoFit/>
-          </a:bodyPr>
-          <a:lstStyle/>
-          <a:p>
-            <a:pPr algn="l"/>
-            <a:r>
-              <a:rPr sz="1800" b="1">
-                <a:solidFill>
-                  <a:srgbClr val="C8102E"/>
-                </a:solidFill>
-                <a:latin typeface="맑은 고딕"/>
-              </a:rPr>
-              <a:t>2.</a:t>
-            </a:r>
-          </a:p>
-        </p:txBody>
-      </p:sp>
-      <p:sp>
-        <p:nvSpPr>
-          <p:cNvPr id="9" name="TextBox 8"/>
-          <p:cNvSpPr txBox="1"/>
-          <p:nvPr/>
-        </p:nvSpPr>
-        <p:spPr>
-          <a:xfrm>
-            <a:off x="1280160" y="2743200"/>
-            <a:ext cx="2286000" cy="548640"/>
-          </a:xfrm>
-          <a:prstGeom prst="rect">
-            <a:avLst/>
-          </a:prstGeom>
-          <a:noFill/>
-        </p:spPr>
-        <p:txBody>
-          <a:bodyPr wrap="square" lIns="25400" rIns="25400" tIns="25400" bIns="25400" anchor="t">
-            <a:spAutoFit/>
-          </a:bodyPr>
-          <a:lstStyle/>
-          <a:p>
-            <a:pPr algn="l"/>
-            <a:r>
-              <a:rPr sz="1600" b="1">
-                <a:solidFill>
-                  <a:srgbClr val="1A1A1A"/>
-                </a:solidFill>
-                <a:latin typeface="맑은 고딕"/>
-              </a:rPr>
-              <a:t>개수 입력</a:t>
-            </a:r>
-          </a:p>
-        </p:txBody>
-      </p:sp>
-      <p:sp>
-        <p:nvSpPr>
-          <p:cNvPr id="10" name="TextBox 9"/>
-          <p:cNvSpPr txBox="1"/>
-          <p:nvPr/>
-        </p:nvSpPr>
-        <p:spPr>
-          <a:xfrm>
-            <a:off x="3657600" y="2743200"/>
-            <a:ext cx="3657600" cy="548640"/>
-          </a:xfrm>
-          <a:prstGeom prst="rect">
-            <a:avLst/>
-          </a:prstGeom>
-          <a:noFill/>
-        </p:spPr>
-        <p:txBody>
-          <a:bodyPr wrap="square" lIns="25400" rIns="25400" tIns="25400" bIns="25400" anchor="t">
-            <a:spAutoFit/>
-          </a:bodyPr>
-          <a:lstStyle/>
-          <a:p>
-            <a:pPr algn="l"/>
-            <a:r>
-              <a:rPr sz="1400" b="0">
-                <a:solidFill>
-                  <a:srgbClr val="777777"/>
-                </a:solidFill>
-                <a:latin typeface="맑은 고딕"/>
-              </a:rPr>
-              <a:t>예: 연차 2개</a:t>
-            </a:r>
-          </a:p>
-        </p:txBody>
-      </p:sp>
-      <p:sp>
-        <p:nvSpPr>
-          <p:cNvPr id="11" name="TextBox 10"/>
-          <p:cNvSpPr txBox="1"/>
-          <p:nvPr/>
-        </p:nvSpPr>
-        <p:spPr>
-          <a:xfrm>
-            <a:off x="731520" y="3474720"/>
-            <a:ext cx="457200" cy="548640"/>
-          </a:xfrm>
-          <a:prstGeom prst="rect">
-            <a:avLst/>
-          </a:prstGeom>
-          <a:noFill/>
-        </p:spPr>
-        <p:txBody>
-          <a:bodyPr wrap="square" lIns="25400" rIns="25400" tIns="25400" bIns="25400" anchor="t">
-            <a:spAutoFit/>
-          </a:bodyPr>
-          <a:lstStyle/>
-          <a:p>
-            <a:pPr algn="l"/>
-            <a:r>
-              <a:rPr sz="1800" b="1">
-                <a:solidFill>
-                  <a:srgbClr val="C8102E"/>
-                </a:solidFill>
-                <a:latin typeface="맑은 고딕"/>
-              </a:rPr>
-              <a:t>3.</a:t>
-            </a:r>
-          </a:p>
-        </p:txBody>
-      </p:sp>
-      <p:sp>
-        <p:nvSpPr>
-          <p:cNvPr id="12" name="TextBox 11"/>
-          <p:cNvSpPr txBox="1"/>
-          <p:nvPr/>
-        </p:nvSpPr>
-        <p:spPr>
-          <a:xfrm>
-            <a:off x="1280160" y="3474720"/>
-            <a:ext cx="2286000" cy="548640"/>
-          </a:xfrm>
-          <a:prstGeom prst="rect">
-            <a:avLst/>
-          </a:prstGeom>
-          <a:noFill/>
-        </p:spPr>
-        <p:txBody>
-          <a:bodyPr wrap="square" lIns="25400" rIns="25400" tIns="25400" bIns="25400" anchor="t">
-            <a:spAutoFit/>
-          </a:bodyPr>
-          <a:lstStyle/>
-          <a:p>
-            <a:pPr algn="l"/>
-            <a:r>
-              <a:rPr sz="1600" b="1">
-                <a:solidFill>
-                  <a:srgbClr val="1A1A1A"/>
-                </a:solidFill>
-                <a:latin typeface="맑은 고딕"/>
-              </a:rPr>
-              <a:t>기간 선택</a:t>
-            </a:r>
-          </a:p>
-        </p:txBody>
-      </p:sp>
-      <p:sp>
-        <p:nvSpPr>
-          <p:cNvPr id="13" name="TextBox 12"/>
-          <p:cNvSpPr txBox="1"/>
-          <p:nvPr/>
-        </p:nvSpPr>
-        <p:spPr>
-          <a:xfrm>
-            <a:off x="3657600" y="3474720"/>
-            <a:ext cx="3657600" cy="548640"/>
-          </a:xfrm>
-          <a:prstGeom prst="rect">
-            <a:avLst/>
-          </a:prstGeom>
-          <a:noFill/>
-        </p:spPr>
-        <p:txBody>
-          <a:bodyPr wrap="square" lIns="25400" rIns="25400" tIns="25400" bIns="25400" anchor="t">
-            <a:spAutoFit/>
-          </a:bodyPr>
-          <a:lstStyle/>
-          <a:p>
-            <a:pPr algn="l"/>
-            <a:r>
-              <a:rPr sz="1400" b="0">
-                <a:solidFill>
-                  <a:srgbClr val="777777"/>
-                </a:solidFill>
-                <a:latin typeface="맑은 고딕"/>
-              </a:rPr>
-              <a:t>시작일 ~ 종료일</a:t>
-            </a:r>
-          </a:p>
-        </p:txBody>
-      </p:sp>
-      <p:sp>
-        <p:nvSpPr>
-          <p:cNvPr id="14" name="TextBox 13"/>
-          <p:cNvSpPr txBox="1"/>
-          <p:nvPr/>
-        </p:nvSpPr>
-        <p:spPr>
-          <a:xfrm>
-            <a:off x="731520" y="4206240"/>
-            <a:ext cx="457200" cy="548640"/>
-          </a:xfrm>
-          <a:prstGeom prst="rect">
-            <a:avLst/>
-          </a:prstGeom>
-          <a:noFill/>
-        </p:spPr>
-        <p:txBody>
-          <a:bodyPr wrap="square" lIns="25400" rIns="25400" tIns="25400" bIns="25400" anchor="t">
-            <a:spAutoFit/>
-          </a:bodyPr>
-          <a:lstStyle/>
-          <a:p>
-            <a:pPr algn="l"/>
-            <a:r>
-              <a:rPr sz="1800" b="1">
-                <a:solidFill>
-                  <a:srgbClr val="C8102E"/>
-                </a:solidFill>
-                <a:latin typeface="맑은 고딕"/>
-              </a:rPr>
-              <a:t>4.</a:t>
-            </a:r>
-          </a:p>
-        </p:txBody>
-      </p:sp>
-      <p:sp>
-        <p:nvSpPr>
-          <p:cNvPr id="15" name="TextBox 14"/>
-          <p:cNvSpPr txBox="1"/>
-          <p:nvPr/>
-        </p:nvSpPr>
-        <p:spPr>
-          <a:xfrm>
-            <a:off x="1280160" y="4206240"/>
-            <a:ext cx="2286000" cy="548640"/>
-          </a:xfrm>
-          <a:prstGeom prst="rect">
-            <a:avLst/>
-          </a:prstGeom>
-          <a:noFill/>
-        </p:spPr>
-        <p:txBody>
-          <a:bodyPr wrap="square" lIns="25400" rIns="25400" tIns="25400" bIns="25400" anchor="t">
-            <a:spAutoFit/>
-          </a:bodyPr>
-          <a:lstStyle/>
-          <a:p>
-            <a:pPr algn="l"/>
-            <a:r>
-              <a:rPr sz="1600" b="1">
-                <a:solidFill>
-                  <a:srgbClr val="1A1A1A"/>
-                </a:solidFill>
-                <a:latin typeface="맑은 고딕"/>
-              </a:rPr>
-              <a:t>사유 입력</a:t>
-            </a:r>
-          </a:p>
-        </p:txBody>
-      </p:sp>
-      <p:sp>
-        <p:nvSpPr>
-          <p:cNvPr id="16" name="TextBox 15"/>
-          <p:cNvSpPr txBox="1"/>
-          <p:nvPr/>
-        </p:nvSpPr>
-        <p:spPr>
-          <a:xfrm>
-            <a:off x="3657600" y="4206240"/>
-            <a:ext cx="3657600" cy="548640"/>
-          </a:xfrm>
-          <a:prstGeom prst="rect">
-            <a:avLst/>
-          </a:prstGeom>
-          <a:noFill/>
-        </p:spPr>
-        <p:txBody>
-          <a:bodyPr wrap="square" lIns="25400" rIns="25400" tIns="25400" bIns="25400" anchor="t">
-            <a:spAutoFit/>
-          </a:bodyPr>
-          <a:lstStyle/>
-          <a:p>
-            <a:pPr algn="l"/>
-            <a:r>
-              <a:rPr sz="1400" b="0">
-                <a:solidFill>
-                  <a:srgbClr val="777777"/>
-                </a:solidFill>
-                <a:latin typeface="맑은 고딕"/>
-              </a:rPr>
-              <a:t>휴가 사유</a:t>
-            </a:r>
-          </a:p>
-        </p:txBody>
-      </p:sp>
-      <p:sp>
-        <p:nvSpPr>
-          <p:cNvPr id="17" name="TextBox 16"/>
-          <p:cNvSpPr txBox="1"/>
-          <p:nvPr/>
-        </p:nvSpPr>
-        <p:spPr>
-          <a:xfrm>
-            <a:off x="731520" y="4937760"/>
-            <a:ext cx="457200" cy="548640"/>
-          </a:xfrm>
-          <a:prstGeom prst="rect">
-            <a:avLst/>
-          </a:prstGeom>
-          <a:noFill/>
-        </p:spPr>
-        <p:txBody>
-          <a:bodyPr wrap="square" lIns="25400" rIns="25400" tIns="25400" bIns="25400" anchor="t">
-            <a:spAutoFit/>
-          </a:bodyPr>
-          <a:lstStyle/>
-          <a:p>
-            <a:pPr algn="l"/>
-            <a:r>
-              <a:rPr sz="1800" b="1">
-                <a:solidFill>
-                  <a:srgbClr val="C8102E"/>
-                </a:solidFill>
-                <a:latin typeface="맑은 고딕"/>
-              </a:rPr>
-              <a:t>5.</a:t>
-            </a:r>
-          </a:p>
-        </p:txBody>
-      </p:sp>
-      <p:sp>
-        <p:nvSpPr>
-          <p:cNvPr id="18" name="TextBox 17"/>
-          <p:cNvSpPr txBox="1"/>
-          <p:nvPr/>
-        </p:nvSpPr>
-        <p:spPr>
-          <a:xfrm>
-            <a:off x="1280160" y="4937760"/>
-            <a:ext cx="2286000" cy="548640"/>
-          </a:xfrm>
-          <a:prstGeom prst="rect">
-            <a:avLst/>
-          </a:prstGeom>
-          <a:noFill/>
-        </p:spPr>
-        <p:txBody>
-          <a:bodyPr wrap="square" lIns="25400" rIns="25400" tIns="25400" bIns="25400" anchor="t">
-            <a:spAutoFit/>
-          </a:bodyPr>
-          <a:lstStyle/>
-          <a:p>
-            <a:pPr algn="l"/>
-            <a:r>
-              <a:rPr sz="1600" b="1">
-                <a:solidFill>
-                  <a:srgbClr val="1A1A1A"/>
-                </a:solidFill>
-                <a:latin typeface="맑은 고딕"/>
-              </a:rPr>
-              <a:t>[+ 추가] 클릭</a:t>
-            </a:r>
-          </a:p>
-        </p:txBody>
-      </p:sp>
-      <p:sp>
-        <p:nvSpPr>
-          <p:cNvPr id="19" name="TextBox 18"/>
-          <p:cNvSpPr txBox="1"/>
-          <p:nvPr/>
-        </p:nvSpPr>
-        <p:spPr>
-          <a:xfrm>
-            <a:off x="3657600" y="4937760"/>
-            <a:ext cx="3657600" cy="548640"/>
-          </a:xfrm>
-          <a:prstGeom prst="rect">
-            <a:avLst/>
-          </a:prstGeom>
-          <a:noFill/>
-        </p:spPr>
-        <p:txBody>
-          <a:bodyPr wrap="square" lIns="25400" rIns="25400" tIns="25400" bIns="25400" anchor="t">
-            <a:spAutoFit/>
-          </a:bodyPr>
-          <a:lstStyle/>
-          <a:p>
-            <a:pPr algn="l"/>
-            <a:r>
-              <a:rPr sz="1400" b="0">
-                <a:solidFill>
-                  <a:srgbClr val="777777"/>
-                </a:solidFill>
-                <a:latin typeface="맑은 고딕"/>
-              </a:rPr>
-              <a:t>클라우드에 자동 저장</a:t>
-            </a:r>
-          </a:p>
-        </p:txBody>
-      </p:sp>
-      <p:sp>
-        <p:nvSpPr>
-          <p:cNvPr id="20" name="Rounded Rectangle 19"/>
+              <a:t>내 휴가증 확인</a:t>
+            </a:r>
+          </a:p>
+        </p:txBody>
+      </p:sp>
+      <p:sp>
+        <p:nvSpPr>
+          <p:cNvPr id="5" name="Rounded Rectangle 4"/>
           <p:cNvSpPr/>
           <p:nvPr/>
         </p:nvSpPr>
         <p:spPr>
           <a:xfrm>
-            <a:off x="7772400" y="1371600"/>
-            <a:ext cx="3931920" cy="4572000"/>
+            <a:off x="731520" y="1828800"/>
+            <a:ext cx="5486400" cy="2194560"/>
           </a:xfrm>
           <a:prstGeom prst="roundRect">
             <a:avLst>
-              <a:gd name="adj" fmla="val 15000"/>
+              <a:gd name="adj" fmla="val 12000"/>
             </a:avLst>
           </a:prstGeom>
           <a:solidFill>
@@ -5545,14 +6191,14 @@
       </p:sp>
       <p:sp>
         <p:nvSpPr>
-          <p:cNvPr id="21" name="TextBox 20"/>
-          <p:cNvSpPr txBox="1"/>
-          <p:nvPr/>
-        </p:nvSpPr>
-        <p:spPr>
-          <a:xfrm>
-            <a:off x="7955279" y="1554480"/>
-            <a:ext cx="3657600" cy="457200"/>
+          <p:cNvPr id="6" name="TextBox 5"/>
+          <p:cNvSpPr txBox="1"/>
+          <p:nvPr/>
+        </p:nvSpPr>
+        <p:spPr>
+          <a:xfrm>
+            <a:off x="914400" y="1965960"/>
+            <a:ext cx="5120640" cy="2011680"/>
           </a:xfrm>
           <a:prstGeom prst="rect">
             <a:avLst/>
@@ -5567,27 +6213,148 @@
           <a:p>
             <a:pPr algn="l"/>
             <a:r>
+              <a:rPr sz="1300" b="0">
+                <a:solidFill>
+                  <a:srgbClr val="1A1A1A"/>
+                </a:solidFill>
+                <a:latin typeface="맑은 고딕"/>
+              </a:rPr>
+              <a:t>① 상단 [내 휴가증] 클릭
+② 이름 + 휴대폰 마지막 4자리 입력
+③ 서무가 등록 완료한 본인 휴가증 표시
+   (✓ 처리 완료 표시, 최근 14일)</a:t>
+            </a:r>
+          </a:p>
+        </p:txBody>
+      </p:sp>
+      <p:sp>
+        <p:nvSpPr>
+          <p:cNvPr id="7" name="Rounded Rectangle 6"/>
+          <p:cNvSpPr/>
+          <p:nvPr/>
+        </p:nvSpPr>
+        <p:spPr>
+          <a:xfrm>
+            <a:off x="731520" y="4206240"/>
+            <a:ext cx="5486400" cy="1828800"/>
+          </a:xfrm>
+          <a:prstGeom prst="roundRect">
+            <a:avLst>
+              <a:gd name="adj" fmla="val 12000"/>
+            </a:avLst>
+          </a:prstGeom>
+          <a:solidFill>
+            <a:srgbClr val="F5F5F5"/>
+          </a:solidFill>
+          <a:ln>
+            <a:noFill/>
+          </a:ln>
+          <a:effectLst/>
+        </p:spPr>
+        <p:style>
+          <a:lnRef idx="1">
+            <a:schemeClr val="accent1"/>
+          </a:lnRef>
+          <a:fillRef idx="3">
+            <a:schemeClr val="accent1"/>
+          </a:fillRef>
+          <a:effectRef idx="2">
+            <a:schemeClr val="accent1"/>
+          </a:effectRef>
+          <a:fontRef idx="minor">
+            <a:schemeClr val="lt1"/>
+          </a:fontRef>
+        </p:style>
+        <p:txBody>
+          <a:bodyPr rtlCol="0" anchor="ctr"/>
+          <a:lstStyle/>
+          <a:p>
+            <a:pPr algn="ctr"/>
+          </a:p>
+        </p:txBody>
+      </p:sp>
+      <p:sp>
+        <p:nvSpPr>
+          <p:cNvPr id="8" name="TextBox 7"/>
+          <p:cNvSpPr txBox="1"/>
+          <p:nvPr/>
+        </p:nvSpPr>
+        <p:spPr>
+          <a:xfrm>
+            <a:off x="914400" y="4343400"/>
+            <a:ext cx="5120640" cy="1645920"/>
+          </a:xfrm>
+          <a:prstGeom prst="rect">
+            <a:avLst/>
+          </a:prstGeom>
+          <a:noFill/>
+        </p:spPr>
+        <p:txBody>
+          <a:bodyPr wrap="square" lIns="25400" rIns="25400" tIns="25400" bIns="25400" anchor="t">
+            <a:spAutoFit/>
+          </a:bodyPr>
+          <a:lstStyle/>
+          <a:p>
+            <a:pPr algn="l"/>
+            <a:r>
+              <a:rPr sz="1200" b="0">
+                <a:solidFill>
+                  <a:srgbClr val="1A1A1A"/>
+                </a:solidFill>
+                <a:latin typeface="맑은 고딕"/>
+              </a:rPr>
+              <a:t>⚠️ 잘못 작성 시
+작성 직후 우측 카드의 [삭제]로 즉시 취소.
+서무 처리 후엔 별도 요청 필요.</a:t>
+            </a:r>
+          </a:p>
+        </p:txBody>
+      </p:sp>
+      <p:sp>
+        <p:nvSpPr>
+          <p:cNvPr id="9" name="TextBox 8"/>
+          <p:cNvSpPr txBox="1"/>
+          <p:nvPr/>
+        </p:nvSpPr>
+        <p:spPr>
+          <a:xfrm>
+            <a:off x="6583680" y="1280160"/>
+            <a:ext cx="5212080" cy="457200"/>
+          </a:xfrm>
+          <a:prstGeom prst="rect">
+            <a:avLst/>
+          </a:prstGeom>
+          <a:noFill/>
+        </p:spPr>
+        <p:txBody>
+          <a:bodyPr wrap="square" lIns="25400" rIns="25400" tIns="25400" bIns="25400" anchor="t">
+            <a:spAutoFit/>
+          </a:bodyPr>
+          <a:lstStyle/>
+          <a:p>
+            <a:pPr algn="l"/>
+            <a:r>
               <a:rPr sz="1600" b="1">
                 <a:solidFill>
                   <a:srgbClr val="C8102E"/>
                 </a:solidFill>
                 <a:latin typeface="맑은 고딕"/>
               </a:rPr>
-              <a:t>💡 알아두세요</a:t>
-            </a:r>
-          </a:p>
-        </p:txBody>
-      </p:sp>
-      <p:sp>
-        <p:nvSpPr>
-          <p:cNvPr id="22" name="TextBox 21"/>
-          <p:cNvSpPr txBox="1"/>
-          <p:nvPr/>
-        </p:nvSpPr>
-        <p:spPr>
-          <a:xfrm>
-            <a:off x="7955279" y="2103120"/>
-            <a:ext cx="3657600" cy="4114800"/>
+              <a:t>자주 묻는 질문</a:t>
+            </a:r>
+          </a:p>
+        </p:txBody>
+      </p:sp>
+      <p:sp>
+        <p:nvSpPr>
+          <p:cNvPr id="10" name="TextBox 9"/>
+          <p:cNvSpPr txBox="1"/>
+          <p:nvPr/>
+        </p:nvSpPr>
+        <p:spPr>
+          <a:xfrm>
+            <a:off x="6583680" y="1828800"/>
+            <a:ext cx="5212080" cy="365760"/>
           </a:xfrm>
           <a:prstGeom prst="rect">
             <a:avLst/>
@@ -5602,26 +6369,265 @@
           <a:p>
             <a:pPr algn="l"/>
             <a:r>
-              <a:rPr sz="1300" b="0">
+              <a:rPr sz="1300" b="1">
                 <a:solidFill>
                   <a:srgbClr val="1A1A1A"/>
                 </a:solidFill>
                 <a:latin typeface="맑은 고딕"/>
               </a:rPr>
-              <a:t>• 이름과 연락처는 자동 채워집니다
-  (수정 불가)
-• 한 사람이 여러 유형을 사용할 땐
-  유형별로 따로 작성
-  (예: 연차 + 반차 → 휴가증 2건)
-• 작성하면 즉시 클라우드에 저장되어
-  서무에게 자동 전달됩니다</a:t>
-            </a:r>
-          </a:p>
-        </p:txBody>
-      </p:sp>
-      <p:sp>
-        <p:nvSpPr>
-          <p:cNvPr id="23" name="TextBox 22"/>
+              <a:t>Q. 비밀번호 분실?</a:t>
+            </a:r>
+          </a:p>
+        </p:txBody>
+      </p:sp>
+      <p:sp>
+        <p:nvSpPr>
+          <p:cNvPr id="11" name="TextBox 10"/>
+          <p:cNvSpPr txBox="1"/>
+          <p:nvPr/>
+        </p:nvSpPr>
+        <p:spPr>
+          <a:xfrm>
+            <a:off x="6766560" y="2194560"/>
+            <a:ext cx="5029200" cy="457200"/>
+          </a:xfrm>
+          <a:prstGeom prst="rect">
+            <a:avLst/>
+          </a:prstGeom>
+          <a:noFill/>
+        </p:spPr>
+        <p:txBody>
+          <a:bodyPr wrap="square" lIns="25400" rIns="25400" tIns="25400" bIns="25400" anchor="t">
+            <a:spAutoFit/>
+          </a:bodyPr>
+          <a:lstStyle/>
+          <a:p>
+            <a:pPr algn="l"/>
+            <a:r>
+              <a:rPr sz="1200" b="0">
+                <a:solidFill>
+                  <a:srgbClr val="777777"/>
+                </a:solidFill>
+                <a:latin typeface="맑은 고딕"/>
+              </a:rPr>
+              <a:t>→ 로그인 화면 [비밀번호 찾기]</a:t>
+            </a:r>
+          </a:p>
+        </p:txBody>
+      </p:sp>
+      <p:sp>
+        <p:nvSpPr>
+          <p:cNvPr id="12" name="TextBox 11"/>
+          <p:cNvSpPr txBox="1"/>
+          <p:nvPr/>
+        </p:nvSpPr>
+        <p:spPr>
+          <a:xfrm>
+            <a:off x="6583680" y="2880360"/>
+            <a:ext cx="5212080" cy="365760"/>
+          </a:xfrm>
+          <a:prstGeom prst="rect">
+            <a:avLst/>
+          </a:prstGeom>
+          <a:noFill/>
+        </p:spPr>
+        <p:txBody>
+          <a:bodyPr wrap="square" lIns="25400" rIns="25400" tIns="25400" bIns="25400" anchor="t">
+            <a:spAutoFit/>
+          </a:bodyPr>
+          <a:lstStyle/>
+          <a:p>
+            <a:pPr algn="l"/>
+            <a:r>
+              <a:rPr sz="1300" b="1">
+                <a:solidFill>
+                  <a:srgbClr val="1A1A1A"/>
+                </a:solidFill>
+                <a:latin typeface="맑은 고딕"/>
+              </a:rPr>
+              <a:t>Q. 사번 등록 안 됨?</a:t>
+            </a:r>
+          </a:p>
+        </p:txBody>
+      </p:sp>
+      <p:sp>
+        <p:nvSpPr>
+          <p:cNvPr id="13" name="TextBox 12"/>
+          <p:cNvSpPr txBox="1"/>
+          <p:nvPr/>
+        </p:nvSpPr>
+        <p:spPr>
+          <a:xfrm>
+            <a:off x="6766560" y="3246120"/>
+            <a:ext cx="5029200" cy="457200"/>
+          </a:xfrm>
+          <a:prstGeom prst="rect">
+            <a:avLst/>
+          </a:prstGeom>
+          <a:noFill/>
+        </p:spPr>
+        <p:txBody>
+          <a:bodyPr wrap="square" lIns="25400" rIns="25400" tIns="25400" bIns="25400" anchor="t">
+            <a:spAutoFit/>
+          </a:bodyPr>
+          <a:lstStyle/>
+          <a:p>
+            <a:pPr algn="l"/>
+            <a:r>
+              <a:rPr sz="1200" b="0">
+                <a:solidFill>
+                  <a:srgbClr val="777777"/>
+                </a:solidFill>
+                <a:latin typeface="맑은 고딕"/>
+              </a:rPr>
+              <a:t>→ 관리자(이동준)에게 요청</a:t>
+            </a:r>
+          </a:p>
+        </p:txBody>
+      </p:sp>
+      <p:sp>
+        <p:nvSpPr>
+          <p:cNvPr id="14" name="TextBox 13"/>
+          <p:cNvSpPr txBox="1"/>
+          <p:nvPr/>
+        </p:nvSpPr>
+        <p:spPr>
+          <a:xfrm>
+            <a:off x="6583680" y="3931920"/>
+            <a:ext cx="5212080" cy="365760"/>
+          </a:xfrm>
+          <a:prstGeom prst="rect">
+            <a:avLst/>
+          </a:prstGeom>
+          <a:noFill/>
+        </p:spPr>
+        <p:txBody>
+          <a:bodyPr wrap="square" lIns="25400" rIns="25400" tIns="25400" bIns="25400" anchor="t">
+            <a:spAutoFit/>
+          </a:bodyPr>
+          <a:lstStyle/>
+          <a:p>
+            <a:pPr algn="l"/>
+            <a:r>
+              <a:rPr sz="1300" b="1">
+                <a:solidFill>
+                  <a:srgbClr val="1A1A1A"/>
+                </a:solidFill>
+                <a:latin typeface="맑은 고딕"/>
+              </a:rPr>
+              <a:t>Q. 화면이 옛 디자인?</a:t>
+            </a:r>
+          </a:p>
+        </p:txBody>
+      </p:sp>
+      <p:sp>
+        <p:nvSpPr>
+          <p:cNvPr id="15" name="TextBox 14"/>
+          <p:cNvSpPr txBox="1"/>
+          <p:nvPr/>
+        </p:nvSpPr>
+        <p:spPr>
+          <a:xfrm>
+            <a:off x="6766560" y="4297680"/>
+            <a:ext cx="5029200" cy="457200"/>
+          </a:xfrm>
+          <a:prstGeom prst="rect">
+            <a:avLst/>
+          </a:prstGeom>
+          <a:noFill/>
+        </p:spPr>
+        <p:txBody>
+          <a:bodyPr wrap="square" lIns="25400" rIns="25400" tIns="25400" bIns="25400" anchor="t">
+            <a:spAutoFit/>
+          </a:bodyPr>
+          <a:lstStyle/>
+          <a:p>
+            <a:pPr algn="l"/>
+            <a:r>
+              <a:rPr sz="1200" b="0">
+                <a:solidFill>
+                  <a:srgbClr val="777777"/>
+                </a:solidFill>
+                <a:latin typeface="맑은 고딕"/>
+              </a:rPr>
+              <a:t>→ 상단 ↻ 아이콘 클릭</a:t>
+            </a:r>
+          </a:p>
+        </p:txBody>
+      </p:sp>
+      <p:sp>
+        <p:nvSpPr>
+          <p:cNvPr id="16" name="TextBox 15"/>
+          <p:cNvSpPr txBox="1"/>
+          <p:nvPr/>
+        </p:nvSpPr>
+        <p:spPr>
+          <a:xfrm>
+            <a:off x="6583680" y="4983479"/>
+            <a:ext cx="5212080" cy="365760"/>
+          </a:xfrm>
+          <a:prstGeom prst="rect">
+            <a:avLst/>
+          </a:prstGeom>
+          <a:noFill/>
+        </p:spPr>
+        <p:txBody>
+          <a:bodyPr wrap="square" lIns="25400" rIns="25400" tIns="25400" bIns="25400" anchor="t">
+            <a:spAutoFit/>
+          </a:bodyPr>
+          <a:lstStyle/>
+          <a:p>
+            <a:pPr algn="l"/>
+            <a:r>
+              <a:rPr sz="1300" b="1">
+                <a:solidFill>
+                  <a:srgbClr val="1A1A1A"/>
+                </a:solidFill>
+                <a:latin typeface="맑은 고딕"/>
+              </a:rPr>
+              <a:t>Q. 서버 저장 실패?</a:t>
+            </a:r>
+          </a:p>
+        </p:txBody>
+      </p:sp>
+      <p:sp>
+        <p:nvSpPr>
+          <p:cNvPr id="17" name="TextBox 16"/>
+          <p:cNvSpPr txBox="1"/>
+          <p:nvPr/>
+        </p:nvSpPr>
+        <p:spPr>
+          <a:xfrm>
+            <a:off x="6766560" y="5349239"/>
+            <a:ext cx="5029200" cy="457200"/>
+          </a:xfrm>
+          <a:prstGeom prst="rect">
+            <a:avLst/>
+          </a:prstGeom>
+          <a:noFill/>
+        </p:spPr>
+        <p:txBody>
+          <a:bodyPr wrap="square" lIns="25400" rIns="25400" tIns="25400" bIns="25400" anchor="t">
+            <a:spAutoFit/>
+          </a:bodyPr>
+          <a:lstStyle/>
+          <a:p>
+            <a:pPr algn="l"/>
+            <a:r>
+              <a:rPr sz="1200" b="0">
+                <a:solidFill>
+                  <a:srgbClr val="777777"/>
+                </a:solidFill>
+                <a:latin typeface="맑은 고딕"/>
+              </a:rPr>
+              <a:t>→ 인터넷 확인 후 재작성</a:t>
+            </a:r>
+          </a:p>
+        </p:txBody>
+      </p:sp>
+      <p:sp>
+        <p:nvSpPr>
+          <p:cNvPr id="18" name="TextBox 17"/>
           <p:cNvSpPr txBox="1"/>
           <p:nvPr/>
         </p:nvSpPr>
@@ -5649,7 +6655,7 @@
                 </a:solidFill>
                 <a:latin typeface="맑은 고딕"/>
               </a:rPr>
-              <a:t>COSMAX · 생산3팀 파우더 성형실    |    5 / 9</a:t>
+              <a:t>COSMAX · 생산3팀 파우더 성형실    |    5 / 6</a:t>
             </a:r>
           </a:p>
         </p:txBody>
@@ -5681,7 +6687,7 @@
         <p:spPr>
           <a:xfrm>
             <a:off x="0" y="0"/>
-            <a:ext cx="12191695" cy="914400"/>
+            <a:ext cx="12191695" cy="6858000"/>
           </a:xfrm>
           <a:prstGeom prst="rect">
             <a:avLst/>
@@ -5724,8 +6730,8 @@
         </p:nvSpPr>
         <p:spPr>
           <a:xfrm>
-            <a:off x="457200" y="182880"/>
-            <a:ext cx="11247120" cy="548640"/>
+            <a:off x="457200" y="2011680"/>
+            <a:ext cx="11247120" cy="914400"/>
           </a:xfrm>
           <a:prstGeom prst="rect">
             <a:avLst/>
@@ -5738,15 +6744,15 @@
           </a:bodyPr>
           <a:lstStyle/>
           <a:p>
-            <a:pPr algn="l"/>
-            <a:r>
-              <a:rPr sz="2800" b="1">
+            <a:pPr algn="ctr"/>
+            <a:r>
+              <a:rPr sz="5400" b="1">
                 <a:solidFill>
                   <a:srgbClr val="FFFFFF"/>
                 </a:solidFill>
                 <a:latin typeface="맑은 고딕"/>
               </a:rPr>
-              <a:t>휴가 유형</a:t>
+              <a:t>감사합니다</a:t>
             </a:r>
           </a:p>
         </p:txBody>
@@ -5759,157 +6765,8 @@
         </p:nvSpPr>
         <p:spPr>
           <a:xfrm>
-            <a:off x="914400" y="1554480"/>
-            <a:ext cx="10332720" cy="594360"/>
-          </a:xfrm>
-          <a:prstGeom prst="rect">
-            <a:avLst/>
-          </a:prstGeom>
-          <a:solidFill>
-            <a:srgbClr val="C8102E"/>
-          </a:solidFill>
-          <a:ln>
-            <a:noFill/>
-          </a:ln>
-          <a:effectLst/>
-        </p:spPr>
-        <p:style>
-          <a:lnRef idx="1">
-            <a:schemeClr val="accent1"/>
-          </a:lnRef>
-          <a:fillRef idx="3">
-            <a:schemeClr val="accent1"/>
-          </a:fillRef>
-          <a:effectRef idx="2">
-            <a:schemeClr val="accent1"/>
-          </a:effectRef>
-          <a:fontRef idx="minor">
-            <a:schemeClr val="lt1"/>
-          </a:fontRef>
-        </p:style>
-        <p:txBody>
-          <a:bodyPr rtlCol="0" anchor="ctr"/>
-          <a:lstStyle/>
-          <a:p>
-            <a:pPr algn="ctr"/>
-          </a:p>
-        </p:txBody>
-      </p:sp>
-      <p:sp>
-        <p:nvSpPr>
-          <p:cNvPr id="5" name="TextBox 4"/>
-          <p:cNvSpPr txBox="1"/>
-          <p:nvPr/>
-        </p:nvSpPr>
-        <p:spPr>
-          <a:xfrm>
-            <a:off x="1097280" y="1554480"/>
-            <a:ext cx="3017520" cy="594360"/>
-          </a:xfrm>
-          <a:prstGeom prst="rect">
-            <a:avLst/>
-          </a:prstGeom>
-          <a:noFill/>
-        </p:spPr>
-        <p:txBody>
-          <a:bodyPr wrap="square" lIns="25400" rIns="25400" tIns="25400" bIns="25400" anchor="ctr">
-            <a:spAutoFit/>
-          </a:bodyPr>
-          <a:lstStyle/>
-          <a:p>
-            <a:pPr algn="l"/>
-            <a:r>
-              <a:rPr sz="1400" b="1">
-                <a:solidFill>
-                  <a:srgbClr val="FFFFFF"/>
-                </a:solidFill>
-                <a:latin typeface="맑은 고딕"/>
-              </a:rPr>
-              <a:t>구분</a:t>
-            </a:r>
-          </a:p>
-        </p:txBody>
-      </p:sp>
-      <p:sp>
-        <p:nvSpPr>
-          <p:cNvPr id="6" name="TextBox 5"/>
-          <p:cNvSpPr txBox="1"/>
-          <p:nvPr/>
-        </p:nvSpPr>
-        <p:spPr>
-          <a:xfrm>
-            <a:off x="4297680" y="1554480"/>
-            <a:ext cx="2103120" cy="594360"/>
-          </a:xfrm>
-          <a:prstGeom prst="rect">
-            <a:avLst/>
-          </a:prstGeom>
-          <a:noFill/>
-        </p:spPr>
-        <p:txBody>
-          <a:bodyPr wrap="square" lIns="25400" rIns="25400" tIns="25400" bIns="25400" anchor="ctr">
-            <a:spAutoFit/>
-          </a:bodyPr>
-          <a:lstStyle/>
-          <a:p>
-            <a:pPr algn="l"/>
-            <a:r>
-              <a:rPr sz="1400" b="1">
-                <a:solidFill>
-                  <a:srgbClr val="FFFFFF"/>
-                </a:solidFill>
-                <a:latin typeface="맑은 고딕"/>
-              </a:rPr>
-              <a:t>1개당 일수</a:t>
-            </a:r>
-          </a:p>
-        </p:txBody>
-      </p:sp>
-      <p:sp>
-        <p:nvSpPr>
-          <p:cNvPr id="7" name="TextBox 6"/>
-          <p:cNvSpPr txBox="1"/>
-          <p:nvPr/>
-        </p:nvSpPr>
-        <p:spPr>
-          <a:xfrm>
-            <a:off x="6583680" y="1554480"/>
-            <a:ext cx="4663440" cy="594360"/>
-          </a:xfrm>
-          <a:prstGeom prst="rect">
-            <a:avLst/>
-          </a:prstGeom>
-          <a:noFill/>
-        </p:spPr>
-        <p:txBody>
-          <a:bodyPr wrap="square" lIns="25400" rIns="25400" tIns="25400" bIns="25400" anchor="ctr">
-            <a:spAutoFit/>
-          </a:bodyPr>
-          <a:lstStyle/>
-          <a:p>
-            <a:pPr algn="l"/>
-            <a:r>
-              <a:rPr sz="1400" b="1">
-                <a:solidFill>
-                  <a:srgbClr val="FFFFFF"/>
-                </a:solidFill>
-                <a:latin typeface="맑은 고딕"/>
-              </a:rPr>
-              <a:t>비고</a:t>
-            </a:r>
-          </a:p>
-        </p:txBody>
-      </p:sp>
-      <p:sp>
-        <p:nvSpPr>
-          <p:cNvPr id="8" name="Rectangle 7"/>
-          <p:cNvSpPr/>
-          <p:nvPr/>
-        </p:nvSpPr>
-        <p:spPr>
-          <a:xfrm>
-            <a:off x="914400" y="2148840"/>
-            <a:ext cx="10332720" cy="594360"/>
+            <a:off x="5029200" y="3291840"/>
+            <a:ext cx="2103120" cy="38100"/>
           </a:xfrm>
           <a:prstGeom prst="rect">
             <a:avLst/>
@@ -5946,1098 +6803,70 @@
       </p:sp>
       <p:sp>
         <p:nvSpPr>
-          <p:cNvPr id="9" name="TextBox 8"/>
-          <p:cNvSpPr txBox="1"/>
-          <p:nvPr/>
-        </p:nvSpPr>
-        <p:spPr>
-          <a:xfrm>
-            <a:off x="1097280" y="2148840"/>
-            <a:ext cx="3017520" cy="594360"/>
-          </a:xfrm>
-          <a:prstGeom prst="rect">
-            <a:avLst/>
-          </a:prstGeom>
-          <a:noFill/>
-        </p:spPr>
-        <p:txBody>
-          <a:bodyPr wrap="square" lIns="25400" rIns="25400" tIns="25400" bIns="25400" anchor="ctr">
-            <a:spAutoFit/>
-          </a:bodyPr>
-          <a:lstStyle/>
-          <a:p>
-            <a:pPr algn="l"/>
+          <p:cNvPr id="5" name="TextBox 4"/>
+          <p:cNvSpPr txBox="1"/>
+          <p:nvPr/>
+        </p:nvSpPr>
+        <p:spPr>
+          <a:xfrm>
+            <a:off x="457200" y="3840480"/>
+            <a:ext cx="11247120" cy="548640"/>
+          </a:xfrm>
+          <a:prstGeom prst="rect">
+            <a:avLst/>
+          </a:prstGeom>
+          <a:noFill/>
+        </p:spPr>
+        <p:txBody>
+          <a:bodyPr wrap="square" lIns="25400" rIns="25400" tIns="25400" bIns="25400" anchor="t">
+            <a:spAutoFit/>
+          </a:bodyPr>
+          <a:lstStyle/>
+          <a:p>
+            <a:pPr algn="ctr"/>
+            <a:r>
+              <a:rPr sz="2000" b="0">
+                <a:solidFill>
+                  <a:srgbClr val="FFFFFF"/>
+                </a:solidFill>
+                <a:latin typeface="맑은 고딕"/>
+              </a:rPr>
+              <a:t>휴가증은 본인이 직접, 빠르고 정확하게.</a:t>
+            </a:r>
+          </a:p>
+        </p:txBody>
+      </p:sp>
+      <p:sp>
+        <p:nvSpPr>
+          <p:cNvPr id="6" name="TextBox 5"/>
+          <p:cNvSpPr txBox="1"/>
+          <p:nvPr/>
+        </p:nvSpPr>
+        <p:spPr>
+          <a:xfrm>
+            <a:off x="457200" y="5212080"/>
+            <a:ext cx="11247120" cy="457200"/>
+          </a:xfrm>
+          <a:prstGeom prst="rect">
+            <a:avLst/>
+          </a:prstGeom>
+          <a:noFill/>
+        </p:spPr>
+        <p:txBody>
+          <a:bodyPr wrap="square" lIns="25400" rIns="25400" tIns="25400" bIns="25400" anchor="t">
+            <a:spAutoFit/>
+          </a:bodyPr>
+          <a:lstStyle/>
+          <a:p>
+            <a:pPr algn="ctr"/>
             <a:r>
               <a:rPr sz="1400" b="0">
                 <a:solidFill>
-                  <a:srgbClr val="1A1A1A"/>
-                </a:solidFill>
-                <a:latin typeface="맑은 고딕"/>
-              </a:rPr>
-              <a:t>연차</a:t>
-            </a:r>
-          </a:p>
-        </p:txBody>
-      </p:sp>
-      <p:sp>
-        <p:nvSpPr>
-          <p:cNvPr id="10" name="TextBox 9"/>
-          <p:cNvSpPr txBox="1"/>
-          <p:nvPr/>
-        </p:nvSpPr>
-        <p:spPr>
-          <a:xfrm>
-            <a:off x="4297680" y="2148840"/>
-            <a:ext cx="2103120" cy="594360"/>
-          </a:xfrm>
-          <a:prstGeom prst="rect">
-            <a:avLst/>
-          </a:prstGeom>
-          <a:noFill/>
-        </p:spPr>
-        <p:txBody>
-          <a:bodyPr wrap="square" lIns="25400" rIns="25400" tIns="25400" bIns="25400" anchor="ctr">
-            <a:spAutoFit/>
-          </a:bodyPr>
-          <a:lstStyle/>
-          <a:p>
-            <a:pPr algn="l"/>
-            <a:r>
-              <a:rPr sz="1400" b="0">
-                <a:solidFill>
-                  <a:srgbClr val="1A1A1A"/>
-                </a:solidFill>
-                <a:latin typeface="맑은 고딕"/>
-              </a:rPr>
-              <a:t>1.0일</a:t>
-            </a:r>
-          </a:p>
-        </p:txBody>
-      </p:sp>
-      <p:sp>
-        <p:nvSpPr>
-          <p:cNvPr id="11" name="TextBox 10"/>
-          <p:cNvSpPr txBox="1"/>
-          <p:nvPr/>
-        </p:nvSpPr>
-        <p:spPr>
-          <a:xfrm>
-            <a:off x="6583680" y="2148840"/>
-            <a:ext cx="4663440" cy="594360"/>
-          </a:xfrm>
-          <a:prstGeom prst="rect">
-            <a:avLst/>
-          </a:prstGeom>
-          <a:noFill/>
-        </p:spPr>
-        <p:txBody>
-          <a:bodyPr wrap="square" lIns="25400" rIns="25400" tIns="25400" bIns="25400" anchor="ctr">
-            <a:spAutoFit/>
-          </a:bodyPr>
-          <a:lstStyle/>
-          <a:p>
-            <a:pPr algn="l"/>
-            <a:r>
-              <a:rPr sz="1400" b="0">
-                <a:solidFill>
-                  <a:srgbClr val="1A1A1A"/>
-                </a:solidFill>
-                <a:latin typeface="맑은 고딕"/>
-              </a:rPr>
-              <a:t>종일</a:t>
-            </a:r>
-          </a:p>
-        </p:txBody>
-      </p:sp>
-      <p:sp>
-        <p:nvSpPr>
-          <p:cNvPr id="12" name="Rectangle 11"/>
-          <p:cNvSpPr/>
-          <p:nvPr/>
-        </p:nvSpPr>
-        <p:spPr>
-          <a:xfrm>
-            <a:off x="914400" y="2743200"/>
-            <a:ext cx="10332720" cy="594360"/>
-          </a:xfrm>
-          <a:prstGeom prst="rect">
-            <a:avLst/>
-          </a:prstGeom>
-          <a:solidFill>
-            <a:srgbClr val="F5F5F5"/>
-          </a:solidFill>
-          <a:ln>
-            <a:noFill/>
-          </a:ln>
-          <a:effectLst/>
-        </p:spPr>
-        <p:style>
-          <a:lnRef idx="1">
-            <a:schemeClr val="accent1"/>
-          </a:lnRef>
-          <a:fillRef idx="3">
-            <a:schemeClr val="accent1"/>
-          </a:fillRef>
-          <a:effectRef idx="2">
-            <a:schemeClr val="accent1"/>
-          </a:effectRef>
-          <a:fontRef idx="minor">
-            <a:schemeClr val="lt1"/>
-          </a:fontRef>
-        </p:style>
-        <p:txBody>
-          <a:bodyPr rtlCol="0" anchor="ctr"/>
-          <a:lstStyle/>
-          <a:p>
-            <a:pPr algn="ctr"/>
-          </a:p>
-        </p:txBody>
-      </p:sp>
-      <p:sp>
-        <p:nvSpPr>
-          <p:cNvPr id="13" name="TextBox 12"/>
-          <p:cNvSpPr txBox="1"/>
-          <p:nvPr/>
-        </p:nvSpPr>
-        <p:spPr>
-          <a:xfrm>
-            <a:off x="1097280" y="2743200"/>
-            <a:ext cx="3017520" cy="594360"/>
-          </a:xfrm>
-          <a:prstGeom prst="rect">
-            <a:avLst/>
-          </a:prstGeom>
-          <a:noFill/>
-        </p:spPr>
-        <p:txBody>
-          <a:bodyPr wrap="square" lIns="25400" rIns="25400" tIns="25400" bIns="25400" anchor="ctr">
-            <a:spAutoFit/>
-          </a:bodyPr>
-          <a:lstStyle/>
-          <a:p>
-            <a:pPr algn="l"/>
-            <a:r>
-              <a:rPr sz="1400" b="0">
-                <a:solidFill>
-                  <a:srgbClr val="1A1A1A"/>
-                </a:solidFill>
-                <a:latin typeface="맑은 고딕"/>
-              </a:rPr>
-              <a:t>반차(오전/오후)</a:t>
-            </a:r>
-          </a:p>
-        </p:txBody>
-      </p:sp>
-      <p:sp>
-        <p:nvSpPr>
-          <p:cNvPr id="14" name="TextBox 13"/>
-          <p:cNvSpPr txBox="1"/>
-          <p:nvPr/>
-        </p:nvSpPr>
-        <p:spPr>
-          <a:xfrm>
-            <a:off x="4297680" y="2743200"/>
-            <a:ext cx="2103120" cy="594360"/>
-          </a:xfrm>
-          <a:prstGeom prst="rect">
-            <a:avLst/>
-          </a:prstGeom>
-          <a:noFill/>
-        </p:spPr>
-        <p:txBody>
-          <a:bodyPr wrap="square" lIns="25400" rIns="25400" tIns="25400" bIns="25400" anchor="ctr">
-            <a:spAutoFit/>
-          </a:bodyPr>
-          <a:lstStyle/>
-          <a:p>
-            <a:pPr algn="l"/>
-            <a:r>
-              <a:rPr sz="1400" b="0">
-                <a:solidFill>
-                  <a:srgbClr val="1A1A1A"/>
-                </a:solidFill>
-                <a:latin typeface="맑은 고딕"/>
-              </a:rPr>
-              <a:t>0.5일</a:t>
-            </a:r>
-          </a:p>
-        </p:txBody>
-      </p:sp>
-      <p:sp>
-        <p:nvSpPr>
-          <p:cNvPr id="15" name="TextBox 14"/>
-          <p:cNvSpPr txBox="1"/>
-          <p:nvPr/>
-        </p:nvSpPr>
-        <p:spPr>
-          <a:xfrm>
-            <a:off x="6583680" y="2743200"/>
-            <a:ext cx="4663440" cy="594360"/>
-          </a:xfrm>
-          <a:prstGeom prst="rect">
-            <a:avLst/>
-          </a:prstGeom>
-          <a:noFill/>
-        </p:spPr>
-        <p:txBody>
-          <a:bodyPr wrap="square" lIns="25400" rIns="25400" tIns="25400" bIns="25400" anchor="ctr">
-            <a:spAutoFit/>
-          </a:bodyPr>
-          <a:lstStyle/>
-          <a:p>
-            <a:pPr algn="l"/>
-            <a:r>
-              <a:rPr sz="1400" b="0">
-                <a:solidFill>
-                  <a:srgbClr val="1A1A1A"/>
-                </a:solidFill>
-                <a:latin typeface="맑은 고딕"/>
-              </a:rPr>
-              <a:t>오전: 12:50 출근 / 오후: 12:00 퇴근</a:t>
-            </a:r>
-          </a:p>
-        </p:txBody>
-      </p:sp>
-      <p:sp>
-        <p:nvSpPr>
-          <p:cNvPr id="16" name="Rectangle 15"/>
-          <p:cNvSpPr/>
-          <p:nvPr/>
-        </p:nvSpPr>
-        <p:spPr>
-          <a:xfrm>
-            <a:off x="914400" y="3337560"/>
-            <a:ext cx="10332720" cy="594360"/>
-          </a:xfrm>
-          <a:prstGeom prst="rect">
-            <a:avLst/>
-          </a:prstGeom>
-          <a:solidFill>
-            <a:srgbClr val="FFFFFF"/>
-          </a:solidFill>
-          <a:ln>
-            <a:noFill/>
-          </a:ln>
-          <a:effectLst/>
-        </p:spPr>
-        <p:style>
-          <a:lnRef idx="1">
-            <a:schemeClr val="accent1"/>
-          </a:lnRef>
-          <a:fillRef idx="3">
-            <a:schemeClr val="accent1"/>
-          </a:fillRef>
-          <a:effectRef idx="2">
-            <a:schemeClr val="accent1"/>
-          </a:effectRef>
-          <a:fontRef idx="minor">
-            <a:schemeClr val="lt1"/>
-          </a:fontRef>
-        </p:style>
-        <p:txBody>
-          <a:bodyPr rtlCol="0" anchor="ctr"/>
-          <a:lstStyle/>
-          <a:p>
-            <a:pPr algn="ctr"/>
-          </a:p>
-        </p:txBody>
-      </p:sp>
-      <p:sp>
-        <p:nvSpPr>
-          <p:cNvPr id="17" name="TextBox 16"/>
-          <p:cNvSpPr txBox="1"/>
-          <p:nvPr/>
-        </p:nvSpPr>
-        <p:spPr>
-          <a:xfrm>
-            <a:off x="1097280" y="3337560"/>
-            <a:ext cx="3017520" cy="594360"/>
-          </a:xfrm>
-          <a:prstGeom prst="rect">
-            <a:avLst/>
-          </a:prstGeom>
-          <a:noFill/>
-        </p:spPr>
-        <p:txBody>
-          <a:bodyPr wrap="square" lIns="25400" rIns="25400" tIns="25400" bIns="25400" anchor="ctr">
-            <a:spAutoFit/>
-          </a:bodyPr>
-          <a:lstStyle/>
-          <a:p>
-            <a:pPr algn="l"/>
-            <a:r>
-              <a:rPr sz="1400" b="0">
-                <a:solidFill>
-                  <a:srgbClr val="1A1A1A"/>
-                </a:solidFill>
-                <a:latin typeface="맑은 고딕"/>
-              </a:rPr>
-              <a:t>반반차(오전/오후)</a:t>
-            </a:r>
-          </a:p>
-        </p:txBody>
-      </p:sp>
-      <p:sp>
-        <p:nvSpPr>
-          <p:cNvPr id="18" name="TextBox 17"/>
-          <p:cNvSpPr txBox="1"/>
-          <p:nvPr/>
-        </p:nvSpPr>
-        <p:spPr>
-          <a:xfrm>
-            <a:off x="4297680" y="3337560"/>
-            <a:ext cx="2103120" cy="594360"/>
-          </a:xfrm>
-          <a:prstGeom prst="rect">
-            <a:avLst/>
-          </a:prstGeom>
-          <a:noFill/>
-        </p:spPr>
-        <p:txBody>
-          <a:bodyPr wrap="square" lIns="25400" rIns="25400" tIns="25400" bIns="25400" anchor="ctr">
-            <a:spAutoFit/>
-          </a:bodyPr>
-          <a:lstStyle/>
-          <a:p>
-            <a:pPr algn="l"/>
-            <a:r>
-              <a:rPr sz="1400" b="0">
-                <a:solidFill>
-                  <a:srgbClr val="1A1A1A"/>
-                </a:solidFill>
-                <a:latin typeface="맑은 고딕"/>
-              </a:rPr>
-              <a:t>0.25일</a:t>
-            </a:r>
-          </a:p>
-        </p:txBody>
-      </p:sp>
-      <p:sp>
-        <p:nvSpPr>
-          <p:cNvPr id="19" name="TextBox 18"/>
-          <p:cNvSpPr txBox="1"/>
-          <p:nvPr/>
-        </p:nvSpPr>
-        <p:spPr>
-          <a:xfrm>
-            <a:off x="6583680" y="3337560"/>
-            <a:ext cx="4663440" cy="594360"/>
-          </a:xfrm>
-          <a:prstGeom prst="rect">
-            <a:avLst/>
-          </a:prstGeom>
-          <a:noFill/>
-        </p:spPr>
-        <p:txBody>
-          <a:bodyPr wrap="square" lIns="25400" rIns="25400" tIns="25400" bIns="25400" anchor="ctr">
-            <a:spAutoFit/>
-          </a:bodyPr>
-          <a:lstStyle/>
-          <a:p>
-            <a:pPr algn="l"/>
-            <a:r>
-              <a:rPr sz="1400" b="0">
-                <a:solidFill>
-                  <a:srgbClr val="1A1A1A"/>
-                </a:solidFill>
-                <a:latin typeface="맑은 고딕"/>
-              </a:rPr>
-              <a:t>오전: 10:00 출근 / 오후: 15:00 퇴근</a:t>
-            </a:r>
-          </a:p>
-        </p:txBody>
-      </p:sp>
-      <p:sp>
-        <p:nvSpPr>
-          <p:cNvPr id="20" name="Rectangle 19"/>
-          <p:cNvSpPr/>
-          <p:nvPr/>
-        </p:nvSpPr>
-        <p:spPr>
-          <a:xfrm>
-            <a:off x="914400" y="3931920"/>
-            <a:ext cx="10332720" cy="594360"/>
-          </a:xfrm>
-          <a:prstGeom prst="rect">
-            <a:avLst/>
-          </a:prstGeom>
-          <a:solidFill>
-            <a:srgbClr val="F5F5F5"/>
-          </a:solidFill>
-          <a:ln>
-            <a:noFill/>
-          </a:ln>
-          <a:effectLst/>
-        </p:spPr>
-        <p:style>
-          <a:lnRef idx="1">
-            <a:schemeClr val="accent1"/>
-          </a:lnRef>
-          <a:fillRef idx="3">
-            <a:schemeClr val="accent1"/>
-          </a:fillRef>
-          <a:effectRef idx="2">
-            <a:schemeClr val="accent1"/>
-          </a:effectRef>
-          <a:fontRef idx="minor">
-            <a:schemeClr val="lt1"/>
-          </a:fontRef>
-        </p:style>
-        <p:txBody>
-          <a:bodyPr rtlCol="0" anchor="ctr"/>
-          <a:lstStyle/>
-          <a:p>
-            <a:pPr algn="ctr"/>
-          </a:p>
-        </p:txBody>
-      </p:sp>
-      <p:sp>
-        <p:nvSpPr>
-          <p:cNvPr id="21" name="TextBox 20"/>
-          <p:cNvSpPr txBox="1"/>
-          <p:nvPr/>
-        </p:nvSpPr>
-        <p:spPr>
-          <a:xfrm>
-            <a:off x="1097280" y="3931920"/>
-            <a:ext cx="3017520" cy="594360"/>
-          </a:xfrm>
-          <a:prstGeom prst="rect">
-            <a:avLst/>
-          </a:prstGeom>
-          <a:noFill/>
-        </p:spPr>
-        <p:txBody>
-          <a:bodyPr wrap="square" lIns="25400" rIns="25400" tIns="25400" bIns="25400" anchor="ctr">
-            <a:spAutoFit/>
-          </a:bodyPr>
-          <a:lstStyle/>
-          <a:p>
-            <a:pPr algn="l"/>
-            <a:r>
-              <a:rPr sz="1400" b="0">
-                <a:solidFill>
-                  <a:srgbClr val="1A1A1A"/>
-                </a:solidFill>
-                <a:latin typeface="맑은 고딕"/>
-              </a:rPr>
-              <a:t>생휴</a:t>
-            </a:r>
-          </a:p>
-        </p:txBody>
-      </p:sp>
-      <p:sp>
-        <p:nvSpPr>
-          <p:cNvPr id="22" name="TextBox 21"/>
-          <p:cNvSpPr txBox="1"/>
-          <p:nvPr/>
-        </p:nvSpPr>
-        <p:spPr>
-          <a:xfrm>
-            <a:off x="4297680" y="3931920"/>
-            <a:ext cx="2103120" cy="594360"/>
-          </a:xfrm>
-          <a:prstGeom prst="rect">
-            <a:avLst/>
-          </a:prstGeom>
-          <a:noFill/>
-        </p:spPr>
-        <p:txBody>
-          <a:bodyPr wrap="square" lIns="25400" rIns="25400" tIns="25400" bIns="25400" anchor="ctr">
-            <a:spAutoFit/>
-          </a:bodyPr>
-          <a:lstStyle/>
-          <a:p>
-            <a:pPr algn="l"/>
-            <a:r>
-              <a:rPr sz="1400" b="0">
-                <a:solidFill>
-                  <a:srgbClr val="1A1A1A"/>
-                </a:solidFill>
-                <a:latin typeface="맑은 고딕"/>
-              </a:rPr>
-              <a:t>1.0일</a:t>
-            </a:r>
-          </a:p>
-        </p:txBody>
-      </p:sp>
-      <p:sp>
-        <p:nvSpPr>
-          <p:cNvPr id="23" name="TextBox 22"/>
-          <p:cNvSpPr txBox="1"/>
-          <p:nvPr/>
-        </p:nvSpPr>
-        <p:spPr>
-          <a:xfrm>
-            <a:off x="6583680" y="3931920"/>
-            <a:ext cx="4663440" cy="594360"/>
-          </a:xfrm>
-          <a:prstGeom prst="rect">
-            <a:avLst/>
-          </a:prstGeom>
-          <a:noFill/>
-        </p:spPr>
-        <p:txBody>
-          <a:bodyPr wrap="square" lIns="25400" rIns="25400" tIns="25400" bIns="25400" anchor="ctr">
-            <a:spAutoFit/>
-          </a:bodyPr>
-          <a:lstStyle/>
-          <a:p>
-            <a:pPr algn="l"/>
-            <a:r>
-              <a:rPr sz="1400" b="0">
-                <a:solidFill>
-                  <a:srgbClr val="1A1A1A"/>
-                </a:solidFill>
-                <a:latin typeface="맑은 고딕"/>
-              </a:rPr>
-              <a:t>생리 휴가</a:t>
-            </a:r>
-          </a:p>
-        </p:txBody>
-      </p:sp>
-      <p:sp>
-        <p:nvSpPr>
-          <p:cNvPr id="24" name="Rectangle 23"/>
-          <p:cNvSpPr/>
-          <p:nvPr/>
-        </p:nvSpPr>
-        <p:spPr>
-          <a:xfrm>
-            <a:off x="914400" y="4526280"/>
-            <a:ext cx="10332720" cy="594360"/>
-          </a:xfrm>
-          <a:prstGeom prst="rect">
-            <a:avLst/>
-          </a:prstGeom>
-          <a:solidFill>
-            <a:srgbClr val="FFFFFF"/>
-          </a:solidFill>
-          <a:ln>
-            <a:noFill/>
-          </a:ln>
-          <a:effectLst/>
-        </p:spPr>
-        <p:style>
-          <a:lnRef idx="1">
-            <a:schemeClr val="accent1"/>
-          </a:lnRef>
-          <a:fillRef idx="3">
-            <a:schemeClr val="accent1"/>
-          </a:fillRef>
-          <a:effectRef idx="2">
-            <a:schemeClr val="accent1"/>
-          </a:effectRef>
-          <a:fontRef idx="minor">
-            <a:schemeClr val="lt1"/>
-          </a:fontRef>
-        </p:style>
-        <p:txBody>
-          <a:bodyPr rtlCol="0" anchor="ctr"/>
-          <a:lstStyle/>
-          <a:p>
-            <a:pPr algn="ctr"/>
-          </a:p>
-        </p:txBody>
-      </p:sp>
-      <p:sp>
-        <p:nvSpPr>
-          <p:cNvPr id="25" name="TextBox 24"/>
-          <p:cNvSpPr txBox="1"/>
-          <p:nvPr/>
-        </p:nvSpPr>
-        <p:spPr>
-          <a:xfrm>
-            <a:off x="1097280" y="4526280"/>
-            <a:ext cx="3017520" cy="594360"/>
-          </a:xfrm>
-          <a:prstGeom prst="rect">
-            <a:avLst/>
-          </a:prstGeom>
-          <a:noFill/>
-        </p:spPr>
-        <p:txBody>
-          <a:bodyPr wrap="square" lIns="25400" rIns="25400" tIns="25400" bIns="25400" anchor="ctr">
-            <a:spAutoFit/>
-          </a:bodyPr>
-          <a:lstStyle/>
-          <a:p>
-            <a:pPr algn="l"/>
-            <a:r>
-              <a:rPr sz="1400" b="0">
-                <a:solidFill>
-                  <a:srgbClr val="1A1A1A"/>
-                </a:solidFill>
-                <a:latin typeface="맑은 고딕"/>
-              </a:rPr>
-              <a:t>하기휴가</a:t>
-            </a:r>
-          </a:p>
-        </p:txBody>
-      </p:sp>
-      <p:sp>
-        <p:nvSpPr>
-          <p:cNvPr id="26" name="TextBox 25"/>
-          <p:cNvSpPr txBox="1"/>
-          <p:nvPr/>
-        </p:nvSpPr>
-        <p:spPr>
-          <a:xfrm>
-            <a:off x="4297680" y="4526280"/>
-            <a:ext cx="2103120" cy="594360"/>
-          </a:xfrm>
-          <a:prstGeom prst="rect">
-            <a:avLst/>
-          </a:prstGeom>
-          <a:noFill/>
-        </p:spPr>
-        <p:txBody>
-          <a:bodyPr wrap="square" lIns="25400" rIns="25400" tIns="25400" bIns="25400" anchor="ctr">
-            <a:spAutoFit/>
-          </a:bodyPr>
-          <a:lstStyle/>
-          <a:p>
-            <a:pPr algn="l"/>
-            <a:r>
-              <a:rPr sz="1400" b="0">
-                <a:solidFill>
-                  <a:srgbClr val="1A1A1A"/>
-                </a:solidFill>
-                <a:latin typeface="맑은 고딕"/>
-              </a:rPr>
-              <a:t>3.0일</a:t>
-            </a:r>
-          </a:p>
-        </p:txBody>
-      </p:sp>
-      <p:sp>
-        <p:nvSpPr>
-          <p:cNvPr id="27" name="TextBox 26"/>
-          <p:cNvSpPr txBox="1"/>
-          <p:nvPr/>
-        </p:nvSpPr>
-        <p:spPr>
-          <a:xfrm>
-            <a:off x="6583680" y="4526280"/>
-            <a:ext cx="4663440" cy="594360"/>
-          </a:xfrm>
-          <a:prstGeom prst="rect">
-            <a:avLst/>
-          </a:prstGeom>
-          <a:noFill/>
-        </p:spPr>
-        <p:txBody>
-          <a:bodyPr wrap="square" lIns="25400" rIns="25400" tIns="25400" bIns="25400" anchor="ctr">
-            <a:spAutoFit/>
-          </a:bodyPr>
-          <a:lstStyle/>
-          <a:p>
-            <a:pPr algn="l"/>
-            <a:r>
-              <a:rPr sz="1400" b="0">
-                <a:solidFill>
-                  <a:srgbClr val="1A1A1A"/>
-                </a:solidFill>
-                <a:latin typeface="맑은 고딕"/>
-              </a:rPr>
-              <a:t>1개 = 연속 3일</a:t>
-            </a:r>
-          </a:p>
-        </p:txBody>
-      </p:sp>
-      <p:sp>
-        <p:nvSpPr>
-          <p:cNvPr id="28" name="Rectangle 27"/>
-          <p:cNvSpPr/>
-          <p:nvPr/>
-        </p:nvSpPr>
-        <p:spPr>
-          <a:xfrm>
-            <a:off x="914400" y="5120640"/>
-            <a:ext cx="10332720" cy="594360"/>
-          </a:xfrm>
-          <a:prstGeom prst="rect">
-            <a:avLst/>
-          </a:prstGeom>
-          <a:solidFill>
-            <a:srgbClr val="F5F5F5"/>
-          </a:solidFill>
-          <a:ln>
-            <a:noFill/>
-          </a:ln>
-          <a:effectLst/>
-        </p:spPr>
-        <p:style>
-          <a:lnRef idx="1">
-            <a:schemeClr val="accent1"/>
-          </a:lnRef>
-          <a:fillRef idx="3">
-            <a:schemeClr val="accent1"/>
-          </a:fillRef>
-          <a:effectRef idx="2">
-            <a:schemeClr val="accent1"/>
-          </a:effectRef>
-          <a:fontRef idx="minor">
-            <a:schemeClr val="lt1"/>
-          </a:fontRef>
-        </p:style>
-        <p:txBody>
-          <a:bodyPr rtlCol="0" anchor="ctr"/>
-          <a:lstStyle/>
-          <a:p>
-            <a:pPr algn="ctr"/>
-          </a:p>
-        </p:txBody>
-      </p:sp>
-      <p:sp>
-        <p:nvSpPr>
-          <p:cNvPr id="29" name="TextBox 28"/>
-          <p:cNvSpPr txBox="1"/>
-          <p:nvPr/>
-        </p:nvSpPr>
-        <p:spPr>
-          <a:xfrm>
-            <a:off x="1097280" y="5120640"/>
-            <a:ext cx="3017520" cy="594360"/>
-          </a:xfrm>
-          <a:prstGeom prst="rect">
-            <a:avLst/>
-          </a:prstGeom>
-          <a:noFill/>
-        </p:spPr>
-        <p:txBody>
-          <a:bodyPr wrap="square" lIns="25400" rIns="25400" tIns="25400" bIns="25400" anchor="ctr">
-            <a:spAutoFit/>
-          </a:bodyPr>
-          <a:lstStyle/>
-          <a:p>
-            <a:pPr algn="l"/>
-            <a:r>
-              <a:rPr sz="1400" b="0">
-                <a:solidFill>
-                  <a:srgbClr val="1A1A1A"/>
-                </a:solidFill>
-                <a:latin typeface="맑은 고딕"/>
-              </a:rPr>
-              <a:t>결근 (전/오전/오후)</a:t>
-            </a:r>
-          </a:p>
-        </p:txBody>
-      </p:sp>
-      <p:sp>
-        <p:nvSpPr>
-          <p:cNvPr id="30" name="TextBox 29"/>
-          <p:cNvSpPr txBox="1"/>
-          <p:nvPr/>
-        </p:nvSpPr>
-        <p:spPr>
-          <a:xfrm>
-            <a:off x="4297680" y="5120640"/>
-            <a:ext cx="2103120" cy="594360"/>
-          </a:xfrm>
-          <a:prstGeom prst="rect">
-            <a:avLst/>
-          </a:prstGeom>
-          <a:noFill/>
-        </p:spPr>
-        <p:txBody>
-          <a:bodyPr wrap="square" lIns="25400" rIns="25400" tIns="25400" bIns="25400" anchor="ctr">
-            <a:spAutoFit/>
-          </a:bodyPr>
-          <a:lstStyle/>
-          <a:p>
-            <a:pPr algn="l"/>
-            <a:r>
-              <a:rPr sz="1400" b="0">
-                <a:solidFill>
-                  <a:srgbClr val="1A1A1A"/>
-                </a:solidFill>
-                <a:latin typeface="맑은 고딕"/>
-              </a:rPr>
-              <a:t>1.0 / 0.5일</a:t>
-            </a:r>
-          </a:p>
-        </p:txBody>
-      </p:sp>
-      <p:sp>
-        <p:nvSpPr>
-          <p:cNvPr id="31" name="TextBox 30"/>
-          <p:cNvSpPr txBox="1"/>
-          <p:nvPr/>
-        </p:nvSpPr>
-        <p:spPr>
-          <a:xfrm>
-            <a:off x="6583680" y="5120640"/>
-            <a:ext cx="4663440" cy="594360"/>
-          </a:xfrm>
-          <a:prstGeom prst="rect">
-            <a:avLst/>
-          </a:prstGeom>
-          <a:noFill/>
-        </p:spPr>
-        <p:txBody>
-          <a:bodyPr wrap="square" lIns="25400" rIns="25400" tIns="25400" bIns="25400" anchor="ctr">
-            <a:spAutoFit/>
-          </a:bodyPr>
-          <a:lstStyle/>
-          <a:p>
-            <a:pPr algn="l"/>
-            <a:r>
-              <a:rPr sz="1400" b="0">
-                <a:solidFill>
-                  <a:srgbClr val="1A1A1A"/>
-                </a:solidFill>
-                <a:latin typeface="맑은 고딕"/>
-              </a:rPr>
-              <a:t>연차 잔여 없을 때</a:t>
-            </a:r>
-          </a:p>
-        </p:txBody>
-      </p:sp>
-      <p:sp>
-        <p:nvSpPr>
-          <p:cNvPr id="32" name="TextBox 31"/>
-          <p:cNvSpPr txBox="1"/>
-          <p:nvPr/>
-        </p:nvSpPr>
-        <p:spPr>
-          <a:xfrm>
-            <a:off x="365760" y="6400800"/>
-            <a:ext cx="11521440" cy="274320"/>
-          </a:xfrm>
-          <a:prstGeom prst="rect">
-            <a:avLst/>
-          </a:prstGeom>
-          <a:noFill/>
-        </p:spPr>
-        <p:txBody>
-          <a:bodyPr wrap="square" lIns="25400" rIns="25400" tIns="25400" bIns="25400" anchor="t">
-            <a:spAutoFit/>
-          </a:bodyPr>
-          <a:lstStyle/>
-          <a:p>
-            <a:pPr algn="r"/>
-            <a:r>
-              <a:rPr sz="900" b="0">
-                <a:solidFill>
-                  <a:srgbClr val="777777"/>
-                </a:solidFill>
-                <a:latin typeface="맑은 고딕"/>
-              </a:rPr>
-              <a:t>COSMAX · 생산3팀 파우더 성형실    |    6 / 9</a:t>
-            </a:r>
-          </a:p>
-        </p:txBody>
-      </p:sp>
-    </p:spTree>
-  </p:cSld>
-  <p:clrMapOvr>
-    <a:masterClrMapping/>
-  </p:clrMapOvr>
-</p:sld>
-</file>
-
-<file path=ppt/slides/slide7.xml><?xml version="1.0" encoding="utf-8"?>
-<p:sld xmlns:a="http://schemas.openxmlformats.org/drawingml/2006/main" xmlns:p="http://schemas.openxmlformats.org/presentationml/2006/main" xmlns:r="http://schemas.openxmlformats.org/officeDocument/2006/relationships">
-  <p:cSld>
-    <p:spTree>
-      <p:nvGrpSpPr>
-        <p:cNvPr id="1" name=""/>
-        <p:cNvGrpSpPr/>
-        <p:nvPr/>
-      </p:nvGrpSpPr>
-      <p:grpSpPr/>
-      <p:sp>
-        <p:nvSpPr>
-          <p:cNvPr id="2" name="Rectangle 1"/>
-          <p:cNvSpPr/>
-          <p:nvPr/>
-        </p:nvSpPr>
-        <p:spPr>
-          <a:xfrm>
-            <a:off x="0" y="0"/>
-            <a:ext cx="12191695" cy="914400"/>
-          </a:xfrm>
-          <a:prstGeom prst="rect">
-            <a:avLst/>
-          </a:prstGeom>
-          <a:solidFill>
-            <a:srgbClr val="C8102E"/>
-          </a:solidFill>
-          <a:ln>
-            <a:noFill/>
-          </a:ln>
-          <a:effectLst/>
-        </p:spPr>
-        <p:style>
-          <a:lnRef idx="1">
-            <a:schemeClr val="accent1"/>
-          </a:lnRef>
-          <a:fillRef idx="3">
-            <a:schemeClr val="accent1"/>
-          </a:fillRef>
-          <a:effectRef idx="2">
-            <a:schemeClr val="accent1"/>
-          </a:effectRef>
-          <a:fontRef idx="minor">
-            <a:schemeClr val="lt1"/>
-          </a:fontRef>
-        </p:style>
-        <p:txBody>
-          <a:bodyPr rtlCol="0" anchor="ctr"/>
-          <a:lstStyle/>
-          <a:p>
-            <a:pPr algn="ctr"/>
-          </a:p>
-        </p:txBody>
-      </p:sp>
-      <p:sp>
-        <p:nvSpPr>
-          <p:cNvPr id="3" name="TextBox 2"/>
-          <p:cNvSpPr txBox="1"/>
-          <p:nvPr/>
-        </p:nvSpPr>
-        <p:spPr>
-          <a:xfrm>
-            <a:off x="457200" y="182880"/>
-            <a:ext cx="11247120" cy="548640"/>
-          </a:xfrm>
-          <a:prstGeom prst="rect">
-            <a:avLst/>
-          </a:prstGeom>
-          <a:noFill/>
-        </p:spPr>
-        <p:txBody>
-          <a:bodyPr wrap="square" lIns="25400" rIns="25400" tIns="25400" bIns="25400" anchor="t">
-            <a:spAutoFit/>
-          </a:bodyPr>
-          <a:lstStyle/>
-          <a:p>
-            <a:pPr algn="l"/>
-            <a:r>
-              <a:rPr sz="2800" b="1">
-                <a:solidFill>
                   <a:srgbClr val="FFFFFF"/>
                 </a:solidFill>
                 <a:latin typeface="맑은 고딕"/>
               </a:rPr>
-              <a:t>4. 내 휴가증 확인하기</a:t>
-            </a:r>
-          </a:p>
-        </p:txBody>
-      </p:sp>
-      <p:sp>
-        <p:nvSpPr>
-          <p:cNvPr id="4" name="TextBox 3"/>
-          <p:cNvSpPr txBox="1"/>
-          <p:nvPr/>
-        </p:nvSpPr>
-        <p:spPr>
-          <a:xfrm>
-            <a:off x="731520" y="1371600"/>
-            <a:ext cx="10698480" cy="548640"/>
-          </a:xfrm>
-          <a:prstGeom prst="rect">
-            <a:avLst/>
-          </a:prstGeom>
-          <a:noFill/>
-        </p:spPr>
-        <p:txBody>
-          <a:bodyPr wrap="square" lIns="25400" rIns="25400" tIns="25400" bIns="25400" anchor="t">
-            <a:spAutoFit/>
-          </a:bodyPr>
-          <a:lstStyle/>
-          <a:p>
-            <a:pPr algn="l"/>
-            <a:r>
-              <a:rPr sz="1600" b="0">
-                <a:solidFill>
-                  <a:srgbClr val="1A1A1A"/>
-                </a:solidFill>
-                <a:latin typeface="맑은 고딕"/>
-              </a:rPr>
-              <a:t>상단 [내 휴가증] 버튼을 누르면 본인 휴가가 등록됐는지 확인 가능</a:t>
-            </a:r>
-          </a:p>
-        </p:txBody>
-      </p:sp>
-      <p:sp>
-        <p:nvSpPr>
-          <p:cNvPr id="5" name="Rounded Rectangle 4"/>
-          <p:cNvSpPr/>
-          <p:nvPr/>
-        </p:nvSpPr>
-        <p:spPr>
-          <a:xfrm>
-            <a:off x="731520" y="2286000"/>
-            <a:ext cx="3383280" cy="1828800"/>
-          </a:xfrm>
-          <a:prstGeom prst="roundRect">
-            <a:avLst>
-              <a:gd name="adj" fmla="val 15000"/>
-            </a:avLst>
-          </a:prstGeom>
-          <a:solidFill>
-            <a:srgbClr val="FFF5F5"/>
-          </a:solidFill>
-          <a:ln>
-            <a:noFill/>
-          </a:ln>
-          <a:effectLst/>
-        </p:spPr>
-        <p:style>
-          <a:lnRef idx="1">
-            <a:schemeClr val="accent1"/>
-          </a:lnRef>
-          <a:fillRef idx="3">
-            <a:schemeClr val="accent1"/>
-          </a:fillRef>
-          <a:effectRef idx="2">
-            <a:schemeClr val="accent1"/>
-          </a:effectRef>
-          <a:fontRef idx="minor">
-            <a:schemeClr val="lt1"/>
-          </a:fontRef>
-        </p:style>
-        <p:txBody>
-          <a:bodyPr rtlCol="0" anchor="ctr"/>
-          <a:lstStyle/>
-          <a:p>
-            <a:pPr algn="ctr"/>
-          </a:p>
-        </p:txBody>
-      </p:sp>
-      <p:sp>
-        <p:nvSpPr>
-          <p:cNvPr id="6" name="TextBox 5"/>
-          <p:cNvSpPr txBox="1"/>
-          <p:nvPr/>
-        </p:nvSpPr>
-        <p:spPr>
-          <a:xfrm>
-            <a:off x="822960" y="2377440"/>
-            <a:ext cx="3200400" cy="457200"/>
-          </a:xfrm>
-          <a:prstGeom prst="rect">
-            <a:avLst/>
-          </a:prstGeom>
-          <a:noFill/>
-        </p:spPr>
-        <p:txBody>
-          <a:bodyPr wrap="square" lIns="25400" rIns="25400" tIns="25400" bIns="25400" anchor="t">
-            <a:spAutoFit/>
-          </a:bodyPr>
-          <a:lstStyle/>
-          <a:p>
-            <a:pPr algn="ctr"/>
-            <a:r>
-              <a:rPr sz="1800" b="1">
-                <a:solidFill>
-                  <a:srgbClr val="C8102E"/>
-                </a:solidFill>
-                <a:latin typeface="맑은 고딕"/>
-              </a:rPr>
-              <a:t>① 본인 인증</a:t>
+              <a:t>문의 — 관리자 이동준 (생산3팀)</a:t>
             </a:r>
           </a:p>
         </p:txBody>
@@ -7050,1118 +6879,7 @@
         </p:nvSpPr>
         <p:spPr>
           <a:xfrm>
-            <a:off x="822960" y="2926080"/>
-            <a:ext cx="3200400" cy="1188720"/>
-          </a:xfrm>
-          <a:prstGeom prst="rect">
-            <a:avLst/>
-          </a:prstGeom>
-          <a:noFill/>
-        </p:spPr>
-        <p:txBody>
-          <a:bodyPr wrap="square" lIns="25400" rIns="25400" tIns="25400" bIns="25400" anchor="ctr">
-            <a:spAutoFit/>
-          </a:bodyPr>
-          <a:lstStyle/>
-          <a:p>
-            <a:pPr algn="ctr"/>
-            <a:r>
-              <a:rPr sz="1300" b="0">
-                <a:solidFill>
-                  <a:srgbClr val="1A1A1A"/>
-                </a:solidFill>
-                <a:latin typeface="맑은 고딕"/>
-              </a:rPr>
-              <a:t>이름 + 휴대폰 마지막 4자리 입력 → [조회]</a:t>
-            </a:r>
-          </a:p>
-        </p:txBody>
-      </p:sp>
-      <p:sp>
-        <p:nvSpPr>
-          <p:cNvPr id="8" name="Rounded Rectangle 7"/>
-          <p:cNvSpPr/>
-          <p:nvPr/>
-        </p:nvSpPr>
-        <p:spPr>
-          <a:xfrm>
-            <a:off x="4389120" y="2286000"/>
-            <a:ext cx="3383280" cy="1828800"/>
-          </a:xfrm>
-          <a:prstGeom prst="roundRect">
-            <a:avLst>
-              <a:gd name="adj" fmla="val 15000"/>
-            </a:avLst>
-          </a:prstGeom>
-          <a:solidFill>
-            <a:srgbClr val="FFF5F5"/>
-          </a:solidFill>
-          <a:ln>
-            <a:noFill/>
-          </a:ln>
-          <a:effectLst/>
-        </p:spPr>
-        <p:style>
-          <a:lnRef idx="1">
-            <a:schemeClr val="accent1"/>
-          </a:lnRef>
-          <a:fillRef idx="3">
-            <a:schemeClr val="accent1"/>
-          </a:fillRef>
-          <a:effectRef idx="2">
-            <a:schemeClr val="accent1"/>
-          </a:effectRef>
-          <a:fontRef idx="minor">
-            <a:schemeClr val="lt1"/>
-          </a:fontRef>
-        </p:style>
-        <p:txBody>
-          <a:bodyPr rtlCol="0" anchor="ctr"/>
-          <a:lstStyle/>
-          <a:p>
-            <a:pPr algn="ctr"/>
-          </a:p>
-        </p:txBody>
-      </p:sp>
-      <p:sp>
-        <p:nvSpPr>
-          <p:cNvPr id="9" name="TextBox 8"/>
-          <p:cNvSpPr txBox="1"/>
-          <p:nvPr/>
-        </p:nvSpPr>
-        <p:spPr>
-          <a:xfrm>
-            <a:off x="4480560" y="2377440"/>
-            <a:ext cx="3200400" cy="457200"/>
-          </a:xfrm>
-          <a:prstGeom prst="rect">
-            <a:avLst/>
-          </a:prstGeom>
-          <a:noFill/>
-        </p:spPr>
-        <p:txBody>
-          <a:bodyPr wrap="square" lIns="25400" rIns="25400" tIns="25400" bIns="25400" anchor="t">
-            <a:spAutoFit/>
-          </a:bodyPr>
-          <a:lstStyle/>
-          <a:p>
-            <a:pPr algn="ctr"/>
-            <a:r>
-              <a:rPr sz="1800" b="1">
-                <a:solidFill>
-                  <a:srgbClr val="C8102E"/>
-                </a:solidFill>
-                <a:latin typeface="맑은 고딕"/>
-              </a:rPr>
-              <a:t>② 등록 확인</a:t>
-            </a:r>
-          </a:p>
-        </p:txBody>
-      </p:sp>
-      <p:sp>
-        <p:nvSpPr>
-          <p:cNvPr id="10" name="TextBox 9"/>
-          <p:cNvSpPr txBox="1"/>
-          <p:nvPr/>
-        </p:nvSpPr>
-        <p:spPr>
-          <a:xfrm>
-            <a:off x="4480560" y="2926080"/>
-            <a:ext cx="3200400" cy="1188720"/>
-          </a:xfrm>
-          <a:prstGeom prst="rect">
-            <a:avLst/>
-          </a:prstGeom>
-          <a:noFill/>
-        </p:spPr>
-        <p:txBody>
-          <a:bodyPr wrap="square" lIns="25400" rIns="25400" tIns="25400" bIns="25400" anchor="ctr">
-            <a:spAutoFit/>
-          </a:bodyPr>
-          <a:lstStyle/>
-          <a:p>
-            <a:pPr algn="ctr"/>
-            <a:r>
-              <a:rPr sz="1300" b="0">
-                <a:solidFill>
-                  <a:srgbClr val="1A1A1A"/>
-                </a:solidFill>
-                <a:latin typeface="맑은 고딕"/>
-              </a:rPr>
-              <a:t>처리 완료된 본인 휴가증이 ✓ 표시로 나옴</a:t>
-            </a:r>
-          </a:p>
-        </p:txBody>
-      </p:sp>
-      <p:sp>
-        <p:nvSpPr>
-          <p:cNvPr id="11" name="Rounded Rectangle 10"/>
-          <p:cNvSpPr/>
-          <p:nvPr/>
-        </p:nvSpPr>
-        <p:spPr>
-          <a:xfrm>
-            <a:off x="8046720" y="2286000"/>
-            <a:ext cx="3383280" cy="1828800"/>
-          </a:xfrm>
-          <a:prstGeom prst="roundRect">
-            <a:avLst>
-              <a:gd name="adj" fmla="val 15000"/>
-            </a:avLst>
-          </a:prstGeom>
-          <a:solidFill>
-            <a:srgbClr val="FFF5F5"/>
-          </a:solidFill>
-          <a:ln>
-            <a:noFill/>
-          </a:ln>
-          <a:effectLst/>
-        </p:spPr>
-        <p:style>
-          <a:lnRef idx="1">
-            <a:schemeClr val="accent1"/>
-          </a:lnRef>
-          <a:fillRef idx="3">
-            <a:schemeClr val="accent1"/>
-          </a:fillRef>
-          <a:effectRef idx="2">
-            <a:schemeClr val="accent1"/>
-          </a:effectRef>
-          <a:fontRef idx="minor">
-            <a:schemeClr val="lt1"/>
-          </a:fontRef>
-        </p:style>
-        <p:txBody>
-          <a:bodyPr rtlCol="0" anchor="ctr"/>
-          <a:lstStyle/>
-          <a:p>
-            <a:pPr algn="ctr"/>
-          </a:p>
-        </p:txBody>
-      </p:sp>
-      <p:sp>
-        <p:nvSpPr>
-          <p:cNvPr id="12" name="TextBox 11"/>
-          <p:cNvSpPr txBox="1"/>
-          <p:nvPr/>
-        </p:nvSpPr>
-        <p:spPr>
-          <a:xfrm>
-            <a:off x="8138160" y="2377440"/>
-            <a:ext cx="3200400" cy="457200"/>
-          </a:xfrm>
-          <a:prstGeom prst="rect">
-            <a:avLst/>
-          </a:prstGeom>
-          <a:noFill/>
-        </p:spPr>
-        <p:txBody>
-          <a:bodyPr wrap="square" lIns="25400" rIns="25400" tIns="25400" bIns="25400" anchor="t">
-            <a:spAutoFit/>
-          </a:bodyPr>
-          <a:lstStyle/>
-          <a:p>
-            <a:pPr algn="ctr"/>
-            <a:r>
-              <a:rPr sz="1800" b="1">
-                <a:solidFill>
-                  <a:srgbClr val="C8102E"/>
-                </a:solidFill>
-                <a:latin typeface="맑은 고딕"/>
-              </a:rPr>
-              <a:t>③ 최근 14일</a:t>
-            </a:r>
-          </a:p>
-        </p:txBody>
-      </p:sp>
-      <p:sp>
-        <p:nvSpPr>
-          <p:cNvPr id="13" name="TextBox 12"/>
-          <p:cNvSpPr txBox="1"/>
-          <p:nvPr/>
-        </p:nvSpPr>
-        <p:spPr>
-          <a:xfrm>
-            <a:off x="8138160" y="2926080"/>
-            <a:ext cx="3200400" cy="1188720"/>
-          </a:xfrm>
-          <a:prstGeom prst="rect">
-            <a:avLst/>
-          </a:prstGeom>
-          <a:noFill/>
-        </p:spPr>
-        <p:txBody>
-          <a:bodyPr wrap="square" lIns="25400" rIns="25400" tIns="25400" bIns="25400" anchor="ctr">
-            <a:spAutoFit/>
-          </a:bodyPr>
-          <a:lstStyle/>
-          <a:p>
-            <a:pPr algn="ctr"/>
-            <a:r>
-              <a:rPr sz="1300" b="0">
-                <a:solidFill>
-                  <a:srgbClr val="1A1A1A"/>
-                </a:solidFill>
-                <a:latin typeface="맑은 고딕"/>
-              </a:rPr>
-              <a:t>최근 14일 내 휴가증만 표시</a:t>
-            </a:r>
-          </a:p>
-        </p:txBody>
-      </p:sp>
-      <p:sp>
-        <p:nvSpPr>
-          <p:cNvPr id="14" name="Rounded Rectangle 13"/>
-          <p:cNvSpPr/>
-          <p:nvPr/>
-        </p:nvSpPr>
-        <p:spPr>
-          <a:xfrm>
-            <a:off x="731520" y="4572000"/>
-            <a:ext cx="10698480" cy="1554480"/>
-          </a:xfrm>
-          <a:prstGeom prst="roundRect">
-            <a:avLst>
-              <a:gd name="adj" fmla="val 15000"/>
-            </a:avLst>
-          </a:prstGeom>
-          <a:solidFill>
-            <a:srgbClr val="F5F5F5"/>
-          </a:solidFill>
-          <a:ln>
-            <a:noFill/>
-          </a:ln>
-          <a:effectLst/>
-        </p:spPr>
-        <p:style>
-          <a:lnRef idx="1">
-            <a:schemeClr val="accent1"/>
-          </a:lnRef>
-          <a:fillRef idx="3">
-            <a:schemeClr val="accent1"/>
-          </a:fillRef>
-          <a:effectRef idx="2">
-            <a:schemeClr val="accent1"/>
-          </a:effectRef>
-          <a:fontRef idx="minor">
-            <a:schemeClr val="lt1"/>
-          </a:fontRef>
-        </p:style>
-        <p:txBody>
-          <a:bodyPr rtlCol="0" anchor="ctr"/>
-          <a:lstStyle/>
-          <a:p>
-            <a:pPr algn="ctr"/>
-          </a:p>
-        </p:txBody>
-      </p:sp>
-      <p:sp>
-        <p:nvSpPr>
-          <p:cNvPr id="15" name="TextBox 14"/>
-          <p:cNvSpPr txBox="1"/>
-          <p:nvPr/>
-        </p:nvSpPr>
-        <p:spPr>
-          <a:xfrm>
-            <a:off x="914400" y="4754880"/>
-            <a:ext cx="10332720" cy="457200"/>
-          </a:xfrm>
-          <a:prstGeom prst="rect">
-            <a:avLst/>
-          </a:prstGeom>
-          <a:noFill/>
-        </p:spPr>
-        <p:txBody>
-          <a:bodyPr wrap="square" lIns="25400" rIns="25400" tIns="25400" bIns="25400" anchor="t">
-            <a:spAutoFit/>
-          </a:bodyPr>
-          <a:lstStyle/>
-          <a:p>
-            <a:pPr algn="l"/>
-            <a:r>
-              <a:rPr sz="1600" b="1">
-                <a:solidFill>
-                  <a:srgbClr val="A30D24"/>
-                </a:solidFill>
-                <a:latin typeface="맑은 고딕"/>
-              </a:rPr>
-              <a:t>⚠️ 잘못 작성한 휴가증은?</a:t>
-            </a:r>
-          </a:p>
-        </p:txBody>
-      </p:sp>
-      <p:sp>
-        <p:nvSpPr>
-          <p:cNvPr id="16" name="TextBox 15"/>
-          <p:cNvSpPr txBox="1"/>
-          <p:nvPr/>
-        </p:nvSpPr>
-        <p:spPr>
-          <a:xfrm>
-            <a:off x="914400" y="5303520"/>
-            <a:ext cx="10332720" cy="731520"/>
-          </a:xfrm>
-          <a:prstGeom prst="rect">
-            <a:avLst/>
-          </a:prstGeom>
-          <a:noFill/>
-        </p:spPr>
-        <p:txBody>
-          <a:bodyPr wrap="square" lIns="25400" rIns="25400" tIns="25400" bIns="25400" anchor="t">
-            <a:spAutoFit/>
-          </a:bodyPr>
-          <a:lstStyle/>
-          <a:p>
-            <a:pPr algn="l"/>
-            <a:r>
-              <a:rPr sz="1400" b="0">
-                <a:solidFill>
-                  <a:srgbClr val="1A1A1A"/>
-                </a:solidFill>
-                <a:latin typeface="맑은 고딕"/>
-              </a:rPr>
-              <a:t>작성 직후 우측 카드의 [삭제] 버튼으로 취소. 서무 처리 후엔 별도 요청 필요.</a:t>
-            </a:r>
-          </a:p>
-        </p:txBody>
-      </p:sp>
-      <p:sp>
-        <p:nvSpPr>
-          <p:cNvPr id="17" name="TextBox 16"/>
-          <p:cNvSpPr txBox="1"/>
-          <p:nvPr/>
-        </p:nvSpPr>
-        <p:spPr>
-          <a:xfrm>
-            <a:off x="365760" y="6400800"/>
-            <a:ext cx="11521440" cy="274320"/>
-          </a:xfrm>
-          <a:prstGeom prst="rect">
-            <a:avLst/>
-          </a:prstGeom>
-          <a:noFill/>
-        </p:spPr>
-        <p:txBody>
-          <a:bodyPr wrap="square" lIns="25400" rIns="25400" tIns="25400" bIns="25400" anchor="t">
-            <a:spAutoFit/>
-          </a:bodyPr>
-          <a:lstStyle/>
-          <a:p>
-            <a:pPr algn="r"/>
-            <a:r>
-              <a:rPr sz="900" b="0">
-                <a:solidFill>
-                  <a:srgbClr val="777777"/>
-                </a:solidFill>
-                <a:latin typeface="맑은 고딕"/>
-              </a:rPr>
-              <a:t>COSMAX · 생산3팀 파우더 성형실    |    7 / 9</a:t>
-            </a:r>
-          </a:p>
-        </p:txBody>
-      </p:sp>
-    </p:spTree>
-  </p:cSld>
-  <p:clrMapOvr>
-    <a:masterClrMapping/>
-  </p:clrMapOvr>
-</p:sld>
-</file>
-
-<file path=ppt/slides/slide8.xml><?xml version="1.0" encoding="utf-8"?>
-<p:sld xmlns:a="http://schemas.openxmlformats.org/drawingml/2006/main" xmlns:p="http://schemas.openxmlformats.org/presentationml/2006/main" xmlns:r="http://schemas.openxmlformats.org/officeDocument/2006/relationships">
-  <p:cSld>
-    <p:spTree>
-      <p:nvGrpSpPr>
-        <p:cNvPr id="1" name=""/>
-        <p:cNvGrpSpPr/>
-        <p:nvPr/>
-      </p:nvGrpSpPr>
-      <p:grpSpPr/>
-      <p:sp>
-        <p:nvSpPr>
-          <p:cNvPr id="2" name="Rectangle 1"/>
-          <p:cNvSpPr/>
-          <p:nvPr/>
-        </p:nvSpPr>
-        <p:spPr>
-          <a:xfrm>
-            <a:off x="0" y="0"/>
-            <a:ext cx="12191695" cy="914400"/>
-          </a:xfrm>
-          <a:prstGeom prst="rect">
-            <a:avLst/>
-          </a:prstGeom>
-          <a:solidFill>
-            <a:srgbClr val="C8102E"/>
-          </a:solidFill>
-          <a:ln>
-            <a:noFill/>
-          </a:ln>
-          <a:effectLst/>
-        </p:spPr>
-        <p:style>
-          <a:lnRef idx="1">
-            <a:schemeClr val="accent1"/>
-          </a:lnRef>
-          <a:fillRef idx="3">
-            <a:schemeClr val="accent1"/>
-          </a:fillRef>
-          <a:effectRef idx="2">
-            <a:schemeClr val="accent1"/>
-          </a:effectRef>
-          <a:fontRef idx="minor">
-            <a:schemeClr val="lt1"/>
-          </a:fontRef>
-        </p:style>
-        <p:txBody>
-          <a:bodyPr rtlCol="0" anchor="ctr"/>
-          <a:lstStyle/>
-          <a:p>
-            <a:pPr algn="ctr"/>
-          </a:p>
-        </p:txBody>
-      </p:sp>
-      <p:sp>
-        <p:nvSpPr>
-          <p:cNvPr id="3" name="TextBox 2"/>
-          <p:cNvSpPr txBox="1"/>
-          <p:nvPr/>
-        </p:nvSpPr>
-        <p:spPr>
-          <a:xfrm>
-            <a:off x="457200" y="182880"/>
-            <a:ext cx="11247120" cy="548640"/>
-          </a:xfrm>
-          <a:prstGeom prst="rect">
-            <a:avLst/>
-          </a:prstGeom>
-          <a:noFill/>
-        </p:spPr>
-        <p:txBody>
-          <a:bodyPr wrap="square" lIns="25400" rIns="25400" tIns="25400" bIns="25400" anchor="t">
-            <a:spAutoFit/>
-          </a:bodyPr>
-          <a:lstStyle/>
-          <a:p>
-            <a:pPr algn="l"/>
-            <a:r>
-              <a:rPr sz="2800" b="1">
-                <a:solidFill>
-                  <a:srgbClr val="FFFFFF"/>
-                </a:solidFill>
-                <a:latin typeface="맑은 고딕"/>
-              </a:rPr>
-              <a:t>자주 묻는 질문</a:t>
-            </a:r>
-          </a:p>
-        </p:txBody>
-      </p:sp>
-      <p:sp>
-        <p:nvSpPr>
-          <p:cNvPr id="4" name="TextBox 3"/>
-          <p:cNvSpPr txBox="1"/>
-          <p:nvPr/>
-        </p:nvSpPr>
-        <p:spPr>
-          <a:xfrm>
-            <a:off x="731520" y="1371600"/>
-            <a:ext cx="10698480" cy="365760"/>
-          </a:xfrm>
-          <a:prstGeom prst="rect">
-            <a:avLst/>
-          </a:prstGeom>
-          <a:noFill/>
-        </p:spPr>
-        <p:txBody>
-          <a:bodyPr wrap="square" lIns="25400" rIns="25400" tIns="25400" bIns="25400" anchor="t">
-            <a:spAutoFit/>
-          </a:bodyPr>
-          <a:lstStyle/>
-          <a:p>
-            <a:pPr algn="l"/>
-            <a:r>
-              <a:rPr sz="1500" b="1">
-                <a:solidFill>
-                  <a:srgbClr val="1A1A1A"/>
-                </a:solidFill>
-                <a:latin typeface="맑은 고딕"/>
-              </a:rPr>
-              <a:t>Q. 비밀번호를 잊어버렸어요.</a:t>
-            </a:r>
-          </a:p>
-        </p:txBody>
-      </p:sp>
-      <p:sp>
-        <p:nvSpPr>
-          <p:cNvPr id="5" name="TextBox 4"/>
-          <p:cNvSpPr txBox="1"/>
-          <p:nvPr/>
-        </p:nvSpPr>
-        <p:spPr>
-          <a:xfrm>
-            <a:off x="914400" y="1783080"/>
-            <a:ext cx="10515600" cy="457200"/>
-          </a:xfrm>
-          <a:prstGeom prst="rect">
-            <a:avLst/>
-          </a:prstGeom>
-          <a:noFill/>
-        </p:spPr>
-        <p:txBody>
-          <a:bodyPr wrap="square" lIns="25400" rIns="25400" tIns="25400" bIns="25400" anchor="t">
-            <a:spAutoFit/>
-          </a:bodyPr>
-          <a:lstStyle/>
-          <a:p>
-            <a:pPr algn="l"/>
-            <a:r>
-              <a:rPr sz="1300" b="0">
-                <a:solidFill>
-                  <a:srgbClr val="777777"/>
-                </a:solidFill>
-                <a:latin typeface="맑은 고딕"/>
-              </a:rPr>
-              <a:t>→ 로그인 화면 [비밀번호 찾기] 클릭 → 보안 질문 답변 후 새 비밀번호 설정</a:t>
-            </a:r>
-          </a:p>
-        </p:txBody>
-      </p:sp>
-      <p:sp>
-        <p:nvSpPr>
-          <p:cNvPr id="6" name="TextBox 5"/>
-          <p:cNvSpPr txBox="1"/>
-          <p:nvPr/>
-        </p:nvSpPr>
-        <p:spPr>
-          <a:xfrm>
-            <a:off x="731520" y="2331720"/>
-            <a:ext cx="10698480" cy="365760"/>
-          </a:xfrm>
-          <a:prstGeom prst="rect">
-            <a:avLst/>
-          </a:prstGeom>
-          <a:noFill/>
-        </p:spPr>
-        <p:txBody>
-          <a:bodyPr wrap="square" lIns="25400" rIns="25400" tIns="25400" bIns="25400" anchor="t">
-            <a:spAutoFit/>
-          </a:bodyPr>
-          <a:lstStyle/>
-          <a:p>
-            <a:pPr algn="l"/>
-            <a:r>
-              <a:rPr sz="1500" b="1">
-                <a:solidFill>
-                  <a:srgbClr val="1A1A1A"/>
-                </a:solidFill>
-                <a:latin typeface="맑은 고딕"/>
-              </a:rPr>
-              <a:t>Q. 사번이 등록되어 있지 않다고 나와요.</a:t>
-            </a:r>
-          </a:p>
-        </p:txBody>
-      </p:sp>
-      <p:sp>
-        <p:nvSpPr>
-          <p:cNvPr id="7" name="TextBox 6"/>
-          <p:cNvSpPr txBox="1"/>
-          <p:nvPr/>
-        </p:nvSpPr>
-        <p:spPr>
-          <a:xfrm>
-            <a:off x="914400" y="2743200"/>
-            <a:ext cx="10515600" cy="457200"/>
-          </a:xfrm>
-          <a:prstGeom prst="rect">
-            <a:avLst/>
-          </a:prstGeom>
-          <a:noFill/>
-        </p:spPr>
-        <p:txBody>
-          <a:bodyPr wrap="square" lIns="25400" rIns="25400" tIns="25400" bIns="25400" anchor="t">
-            <a:spAutoFit/>
-          </a:bodyPr>
-          <a:lstStyle/>
-          <a:p>
-            <a:pPr algn="l"/>
-            <a:r>
-              <a:rPr sz="1300" b="0">
-                <a:solidFill>
-                  <a:srgbClr val="777777"/>
-                </a:solidFill>
-                <a:latin typeface="맑은 고딕"/>
-              </a:rPr>
-              <a:t>→ 관리자(이동준)에게 명단 추가 요청</a:t>
-            </a:r>
-          </a:p>
-        </p:txBody>
-      </p:sp>
-      <p:sp>
-        <p:nvSpPr>
-          <p:cNvPr id="8" name="TextBox 7"/>
-          <p:cNvSpPr txBox="1"/>
-          <p:nvPr/>
-        </p:nvSpPr>
-        <p:spPr>
-          <a:xfrm>
-            <a:off x="731520" y="3291840"/>
-            <a:ext cx="10698480" cy="365760"/>
-          </a:xfrm>
-          <a:prstGeom prst="rect">
-            <a:avLst/>
-          </a:prstGeom>
-          <a:noFill/>
-        </p:spPr>
-        <p:txBody>
-          <a:bodyPr wrap="square" lIns="25400" rIns="25400" tIns="25400" bIns="25400" anchor="t">
-            <a:spAutoFit/>
-          </a:bodyPr>
-          <a:lstStyle/>
-          <a:p>
-            <a:pPr algn="l"/>
-            <a:r>
-              <a:rPr sz="1500" b="1">
-                <a:solidFill>
-                  <a:srgbClr val="1A1A1A"/>
-                </a:solidFill>
-                <a:latin typeface="맑은 고딕"/>
-              </a:rPr>
-              <a:t>Q. 휴가증을 잘못 작성했어요.</a:t>
-            </a:r>
-          </a:p>
-        </p:txBody>
-      </p:sp>
-      <p:sp>
-        <p:nvSpPr>
-          <p:cNvPr id="9" name="TextBox 8"/>
-          <p:cNvSpPr txBox="1"/>
-          <p:nvPr/>
-        </p:nvSpPr>
-        <p:spPr>
-          <a:xfrm>
-            <a:off x="914400" y="3703320"/>
-            <a:ext cx="10515600" cy="457200"/>
-          </a:xfrm>
-          <a:prstGeom prst="rect">
-            <a:avLst/>
-          </a:prstGeom>
-          <a:noFill/>
-        </p:spPr>
-        <p:txBody>
-          <a:bodyPr wrap="square" lIns="25400" rIns="25400" tIns="25400" bIns="25400" anchor="t">
-            <a:spAutoFit/>
-          </a:bodyPr>
-          <a:lstStyle/>
-          <a:p>
-            <a:pPr algn="l"/>
-            <a:r>
-              <a:rPr sz="1300" b="0">
-                <a:solidFill>
-                  <a:srgbClr val="777777"/>
-                </a:solidFill>
-                <a:latin typeface="맑은 고딕"/>
-              </a:rPr>
-              <a:t>→ 작성 직후 우측 카드 [삭제] 클릭. 서무 처리 후에는 서무에게 별도 요청</a:t>
-            </a:r>
-          </a:p>
-        </p:txBody>
-      </p:sp>
-      <p:sp>
-        <p:nvSpPr>
-          <p:cNvPr id="10" name="TextBox 9"/>
-          <p:cNvSpPr txBox="1"/>
-          <p:nvPr/>
-        </p:nvSpPr>
-        <p:spPr>
-          <a:xfrm>
-            <a:off x="731520" y="4251960"/>
-            <a:ext cx="10698480" cy="365760"/>
-          </a:xfrm>
-          <a:prstGeom prst="rect">
-            <a:avLst/>
-          </a:prstGeom>
-          <a:noFill/>
-        </p:spPr>
-        <p:txBody>
-          <a:bodyPr wrap="square" lIns="25400" rIns="25400" tIns="25400" bIns="25400" anchor="t">
-            <a:spAutoFit/>
-          </a:bodyPr>
-          <a:lstStyle/>
-          <a:p>
-            <a:pPr algn="l"/>
-            <a:r>
-              <a:rPr sz="1500" b="1">
-                <a:solidFill>
-                  <a:srgbClr val="1A1A1A"/>
-                </a:solidFill>
-                <a:latin typeface="맑은 고딕"/>
-              </a:rPr>
-              <a:t>Q. 화면이 이상하거나 옛 디자인이 보여요.</a:t>
-            </a:r>
-          </a:p>
-        </p:txBody>
-      </p:sp>
-      <p:sp>
-        <p:nvSpPr>
-          <p:cNvPr id="11" name="TextBox 10"/>
-          <p:cNvSpPr txBox="1"/>
-          <p:nvPr/>
-        </p:nvSpPr>
-        <p:spPr>
-          <a:xfrm>
-            <a:off x="914400" y="4663440"/>
-            <a:ext cx="10515600" cy="457200"/>
-          </a:xfrm>
-          <a:prstGeom prst="rect">
-            <a:avLst/>
-          </a:prstGeom>
-          <a:noFill/>
-        </p:spPr>
-        <p:txBody>
-          <a:bodyPr wrap="square" lIns="25400" rIns="25400" tIns="25400" bIns="25400" anchor="t">
-            <a:spAutoFit/>
-          </a:bodyPr>
-          <a:lstStyle/>
-          <a:p>
-            <a:pPr algn="l"/>
-            <a:r>
-              <a:rPr sz="1300" b="0">
-                <a:solidFill>
-                  <a:srgbClr val="777777"/>
-                </a:solidFill>
-                <a:latin typeface="맑은 고딕"/>
-              </a:rPr>
-              <a:t>→ 상단 ↻ 아이콘 클릭 / 또는 시크릿 창으로 접속</a:t>
-            </a:r>
-          </a:p>
-        </p:txBody>
-      </p:sp>
-      <p:sp>
-        <p:nvSpPr>
-          <p:cNvPr id="12" name="TextBox 11"/>
-          <p:cNvSpPr txBox="1"/>
-          <p:nvPr/>
-        </p:nvSpPr>
-        <p:spPr>
-          <a:xfrm>
-            <a:off x="731520" y="5212080"/>
-            <a:ext cx="10698480" cy="365760"/>
-          </a:xfrm>
-          <a:prstGeom prst="rect">
-            <a:avLst/>
-          </a:prstGeom>
-          <a:noFill/>
-        </p:spPr>
-        <p:txBody>
-          <a:bodyPr wrap="square" lIns="25400" rIns="25400" tIns="25400" bIns="25400" anchor="t">
-            <a:spAutoFit/>
-          </a:bodyPr>
-          <a:lstStyle/>
-          <a:p>
-            <a:pPr algn="l"/>
-            <a:r>
-              <a:rPr sz="1500" b="1">
-                <a:solidFill>
-                  <a:srgbClr val="1A1A1A"/>
-                </a:solidFill>
-                <a:latin typeface="맑은 고딕"/>
-              </a:rPr>
-              <a:t>Q. ⚠ 서버 저장 실패 알림이 떠요.</a:t>
-            </a:r>
-          </a:p>
-        </p:txBody>
-      </p:sp>
-      <p:sp>
-        <p:nvSpPr>
-          <p:cNvPr id="13" name="TextBox 12"/>
-          <p:cNvSpPr txBox="1"/>
-          <p:nvPr/>
-        </p:nvSpPr>
-        <p:spPr>
-          <a:xfrm>
-            <a:off x="914400" y="5623560"/>
-            <a:ext cx="10515600" cy="457200"/>
-          </a:xfrm>
-          <a:prstGeom prst="rect">
-            <a:avLst/>
-          </a:prstGeom>
-          <a:noFill/>
-        </p:spPr>
-        <p:txBody>
-          <a:bodyPr wrap="square" lIns="25400" rIns="25400" tIns="25400" bIns="25400" anchor="t">
-            <a:spAutoFit/>
-          </a:bodyPr>
-          <a:lstStyle/>
-          <a:p>
-            <a:pPr algn="l"/>
-            <a:r>
-              <a:rPr sz="1300" b="0">
-                <a:solidFill>
-                  <a:srgbClr val="777777"/>
-                </a:solidFill>
-                <a:latin typeface="맑은 고딕"/>
-              </a:rPr>
-              <a:t>→ 인터넷 연결 확인 후 다시 작성 (저장 실패한 휴가증은 서버에 전달되지 않음)</a:t>
-            </a:r>
-          </a:p>
-        </p:txBody>
-      </p:sp>
-      <p:sp>
-        <p:nvSpPr>
-          <p:cNvPr id="14" name="TextBox 13"/>
-          <p:cNvSpPr txBox="1"/>
-          <p:nvPr/>
-        </p:nvSpPr>
-        <p:spPr>
-          <a:xfrm>
-            <a:off x="365760" y="6400800"/>
-            <a:ext cx="11521440" cy="274320"/>
-          </a:xfrm>
-          <a:prstGeom prst="rect">
-            <a:avLst/>
-          </a:prstGeom>
-          <a:noFill/>
-        </p:spPr>
-        <p:txBody>
-          <a:bodyPr wrap="square" lIns="25400" rIns="25400" tIns="25400" bIns="25400" anchor="t">
-            <a:spAutoFit/>
-          </a:bodyPr>
-          <a:lstStyle/>
-          <a:p>
-            <a:pPr algn="r"/>
-            <a:r>
-              <a:rPr sz="900" b="0">
-                <a:solidFill>
-                  <a:srgbClr val="777777"/>
-                </a:solidFill>
-                <a:latin typeface="맑은 고딕"/>
-              </a:rPr>
-              <a:t>COSMAX · 생산3팀 파우더 성형실    |    8 / 9</a:t>
-            </a:r>
-          </a:p>
-        </p:txBody>
-      </p:sp>
-    </p:spTree>
-  </p:cSld>
-  <p:clrMapOvr>
-    <a:masterClrMapping/>
-  </p:clrMapOvr>
-</p:sld>
-</file>
-
-<file path=ppt/slides/slide9.xml><?xml version="1.0" encoding="utf-8"?>
-<p:sld xmlns:a="http://schemas.openxmlformats.org/drawingml/2006/main" xmlns:p="http://schemas.openxmlformats.org/presentationml/2006/main" xmlns:r="http://schemas.openxmlformats.org/officeDocument/2006/relationships">
-  <p:cSld>
-    <p:spTree>
-      <p:nvGrpSpPr>
-        <p:cNvPr id="1" name=""/>
-        <p:cNvGrpSpPr/>
-        <p:nvPr/>
-      </p:nvGrpSpPr>
-      <p:grpSpPr/>
-      <p:sp>
-        <p:nvSpPr>
-          <p:cNvPr id="2" name="Rectangle 1"/>
-          <p:cNvSpPr/>
-          <p:nvPr/>
-        </p:nvSpPr>
-        <p:spPr>
-          <a:xfrm>
-            <a:off x="0" y="0"/>
-            <a:ext cx="12191695" cy="6858000"/>
-          </a:xfrm>
-          <a:prstGeom prst="rect">
-            <a:avLst/>
-          </a:prstGeom>
-          <a:solidFill>
-            <a:srgbClr val="C8102E"/>
-          </a:solidFill>
-          <a:ln>
-            <a:noFill/>
-          </a:ln>
-          <a:effectLst/>
-        </p:spPr>
-        <p:style>
-          <a:lnRef idx="1">
-            <a:schemeClr val="accent1"/>
-          </a:lnRef>
-          <a:fillRef idx="3">
-            <a:schemeClr val="accent1"/>
-          </a:fillRef>
-          <a:effectRef idx="2">
-            <a:schemeClr val="accent1"/>
-          </a:effectRef>
-          <a:fontRef idx="minor">
-            <a:schemeClr val="lt1"/>
-          </a:fontRef>
-        </p:style>
-        <p:txBody>
-          <a:bodyPr rtlCol="0" anchor="ctr"/>
-          <a:lstStyle/>
-          <a:p>
-            <a:pPr algn="ctr"/>
-          </a:p>
-        </p:txBody>
-      </p:sp>
-      <p:sp>
-        <p:nvSpPr>
-          <p:cNvPr id="3" name="TextBox 2"/>
-          <p:cNvSpPr txBox="1"/>
-          <p:nvPr/>
-        </p:nvSpPr>
-        <p:spPr>
-          <a:xfrm>
-            <a:off x="457200" y="1828800"/>
-            <a:ext cx="11247120" cy="914400"/>
-          </a:xfrm>
-          <a:prstGeom prst="rect">
-            <a:avLst/>
-          </a:prstGeom>
-          <a:noFill/>
-        </p:spPr>
-        <p:txBody>
-          <a:bodyPr wrap="square" lIns="25400" rIns="25400" tIns="25400" bIns="25400" anchor="t">
-            <a:spAutoFit/>
-          </a:bodyPr>
-          <a:lstStyle/>
-          <a:p>
-            <a:pPr algn="ctr"/>
-            <a:r>
-              <a:rPr sz="5400" b="1">
-                <a:solidFill>
-                  <a:srgbClr val="FFFFFF"/>
-                </a:solidFill>
-                <a:latin typeface="맑은 고딕"/>
-              </a:rPr>
-              <a:t>감사합니다</a:t>
-            </a:r>
-          </a:p>
-        </p:txBody>
-      </p:sp>
-      <p:sp>
-        <p:nvSpPr>
-          <p:cNvPr id="4" name="Rectangle 3"/>
-          <p:cNvSpPr/>
-          <p:nvPr/>
-        </p:nvSpPr>
-        <p:spPr>
-          <a:xfrm>
-            <a:off x="5029200" y="3108960"/>
-            <a:ext cx="2103120" cy="38100"/>
-          </a:xfrm>
-          <a:prstGeom prst="rect">
-            <a:avLst/>
-          </a:prstGeom>
-          <a:solidFill>
-            <a:srgbClr val="FFFFFF"/>
-          </a:solidFill>
-          <a:ln>
-            <a:noFill/>
-          </a:ln>
-          <a:effectLst/>
-        </p:spPr>
-        <p:style>
-          <a:lnRef idx="1">
-            <a:schemeClr val="accent1"/>
-          </a:lnRef>
-          <a:fillRef idx="3">
-            <a:schemeClr val="accent1"/>
-          </a:fillRef>
-          <a:effectRef idx="2">
-            <a:schemeClr val="accent1"/>
-          </a:effectRef>
-          <a:fontRef idx="minor">
-            <a:schemeClr val="lt1"/>
-          </a:fontRef>
-        </p:style>
-        <p:txBody>
-          <a:bodyPr rtlCol="0" anchor="ctr"/>
-          <a:lstStyle/>
-          <a:p>
-            <a:pPr algn="ctr"/>
-          </a:p>
-        </p:txBody>
-      </p:sp>
-      <p:sp>
-        <p:nvSpPr>
-          <p:cNvPr id="5" name="TextBox 4"/>
-          <p:cNvSpPr txBox="1"/>
-          <p:nvPr/>
-        </p:nvSpPr>
-        <p:spPr>
-          <a:xfrm>
-            <a:off x="457200" y="3657600"/>
-            <a:ext cx="11247120" cy="548640"/>
-          </a:xfrm>
-          <a:prstGeom prst="rect">
-            <a:avLst/>
-          </a:prstGeom>
-          <a:noFill/>
-        </p:spPr>
-        <p:txBody>
-          <a:bodyPr wrap="square" lIns="25400" rIns="25400" tIns="25400" bIns="25400" anchor="t">
-            <a:spAutoFit/>
-          </a:bodyPr>
-          <a:lstStyle/>
-          <a:p>
-            <a:pPr algn="ctr"/>
-            <a:r>
-              <a:rPr sz="2000" b="0">
-                <a:solidFill>
-                  <a:srgbClr val="FFFFFF"/>
-                </a:solidFill>
-                <a:latin typeface="맑은 고딕"/>
-              </a:rPr>
-              <a:t>휴가증은 본인이 직접, 빠르고 정확하게.</a:t>
-            </a:r>
-          </a:p>
-        </p:txBody>
-      </p:sp>
-      <p:sp>
-        <p:nvSpPr>
-          <p:cNvPr id="6" name="TextBox 5"/>
-          <p:cNvSpPr txBox="1"/>
-          <p:nvPr/>
-        </p:nvSpPr>
-        <p:spPr>
-          <a:xfrm>
-            <a:off x="457200" y="5029200"/>
-            <a:ext cx="11247120" cy="457200"/>
-          </a:xfrm>
-          <a:prstGeom prst="rect">
-            <a:avLst/>
-          </a:prstGeom>
-          <a:noFill/>
-        </p:spPr>
-        <p:txBody>
-          <a:bodyPr wrap="square" lIns="25400" rIns="25400" tIns="25400" bIns="25400" anchor="t">
-            <a:spAutoFit/>
-          </a:bodyPr>
-          <a:lstStyle/>
-          <a:p>
-            <a:pPr algn="ctr"/>
-            <a:r>
-              <a:rPr sz="1400" b="0">
-                <a:solidFill>
-                  <a:srgbClr val="FFFFFF"/>
-                </a:solidFill>
-                <a:latin typeface="맑은 고딕"/>
-              </a:rPr>
-              <a:t>문의 — 관리자 이동준 (생산3팀)</a:t>
-            </a:r>
-          </a:p>
-        </p:txBody>
-      </p:sp>
-      <p:sp>
-        <p:nvSpPr>
-          <p:cNvPr id="7" name="TextBox 6"/>
-          <p:cNvSpPr txBox="1"/>
-          <p:nvPr/>
-        </p:nvSpPr>
-        <p:spPr>
-          <a:xfrm>
-            <a:off x="457200" y="5577840"/>
+            <a:off x="457200" y="5760720"/>
             <a:ext cx="11247120" cy="365760"/>
           </a:xfrm>
           <a:prstGeom prst="rect">

--- a/docs/휴가증 자동 반영 프로그램 안내 (작업자용).pptx
+++ b/docs/휴가증 자동 반영 프로그램 안내 (작업자용).pptx
@@ -11,6 +11,7 @@
     <p:sldId id="259" r:id="rId10"/>
     <p:sldId id="260" r:id="rId11"/>
     <p:sldId id="261" r:id="rId12"/>
+    <p:sldId id="262" r:id="rId13"/>
   </p:sldIdLst>
   <p:sldSz cx="12191695" cy="6858000" type="screen4x3"/>
   <p:notesSz cx="6858000" cy="9144000"/>
@@ -3756,7 +3757,7 @@
                 </a:solidFill>
                 <a:latin typeface="맑은 고딕"/>
               </a:rPr>
-              <a:t>COSMAX · 생산3팀 파우더 성형실    |    2 / 6</a:t>
+              <a:t>COSMAX · 생산3팀 파우더 성형실    |    2 / 7</a:t>
             </a:r>
           </a:p>
         </p:txBody>
@@ -4468,7 +4469,7 @@
                 </a:solidFill>
                 <a:latin typeface="맑은 고딕"/>
               </a:rPr>
-              <a:t>💡 홈 화면에 추가하면 앱처럼 사용 가능 / ⚠️ 첫 로그인 후 [비밀번호 변경] 필수</a:t>
+              <a:t>⚠️ 첫 로그인 후 상단 [비밀번호 변경] → 새 비밀번호(숫자 6자리 이상) + 보안 질문 등록</a:t>
             </a:r>
           </a:p>
         </p:txBody>
@@ -4503,7 +4504,7 @@
                 </a:solidFill>
                 <a:latin typeface="맑은 고딕"/>
               </a:rPr>
-              <a:t>COSMAX · 생산3팀 파우더 성형실    |    3 / 6</a:t>
+              <a:t>COSMAX · 생산3팀 파우더 성형실    |    3 / 7</a:t>
             </a:r>
           </a:p>
         </p:txBody>
@@ -4600,7 +4601,7 @@
                 </a:solidFill>
                 <a:latin typeface="맑은 고딕"/>
               </a:rPr>
-              <a:t>2. 휴가증 작성</a:t>
+              <a:t>2. 홈 화면에 추가하기 (권장)</a:t>
             </a:r>
           </a:p>
         </p:txBody>
@@ -4613,8 +4614,8 @@
         </p:nvSpPr>
         <p:spPr>
           <a:xfrm>
-            <a:off x="731520" y="1371600"/>
-            <a:ext cx="5486400" cy="457200"/>
+            <a:off x="731520" y="1280160"/>
+            <a:ext cx="10698480" cy="548640"/>
           </a:xfrm>
           <a:prstGeom prst="rect">
             <a:avLst/>
@@ -4627,449 +4628,29 @@
           </a:bodyPr>
           <a:lstStyle/>
           <a:p>
-            <a:pPr algn="l"/>
-            <a:r>
-              <a:rPr sz="1400" b="1">
+            <a:pPr algn="ctr"/>
+            <a:r>
+              <a:rPr sz="1500" b="0">
                 <a:solidFill>
                   <a:srgbClr val="1A1A1A"/>
                 </a:solidFill>
                 <a:latin typeface="맑은 고딕"/>
               </a:rPr>
-              <a:t>왼쪽 [휴가증 작성] 카드에서:</a:t>
-            </a:r>
-          </a:p>
-        </p:txBody>
-      </p:sp>
-      <p:sp>
-        <p:nvSpPr>
-          <p:cNvPr id="5" name="TextBox 4"/>
-          <p:cNvSpPr txBox="1"/>
-          <p:nvPr/>
-        </p:nvSpPr>
-        <p:spPr>
-          <a:xfrm>
-            <a:off x="731520" y="1920240"/>
-            <a:ext cx="365760" cy="457200"/>
-          </a:xfrm>
-          <a:prstGeom prst="rect">
-            <a:avLst/>
-          </a:prstGeom>
-          <a:noFill/>
-        </p:spPr>
-        <p:txBody>
-          <a:bodyPr wrap="square" lIns="25400" rIns="25400" tIns="25400" bIns="25400" anchor="t">
-            <a:spAutoFit/>
-          </a:bodyPr>
-          <a:lstStyle/>
-          <a:p>
-            <a:pPr algn="l"/>
-            <a:r>
-              <a:rPr sz="1500" b="1">
-                <a:solidFill>
-                  <a:srgbClr val="C8102E"/>
-                </a:solidFill>
-                <a:latin typeface="맑은 고딕"/>
-              </a:rPr>
-              <a:t>1.</a:t>
-            </a:r>
-          </a:p>
-        </p:txBody>
-      </p:sp>
-      <p:sp>
-        <p:nvSpPr>
-          <p:cNvPr id="6" name="TextBox 5"/>
-          <p:cNvSpPr txBox="1"/>
-          <p:nvPr/>
-        </p:nvSpPr>
-        <p:spPr>
-          <a:xfrm>
-            <a:off x="1188720" y="1920240"/>
-            <a:ext cx="2011680" cy="457200"/>
-          </a:xfrm>
-          <a:prstGeom prst="rect">
-            <a:avLst/>
-          </a:prstGeom>
-          <a:noFill/>
-        </p:spPr>
-        <p:txBody>
-          <a:bodyPr wrap="square" lIns="25400" rIns="25400" tIns="25400" bIns="25400" anchor="t">
-            <a:spAutoFit/>
-          </a:bodyPr>
-          <a:lstStyle/>
-          <a:p>
-            <a:pPr algn="l"/>
-            <a:r>
-              <a:rPr sz="1400" b="1">
-                <a:solidFill>
-                  <a:srgbClr val="1A1A1A"/>
-                </a:solidFill>
-                <a:latin typeface="맑은 고딕"/>
-              </a:rPr>
-              <a:t>구분 선택</a:t>
-            </a:r>
-          </a:p>
-        </p:txBody>
-      </p:sp>
-      <p:sp>
-        <p:nvSpPr>
-          <p:cNvPr id="7" name="TextBox 6"/>
-          <p:cNvSpPr txBox="1"/>
-          <p:nvPr/>
-        </p:nvSpPr>
-        <p:spPr>
-          <a:xfrm>
-            <a:off x="3291840" y="1920240"/>
-            <a:ext cx="2926080" cy="457200"/>
-          </a:xfrm>
-          <a:prstGeom prst="rect">
-            <a:avLst/>
-          </a:prstGeom>
-          <a:noFill/>
-        </p:spPr>
-        <p:txBody>
-          <a:bodyPr wrap="square" lIns="25400" rIns="25400" tIns="25400" bIns="25400" anchor="t">
-            <a:spAutoFit/>
-          </a:bodyPr>
-          <a:lstStyle/>
-          <a:p>
-            <a:pPr algn="l"/>
-            <a:r>
-              <a:rPr sz="1200" b="0">
-                <a:solidFill>
-                  <a:srgbClr val="777777"/>
-                </a:solidFill>
-                <a:latin typeface="맑은 고딕"/>
-              </a:rPr>
-              <a:t>연차, 반차, 생휴 등</a:t>
-            </a:r>
-          </a:p>
-        </p:txBody>
-      </p:sp>
-      <p:sp>
-        <p:nvSpPr>
-          <p:cNvPr id="8" name="TextBox 7"/>
-          <p:cNvSpPr txBox="1"/>
-          <p:nvPr/>
-        </p:nvSpPr>
-        <p:spPr>
-          <a:xfrm>
-            <a:off x="731520" y="2560320"/>
-            <a:ext cx="365760" cy="457200"/>
-          </a:xfrm>
-          <a:prstGeom prst="rect">
-            <a:avLst/>
-          </a:prstGeom>
-          <a:noFill/>
-        </p:spPr>
-        <p:txBody>
-          <a:bodyPr wrap="square" lIns="25400" rIns="25400" tIns="25400" bIns="25400" anchor="t">
-            <a:spAutoFit/>
-          </a:bodyPr>
-          <a:lstStyle/>
-          <a:p>
-            <a:pPr algn="l"/>
-            <a:r>
-              <a:rPr sz="1500" b="1">
-                <a:solidFill>
-                  <a:srgbClr val="C8102E"/>
-                </a:solidFill>
-                <a:latin typeface="맑은 고딕"/>
-              </a:rPr>
-              <a:t>2.</a:t>
-            </a:r>
-          </a:p>
-        </p:txBody>
-      </p:sp>
-      <p:sp>
-        <p:nvSpPr>
-          <p:cNvPr id="9" name="TextBox 8"/>
-          <p:cNvSpPr txBox="1"/>
-          <p:nvPr/>
-        </p:nvSpPr>
-        <p:spPr>
-          <a:xfrm>
-            <a:off x="1188720" y="2560320"/>
-            <a:ext cx="2011680" cy="457200"/>
-          </a:xfrm>
-          <a:prstGeom prst="rect">
-            <a:avLst/>
-          </a:prstGeom>
-          <a:noFill/>
-        </p:spPr>
-        <p:txBody>
-          <a:bodyPr wrap="square" lIns="25400" rIns="25400" tIns="25400" bIns="25400" anchor="t">
-            <a:spAutoFit/>
-          </a:bodyPr>
-          <a:lstStyle/>
-          <a:p>
-            <a:pPr algn="l"/>
-            <a:r>
-              <a:rPr sz="1400" b="1">
-                <a:solidFill>
-                  <a:srgbClr val="1A1A1A"/>
-                </a:solidFill>
-                <a:latin typeface="맑은 고딕"/>
-              </a:rPr>
-              <a:t>개수 + 기간</a:t>
-            </a:r>
-          </a:p>
-        </p:txBody>
-      </p:sp>
-      <p:sp>
-        <p:nvSpPr>
-          <p:cNvPr id="10" name="TextBox 9"/>
-          <p:cNvSpPr txBox="1"/>
-          <p:nvPr/>
-        </p:nvSpPr>
-        <p:spPr>
-          <a:xfrm>
-            <a:off x="3291840" y="2560320"/>
-            <a:ext cx="2926080" cy="457200"/>
-          </a:xfrm>
-          <a:prstGeom prst="rect">
-            <a:avLst/>
-          </a:prstGeom>
-          <a:noFill/>
-        </p:spPr>
-        <p:txBody>
-          <a:bodyPr wrap="square" lIns="25400" rIns="25400" tIns="25400" bIns="25400" anchor="t">
-            <a:spAutoFit/>
-          </a:bodyPr>
-          <a:lstStyle/>
-          <a:p>
-            <a:pPr algn="l"/>
-            <a:r>
-              <a:rPr sz="1200" b="0">
-                <a:solidFill>
-                  <a:srgbClr val="777777"/>
-                </a:solidFill>
-                <a:latin typeface="맑은 고딕"/>
-              </a:rPr>
-              <a:t>예: 연차 2개</a:t>
-            </a:r>
-          </a:p>
-        </p:txBody>
-      </p:sp>
-      <p:sp>
-        <p:nvSpPr>
-          <p:cNvPr id="11" name="TextBox 10"/>
-          <p:cNvSpPr txBox="1"/>
-          <p:nvPr/>
-        </p:nvSpPr>
-        <p:spPr>
-          <a:xfrm>
-            <a:off x="731520" y="3200400"/>
-            <a:ext cx="365760" cy="457200"/>
-          </a:xfrm>
-          <a:prstGeom prst="rect">
-            <a:avLst/>
-          </a:prstGeom>
-          <a:noFill/>
-        </p:spPr>
-        <p:txBody>
-          <a:bodyPr wrap="square" lIns="25400" rIns="25400" tIns="25400" bIns="25400" anchor="t">
-            <a:spAutoFit/>
-          </a:bodyPr>
-          <a:lstStyle/>
-          <a:p>
-            <a:pPr algn="l"/>
-            <a:r>
-              <a:rPr sz="1500" b="1">
-                <a:solidFill>
-                  <a:srgbClr val="C8102E"/>
-                </a:solidFill>
-                <a:latin typeface="맑은 고딕"/>
-              </a:rPr>
-              <a:t>3.</a:t>
-            </a:r>
-          </a:p>
-        </p:txBody>
-      </p:sp>
-      <p:sp>
-        <p:nvSpPr>
-          <p:cNvPr id="12" name="TextBox 11"/>
-          <p:cNvSpPr txBox="1"/>
-          <p:nvPr/>
-        </p:nvSpPr>
-        <p:spPr>
-          <a:xfrm>
-            <a:off x="1188720" y="3200400"/>
-            <a:ext cx="2011680" cy="457200"/>
-          </a:xfrm>
-          <a:prstGeom prst="rect">
-            <a:avLst/>
-          </a:prstGeom>
-          <a:noFill/>
-        </p:spPr>
-        <p:txBody>
-          <a:bodyPr wrap="square" lIns="25400" rIns="25400" tIns="25400" bIns="25400" anchor="t">
-            <a:spAutoFit/>
-          </a:bodyPr>
-          <a:lstStyle/>
-          <a:p>
-            <a:pPr algn="l"/>
-            <a:r>
-              <a:rPr sz="1400" b="1">
-                <a:solidFill>
-                  <a:srgbClr val="1A1A1A"/>
-                </a:solidFill>
-                <a:latin typeface="맑은 고딕"/>
-              </a:rPr>
-              <a:t>사유 입력</a:t>
-            </a:r>
-          </a:p>
-        </p:txBody>
-      </p:sp>
-      <p:sp>
-        <p:nvSpPr>
-          <p:cNvPr id="13" name="TextBox 12"/>
-          <p:cNvSpPr txBox="1"/>
-          <p:nvPr/>
-        </p:nvSpPr>
-        <p:spPr>
-          <a:xfrm>
-            <a:off x="3291840" y="3200400"/>
-            <a:ext cx="2926080" cy="457200"/>
-          </a:xfrm>
-          <a:prstGeom prst="rect">
-            <a:avLst/>
-          </a:prstGeom>
-          <a:noFill/>
-        </p:spPr>
-        <p:txBody>
-          <a:bodyPr wrap="square" lIns="25400" rIns="25400" tIns="25400" bIns="25400" anchor="t">
-            <a:spAutoFit/>
-          </a:bodyPr>
-          <a:lstStyle/>
-          <a:p>
-            <a:pPr algn="l"/>
-            <a:r>
-              <a:rPr sz="1200" b="0">
-                <a:solidFill>
-                  <a:srgbClr val="777777"/>
-                </a:solidFill>
-                <a:latin typeface="맑은 고딕"/>
-              </a:rPr>
-              <a:t>휴가 사유</a:t>
-            </a:r>
-          </a:p>
-        </p:txBody>
-      </p:sp>
-      <p:sp>
-        <p:nvSpPr>
-          <p:cNvPr id="14" name="TextBox 13"/>
-          <p:cNvSpPr txBox="1"/>
-          <p:nvPr/>
-        </p:nvSpPr>
-        <p:spPr>
-          <a:xfrm>
-            <a:off x="731520" y="3840479"/>
-            <a:ext cx="365760" cy="457200"/>
-          </a:xfrm>
-          <a:prstGeom prst="rect">
-            <a:avLst/>
-          </a:prstGeom>
-          <a:noFill/>
-        </p:spPr>
-        <p:txBody>
-          <a:bodyPr wrap="square" lIns="25400" rIns="25400" tIns="25400" bIns="25400" anchor="t">
-            <a:spAutoFit/>
-          </a:bodyPr>
-          <a:lstStyle/>
-          <a:p>
-            <a:pPr algn="l"/>
-            <a:r>
-              <a:rPr sz="1500" b="1">
-                <a:solidFill>
-                  <a:srgbClr val="C8102E"/>
-                </a:solidFill>
-                <a:latin typeface="맑은 고딕"/>
-              </a:rPr>
-              <a:t>4.</a:t>
-            </a:r>
-          </a:p>
-        </p:txBody>
-      </p:sp>
-      <p:sp>
-        <p:nvSpPr>
-          <p:cNvPr id="15" name="TextBox 14"/>
-          <p:cNvSpPr txBox="1"/>
-          <p:nvPr/>
-        </p:nvSpPr>
-        <p:spPr>
-          <a:xfrm>
-            <a:off x="1188720" y="3840479"/>
-            <a:ext cx="2011680" cy="457200"/>
-          </a:xfrm>
-          <a:prstGeom prst="rect">
-            <a:avLst/>
-          </a:prstGeom>
-          <a:noFill/>
-        </p:spPr>
-        <p:txBody>
-          <a:bodyPr wrap="square" lIns="25400" rIns="25400" tIns="25400" bIns="25400" anchor="t">
-            <a:spAutoFit/>
-          </a:bodyPr>
-          <a:lstStyle/>
-          <a:p>
-            <a:pPr algn="l"/>
-            <a:r>
-              <a:rPr sz="1400" b="1">
-                <a:solidFill>
-                  <a:srgbClr val="1A1A1A"/>
-                </a:solidFill>
-                <a:latin typeface="맑은 고딕"/>
-              </a:rPr>
-              <a:t>[+ 추가]</a:t>
-            </a:r>
-          </a:p>
-        </p:txBody>
-      </p:sp>
-      <p:sp>
-        <p:nvSpPr>
-          <p:cNvPr id="16" name="TextBox 15"/>
-          <p:cNvSpPr txBox="1"/>
-          <p:nvPr/>
-        </p:nvSpPr>
-        <p:spPr>
-          <a:xfrm>
-            <a:off x="3291840" y="3840479"/>
-            <a:ext cx="2926080" cy="457200"/>
-          </a:xfrm>
-          <a:prstGeom prst="rect">
-            <a:avLst/>
-          </a:prstGeom>
-          <a:noFill/>
-        </p:spPr>
-        <p:txBody>
-          <a:bodyPr wrap="square" lIns="25400" rIns="25400" tIns="25400" bIns="25400" anchor="t">
-            <a:spAutoFit/>
-          </a:bodyPr>
-          <a:lstStyle/>
-          <a:p>
-            <a:pPr algn="l"/>
-            <a:r>
-              <a:rPr sz="1200" b="0">
-                <a:solidFill>
-                  <a:srgbClr val="777777"/>
-                </a:solidFill>
-                <a:latin typeface="맑은 고딕"/>
-              </a:rPr>
-              <a:t>클라우드 자동 저장</a:t>
-            </a:r>
-          </a:p>
-        </p:txBody>
-      </p:sp>
-      <p:sp>
-        <p:nvSpPr>
-          <p:cNvPr id="17" name="Rounded Rectangle 16"/>
+              <a:t>휴대폰 홈 화면에 추가하면 일반 앱처럼 아이콘 한 번에 실행됩니다.</a:t>
+            </a:r>
+          </a:p>
+        </p:txBody>
+      </p:sp>
+      <p:sp>
+        <p:nvSpPr>
+          <p:cNvPr id="5" name="Rounded Rectangle 4"/>
           <p:cNvSpPr/>
           <p:nvPr/>
         </p:nvSpPr>
         <p:spPr>
           <a:xfrm>
-            <a:off x="731520" y="4846320"/>
-            <a:ext cx="5486400" cy="1371600"/>
+            <a:off x="731520" y="2103120"/>
+            <a:ext cx="5394960" cy="3474720"/>
           </a:xfrm>
           <a:prstGeom prst="roundRect">
             <a:avLst>
@@ -5108,14 +4689,14 @@
       </p:sp>
       <p:sp>
         <p:nvSpPr>
-          <p:cNvPr id="18" name="TextBox 17"/>
-          <p:cNvSpPr txBox="1"/>
-          <p:nvPr/>
-        </p:nvSpPr>
-        <p:spPr>
-          <a:xfrm>
-            <a:off x="914400" y="4983480"/>
-            <a:ext cx="5120640" cy="1097280"/>
+          <p:cNvPr id="6" name="TextBox 5"/>
+          <p:cNvSpPr txBox="1"/>
+          <p:nvPr/>
+        </p:nvSpPr>
+        <p:spPr>
+          <a:xfrm>
+            <a:off x="914400" y="2286000"/>
+            <a:ext cx="5029200" cy="548640"/>
           </a:xfrm>
           <a:prstGeom prst="rect">
             <a:avLst/>
@@ -5130,70 +4711,73 @@
           <a:p>
             <a:pPr algn="l"/>
             <a:r>
-              <a:rPr sz="1200" b="0">
+              <a:rPr sz="2000" b="1">
+                <a:solidFill>
+                  <a:srgbClr val="C8102E"/>
+                </a:solidFill>
+                <a:latin typeface="맑은 고딕"/>
+              </a:rPr>
+              <a:t>📱 iOS (Safari)</a:t>
+            </a:r>
+          </a:p>
+        </p:txBody>
+      </p:sp>
+      <p:sp>
+        <p:nvSpPr>
+          <p:cNvPr id="7" name="TextBox 6"/>
+          <p:cNvSpPr txBox="1"/>
+          <p:nvPr/>
+        </p:nvSpPr>
+        <p:spPr>
+          <a:xfrm>
+            <a:off x="914400" y="3017520"/>
+            <a:ext cx="5029200" cy="2468880"/>
+          </a:xfrm>
+          <a:prstGeom prst="rect">
+            <a:avLst/>
+          </a:prstGeom>
+          <a:noFill/>
+        </p:spPr>
+        <p:txBody>
+          <a:bodyPr wrap="square" lIns="25400" rIns="25400" tIns="25400" bIns="25400" anchor="t">
+            <a:spAutoFit/>
+          </a:bodyPr>
+          <a:lstStyle/>
+          <a:p>
+            <a:pPr algn="l"/>
+            <a:r>
+              <a:rPr sz="1400" b="0">
                 <a:solidFill>
                   <a:srgbClr val="1A1A1A"/>
                 </a:solidFill>
                 <a:latin typeface="맑은 고딕"/>
               </a:rPr>
-              <a:t>• 이름·연락처는 자동 채움 (수정 불가)
-• 여러 유형은 휴가증 따로 작성
-  (예: 연차+반차 = 2건)</a:t>
-            </a:r>
-          </a:p>
-        </p:txBody>
-      </p:sp>
-      <p:sp>
-        <p:nvSpPr>
-          <p:cNvPr id="19" name="TextBox 18"/>
-          <p:cNvSpPr txBox="1"/>
-          <p:nvPr/>
-        </p:nvSpPr>
-        <p:spPr>
-          <a:xfrm>
-            <a:off x="6583680" y="1371600"/>
-            <a:ext cx="5029200" cy="457200"/>
-          </a:xfrm>
-          <a:prstGeom prst="rect">
-            <a:avLst/>
-          </a:prstGeom>
-          <a:noFill/>
-        </p:spPr>
-        <p:txBody>
-          <a:bodyPr wrap="square" lIns="25400" rIns="25400" tIns="25400" bIns="25400" anchor="t">
-            <a:spAutoFit/>
-          </a:bodyPr>
-          <a:lstStyle/>
-          <a:p>
-            <a:pPr algn="l"/>
-            <a:r>
-              <a:rPr sz="1400" b="1">
-                <a:solidFill>
-                  <a:srgbClr val="1A1A1A"/>
-                </a:solidFill>
-                <a:latin typeface="맑은 고딕"/>
-              </a:rPr>
-              <a:t>휴가 유형:</a:t>
-            </a:r>
-          </a:p>
-        </p:txBody>
-      </p:sp>
-      <p:sp>
-        <p:nvSpPr>
-          <p:cNvPr id="20" name="Rectangle 19"/>
+              <a:t>① 사이트 접속
+② 하단 가운데 공유 버튼 ⬆️ 탭
+③ "홈 화면에 추가" 선택
+④ 우상단 "추가" 탭</a:t>
+            </a:r>
+          </a:p>
+        </p:txBody>
+      </p:sp>
+      <p:sp>
+        <p:nvSpPr>
+          <p:cNvPr id="8" name="Rounded Rectangle 7"/>
           <p:cNvSpPr/>
           <p:nvPr/>
         </p:nvSpPr>
         <p:spPr>
           <a:xfrm>
-            <a:off x="6583680" y="1920240"/>
-            <a:ext cx="5029200" cy="502920"/>
-          </a:xfrm>
-          <a:prstGeom prst="rect">
-            <a:avLst/>
+            <a:off x="6217920" y="2103120"/>
+            <a:ext cx="5394960" cy="3474720"/>
+          </a:xfrm>
+          <a:prstGeom prst="roundRect">
+            <a:avLst>
+              <a:gd name="adj" fmla="val 12000"/>
+            </a:avLst>
           </a:prstGeom>
           <a:solidFill>
-            <a:srgbClr val="C8102E"/>
+            <a:srgbClr val="FFF5F5"/>
           </a:solidFill>
           <a:ln>
             <a:noFill/>
@@ -5224,201 +4808,92 @@
       </p:sp>
       <p:sp>
         <p:nvSpPr>
-          <p:cNvPr id="21" name="TextBox 20"/>
-          <p:cNvSpPr txBox="1"/>
-          <p:nvPr/>
-        </p:nvSpPr>
-        <p:spPr>
-          <a:xfrm>
-            <a:off x="6766560" y="1920240"/>
-            <a:ext cx="3017520" cy="502920"/>
-          </a:xfrm>
-          <a:prstGeom prst="rect">
-            <a:avLst/>
-          </a:prstGeom>
-          <a:noFill/>
-        </p:spPr>
-        <p:txBody>
-          <a:bodyPr wrap="square" lIns="25400" rIns="25400" tIns="25400" bIns="25400" anchor="ctr">
+          <p:cNvPr id="9" name="TextBox 8"/>
+          <p:cNvSpPr txBox="1"/>
+          <p:nvPr/>
+        </p:nvSpPr>
+        <p:spPr>
+          <a:xfrm>
+            <a:off x="6400800" y="2286000"/>
+            <a:ext cx="5029200" cy="548640"/>
+          </a:xfrm>
+          <a:prstGeom prst="rect">
+            <a:avLst/>
+          </a:prstGeom>
+          <a:noFill/>
+        </p:spPr>
+        <p:txBody>
+          <a:bodyPr wrap="square" lIns="25400" rIns="25400" tIns="25400" bIns="25400" anchor="t">
             <a:spAutoFit/>
           </a:bodyPr>
           <a:lstStyle/>
           <a:p>
             <a:pPr algn="l"/>
             <a:r>
-              <a:rPr sz="1200" b="1">
-                <a:solidFill>
-                  <a:srgbClr val="FFFFFF"/>
-                </a:solidFill>
-                <a:latin typeface="맑은 고딕"/>
-              </a:rPr>
-              <a:t>구분</a:t>
-            </a:r>
-          </a:p>
-        </p:txBody>
-      </p:sp>
-      <p:sp>
-        <p:nvSpPr>
-          <p:cNvPr id="22" name="TextBox 21"/>
-          <p:cNvSpPr txBox="1"/>
-          <p:nvPr/>
-        </p:nvSpPr>
-        <p:spPr>
-          <a:xfrm>
-            <a:off x="9966960" y="1920240"/>
-            <a:ext cx="1645920" cy="502920"/>
-          </a:xfrm>
-          <a:prstGeom prst="rect">
-            <a:avLst/>
-          </a:prstGeom>
-          <a:noFill/>
-        </p:spPr>
-        <p:txBody>
-          <a:bodyPr wrap="square" lIns="25400" rIns="25400" tIns="25400" bIns="25400" anchor="ctr">
+              <a:rPr sz="2000" b="1">
+                <a:solidFill>
+                  <a:srgbClr val="C8102E"/>
+                </a:solidFill>
+                <a:latin typeface="맑은 고딕"/>
+              </a:rPr>
+              <a:t>🤖 Android (Chrome)</a:t>
+            </a:r>
+          </a:p>
+        </p:txBody>
+      </p:sp>
+      <p:sp>
+        <p:nvSpPr>
+          <p:cNvPr id="10" name="TextBox 9"/>
+          <p:cNvSpPr txBox="1"/>
+          <p:nvPr/>
+        </p:nvSpPr>
+        <p:spPr>
+          <a:xfrm>
+            <a:off x="6400800" y="3017520"/>
+            <a:ext cx="5029200" cy="2468880"/>
+          </a:xfrm>
+          <a:prstGeom prst="rect">
+            <a:avLst/>
+          </a:prstGeom>
+          <a:noFill/>
+        </p:spPr>
+        <p:txBody>
+          <a:bodyPr wrap="square" lIns="25400" rIns="25400" tIns="25400" bIns="25400" anchor="t">
             <a:spAutoFit/>
           </a:bodyPr>
           <a:lstStyle/>
           <a:p>
             <a:pPr algn="l"/>
             <a:r>
-              <a:rPr sz="1200" b="1">
-                <a:solidFill>
-                  <a:srgbClr val="FFFFFF"/>
-                </a:solidFill>
-                <a:latin typeface="맑은 고딕"/>
-              </a:rPr>
-              <a:t>1개당</a:t>
-            </a:r>
-          </a:p>
-        </p:txBody>
-      </p:sp>
-      <p:sp>
-        <p:nvSpPr>
-          <p:cNvPr id="23" name="Rectangle 22"/>
+              <a:rPr sz="1400" b="0">
+                <a:solidFill>
+                  <a:srgbClr val="1A1A1A"/>
+                </a:solidFill>
+                <a:latin typeface="맑은 고딕"/>
+              </a:rPr>
+              <a:t>① 사이트 접속
+② 우상단 ⋮ (점 세 개) 탭
+③ "홈 화면에 추가" 선택
+④ "설치" 또는 "추가" 확인</a:t>
+            </a:r>
+          </a:p>
+        </p:txBody>
+      </p:sp>
+      <p:sp>
+        <p:nvSpPr>
+          <p:cNvPr id="11" name="Rounded Rectangle 10"/>
           <p:cNvSpPr/>
           <p:nvPr/>
         </p:nvSpPr>
         <p:spPr>
           <a:xfrm>
-            <a:off x="6583680" y="2423160"/>
-            <a:ext cx="5029200" cy="502920"/>
-          </a:xfrm>
-          <a:prstGeom prst="rect">
-            <a:avLst/>
-          </a:prstGeom>
-          <a:solidFill>
-            <a:srgbClr val="FFFFFF"/>
-          </a:solidFill>
-          <a:ln>
-            <a:noFill/>
-          </a:ln>
-          <a:effectLst/>
-        </p:spPr>
-        <p:style>
-          <a:lnRef idx="1">
-            <a:schemeClr val="accent1"/>
-          </a:lnRef>
-          <a:fillRef idx="3">
-            <a:schemeClr val="accent1"/>
-          </a:fillRef>
-          <a:effectRef idx="2">
-            <a:schemeClr val="accent1"/>
-          </a:effectRef>
-          <a:fontRef idx="minor">
-            <a:schemeClr val="lt1"/>
-          </a:fontRef>
-        </p:style>
-        <p:txBody>
-          <a:bodyPr rtlCol="0" anchor="ctr"/>
-          <a:lstStyle/>
-          <a:p>
-            <a:pPr algn="ctr"/>
-          </a:p>
-        </p:txBody>
-      </p:sp>
-      <p:sp>
-        <p:nvSpPr>
-          <p:cNvPr id="24" name="TextBox 23"/>
-          <p:cNvSpPr txBox="1"/>
-          <p:nvPr/>
-        </p:nvSpPr>
-        <p:spPr>
-          <a:xfrm>
-            <a:off x="6766560" y="2423160"/>
-            <a:ext cx="3017520" cy="502920"/>
-          </a:xfrm>
-          <a:prstGeom prst="rect">
-            <a:avLst/>
-          </a:prstGeom>
-          <a:noFill/>
-        </p:spPr>
-        <p:txBody>
-          <a:bodyPr wrap="square" lIns="25400" rIns="25400" tIns="25400" bIns="25400" anchor="ctr">
-            <a:spAutoFit/>
-          </a:bodyPr>
-          <a:lstStyle/>
-          <a:p>
-            <a:pPr algn="l"/>
-            <a:r>
-              <a:rPr sz="1200" b="0">
-                <a:solidFill>
-                  <a:srgbClr val="1A1A1A"/>
-                </a:solidFill>
-                <a:latin typeface="맑은 고딕"/>
-              </a:rPr>
-              <a:t>연차</a:t>
-            </a:r>
-          </a:p>
-        </p:txBody>
-      </p:sp>
-      <p:sp>
-        <p:nvSpPr>
-          <p:cNvPr id="25" name="TextBox 24"/>
-          <p:cNvSpPr txBox="1"/>
-          <p:nvPr/>
-        </p:nvSpPr>
-        <p:spPr>
-          <a:xfrm>
-            <a:off x="9966960" y="2423160"/>
-            <a:ext cx="1645920" cy="502920"/>
-          </a:xfrm>
-          <a:prstGeom prst="rect">
-            <a:avLst/>
-          </a:prstGeom>
-          <a:noFill/>
-        </p:spPr>
-        <p:txBody>
-          <a:bodyPr wrap="square" lIns="25400" rIns="25400" tIns="25400" bIns="25400" anchor="ctr">
-            <a:spAutoFit/>
-          </a:bodyPr>
-          <a:lstStyle/>
-          <a:p>
-            <a:pPr algn="l"/>
-            <a:r>
-              <a:rPr sz="1200" b="0">
-                <a:solidFill>
-                  <a:srgbClr val="1A1A1A"/>
-                </a:solidFill>
-                <a:latin typeface="맑은 고딕"/>
-              </a:rPr>
-              <a:t>1.0일</a:t>
-            </a:r>
-          </a:p>
-        </p:txBody>
-      </p:sp>
-      <p:sp>
-        <p:nvSpPr>
-          <p:cNvPr id="26" name="Rectangle 25"/>
-          <p:cNvSpPr/>
-          <p:nvPr/>
-        </p:nvSpPr>
-        <p:spPr>
-          <a:xfrm>
-            <a:off x="6583680" y="2926080"/>
-            <a:ext cx="5029200" cy="502920"/>
-          </a:xfrm>
-          <a:prstGeom prst="rect">
-            <a:avLst/>
+            <a:off x="731520" y="5760720"/>
+            <a:ext cx="10881360" cy="640080"/>
+          </a:xfrm>
+          <a:prstGeom prst="roundRect">
+            <a:avLst>
+              <a:gd name="adj" fmla="val 12000"/>
+            </a:avLst>
           </a:prstGeom>
           <a:solidFill>
             <a:srgbClr val="F5F5F5"/>
@@ -5452,14 +4927,14 @@
       </p:sp>
       <p:sp>
         <p:nvSpPr>
-          <p:cNvPr id="27" name="TextBox 26"/>
-          <p:cNvSpPr txBox="1"/>
-          <p:nvPr/>
-        </p:nvSpPr>
-        <p:spPr>
-          <a:xfrm>
-            <a:off x="6766560" y="2926080"/>
-            <a:ext cx="3017520" cy="502920"/>
+          <p:cNvPr id="12" name="TextBox 11"/>
+          <p:cNvSpPr txBox="1"/>
+          <p:nvPr/>
+        </p:nvSpPr>
+        <p:spPr>
+          <a:xfrm>
+            <a:off x="914400" y="5760720"/>
+            <a:ext cx="10515600" cy="640080"/>
           </a:xfrm>
           <a:prstGeom prst="rect">
             <a:avLst/>
@@ -5474,511 +4949,20 @@
           <a:p>
             <a:pPr algn="l"/>
             <a:r>
-              <a:rPr sz="1200" b="0">
-                <a:solidFill>
-                  <a:srgbClr val="1A1A1A"/>
-                </a:solidFill>
-                <a:latin typeface="맑은 고딕"/>
-              </a:rPr>
-              <a:t>반차(오전/오후)</a:t>
-            </a:r>
-          </a:p>
-        </p:txBody>
-      </p:sp>
-      <p:sp>
-        <p:nvSpPr>
-          <p:cNvPr id="28" name="TextBox 27"/>
-          <p:cNvSpPr txBox="1"/>
-          <p:nvPr/>
-        </p:nvSpPr>
-        <p:spPr>
-          <a:xfrm>
-            <a:off x="9966960" y="2926080"/>
-            <a:ext cx="1645920" cy="502920"/>
-          </a:xfrm>
-          <a:prstGeom prst="rect">
-            <a:avLst/>
-          </a:prstGeom>
-          <a:noFill/>
-        </p:spPr>
-        <p:txBody>
-          <a:bodyPr wrap="square" lIns="25400" rIns="25400" tIns="25400" bIns="25400" anchor="ctr">
-            <a:spAutoFit/>
-          </a:bodyPr>
-          <a:lstStyle/>
-          <a:p>
-            <a:pPr algn="l"/>
-            <a:r>
-              <a:rPr sz="1200" b="0">
-                <a:solidFill>
-                  <a:srgbClr val="1A1A1A"/>
-                </a:solidFill>
-                <a:latin typeface="맑은 고딕"/>
-              </a:rPr>
-              <a:t>0.5일</a:t>
-            </a:r>
-          </a:p>
-        </p:txBody>
-      </p:sp>
-      <p:sp>
-        <p:nvSpPr>
-          <p:cNvPr id="29" name="Rectangle 28"/>
-          <p:cNvSpPr/>
-          <p:nvPr/>
-        </p:nvSpPr>
-        <p:spPr>
-          <a:xfrm>
-            <a:off x="6583680" y="3429000"/>
-            <a:ext cx="5029200" cy="502920"/>
-          </a:xfrm>
-          <a:prstGeom prst="rect">
-            <a:avLst/>
-          </a:prstGeom>
-          <a:solidFill>
-            <a:srgbClr val="FFFFFF"/>
-          </a:solidFill>
-          <a:ln>
-            <a:noFill/>
-          </a:ln>
-          <a:effectLst/>
-        </p:spPr>
-        <p:style>
-          <a:lnRef idx="1">
-            <a:schemeClr val="accent1"/>
-          </a:lnRef>
-          <a:fillRef idx="3">
-            <a:schemeClr val="accent1"/>
-          </a:fillRef>
-          <a:effectRef idx="2">
-            <a:schemeClr val="accent1"/>
-          </a:effectRef>
-          <a:fontRef idx="minor">
-            <a:schemeClr val="lt1"/>
-          </a:fontRef>
-        </p:style>
-        <p:txBody>
-          <a:bodyPr rtlCol="0" anchor="ctr"/>
-          <a:lstStyle/>
-          <a:p>
-            <a:pPr algn="ctr"/>
-          </a:p>
-        </p:txBody>
-      </p:sp>
-      <p:sp>
-        <p:nvSpPr>
-          <p:cNvPr id="30" name="TextBox 29"/>
-          <p:cNvSpPr txBox="1"/>
-          <p:nvPr/>
-        </p:nvSpPr>
-        <p:spPr>
-          <a:xfrm>
-            <a:off x="6766560" y="3429000"/>
-            <a:ext cx="3017520" cy="502920"/>
-          </a:xfrm>
-          <a:prstGeom prst="rect">
-            <a:avLst/>
-          </a:prstGeom>
-          <a:noFill/>
-        </p:spPr>
-        <p:txBody>
-          <a:bodyPr wrap="square" lIns="25400" rIns="25400" tIns="25400" bIns="25400" anchor="ctr">
-            <a:spAutoFit/>
-          </a:bodyPr>
-          <a:lstStyle/>
-          <a:p>
-            <a:pPr algn="l"/>
-            <a:r>
-              <a:rPr sz="1200" b="0">
-                <a:solidFill>
-                  <a:srgbClr val="1A1A1A"/>
-                </a:solidFill>
-                <a:latin typeface="맑은 고딕"/>
-              </a:rPr>
-              <a:t>반반차(오전/오후)</a:t>
-            </a:r>
-          </a:p>
-        </p:txBody>
-      </p:sp>
-      <p:sp>
-        <p:nvSpPr>
-          <p:cNvPr id="31" name="TextBox 30"/>
-          <p:cNvSpPr txBox="1"/>
-          <p:nvPr/>
-        </p:nvSpPr>
-        <p:spPr>
-          <a:xfrm>
-            <a:off x="9966960" y="3429000"/>
-            <a:ext cx="1645920" cy="502920"/>
-          </a:xfrm>
-          <a:prstGeom prst="rect">
-            <a:avLst/>
-          </a:prstGeom>
-          <a:noFill/>
-        </p:spPr>
-        <p:txBody>
-          <a:bodyPr wrap="square" lIns="25400" rIns="25400" tIns="25400" bIns="25400" anchor="ctr">
-            <a:spAutoFit/>
-          </a:bodyPr>
-          <a:lstStyle/>
-          <a:p>
-            <a:pPr algn="l"/>
-            <a:r>
-              <a:rPr sz="1200" b="0">
-                <a:solidFill>
-                  <a:srgbClr val="1A1A1A"/>
-                </a:solidFill>
-                <a:latin typeface="맑은 고딕"/>
-              </a:rPr>
-              <a:t>0.25일</a:t>
-            </a:r>
-          </a:p>
-        </p:txBody>
-      </p:sp>
-      <p:sp>
-        <p:nvSpPr>
-          <p:cNvPr id="32" name="Rectangle 31"/>
-          <p:cNvSpPr/>
-          <p:nvPr/>
-        </p:nvSpPr>
-        <p:spPr>
-          <a:xfrm>
-            <a:off x="6583680" y="3931920"/>
-            <a:ext cx="5029200" cy="502920"/>
-          </a:xfrm>
-          <a:prstGeom prst="rect">
-            <a:avLst/>
-          </a:prstGeom>
-          <a:solidFill>
-            <a:srgbClr val="F5F5F5"/>
-          </a:solidFill>
-          <a:ln>
-            <a:noFill/>
-          </a:ln>
-          <a:effectLst/>
-        </p:spPr>
-        <p:style>
-          <a:lnRef idx="1">
-            <a:schemeClr val="accent1"/>
-          </a:lnRef>
-          <a:fillRef idx="3">
-            <a:schemeClr val="accent1"/>
-          </a:fillRef>
-          <a:effectRef idx="2">
-            <a:schemeClr val="accent1"/>
-          </a:effectRef>
-          <a:fontRef idx="minor">
-            <a:schemeClr val="lt1"/>
-          </a:fontRef>
-        </p:style>
-        <p:txBody>
-          <a:bodyPr rtlCol="0" anchor="ctr"/>
-          <a:lstStyle/>
-          <a:p>
-            <a:pPr algn="ctr"/>
-          </a:p>
-        </p:txBody>
-      </p:sp>
-      <p:sp>
-        <p:nvSpPr>
-          <p:cNvPr id="33" name="TextBox 32"/>
-          <p:cNvSpPr txBox="1"/>
-          <p:nvPr/>
-        </p:nvSpPr>
-        <p:spPr>
-          <a:xfrm>
-            <a:off x="6766560" y="3931920"/>
-            <a:ext cx="3017520" cy="502920"/>
-          </a:xfrm>
-          <a:prstGeom prst="rect">
-            <a:avLst/>
-          </a:prstGeom>
-          <a:noFill/>
-        </p:spPr>
-        <p:txBody>
-          <a:bodyPr wrap="square" lIns="25400" rIns="25400" tIns="25400" bIns="25400" anchor="ctr">
-            <a:spAutoFit/>
-          </a:bodyPr>
-          <a:lstStyle/>
-          <a:p>
-            <a:pPr algn="l"/>
-            <a:r>
-              <a:rPr sz="1200" b="0">
-                <a:solidFill>
-                  <a:srgbClr val="1A1A1A"/>
-                </a:solidFill>
-                <a:latin typeface="맑은 고딕"/>
-              </a:rPr>
-              <a:t>생휴</a:t>
-            </a:r>
-          </a:p>
-        </p:txBody>
-      </p:sp>
-      <p:sp>
-        <p:nvSpPr>
-          <p:cNvPr id="34" name="TextBox 33"/>
-          <p:cNvSpPr txBox="1"/>
-          <p:nvPr/>
-        </p:nvSpPr>
-        <p:spPr>
-          <a:xfrm>
-            <a:off x="9966960" y="3931920"/>
-            <a:ext cx="1645920" cy="502920"/>
-          </a:xfrm>
-          <a:prstGeom prst="rect">
-            <a:avLst/>
-          </a:prstGeom>
-          <a:noFill/>
-        </p:spPr>
-        <p:txBody>
-          <a:bodyPr wrap="square" lIns="25400" rIns="25400" tIns="25400" bIns="25400" anchor="ctr">
-            <a:spAutoFit/>
-          </a:bodyPr>
-          <a:lstStyle/>
-          <a:p>
-            <a:pPr algn="l"/>
-            <a:r>
-              <a:rPr sz="1200" b="0">
-                <a:solidFill>
-                  <a:srgbClr val="1A1A1A"/>
-                </a:solidFill>
-                <a:latin typeface="맑은 고딕"/>
-              </a:rPr>
-              <a:t>1.0일</a:t>
-            </a:r>
-          </a:p>
-        </p:txBody>
-      </p:sp>
-      <p:sp>
-        <p:nvSpPr>
-          <p:cNvPr id="35" name="Rectangle 34"/>
-          <p:cNvSpPr/>
-          <p:nvPr/>
-        </p:nvSpPr>
-        <p:spPr>
-          <a:xfrm>
-            <a:off x="6583680" y="4434840"/>
-            <a:ext cx="5029200" cy="502920"/>
-          </a:xfrm>
-          <a:prstGeom prst="rect">
-            <a:avLst/>
-          </a:prstGeom>
-          <a:solidFill>
-            <a:srgbClr val="FFFFFF"/>
-          </a:solidFill>
-          <a:ln>
-            <a:noFill/>
-          </a:ln>
-          <a:effectLst/>
-        </p:spPr>
-        <p:style>
-          <a:lnRef idx="1">
-            <a:schemeClr val="accent1"/>
-          </a:lnRef>
-          <a:fillRef idx="3">
-            <a:schemeClr val="accent1"/>
-          </a:fillRef>
-          <a:effectRef idx="2">
-            <a:schemeClr val="accent1"/>
-          </a:effectRef>
-          <a:fontRef idx="minor">
-            <a:schemeClr val="lt1"/>
-          </a:fontRef>
-        </p:style>
-        <p:txBody>
-          <a:bodyPr rtlCol="0" anchor="ctr"/>
-          <a:lstStyle/>
-          <a:p>
-            <a:pPr algn="ctr"/>
-          </a:p>
-        </p:txBody>
-      </p:sp>
-      <p:sp>
-        <p:nvSpPr>
-          <p:cNvPr id="36" name="TextBox 35"/>
-          <p:cNvSpPr txBox="1"/>
-          <p:nvPr/>
-        </p:nvSpPr>
-        <p:spPr>
-          <a:xfrm>
-            <a:off x="6766560" y="4434840"/>
-            <a:ext cx="3017520" cy="502920"/>
-          </a:xfrm>
-          <a:prstGeom prst="rect">
-            <a:avLst/>
-          </a:prstGeom>
-          <a:noFill/>
-        </p:spPr>
-        <p:txBody>
-          <a:bodyPr wrap="square" lIns="25400" rIns="25400" tIns="25400" bIns="25400" anchor="ctr">
-            <a:spAutoFit/>
-          </a:bodyPr>
-          <a:lstStyle/>
-          <a:p>
-            <a:pPr algn="l"/>
-            <a:r>
-              <a:rPr sz="1200" b="0">
-                <a:solidFill>
-                  <a:srgbClr val="1A1A1A"/>
-                </a:solidFill>
-                <a:latin typeface="맑은 고딕"/>
-              </a:rPr>
-              <a:t>하기휴가</a:t>
-            </a:r>
-          </a:p>
-        </p:txBody>
-      </p:sp>
-      <p:sp>
-        <p:nvSpPr>
-          <p:cNvPr id="37" name="TextBox 36"/>
-          <p:cNvSpPr txBox="1"/>
-          <p:nvPr/>
-        </p:nvSpPr>
-        <p:spPr>
-          <a:xfrm>
-            <a:off x="9966960" y="4434840"/>
-            <a:ext cx="1645920" cy="502920"/>
-          </a:xfrm>
-          <a:prstGeom prst="rect">
-            <a:avLst/>
-          </a:prstGeom>
-          <a:noFill/>
-        </p:spPr>
-        <p:txBody>
-          <a:bodyPr wrap="square" lIns="25400" rIns="25400" tIns="25400" bIns="25400" anchor="ctr">
-            <a:spAutoFit/>
-          </a:bodyPr>
-          <a:lstStyle/>
-          <a:p>
-            <a:pPr algn="l"/>
-            <a:r>
-              <a:rPr sz="1200" b="0">
-                <a:solidFill>
-                  <a:srgbClr val="1A1A1A"/>
-                </a:solidFill>
-                <a:latin typeface="맑은 고딕"/>
-              </a:rPr>
-              <a:t>3.0일</a:t>
-            </a:r>
-          </a:p>
-        </p:txBody>
-      </p:sp>
-      <p:sp>
-        <p:nvSpPr>
-          <p:cNvPr id="38" name="Rectangle 37"/>
-          <p:cNvSpPr/>
-          <p:nvPr/>
-        </p:nvSpPr>
-        <p:spPr>
-          <a:xfrm>
-            <a:off x="6583680" y="4937760"/>
-            <a:ext cx="5029200" cy="502920"/>
-          </a:xfrm>
-          <a:prstGeom prst="rect">
-            <a:avLst/>
-          </a:prstGeom>
-          <a:solidFill>
-            <a:srgbClr val="F5F5F5"/>
-          </a:solidFill>
-          <a:ln>
-            <a:noFill/>
-          </a:ln>
-          <a:effectLst/>
-        </p:spPr>
-        <p:style>
-          <a:lnRef idx="1">
-            <a:schemeClr val="accent1"/>
-          </a:lnRef>
-          <a:fillRef idx="3">
-            <a:schemeClr val="accent1"/>
-          </a:fillRef>
-          <a:effectRef idx="2">
-            <a:schemeClr val="accent1"/>
-          </a:effectRef>
-          <a:fontRef idx="minor">
-            <a:schemeClr val="lt1"/>
-          </a:fontRef>
-        </p:style>
-        <p:txBody>
-          <a:bodyPr rtlCol="0" anchor="ctr"/>
-          <a:lstStyle/>
-          <a:p>
-            <a:pPr algn="ctr"/>
-          </a:p>
-        </p:txBody>
-      </p:sp>
-      <p:sp>
-        <p:nvSpPr>
-          <p:cNvPr id="39" name="TextBox 38"/>
-          <p:cNvSpPr txBox="1"/>
-          <p:nvPr/>
-        </p:nvSpPr>
-        <p:spPr>
-          <a:xfrm>
-            <a:off x="6766560" y="4937760"/>
-            <a:ext cx="3017520" cy="502920"/>
-          </a:xfrm>
-          <a:prstGeom prst="rect">
-            <a:avLst/>
-          </a:prstGeom>
-          <a:noFill/>
-        </p:spPr>
-        <p:txBody>
-          <a:bodyPr wrap="square" lIns="25400" rIns="25400" tIns="25400" bIns="25400" anchor="ctr">
-            <a:spAutoFit/>
-          </a:bodyPr>
-          <a:lstStyle/>
-          <a:p>
-            <a:pPr algn="l"/>
-            <a:r>
-              <a:rPr sz="1200" b="0">
-                <a:solidFill>
-                  <a:srgbClr val="1A1A1A"/>
-                </a:solidFill>
-                <a:latin typeface="맑은 고딕"/>
-              </a:rPr>
-              <a:t>결근(전/오전/오후)</a:t>
-            </a:r>
-          </a:p>
-        </p:txBody>
-      </p:sp>
-      <p:sp>
-        <p:nvSpPr>
-          <p:cNvPr id="40" name="TextBox 39"/>
-          <p:cNvSpPr txBox="1"/>
-          <p:nvPr/>
-        </p:nvSpPr>
-        <p:spPr>
-          <a:xfrm>
-            <a:off x="9966960" y="4937760"/>
-            <a:ext cx="1645920" cy="502920"/>
-          </a:xfrm>
-          <a:prstGeom prst="rect">
-            <a:avLst/>
-          </a:prstGeom>
-          <a:noFill/>
-        </p:spPr>
-        <p:txBody>
-          <a:bodyPr wrap="square" lIns="25400" rIns="25400" tIns="25400" bIns="25400" anchor="ctr">
-            <a:spAutoFit/>
-          </a:bodyPr>
-          <a:lstStyle/>
-          <a:p>
-            <a:pPr algn="l"/>
-            <a:r>
-              <a:rPr sz="1200" b="0">
-                <a:solidFill>
-                  <a:srgbClr val="1A1A1A"/>
-                </a:solidFill>
-                <a:latin typeface="맑은 고딕"/>
-              </a:rPr>
-              <a:t>1.0/0.5일</a:t>
-            </a:r>
-          </a:p>
-        </p:txBody>
-      </p:sp>
-      <p:sp>
-        <p:nvSpPr>
-          <p:cNvPr id="41" name="TextBox 40"/>
+              <a:rPr sz="1200" b="1">
+                <a:solidFill>
+                  <a:srgbClr val="A30D24"/>
+                </a:solidFill>
+                <a:latin typeface="맑은 고딕"/>
+              </a:rPr>
+              <a:t>💡 추가 후 아이콘 탭 → 풀스크린 앱으로 실행 / 새로고침은 상단 ↻ 아이콘</a:t>
+            </a:r>
+          </a:p>
+        </p:txBody>
+      </p:sp>
+      <p:sp>
+        <p:nvSpPr>
+          <p:cNvPr id="13" name="TextBox 12"/>
           <p:cNvSpPr txBox="1"/>
           <p:nvPr/>
         </p:nvSpPr>
@@ -6006,7 +4990,7 @@
                 </a:solidFill>
                 <a:latin typeface="맑은 고딕"/>
               </a:rPr>
-              <a:t>COSMAX · 생산3팀 파우더 성형실    |    4 / 6</a:t>
+              <a:t>COSMAX · 생산3팀 파우더 성형실    |    4 / 7</a:t>
             </a:r>
           </a:p>
         </p:txBody>
@@ -6103,7 +5087,7 @@
                 </a:solidFill>
                 <a:latin typeface="맑은 고딕"/>
               </a:rPr>
-              <a:t>3. 내 휴가증 확인 &amp; FAQ</a:t>
+              <a:t>3. 휴가증 작성</a:t>
             </a:r>
           </a:p>
         </p:txBody>
@@ -6116,7 +5100,7 @@
         </p:nvSpPr>
         <p:spPr>
           <a:xfrm>
-            <a:off x="731520" y="1280160"/>
+            <a:off x="731520" y="1371600"/>
             <a:ext cx="5486400" cy="457200"/>
           </a:xfrm>
           <a:prstGeom prst="rect">
@@ -6132,27 +5116,447 @@
           <a:p>
             <a:pPr algn="l"/>
             <a:r>
-              <a:rPr sz="1600" b="1">
+              <a:rPr sz="1400" b="1">
+                <a:solidFill>
+                  <a:srgbClr val="1A1A1A"/>
+                </a:solidFill>
+                <a:latin typeface="맑은 고딕"/>
+              </a:rPr>
+              <a:t>왼쪽 [휴가증 작성] 카드에서:</a:t>
+            </a:r>
+          </a:p>
+        </p:txBody>
+      </p:sp>
+      <p:sp>
+        <p:nvSpPr>
+          <p:cNvPr id="5" name="TextBox 4"/>
+          <p:cNvSpPr txBox="1"/>
+          <p:nvPr/>
+        </p:nvSpPr>
+        <p:spPr>
+          <a:xfrm>
+            <a:off x="731520" y="1920240"/>
+            <a:ext cx="365760" cy="457200"/>
+          </a:xfrm>
+          <a:prstGeom prst="rect">
+            <a:avLst/>
+          </a:prstGeom>
+          <a:noFill/>
+        </p:spPr>
+        <p:txBody>
+          <a:bodyPr wrap="square" lIns="25400" rIns="25400" tIns="25400" bIns="25400" anchor="t">
+            <a:spAutoFit/>
+          </a:bodyPr>
+          <a:lstStyle/>
+          <a:p>
+            <a:pPr algn="l"/>
+            <a:r>
+              <a:rPr sz="1500" b="1">
                 <a:solidFill>
                   <a:srgbClr val="C8102E"/>
                 </a:solidFill>
                 <a:latin typeface="맑은 고딕"/>
               </a:rPr>
-              <a:t>내 휴가증 확인</a:t>
-            </a:r>
-          </a:p>
-        </p:txBody>
-      </p:sp>
-      <p:sp>
-        <p:nvSpPr>
-          <p:cNvPr id="5" name="Rounded Rectangle 4"/>
+              <a:t>1.</a:t>
+            </a:r>
+          </a:p>
+        </p:txBody>
+      </p:sp>
+      <p:sp>
+        <p:nvSpPr>
+          <p:cNvPr id="6" name="TextBox 5"/>
+          <p:cNvSpPr txBox="1"/>
+          <p:nvPr/>
+        </p:nvSpPr>
+        <p:spPr>
+          <a:xfrm>
+            <a:off x="1188720" y="1920240"/>
+            <a:ext cx="2011680" cy="457200"/>
+          </a:xfrm>
+          <a:prstGeom prst="rect">
+            <a:avLst/>
+          </a:prstGeom>
+          <a:noFill/>
+        </p:spPr>
+        <p:txBody>
+          <a:bodyPr wrap="square" lIns="25400" rIns="25400" tIns="25400" bIns="25400" anchor="t">
+            <a:spAutoFit/>
+          </a:bodyPr>
+          <a:lstStyle/>
+          <a:p>
+            <a:pPr algn="l"/>
+            <a:r>
+              <a:rPr sz="1400" b="1">
+                <a:solidFill>
+                  <a:srgbClr val="1A1A1A"/>
+                </a:solidFill>
+                <a:latin typeface="맑은 고딕"/>
+              </a:rPr>
+              <a:t>구분 선택</a:t>
+            </a:r>
+          </a:p>
+        </p:txBody>
+      </p:sp>
+      <p:sp>
+        <p:nvSpPr>
+          <p:cNvPr id="7" name="TextBox 6"/>
+          <p:cNvSpPr txBox="1"/>
+          <p:nvPr/>
+        </p:nvSpPr>
+        <p:spPr>
+          <a:xfrm>
+            <a:off x="3291840" y="1920240"/>
+            <a:ext cx="2926080" cy="457200"/>
+          </a:xfrm>
+          <a:prstGeom prst="rect">
+            <a:avLst/>
+          </a:prstGeom>
+          <a:noFill/>
+        </p:spPr>
+        <p:txBody>
+          <a:bodyPr wrap="square" lIns="25400" rIns="25400" tIns="25400" bIns="25400" anchor="t">
+            <a:spAutoFit/>
+          </a:bodyPr>
+          <a:lstStyle/>
+          <a:p>
+            <a:pPr algn="l"/>
+            <a:r>
+              <a:rPr sz="1200" b="0">
+                <a:solidFill>
+                  <a:srgbClr val="777777"/>
+                </a:solidFill>
+                <a:latin typeface="맑은 고딕"/>
+              </a:rPr>
+              <a:t>연차, 반차, 생휴 등</a:t>
+            </a:r>
+          </a:p>
+        </p:txBody>
+      </p:sp>
+      <p:sp>
+        <p:nvSpPr>
+          <p:cNvPr id="8" name="TextBox 7"/>
+          <p:cNvSpPr txBox="1"/>
+          <p:nvPr/>
+        </p:nvSpPr>
+        <p:spPr>
+          <a:xfrm>
+            <a:off x="731520" y="2560320"/>
+            <a:ext cx="365760" cy="457200"/>
+          </a:xfrm>
+          <a:prstGeom prst="rect">
+            <a:avLst/>
+          </a:prstGeom>
+          <a:noFill/>
+        </p:spPr>
+        <p:txBody>
+          <a:bodyPr wrap="square" lIns="25400" rIns="25400" tIns="25400" bIns="25400" anchor="t">
+            <a:spAutoFit/>
+          </a:bodyPr>
+          <a:lstStyle/>
+          <a:p>
+            <a:pPr algn="l"/>
+            <a:r>
+              <a:rPr sz="1500" b="1">
+                <a:solidFill>
+                  <a:srgbClr val="C8102E"/>
+                </a:solidFill>
+                <a:latin typeface="맑은 고딕"/>
+              </a:rPr>
+              <a:t>2.</a:t>
+            </a:r>
+          </a:p>
+        </p:txBody>
+      </p:sp>
+      <p:sp>
+        <p:nvSpPr>
+          <p:cNvPr id="9" name="TextBox 8"/>
+          <p:cNvSpPr txBox="1"/>
+          <p:nvPr/>
+        </p:nvSpPr>
+        <p:spPr>
+          <a:xfrm>
+            <a:off x="1188720" y="2560320"/>
+            <a:ext cx="2011680" cy="457200"/>
+          </a:xfrm>
+          <a:prstGeom prst="rect">
+            <a:avLst/>
+          </a:prstGeom>
+          <a:noFill/>
+        </p:spPr>
+        <p:txBody>
+          <a:bodyPr wrap="square" lIns="25400" rIns="25400" tIns="25400" bIns="25400" anchor="t">
+            <a:spAutoFit/>
+          </a:bodyPr>
+          <a:lstStyle/>
+          <a:p>
+            <a:pPr algn="l"/>
+            <a:r>
+              <a:rPr sz="1400" b="1">
+                <a:solidFill>
+                  <a:srgbClr val="1A1A1A"/>
+                </a:solidFill>
+                <a:latin typeface="맑은 고딕"/>
+              </a:rPr>
+              <a:t>개수 + 기간</a:t>
+            </a:r>
+          </a:p>
+        </p:txBody>
+      </p:sp>
+      <p:sp>
+        <p:nvSpPr>
+          <p:cNvPr id="10" name="TextBox 9"/>
+          <p:cNvSpPr txBox="1"/>
+          <p:nvPr/>
+        </p:nvSpPr>
+        <p:spPr>
+          <a:xfrm>
+            <a:off x="3291840" y="2560320"/>
+            <a:ext cx="2926080" cy="457200"/>
+          </a:xfrm>
+          <a:prstGeom prst="rect">
+            <a:avLst/>
+          </a:prstGeom>
+          <a:noFill/>
+        </p:spPr>
+        <p:txBody>
+          <a:bodyPr wrap="square" lIns="25400" rIns="25400" tIns="25400" bIns="25400" anchor="t">
+            <a:spAutoFit/>
+          </a:bodyPr>
+          <a:lstStyle/>
+          <a:p>
+            <a:pPr algn="l"/>
+            <a:r>
+              <a:rPr sz="1200" b="0">
+                <a:solidFill>
+                  <a:srgbClr val="777777"/>
+                </a:solidFill>
+                <a:latin typeface="맑은 고딕"/>
+              </a:rPr>
+              <a:t>예: 연차 2개</a:t>
+            </a:r>
+          </a:p>
+        </p:txBody>
+      </p:sp>
+      <p:sp>
+        <p:nvSpPr>
+          <p:cNvPr id="11" name="TextBox 10"/>
+          <p:cNvSpPr txBox="1"/>
+          <p:nvPr/>
+        </p:nvSpPr>
+        <p:spPr>
+          <a:xfrm>
+            <a:off x="731520" y="3200400"/>
+            <a:ext cx="365760" cy="457200"/>
+          </a:xfrm>
+          <a:prstGeom prst="rect">
+            <a:avLst/>
+          </a:prstGeom>
+          <a:noFill/>
+        </p:spPr>
+        <p:txBody>
+          <a:bodyPr wrap="square" lIns="25400" rIns="25400" tIns="25400" bIns="25400" anchor="t">
+            <a:spAutoFit/>
+          </a:bodyPr>
+          <a:lstStyle/>
+          <a:p>
+            <a:pPr algn="l"/>
+            <a:r>
+              <a:rPr sz="1500" b="1">
+                <a:solidFill>
+                  <a:srgbClr val="C8102E"/>
+                </a:solidFill>
+                <a:latin typeface="맑은 고딕"/>
+              </a:rPr>
+              <a:t>3.</a:t>
+            </a:r>
+          </a:p>
+        </p:txBody>
+      </p:sp>
+      <p:sp>
+        <p:nvSpPr>
+          <p:cNvPr id="12" name="TextBox 11"/>
+          <p:cNvSpPr txBox="1"/>
+          <p:nvPr/>
+        </p:nvSpPr>
+        <p:spPr>
+          <a:xfrm>
+            <a:off x="1188720" y="3200400"/>
+            <a:ext cx="2011680" cy="457200"/>
+          </a:xfrm>
+          <a:prstGeom prst="rect">
+            <a:avLst/>
+          </a:prstGeom>
+          <a:noFill/>
+        </p:spPr>
+        <p:txBody>
+          <a:bodyPr wrap="square" lIns="25400" rIns="25400" tIns="25400" bIns="25400" anchor="t">
+            <a:spAutoFit/>
+          </a:bodyPr>
+          <a:lstStyle/>
+          <a:p>
+            <a:pPr algn="l"/>
+            <a:r>
+              <a:rPr sz="1400" b="1">
+                <a:solidFill>
+                  <a:srgbClr val="1A1A1A"/>
+                </a:solidFill>
+                <a:latin typeface="맑은 고딕"/>
+              </a:rPr>
+              <a:t>사유 입력</a:t>
+            </a:r>
+          </a:p>
+        </p:txBody>
+      </p:sp>
+      <p:sp>
+        <p:nvSpPr>
+          <p:cNvPr id="13" name="TextBox 12"/>
+          <p:cNvSpPr txBox="1"/>
+          <p:nvPr/>
+        </p:nvSpPr>
+        <p:spPr>
+          <a:xfrm>
+            <a:off x="3291840" y="3200400"/>
+            <a:ext cx="2926080" cy="457200"/>
+          </a:xfrm>
+          <a:prstGeom prst="rect">
+            <a:avLst/>
+          </a:prstGeom>
+          <a:noFill/>
+        </p:spPr>
+        <p:txBody>
+          <a:bodyPr wrap="square" lIns="25400" rIns="25400" tIns="25400" bIns="25400" anchor="t">
+            <a:spAutoFit/>
+          </a:bodyPr>
+          <a:lstStyle/>
+          <a:p>
+            <a:pPr algn="l"/>
+            <a:r>
+              <a:rPr sz="1200" b="0">
+                <a:solidFill>
+                  <a:srgbClr val="777777"/>
+                </a:solidFill>
+                <a:latin typeface="맑은 고딕"/>
+              </a:rPr>
+              <a:t>휴가 사유</a:t>
+            </a:r>
+          </a:p>
+        </p:txBody>
+      </p:sp>
+      <p:sp>
+        <p:nvSpPr>
+          <p:cNvPr id="14" name="TextBox 13"/>
+          <p:cNvSpPr txBox="1"/>
+          <p:nvPr/>
+        </p:nvSpPr>
+        <p:spPr>
+          <a:xfrm>
+            <a:off x="731520" y="3840479"/>
+            <a:ext cx="365760" cy="457200"/>
+          </a:xfrm>
+          <a:prstGeom prst="rect">
+            <a:avLst/>
+          </a:prstGeom>
+          <a:noFill/>
+        </p:spPr>
+        <p:txBody>
+          <a:bodyPr wrap="square" lIns="25400" rIns="25400" tIns="25400" bIns="25400" anchor="t">
+            <a:spAutoFit/>
+          </a:bodyPr>
+          <a:lstStyle/>
+          <a:p>
+            <a:pPr algn="l"/>
+            <a:r>
+              <a:rPr sz="1500" b="1">
+                <a:solidFill>
+                  <a:srgbClr val="C8102E"/>
+                </a:solidFill>
+                <a:latin typeface="맑은 고딕"/>
+              </a:rPr>
+              <a:t>4.</a:t>
+            </a:r>
+          </a:p>
+        </p:txBody>
+      </p:sp>
+      <p:sp>
+        <p:nvSpPr>
+          <p:cNvPr id="15" name="TextBox 14"/>
+          <p:cNvSpPr txBox="1"/>
+          <p:nvPr/>
+        </p:nvSpPr>
+        <p:spPr>
+          <a:xfrm>
+            <a:off x="1188720" y="3840479"/>
+            <a:ext cx="2011680" cy="457200"/>
+          </a:xfrm>
+          <a:prstGeom prst="rect">
+            <a:avLst/>
+          </a:prstGeom>
+          <a:noFill/>
+        </p:spPr>
+        <p:txBody>
+          <a:bodyPr wrap="square" lIns="25400" rIns="25400" tIns="25400" bIns="25400" anchor="t">
+            <a:spAutoFit/>
+          </a:bodyPr>
+          <a:lstStyle/>
+          <a:p>
+            <a:pPr algn="l"/>
+            <a:r>
+              <a:rPr sz="1400" b="1">
+                <a:solidFill>
+                  <a:srgbClr val="1A1A1A"/>
+                </a:solidFill>
+                <a:latin typeface="맑은 고딕"/>
+              </a:rPr>
+              <a:t>[+ 추가]</a:t>
+            </a:r>
+          </a:p>
+        </p:txBody>
+      </p:sp>
+      <p:sp>
+        <p:nvSpPr>
+          <p:cNvPr id="16" name="TextBox 15"/>
+          <p:cNvSpPr txBox="1"/>
+          <p:nvPr/>
+        </p:nvSpPr>
+        <p:spPr>
+          <a:xfrm>
+            <a:off x="3291840" y="3840479"/>
+            <a:ext cx="2926080" cy="457200"/>
+          </a:xfrm>
+          <a:prstGeom prst="rect">
+            <a:avLst/>
+          </a:prstGeom>
+          <a:noFill/>
+        </p:spPr>
+        <p:txBody>
+          <a:bodyPr wrap="square" lIns="25400" rIns="25400" tIns="25400" bIns="25400" anchor="t">
+            <a:spAutoFit/>
+          </a:bodyPr>
+          <a:lstStyle/>
+          <a:p>
+            <a:pPr algn="l"/>
+            <a:r>
+              <a:rPr sz="1200" b="0">
+                <a:solidFill>
+                  <a:srgbClr val="777777"/>
+                </a:solidFill>
+                <a:latin typeface="맑은 고딕"/>
+              </a:rPr>
+              <a:t>클라우드 자동 저장</a:t>
+            </a:r>
+          </a:p>
+        </p:txBody>
+      </p:sp>
+      <p:sp>
+        <p:nvSpPr>
+          <p:cNvPr id="17" name="Rounded Rectangle 16"/>
           <p:cNvSpPr/>
           <p:nvPr/>
         </p:nvSpPr>
         <p:spPr>
           <a:xfrm>
-            <a:off x="731520" y="1828800"/>
-            <a:ext cx="5486400" cy="2194560"/>
+            <a:off x="731520" y="4846320"/>
+            <a:ext cx="5486400" cy="1371600"/>
           </a:xfrm>
           <a:prstGeom prst="roundRect">
             <a:avLst>
@@ -6191,14 +5595,14 @@
       </p:sp>
       <p:sp>
         <p:nvSpPr>
-          <p:cNvPr id="6" name="TextBox 5"/>
-          <p:cNvSpPr txBox="1"/>
-          <p:nvPr/>
-        </p:nvSpPr>
-        <p:spPr>
-          <a:xfrm>
-            <a:off x="914400" y="1965960"/>
-            <a:ext cx="5120640" cy="2011680"/>
+          <p:cNvPr id="18" name="TextBox 17"/>
+          <p:cNvSpPr txBox="1"/>
+          <p:nvPr/>
+        </p:nvSpPr>
+        <p:spPr>
+          <a:xfrm>
+            <a:off x="914400" y="4983480"/>
+            <a:ext cx="5120640" cy="1097280"/>
           </a:xfrm>
           <a:prstGeom prst="rect">
             <a:avLst/>
@@ -6213,35 +5617,295 @@
           <a:p>
             <a:pPr algn="l"/>
             <a:r>
-              <a:rPr sz="1300" b="0">
+              <a:rPr sz="1200" b="0">
                 <a:solidFill>
                   <a:srgbClr val="1A1A1A"/>
                 </a:solidFill>
                 <a:latin typeface="맑은 고딕"/>
               </a:rPr>
-              <a:t>① 상단 [내 휴가증] 클릭
-② 이름 + 휴대폰 마지막 4자리 입력
-③ 서무가 등록 완료한 본인 휴가증 표시
-   (✓ 처리 완료 표시, 최근 14일)</a:t>
-            </a:r>
-          </a:p>
-        </p:txBody>
-      </p:sp>
-      <p:sp>
-        <p:nvSpPr>
-          <p:cNvPr id="7" name="Rounded Rectangle 6"/>
+              <a:t>• 이름·연락처는 자동 채움 (수정 불가)
+• 여러 유형은 휴가증 따로 작성
+  (예: 연차+반차 = 2건)</a:t>
+            </a:r>
+          </a:p>
+        </p:txBody>
+      </p:sp>
+      <p:sp>
+        <p:nvSpPr>
+          <p:cNvPr id="19" name="TextBox 18"/>
+          <p:cNvSpPr txBox="1"/>
+          <p:nvPr/>
+        </p:nvSpPr>
+        <p:spPr>
+          <a:xfrm>
+            <a:off x="6583680" y="1371600"/>
+            <a:ext cx="5029200" cy="457200"/>
+          </a:xfrm>
+          <a:prstGeom prst="rect">
+            <a:avLst/>
+          </a:prstGeom>
+          <a:noFill/>
+        </p:spPr>
+        <p:txBody>
+          <a:bodyPr wrap="square" lIns="25400" rIns="25400" tIns="25400" bIns="25400" anchor="t">
+            <a:spAutoFit/>
+          </a:bodyPr>
+          <a:lstStyle/>
+          <a:p>
+            <a:pPr algn="l"/>
+            <a:r>
+              <a:rPr sz="1400" b="1">
+                <a:solidFill>
+                  <a:srgbClr val="1A1A1A"/>
+                </a:solidFill>
+                <a:latin typeface="맑은 고딕"/>
+              </a:rPr>
+              <a:t>휴가 유형:</a:t>
+            </a:r>
+          </a:p>
+        </p:txBody>
+      </p:sp>
+      <p:sp>
+        <p:nvSpPr>
+          <p:cNvPr id="20" name="Rectangle 19"/>
           <p:cNvSpPr/>
           <p:nvPr/>
         </p:nvSpPr>
         <p:spPr>
           <a:xfrm>
-            <a:off x="731520" y="4206240"/>
-            <a:ext cx="5486400" cy="1828800"/>
-          </a:xfrm>
-          <a:prstGeom prst="roundRect">
-            <a:avLst>
-              <a:gd name="adj" fmla="val 12000"/>
-            </a:avLst>
+            <a:off x="6583680" y="1920240"/>
+            <a:ext cx="5029200" cy="502920"/>
+          </a:xfrm>
+          <a:prstGeom prst="rect">
+            <a:avLst/>
+          </a:prstGeom>
+          <a:solidFill>
+            <a:srgbClr val="C8102E"/>
+          </a:solidFill>
+          <a:ln>
+            <a:noFill/>
+          </a:ln>
+          <a:effectLst/>
+        </p:spPr>
+        <p:style>
+          <a:lnRef idx="1">
+            <a:schemeClr val="accent1"/>
+          </a:lnRef>
+          <a:fillRef idx="3">
+            <a:schemeClr val="accent1"/>
+          </a:fillRef>
+          <a:effectRef idx="2">
+            <a:schemeClr val="accent1"/>
+          </a:effectRef>
+          <a:fontRef idx="minor">
+            <a:schemeClr val="lt1"/>
+          </a:fontRef>
+        </p:style>
+        <p:txBody>
+          <a:bodyPr rtlCol="0" anchor="ctr"/>
+          <a:lstStyle/>
+          <a:p>
+            <a:pPr algn="ctr"/>
+          </a:p>
+        </p:txBody>
+      </p:sp>
+      <p:sp>
+        <p:nvSpPr>
+          <p:cNvPr id="21" name="TextBox 20"/>
+          <p:cNvSpPr txBox="1"/>
+          <p:nvPr/>
+        </p:nvSpPr>
+        <p:spPr>
+          <a:xfrm>
+            <a:off x="6766560" y="1920240"/>
+            <a:ext cx="3017520" cy="502920"/>
+          </a:xfrm>
+          <a:prstGeom prst="rect">
+            <a:avLst/>
+          </a:prstGeom>
+          <a:noFill/>
+        </p:spPr>
+        <p:txBody>
+          <a:bodyPr wrap="square" lIns="25400" rIns="25400" tIns="25400" bIns="25400" anchor="ctr">
+            <a:spAutoFit/>
+          </a:bodyPr>
+          <a:lstStyle/>
+          <a:p>
+            <a:pPr algn="l"/>
+            <a:r>
+              <a:rPr sz="1200" b="1">
+                <a:solidFill>
+                  <a:srgbClr val="FFFFFF"/>
+                </a:solidFill>
+                <a:latin typeface="맑은 고딕"/>
+              </a:rPr>
+              <a:t>구분</a:t>
+            </a:r>
+          </a:p>
+        </p:txBody>
+      </p:sp>
+      <p:sp>
+        <p:nvSpPr>
+          <p:cNvPr id="22" name="TextBox 21"/>
+          <p:cNvSpPr txBox="1"/>
+          <p:nvPr/>
+        </p:nvSpPr>
+        <p:spPr>
+          <a:xfrm>
+            <a:off x="9966960" y="1920240"/>
+            <a:ext cx="1645920" cy="502920"/>
+          </a:xfrm>
+          <a:prstGeom prst="rect">
+            <a:avLst/>
+          </a:prstGeom>
+          <a:noFill/>
+        </p:spPr>
+        <p:txBody>
+          <a:bodyPr wrap="square" lIns="25400" rIns="25400" tIns="25400" bIns="25400" anchor="ctr">
+            <a:spAutoFit/>
+          </a:bodyPr>
+          <a:lstStyle/>
+          <a:p>
+            <a:pPr algn="l"/>
+            <a:r>
+              <a:rPr sz="1200" b="1">
+                <a:solidFill>
+                  <a:srgbClr val="FFFFFF"/>
+                </a:solidFill>
+                <a:latin typeface="맑은 고딕"/>
+              </a:rPr>
+              <a:t>1개당</a:t>
+            </a:r>
+          </a:p>
+        </p:txBody>
+      </p:sp>
+      <p:sp>
+        <p:nvSpPr>
+          <p:cNvPr id="23" name="Rectangle 22"/>
+          <p:cNvSpPr/>
+          <p:nvPr/>
+        </p:nvSpPr>
+        <p:spPr>
+          <a:xfrm>
+            <a:off x="6583680" y="2423160"/>
+            <a:ext cx="5029200" cy="502920"/>
+          </a:xfrm>
+          <a:prstGeom prst="rect">
+            <a:avLst/>
+          </a:prstGeom>
+          <a:solidFill>
+            <a:srgbClr val="FFFFFF"/>
+          </a:solidFill>
+          <a:ln>
+            <a:noFill/>
+          </a:ln>
+          <a:effectLst/>
+        </p:spPr>
+        <p:style>
+          <a:lnRef idx="1">
+            <a:schemeClr val="accent1"/>
+          </a:lnRef>
+          <a:fillRef idx="3">
+            <a:schemeClr val="accent1"/>
+          </a:fillRef>
+          <a:effectRef idx="2">
+            <a:schemeClr val="accent1"/>
+          </a:effectRef>
+          <a:fontRef idx="minor">
+            <a:schemeClr val="lt1"/>
+          </a:fontRef>
+        </p:style>
+        <p:txBody>
+          <a:bodyPr rtlCol="0" anchor="ctr"/>
+          <a:lstStyle/>
+          <a:p>
+            <a:pPr algn="ctr"/>
+          </a:p>
+        </p:txBody>
+      </p:sp>
+      <p:sp>
+        <p:nvSpPr>
+          <p:cNvPr id="24" name="TextBox 23"/>
+          <p:cNvSpPr txBox="1"/>
+          <p:nvPr/>
+        </p:nvSpPr>
+        <p:spPr>
+          <a:xfrm>
+            <a:off x="6766560" y="2423160"/>
+            <a:ext cx="3017520" cy="502920"/>
+          </a:xfrm>
+          <a:prstGeom prst="rect">
+            <a:avLst/>
+          </a:prstGeom>
+          <a:noFill/>
+        </p:spPr>
+        <p:txBody>
+          <a:bodyPr wrap="square" lIns="25400" rIns="25400" tIns="25400" bIns="25400" anchor="ctr">
+            <a:spAutoFit/>
+          </a:bodyPr>
+          <a:lstStyle/>
+          <a:p>
+            <a:pPr algn="l"/>
+            <a:r>
+              <a:rPr sz="1200" b="0">
+                <a:solidFill>
+                  <a:srgbClr val="1A1A1A"/>
+                </a:solidFill>
+                <a:latin typeface="맑은 고딕"/>
+              </a:rPr>
+              <a:t>연차</a:t>
+            </a:r>
+          </a:p>
+        </p:txBody>
+      </p:sp>
+      <p:sp>
+        <p:nvSpPr>
+          <p:cNvPr id="25" name="TextBox 24"/>
+          <p:cNvSpPr txBox="1"/>
+          <p:nvPr/>
+        </p:nvSpPr>
+        <p:spPr>
+          <a:xfrm>
+            <a:off x="9966960" y="2423160"/>
+            <a:ext cx="1645920" cy="502920"/>
+          </a:xfrm>
+          <a:prstGeom prst="rect">
+            <a:avLst/>
+          </a:prstGeom>
+          <a:noFill/>
+        </p:spPr>
+        <p:txBody>
+          <a:bodyPr wrap="square" lIns="25400" rIns="25400" tIns="25400" bIns="25400" anchor="ctr">
+            <a:spAutoFit/>
+          </a:bodyPr>
+          <a:lstStyle/>
+          <a:p>
+            <a:pPr algn="l"/>
+            <a:r>
+              <a:rPr sz="1200" b="0">
+                <a:solidFill>
+                  <a:srgbClr val="1A1A1A"/>
+                </a:solidFill>
+                <a:latin typeface="맑은 고딕"/>
+              </a:rPr>
+              <a:t>1.0일</a:t>
+            </a:r>
+          </a:p>
+        </p:txBody>
+      </p:sp>
+      <p:sp>
+        <p:nvSpPr>
+          <p:cNvPr id="26" name="Rectangle 25"/>
+          <p:cNvSpPr/>
+          <p:nvPr/>
+        </p:nvSpPr>
+        <p:spPr>
+          <a:xfrm>
+            <a:off x="6583680" y="2926080"/>
+            <a:ext cx="5029200" cy="502920"/>
+          </a:xfrm>
+          <a:prstGeom prst="rect">
+            <a:avLst/>
           </a:prstGeom>
           <a:solidFill>
             <a:srgbClr val="F5F5F5"/>
@@ -6275,22 +5939,22 @@
       </p:sp>
       <p:sp>
         <p:nvSpPr>
-          <p:cNvPr id="8" name="TextBox 7"/>
-          <p:cNvSpPr txBox="1"/>
-          <p:nvPr/>
-        </p:nvSpPr>
-        <p:spPr>
-          <a:xfrm>
-            <a:off x="914400" y="4343400"/>
-            <a:ext cx="5120640" cy="1645920"/>
-          </a:xfrm>
-          <a:prstGeom prst="rect">
-            <a:avLst/>
-          </a:prstGeom>
-          <a:noFill/>
-        </p:spPr>
-        <p:txBody>
-          <a:bodyPr wrap="square" lIns="25400" rIns="25400" tIns="25400" bIns="25400" anchor="t">
+          <p:cNvPr id="27" name="TextBox 26"/>
+          <p:cNvSpPr txBox="1"/>
+          <p:nvPr/>
+        </p:nvSpPr>
+        <p:spPr>
+          <a:xfrm>
+            <a:off x="6766560" y="2926080"/>
+            <a:ext cx="3017520" cy="502920"/>
+          </a:xfrm>
+          <a:prstGeom prst="rect">
+            <a:avLst/>
+          </a:prstGeom>
+          <a:noFill/>
+        </p:spPr>
+        <p:txBody>
+          <a:bodyPr wrap="square" lIns="25400" rIns="25400" tIns="25400" bIns="25400" anchor="ctr">
             <a:spAutoFit/>
           </a:bodyPr>
           <a:lstStyle/>
@@ -6303,101 +5967,143 @@
                 </a:solidFill>
                 <a:latin typeface="맑은 고딕"/>
               </a:rPr>
-              <a:t>⚠️ 잘못 작성 시
-작성 직후 우측 카드의 [삭제]로 즉시 취소.
-서무 처리 후엔 별도 요청 필요.</a:t>
-            </a:r>
-          </a:p>
-        </p:txBody>
-      </p:sp>
-      <p:sp>
-        <p:nvSpPr>
-          <p:cNvPr id="9" name="TextBox 8"/>
-          <p:cNvSpPr txBox="1"/>
-          <p:nvPr/>
-        </p:nvSpPr>
-        <p:spPr>
-          <a:xfrm>
-            <a:off x="6583680" y="1280160"/>
-            <a:ext cx="5212080" cy="457200"/>
-          </a:xfrm>
-          <a:prstGeom prst="rect">
-            <a:avLst/>
-          </a:prstGeom>
-          <a:noFill/>
-        </p:spPr>
-        <p:txBody>
-          <a:bodyPr wrap="square" lIns="25400" rIns="25400" tIns="25400" bIns="25400" anchor="t">
+              <a:t>반차(오전/오후)</a:t>
+            </a:r>
+          </a:p>
+        </p:txBody>
+      </p:sp>
+      <p:sp>
+        <p:nvSpPr>
+          <p:cNvPr id="28" name="TextBox 27"/>
+          <p:cNvSpPr txBox="1"/>
+          <p:nvPr/>
+        </p:nvSpPr>
+        <p:spPr>
+          <a:xfrm>
+            <a:off x="9966960" y="2926080"/>
+            <a:ext cx="1645920" cy="502920"/>
+          </a:xfrm>
+          <a:prstGeom prst="rect">
+            <a:avLst/>
+          </a:prstGeom>
+          <a:noFill/>
+        </p:spPr>
+        <p:txBody>
+          <a:bodyPr wrap="square" lIns="25400" rIns="25400" tIns="25400" bIns="25400" anchor="ctr">
             <a:spAutoFit/>
           </a:bodyPr>
           <a:lstStyle/>
           <a:p>
             <a:pPr algn="l"/>
             <a:r>
-              <a:rPr sz="1600" b="1">
-                <a:solidFill>
-                  <a:srgbClr val="C8102E"/>
-                </a:solidFill>
-                <a:latin typeface="맑은 고딕"/>
-              </a:rPr>
-              <a:t>자주 묻는 질문</a:t>
-            </a:r>
-          </a:p>
-        </p:txBody>
-      </p:sp>
-      <p:sp>
-        <p:nvSpPr>
-          <p:cNvPr id="10" name="TextBox 9"/>
-          <p:cNvSpPr txBox="1"/>
-          <p:nvPr/>
-        </p:nvSpPr>
-        <p:spPr>
-          <a:xfrm>
-            <a:off x="6583680" y="1828800"/>
-            <a:ext cx="5212080" cy="365760"/>
-          </a:xfrm>
-          <a:prstGeom prst="rect">
-            <a:avLst/>
-          </a:prstGeom>
-          <a:noFill/>
-        </p:spPr>
-        <p:txBody>
-          <a:bodyPr wrap="square" lIns="25400" rIns="25400" tIns="25400" bIns="25400" anchor="t">
+              <a:rPr sz="1200" b="0">
+                <a:solidFill>
+                  <a:srgbClr val="1A1A1A"/>
+                </a:solidFill>
+                <a:latin typeface="맑은 고딕"/>
+              </a:rPr>
+              <a:t>0.5일</a:t>
+            </a:r>
+          </a:p>
+        </p:txBody>
+      </p:sp>
+      <p:sp>
+        <p:nvSpPr>
+          <p:cNvPr id="29" name="Rectangle 28"/>
+          <p:cNvSpPr/>
+          <p:nvPr/>
+        </p:nvSpPr>
+        <p:spPr>
+          <a:xfrm>
+            <a:off x="6583680" y="3429000"/>
+            <a:ext cx="5029200" cy="502920"/>
+          </a:xfrm>
+          <a:prstGeom prst="rect">
+            <a:avLst/>
+          </a:prstGeom>
+          <a:solidFill>
+            <a:srgbClr val="FFFFFF"/>
+          </a:solidFill>
+          <a:ln>
+            <a:noFill/>
+          </a:ln>
+          <a:effectLst/>
+        </p:spPr>
+        <p:style>
+          <a:lnRef idx="1">
+            <a:schemeClr val="accent1"/>
+          </a:lnRef>
+          <a:fillRef idx="3">
+            <a:schemeClr val="accent1"/>
+          </a:fillRef>
+          <a:effectRef idx="2">
+            <a:schemeClr val="accent1"/>
+          </a:effectRef>
+          <a:fontRef idx="minor">
+            <a:schemeClr val="lt1"/>
+          </a:fontRef>
+        </p:style>
+        <p:txBody>
+          <a:bodyPr rtlCol="0" anchor="ctr"/>
+          <a:lstStyle/>
+          <a:p>
+            <a:pPr algn="ctr"/>
+          </a:p>
+        </p:txBody>
+      </p:sp>
+      <p:sp>
+        <p:nvSpPr>
+          <p:cNvPr id="30" name="TextBox 29"/>
+          <p:cNvSpPr txBox="1"/>
+          <p:nvPr/>
+        </p:nvSpPr>
+        <p:spPr>
+          <a:xfrm>
+            <a:off x="6766560" y="3429000"/>
+            <a:ext cx="3017520" cy="502920"/>
+          </a:xfrm>
+          <a:prstGeom prst="rect">
+            <a:avLst/>
+          </a:prstGeom>
+          <a:noFill/>
+        </p:spPr>
+        <p:txBody>
+          <a:bodyPr wrap="square" lIns="25400" rIns="25400" tIns="25400" bIns="25400" anchor="ctr">
             <a:spAutoFit/>
           </a:bodyPr>
           <a:lstStyle/>
           <a:p>
             <a:pPr algn="l"/>
             <a:r>
-              <a:rPr sz="1300" b="1">
+              <a:rPr sz="1200" b="0">
                 <a:solidFill>
                   <a:srgbClr val="1A1A1A"/>
                 </a:solidFill>
                 <a:latin typeface="맑은 고딕"/>
               </a:rPr>
-              <a:t>Q. 비밀번호 분실?</a:t>
-            </a:r>
-          </a:p>
-        </p:txBody>
-      </p:sp>
-      <p:sp>
-        <p:nvSpPr>
-          <p:cNvPr id="11" name="TextBox 10"/>
-          <p:cNvSpPr txBox="1"/>
-          <p:nvPr/>
-        </p:nvSpPr>
-        <p:spPr>
-          <a:xfrm>
-            <a:off x="6766560" y="2194560"/>
-            <a:ext cx="5029200" cy="457200"/>
-          </a:xfrm>
-          <a:prstGeom prst="rect">
-            <a:avLst/>
-          </a:prstGeom>
-          <a:noFill/>
-        </p:spPr>
-        <p:txBody>
-          <a:bodyPr wrap="square" lIns="25400" rIns="25400" tIns="25400" bIns="25400" anchor="t">
+              <a:t>반반차(오전/오후)</a:t>
+            </a:r>
+          </a:p>
+        </p:txBody>
+      </p:sp>
+      <p:sp>
+        <p:nvSpPr>
+          <p:cNvPr id="31" name="TextBox 30"/>
+          <p:cNvSpPr txBox="1"/>
+          <p:nvPr/>
+        </p:nvSpPr>
+        <p:spPr>
+          <a:xfrm>
+            <a:off x="9966960" y="3429000"/>
+            <a:ext cx="1645920" cy="502920"/>
+          </a:xfrm>
+          <a:prstGeom prst="rect">
+            <a:avLst/>
+          </a:prstGeom>
+          <a:noFill/>
+        </p:spPr>
+        <p:txBody>
+          <a:bodyPr wrap="square" lIns="25400" rIns="25400" tIns="25400" bIns="25400" anchor="ctr">
             <a:spAutoFit/>
           </a:bodyPr>
           <a:lstStyle/>
@@ -6406,68 +6112,112 @@
             <a:r>
               <a:rPr sz="1200" b="0">
                 <a:solidFill>
-                  <a:srgbClr val="777777"/>
-                </a:solidFill>
-                <a:latin typeface="맑은 고딕"/>
-              </a:rPr>
-              <a:t>→ 로그인 화면 [비밀번호 찾기]</a:t>
-            </a:r>
-          </a:p>
-        </p:txBody>
-      </p:sp>
-      <p:sp>
-        <p:nvSpPr>
-          <p:cNvPr id="12" name="TextBox 11"/>
-          <p:cNvSpPr txBox="1"/>
-          <p:nvPr/>
-        </p:nvSpPr>
-        <p:spPr>
-          <a:xfrm>
-            <a:off x="6583680" y="2880360"/>
-            <a:ext cx="5212080" cy="365760"/>
-          </a:xfrm>
-          <a:prstGeom prst="rect">
-            <a:avLst/>
-          </a:prstGeom>
-          <a:noFill/>
-        </p:spPr>
-        <p:txBody>
-          <a:bodyPr wrap="square" lIns="25400" rIns="25400" tIns="25400" bIns="25400" anchor="t">
+                  <a:srgbClr val="1A1A1A"/>
+                </a:solidFill>
+                <a:latin typeface="맑은 고딕"/>
+              </a:rPr>
+              <a:t>0.25일</a:t>
+            </a:r>
+          </a:p>
+        </p:txBody>
+      </p:sp>
+      <p:sp>
+        <p:nvSpPr>
+          <p:cNvPr id="32" name="Rectangle 31"/>
+          <p:cNvSpPr/>
+          <p:nvPr/>
+        </p:nvSpPr>
+        <p:spPr>
+          <a:xfrm>
+            <a:off x="6583680" y="3931920"/>
+            <a:ext cx="5029200" cy="502920"/>
+          </a:xfrm>
+          <a:prstGeom prst="rect">
+            <a:avLst/>
+          </a:prstGeom>
+          <a:solidFill>
+            <a:srgbClr val="F5F5F5"/>
+          </a:solidFill>
+          <a:ln>
+            <a:noFill/>
+          </a:ln>
+          <a:effectLst/>
+        </p:spPr>
+        <p:style>
+          <a:lnRef idx="1">
+            <a:schemeClr val="accent1"/>
+          </a:lnRef>
+          <a:fillRef idx="3">
+            <a:schemeClr val="accent1"/>
+          </a:fillRef>
+          <a:effectRef idx="2">
+            <a:schemeClr val="accent1"/>
+          </a:effectRef>
+          <a:fontRef idx="minor">
+            <a:schemeClr val="lt1"/>
+          </a:fontRef>
+        </p:style>
+        <p:txBody>
+          <a:bodyPr rtlCol="0" anchor="ctr"/>
+          <a:lstStyle/>
+          <a:p>
+            <a:pPr algn="ctr"/>
+          </a:p>
+        </p:txBody>
+      </p:sp>
+      <p:sp>
+        <p:nvSpPr>
+          <p:cNvPr id="33" name="TextBox 32"/>
+          <p:cNvSpPr txBox="1"/>
+          <p:nvPr/>
+        </p:nvSpPr>
+        <p:spPr>
+          <a:xfrm>
+            <a:off x="6766560" y="3931920"/>
+            <a:ext cx="3017520" cy="502920"/>
+          </a:xfrm>
+          <a:prstGeom prst="rect">
+            <a:avLst/>
+          </a:prstGeom>
+          <a:noFill/>
+        </p:spPr>
+        <p:txBody>
+          <a:bodyPr wrap="square" lIns="25400" rIns="25400" tIns="25400" bIns="25400" anchor="ctr">
             <a:spAutoFit/>
           </a:bodyPr>
           <a:lstStyle/>
           <a:p>
             <a:pPr algn="l"/>
             <a:r>
-              <a:rPr sz="1300" b="1">
+              <a:rPr sz="1200" b="0">
                 <a:solidFill>
                   <a:srgbClr val="1A1A1A"/>
                 </a:solidFill>
                 <a:latin typeface="맑은 고딕"/>
               </a:rPr>
-              <a:t>Q. 사번 등록 안 됨?</a:t>
-            </a:r>
-          </a:p>
-        </p:txBody>
-      </p:sp>
-      <p:sp>
-        <p:nvSpPr>
-          <p:cNvPr id="13" name="TextBox 12"/>
-          <p:cNvSpPr txBox="1"/>
-          <p:nvPr/>
-        </p:nvSpPr>
-        <p:spPr>
-          <a:xfrm>
-            <a:off x="6766560" y="3246120"/>
-            <a:ext cx="5029200" cy="457200"/>
-          </a:xfrm>
-          <a:prstGeom prst="rect">
-            <a:avLst/>
-          </a:prstGeom>
-          <a:noFill/>
-        </p:spPr>
-        <p:txBody>
-          <a:bodyPr wrap="square" lIns="25400" rIns="25400" tIns="25400" bIns="25400" anchor="t">
+              <a:t>생휴</a:t>
+            </a:r>
+          </a:p>
+        </p:txBody>
+      </p:sp>
+      <p:sp>
+        <p:nvSpPr>
+          <p:cNvPr id="34" name="TextBox 33"/>
+          <p:cNvSpPr txBox="1"/>
+          <p:nvPr/>
+        </p:nvSpPr>
+        <p:spPr>
+          <a:xfrm>
+            <a:off x="9966960" y="3931920"/>
+            <a:ext cx="1645920" cy="502920"/>
+          </a:xfrm>
+          <a:prstGeom prst="rect">
+            <a:avLst/>
+          </a:prstGeom>
+          <a:noFill/>
+        </p:spPr>
+        <p:txBody>
+          <a:bodyPr wrap="square" lIns="25400" rIns="25400" tIns="25400" bIns="25400" anchor="ctr">
             <a:spAutoFit/>
           </a:bodyPr>
           <a:lstStyle/>
@@ -6476,68 +6226,112 @@
             <a:r>
               <a:rPr sz="1200" b="0">
                 <a:solidFill>
-                  <a:srgbClr val="777777"/>
-                </a:solidFill>
-                <a:latin typeface="맑은 고딕"/>
-              </a:rPr>
-              <a:t>→ 관리자(이동준)에게 요청</a:t>
-            </a:r>
-          </a:p>
-        </p:txBody>
-      </p:sp>
-      <p:sp>
-        <p:nvSpPr>
-          <p:cNvPr id="14" name="TextBox 13"/>
-          <p:cNvSpPr txBox="1"/>
-          <p:nvPr/>
-        </p:nvSpPr>
-        <p:spPr>
-          <a:xfrm>
-            <a:off x="6583680" y="3931920"/>
-            <a:ext cx="5212080" cy="365760"/>
-          </a:xfrm>
-          <a:prstGeom prst="rect">
-            <a:avLst/>
-          </a:prstGeom>
-          <a:noFill/>
-        </p:spPr>
-        <p:txBody>
-          <a:bodyPr wrap="square" lIns="25400" rIns="25400" tIns="25400" bIns="25400" anchor="t">
+                  <a:srgbClr val="1A1A1A"/>
+                </a:solidFill>
+                <a:latin typeface="맑은 고딕"/>
+              </a:rPr>
+              <a:t>1.0일</a:t>
+            </a:r>
+          </a:p>
+        </p:txBody>
+      </p:sp>
+      <p:sp>
+        <p:nvSpPr>
+          <p:cNvPr id="35" name="Rectangle 34"/>
+          <p:cNvSpPr/>
+          <p:nvPr/>
+        </p:nvSpPr>
+        <p:spPr>
+          <a:xfrm>
+            <a:off x="6583680" y="4434840"/>
+            <a:ext cx="5029200" cy="502920"/>
+          </a:xfrm>
+          <a:prstGeom prst="rect">
+            <a:avLst/>
+          </a:prstGeom>
+          <a:solidFill>
+            <a:srgbClr val="FFFFFF"/>
+          </a:solidFill>
+          <a:ln>
+            <a:noFill/>
+          </a:ln>
+          <a:effectLst/>
+        </p:spPr>
+        <p:style>
+          <a:lnRef idx="1">
+            <a:schemeClr val="accent1"/>
+          </a:lnRef>
+          <a:fillRef idx="3">
+            <a:schemeClr val="accent1"/>
+          </a:fillRef>
+          <a:effectRef idx="2">
+            <a:schemeClr val="accent1"/>
+          </a:effectRef>
+          <a:fontRef idx="minor">
+            <a:schemeClr val="lt1"/>
+          </a:fontRef>
+        </p:style>
+        <p:txBody>
+          <a:bodyPr rtlCol="0" anchor="ctr"/>
+          <a:lstStyle/>
+          <a:p>
+            <a:pPr algn="ctr"/>
+          </a:p>
+        </p:txBody>
+      </p:sp>
+      <p:sp>
+        <p:nvSpPr>
+          <p:cNvPr id="36" name="TextBox 35"/>
+          <p:cNvSpPr txBox="1"/>
+          <p:nvPr/>
+        </p:nvSpPr>
+        <p:spPr>
+          <a:xfrm>
+            <a:off x="6766560" y="4434840"/>
+            <a:ext cx="3017520" cy="502920"/>
+          </a:xfrm>
+          <a:prstGeom prst="rect">
+            <a:avLst/>
+          </a:prstGeom>
+          <a:noFill/>
+        </p:spPr>
+        <p:txBody>
+          <a:bodyPr wrap="square" lIns="25400" rIns="25400" tIns="25400" bIns="25400" anchor="ctr">
             <a:spAutoFit/>
           </a:bodyPr>
           <a:lstStyle/>
           <a:p>
             <a:pPr algn="l"/>
             <a:r>
-              <a:rPr sz="1300" b="1">
+              <a:rPr sz="1200" b="0">
                 <a:solidFill>
                   <a:srgbClr val="1A1A1A"/>
                 </a:solidFill>
                 <a:latin typeface="맑은 고딕"/>
               </a:rPr>
-              <a:t>Q. 화면이 옛 디자인?</a:t>
-            </a:r>
-          </a:p>
-        </p:txBody>
-      </p:sp>
-      <p:sp>
-        <p:nvSpPr>
-          <p:cNvPr id="15" name="TextBox 14"/>
-          <p:cNvSpPr txBox="1"/>
-          <p:nvPr/>
-        </p:nvSpPr>
-        <p:spPr>
-          <a:xfrm>
-            <a:off x="6766560" y="4297680"/>
-            <a:ext cx="5029200" cy="457200"/>
-          </a:xfrm>
-          <a:prstGeom prst="rect">
-            <a:avLst/>
-          </a:prstGeom>
-          <a:noFill/>
-        </p:spPr>
-        <p:txBody>
-          <a:bodyPr wrap="square" lIns="25400" rIns="25400" tIns="25400" bIns="25400" anchor="t">
+              <a:t>하기휴가</a:t>
+            </a:r>
+          </a:p>
+        </p:txBody>
+      </p:sp>
+      <p:sp>
+        <p:nvSpPr>
+          <p:cNvPr id="37" name="TextBox 36"/>
+          <p:cNvSpPr txBox="1"/>
+          <p:nvPr/>
+        </p:nvSpPr>
+        <p:spPr>
+          <a:xfrm>
+            <a:off x="9966960" y="4434840"/>
+            <a:ext cx="1645920" cy="502920"/>
+          </a:xfrm>
+          <a:prstGeom prst="rect">
+            <a:avLst/>
+          </a:prstGeom>
+          <a:noFill/>
+        </p:spPr>
+        <p:txBody>
+          <a:bodyPr wrap="square" lIns="25400" rIns="25400" tIns="25400" bIns="25400" anchor="ctr">
             <a:spAutoFit/>
           </a:bodyPr>
           <a:lstStyle/>
@@ -6546,68 +6340,112 @@
             <a:r>
               <a:rPr sz="1200" b="0">
                 <a:solidFill>
-                  <a:srgbClr val="777777"/>
-                </a:solidFill>
-                <a:latin typeface="맑은 고딕"/>
-              </a:rPr>
-              <a:t>→ 상단 ↻ 아이콘 클릭</a:t>
-            </a:r>
-          </a:p>
-        </p:txBody>
-      </p:sp>
-      <p:sp>
-        <p:nvSpPr>
-          <p:cNvPr id="16" name="TextBox 15"/>
-          <p:cNvSpPr txBox="1"/>
-          <p:nvPr/>
-        </p:nvSpPr>
-        <p:spPr>
-          <a:xfrm>
-            <a:off x="6583680" y="4983479"/>
-            <a:ext cx="5212080" cy="365760"/>
-          </a:xfrm>
-          <a:prstGeom prst="rect">
-            <a:avLst/>
-          </a:prstGeom>
-          <a:noFill/>
-        </p:spPr>
-        <p:txBody>
-          <a:bodyPr wrap="square" lIns="25400" rIns="25400" tIns="25400" bIns="25400" anchor="t">
+                  <a:srgbClr val="1A1A1A"/>
+                </a:solidFill>
+                <a:latin typeface="맑은 고딕"/>
+              </a:rPr>
+              <a:t>3.0일</a:t>
+            </a:r>
+          </a:p>
+        </p:txBody>
+      </p:sp>
+      <p:sp>
+        <p:nvSpPr>
+          <p:cNvPr id="38" name="Rectangle 37"/>
+          <p:cNvSpPr/>
+          <p:nvPr/>
+        </p:nvSpPr>
+        <p:spPr>
+          <a:xfrm>
+            <a:off x="6583680" y="4937760"/>
+            <a:ext cx="5029200" cy="502920"/>
+          </a:xfrm>
+          <a:prstGeom prst="rect">
+            <a:avLst/>
+          </a:prstGeom>
+          <a:solidFill>
+            <a:srgbClr val="F5F5F5"/>
+          </a:solidFill>
+          <a:ln>
+            <a:noFill/>
+          </a:ln>
+          <a:effectLst/>
+        </p:spPr>
+        <p:style>
+          <a:lnRef idx="1">
+            <a:schemeClr val="accent1"/>
+          </a:lnRef>
+          <a:fillRef idx="3">
+            <a:schemeClr val="accent1"/>
+          </a:fillRef>
+          <a:effectRef idx="2">
+            <a:schemeClr val="accent1"/>
+          </a:effectRef>
+          <a:fontRef idx="minor">
+            <a:schemeClr val="lt1"/>
+          </a:fontRef>
+        </p:style>
+        <p:txBody>
+          <a:bodyPr rtlCol="0" anchor="ctr"/>
+          <a:lstStyle/>
+          <a:p>
+            <a:pPr algn="ctr"/>
+          </a:p>
+        </p:txBody>
+      </p:sp>
+      <p:sp>
+        <p:nvSpPr>
+          <p:cNvPr id="39" name="TextBox 38"/>
+          <p:cNvSpPr txBox="1"/>
+          <p:nvPr/>
+        </p:nvSpPr>
+        <p:spPr>
+          <a:xfrm>
+            <a:off x="6766560" y="4937760"/>
+            <a:ext cx="3017520" cy="502920"/>
+          </a:xfrm>
+          <a:prstGeom prst="rect">
+            <a:avLst/>
+          </a:prstGeom>
+          <a:noFill/>
+        </p:spPr>
+        <p:txBody>
+          <a:bodyPr wrap="square" lIns="25400" rIns="25400" tIns="25400" bIns="25400" anchor="ctr">
             <a:spAutoFit/>
           </a:bodyPr>
           <a:lstStyle/>
           <a:p>
             <a:pPr algn="l"/>
             <a:r>
-              <a:rPr sz="1300" b="1">
+              <a:rPr sz="1200" b="0">
                 <a:solidFill>
                   <a:srgbClr val="1A1A1A"/>
                 </a:solidFill>
                 <a:latin typeface="맑은 고딕"/>
               </a:rPr>
-              <a:t>Q. 서버 저장 실패?</a:t>
-            </a:r>
-          </a:p>
-        </p:txBody>
-      </p:sp>
-      <p:sp>
-        <p:nvSpPr>
-          <p:cNvPr id="17" name="TextBox 16"/>
-          <p:cNvSpPr txBox="1"/>
-          <p:nvPr/>
-        </p:nvSpPr>
-        <p:spPr>
-          <a:xfrm>
-            <a:off x="6766560" y="5349239"/>
-            <a:ext cx="5029200" cy="457200"/>
-          </a:xfrm>
-          <a:prstGeom prst="rect">
-            <a:avLst/>
-          </a:prstGeom>
-          <a:noFill/>
-        </p:spPr>
-        <p:txBody>
-          <a:bodyPr wrap="square" lIns="25400" rIns="25400" tIns="25400" bIns="25400" anchor="t">
+              <a:t>결근(전/오전/오후)</a:t>
+            </a:r>
+          </a:p>
+        </p:txBody>
+      </p:sp>
+      <p:sp>
+        <p:nvSpPr>
+          <p:cNvPr id="40" name="TextBox 39"/>
+          <p:cNvSpPr txBox="1"/>
+          <p:nvPr/>
+        </p:nvSpPr>
+        <p:spPr>
+          <a:xfrm>
+            <a:off x="9966960" y="4937760"/>
+            <a:ext cx="1645920" cy="502920"/>
+          </a:xfrm>
+          <a:prstGeom prst="rect">
+            <a:avLst/>
+          </a:prstGeom>
+          <a:noFill/>
+        </p:spPr>
+        <p:txBody>
+          <a:bodyPr wrap="square" lIns="25400" rIns="25400" tIns="25400" bIns="25400" anchor="ctr">
             <a:spAutoFit/>
           </a:bodyPr>
           <a:lstStyle/>
@@ -6616,18 +6454,18 @@
             <a:r>
               <a:rPr sz="1200" b="0">
                 <a:solidFill>
-                  <a:srgbClr val="777777"/>
-                </a:solidFill>
-                <a:latin typeface="맑은 고딕"/>
-              </a:rPr>
-              <a:t>→ 인터넷 확인 후 재작성</a:t>
-            </a:r>
-          </a:p>
-        </p:txBody>
-      </p:sp>
-      <p:sp>
-        <p:nvSpPr>
-          <p:cNvPr id="18" name="TextBox 17"/>
+                  <a:srgbClr val="1A1A1A"/>
+                </a:solidFill>
+                <a:latin typeface="맑은 고딕"/>
+              </a:rPr>
+              <a:t>1.0/0.5일</a:t>
+            </a:r>
+          </a:p>
+        </p:txBody>
+      </p:sp>
+      <p:sp>
+        <p:nvSpPr>
+          <p:cNvPr id="41" name="TextBox 40"/>
           <p:cNvSpPr txBox="1"/>
           <p:nvPr/>
         </p:nvSpPr>
@@ -6655,7 +6493,7 @@
                 </a:solidFill>
                 <a:latin typeface="맑은 고딕"/>
               </a:rPr>
-              <a:t>COSMAX · 생산3팀 파우더 성형실    |    5 / 6</a:t>
+              <a:t>COSMAX · 생산3팀 파우더 성형실    |    5 / 7</a:t>
             </a:r>
           </a:p>
         </p:txBody>
@@ -6669,6 +6507,655 @@
 </file>
 
 <file path=ppt/slides/slide6.xml><?xml version="1.0" encoding="utf-8"?>
+<p:sld xmlns:a="http://schemas.openxmlformats.org/drawingml/2006/main" xmlns:p="http://schemas.openxmlformats.org/presentationml/2006/main" xmlns:r="http://schemas.openxmlformats.org/officeDocument/2006/relationships">
+  <p:cSld>
+    <p:spTree>
+      <p:nvGrpSpPr>
+        <p:cNvPr id="1" name=""/>
+        <p:cNvGrpSpPr/>
+        <p:nvPr/>
+      </p:nvGrpSpPr>
+      <p:grpSpPr/>
+      <p:sp>
+        <p:nvSpPr>
+          <p:cNvPr id="2" name="Rectangle 1"/>
+          <p:cNvSpPr/>
+          <p:nvPr/>
+        </p:nvSpPr>
+        <p:spPr>
+          <a:xfrm>
+            <a:off x="0" y="0"/>
+            <a:ext cx="12191695" cy="914400"/>
+          </a:xfrm>
+          <a:prstGeom prst="rect">
+            <a:avLst/>
+          </a:prstGeom>
+          <a:solidFill>
+            <a:srgbClr val="C8102E"/>
+          </a:solidFill>
+          <a:ln>
+            <a:noFill/>
+          </a:ln>
+          <a:effectLst/>
+        </p:spPr>
+        <p:style>
+          <a:lnRef idx="1">
+            <a:schemeClr val="accent1"/>
+          </a:lnRef>
+          <a:fillRef idx="3">
+            <a:schemeClr val="accent1"/>
+          </a:fillRef>
+          <a:effectRef idx="2">
+            <a:schemeClr val="accent1"/>
+          </a:effectRef>
+          <a:fontRef idx="minor">
+            <a:schemeClr val="lt1"/>
+          </a:fontRef>
+        </p:style>
+        <p:txBody>
+          <a:bodyPr rtlCol="0" anchor="ctr"/>
+          <a:lstStyle/>
+          <a:p>
+            <a:pPr algn="ctr"/>
+          </a:p>
+        </p:txBody>
+      </p:sp>
+      <p:sp>
+        <p:nvSpPr>
+          <p:cNvPr id="3" name="TextBox 2"/>
+          <p:cNvSpPr txBox="1"/>
+          <p:nvPr/>
+        </p:nvSpPr>
+        <p:spPr>
+          <a:xfrm>
+            <a:off x="457200" y="182880"/>
+            <a:ext cx="11247120" cy="548640"/>
+          </a:xfrm>
+          <a:prstGeom prst="rect">
+            <a:avLst/>
+          </a:prstGeom>
+          <a:noFill/>
+        </p:spPr>
+        <p:txBody>
+          <a:bodyPr wrap="square" lIns="25400" rIns="25400" tIns="25400" bIns="25400" anchor="t">
+            <a:spAutoFit/>
+          </a:bodyPr>
+          <a:lstStyle/>
+          <a:p>
+            <a:pPr algn="l"/>
+            <a:r>
+              <a:rPr sz="2800" b="1">
+                <a:solidFill>
+                  <a:srgbClr val="FFFFFF"/>
+                </a:solidFill>
+                <a:latin typeface="맑은 고딕"/>
+              </a:rPr>
+              <a:t>4. 내 휴가증 확인 &amp; FAQ</a:t>
+            </a:r>
+          </a:p>
+        </p:txBody>
+      </p:sp>
+      <p:sp>
+        <p:nvSpPr>
+          <p:cNvPr id="4" name="TextBox 3"/>
+          <p:cNvSpPr txBox="1"/>
+          <p:nvPr/>
+        </p:nvSpPr>
+        <p:spPr>
+          <a:xfrm>
+            <a:off x="731520" y="1280160"/>
+            <a:ext cx="5486400" cy="457200"/>
+          </a:xfrm>
+          <a:prstGeom prst="rect">
+            <a:avLst/>
+          </a:prstGeom>
+          <a:noFill/>
+        </p:spPr>
+        <p:txBody>
+          <a:bodyPr wrap="square" lIns="25400" rIns="25400" tIns="25400" bIns="25400" anchor="t">
+            <a:spAutoFit/>
+          </a:bodyPr>
+          <a:lstStyle/>
+          <a:p>
+            <a:pPr algn="l"/>
+            <a:r>
+              <a:rPr sz="1600" b="1">
+                <a:solidFill>
+                  <a:srgbClr val="C8102E"/>
+                </a:solidFill>
+                <a:latin typeface="맑은 고딕"/>
+              </a:rPr>
+              <a:t>내 휴가증 확인</a:t>
+            </a:r>
+          </a:p>
+        </p:txBody>
+      </p:sp>
+      <p:sp>
+        <p:nvSpPr>
+          <p:cNvPr id="5" name="Rounded Rectangle 4"/>
+          <p:cNvSpPr/>
+          <p:nvPr/>
+        </p:nvSpPr>
+        <p:spPr>
+          <a:xfrm>
+            <a:off x="731520" y="1828800"/>
+            <a:ext cx="5486400" cy="2194560"/>
+          </a:xfrm>
+          <a:prstGeom prst="roundRect">
+            <a:avLst>
+              <a:gd name="adj" fmla="val 12000"/>
+            </a:avLst>
+          </a:prstGeom>
+          <a:solidFill>
+            <a:srgbClr val="FFF5F5"/>
+          </a:solidFill>
+          <a:ln>
+            <a:noFill/>
+          </a:ln>
+          <a:effectLst/>
+        </p:spPr>
+        <p:style>
+          <a:lnRef idx="1">
+            <a:schemeClr val="accent1"/>
+          </a:lnRef>
+          <a:fillRef idx="3">
+            <a:schemeClr val="accent1"/>
+          </a:fillRef>
+          <a:effectRef idx="2">
+            <a:schemeClr val="accent1"/>
+          </a:effectRef>
+          <a:fontRef idx="minor">
+            <a:schemeClr val="lt1"/>
+          </a:fontRef>
+        </p:style>
+        <p:txBody>
+          <a:bodyPr rtlCol="0" anchor="ctr"/>
+          <a:lstStyle/>
+          <a:p>
+            <a:pPr algn="ctr"/>
+          </a:p>
+        </p:txBody>
+      </p:sp>
+      <p:sp>
+        <p:nvSpPr>
+          <p:cNvPr id="6" name="TextBox 5"/>
+          <p:cNvSpPr txBox="1"/>
+          <p:nvPr/>
+        </p:nvSpPr>
+        <p:spPr>
+          <a:xfrm>
+            <a:off x="914400" y="1965960"/>
+            <a:ext cx="5120640" cy="2011680"/>
+          </a:xfrm>
+          <a:prstGeom prst="rect">
+            <a:avLst/>
+          </a:prstGeom>
+          <a:noFill/>
+        </p:spPr>
+        <p:txBody>
+          <a:bodyPr wrap="square" lIns="25400" rIns="25400" tIns="25400" bIns="25400" anchor="t">
+            <a:spAutoFit/>
+          </a:bodyPr>
+          <a:lstStyle/>
+          <a:p>
+            <a:pPr algn="l"/>
+            <a:r>
+              <a:rPr sz="1300" b="0">
+                <a:solidFill>
+                  <a:srgbClr val="1A1A1A"/>
+                </a:solidFill>
+                <a:latin typeface="맑은 고딕"/>
+              </a:rPr>
+              <a:t>① 상단 [내 휴가증] 클릭
+② 이름 + 휴대폰 마지막 4자리 입력
+③ 서무가 등록 완료한 본인 휴가증 표시
+   (✓ 처리 완료 표시, 최근 14일)</a:t>
+            </a:r>
+          </a:p>
+        </p:txBody>
+      </p:sp>
+      <p:sp>
+        <p:nvSpPr>
+          <p:cNvPr id="7" name="Rounded Rectangle 6"/>
+          <p:cNvSpPr/>
+          <p:nvPr/>
+        </p:nvSpPr>
+        <p:spPr>
+          <a:xfrm>
+            <a:off x="731520" y="4206240"/>
+            <a:ext cx="5486400" cy="1828800"/>
+          </a:xfrm>
+          <a:prstGeom prst="roundRect">
+            <a:avLst>
+              <a:gd name="adj" fmla="val 12000"/>
+            </a:avLst>
+          </a:prstGeom>
+          <a:solidFill>
+            <a:srgbClr val="F5F5F5"/>
+          </a:solidFill>
+          <a:ln>
+            <a:noFill/>
+          </a:ln>
+          <a:effectLst/>
+        </p:spPr>
+        <p:style>
+          <a:lnRef idx="1">
+            <a:schemeClr val="accent1"/>
+          </a:lnRef>
+          <a:fillRef idx="3">
+            <a:schemeClr val="accent1"/>
+          </a:fillRef>
+          <a:effectRef idx="2">
+            <a:schemeClr val="accent1"/>
+          </a:effectRef>
+          <a:fontRef idx="minor">
+            <a:schemeClr val="lt1"/>
+          </a:fontRef>
+        </p:style>
+        <p:txBody>
+          <a:bodyPr rtlCol="0" anchor="ctr"/>
+          <a:lstStyle/>
+          <a:p>
+            <a:pPr algn="ctr"/>
+          </a:p>
+        </p:txBody>
+      </p:sp>
+      <p:sp>
+        <p:nvSpPr>
+          <p:cNvPr id="8" name="TextBox 7"/>
+          <p:cNvSpPr txBox="1"/>
+          <p:nvPr/>
+        </p:nvSpPr>
+        <p:spPr>
+          <a:xfrm>
+            <a:off x="914400" y="4343400"/>
+            <a:ext cx="5120640" cy="1645920"/>
+          </a:xfrm>
+          <a:prstGeom prst="rect">
+            <a:avLst/>
+          </a:prstGeom>
+          <a:noFill/>
+        </p:spPr>
+        <p:txBody>
+          <a:bodyPr wrap="square" lIns="25400" rIns="25400" tIns="25400" bIns="25400" anchor="t">
+            <a:spAutoFit/>
+          </a:bodyPr>
+          <a:lstStyle/>
+          <a:p>
+            <a:pPr algn="l"/>
+            <a:r>
+              <a:rPr sz="1200" b="0">
+                <a:solidFill>
+                  <a:srgbClr val="1A1A1A"/>
+                </a:solidFill>
+                <a:latin typeface="맑은 고딕"/>
+              </a:rPr>
+              <a:t>⚠️ 잘못 작성 시
+작성 직후 우측 카드의 [삭제]로 즉시 취소.
+서무 처리 후엔 별도 요청 필요.</a:t>
+            </a:r>
+          </a:p>
+        </p:txBody>
+      </p:sp>
+      <p:sp>
+        <p:nvSpPr>
+          <p:cNvPr id="9" name="TextBox 8"/>
+          <p:cNvSpPr txBox="1"/>
+          <p:nvPr/>
+        </p:nvSpPr>
+        <p:spPr>
+          <a:xfrm>
+            <a:off x="6583680" y="1280160"/>
+            <a:ext cx="5212080" cy="457200"/>
+          </a:xfrm>
+          <a:prstGeom prst="rect">
+            <a:avLst/>
+          </a:prstGeom>
+          <a:noFill/>
+        </p:spPr>
+        <p:txBody>
+          <a:bodyPr wrap="square" lIns="25400" rIns="25400" tIns="25400" bIns="25400" anchor="t">
+            <a:spAutoFit/>
+          </a:bodyPr>
+          <a:lstStyle/>
+          <a:p>
+            <a:pPr algn="l"/>
+            <a:r>
+              <a:rPr sz="1600" b="1">
+                <a:solidFill>
+                  <a:srgbClr val="C8102E"/>
+                </a:solidFill>
+                <a:latin typeface="맑은 고딕"/>
+              </a:rPr>
+              <a:t>자주 묻는 질문</a:t>
+            </a:r>
+          </a:p>
+        </p:txBody>
+      </p:sp>
+      <p:sp>
+        <p:nvSpPr>
+          <p:cNvPr id="10" name="TextBox 9"/>
+          <p:cNvSpPr txBox="1"/>
+          <p:nvPr/>
+        </p:nvSpPr>
+        <p:spPr>
+          <a:xfrm>
+            <a:off x="6583680" y="1828800"/>
+            <a:ext cx="5212080" cy="365760"/>
+          </a:xfrm>
+          <a:prstGeom prst="rect">
+            <a:avLst/>
+          </a:prstGeom>
+          <a:noFill/>
+        </p:spPr>
+        <p:txBody>
+          <a:bodyPr wrap="square" lIns="25400" rIns="25400" tIns="25400" bIns="25400" anchor="t">
+            <a:spAutoFit/>
+          </a:bodyPr>
+          <a:lstStyle/>
+          <a:p>
+            <a:pPr algn="l"/>
+            <a:r>
+              <a:rPr sz="1300" b="1">
+                <a:solidFill>
+                  <a:srgbClr val="1A1A1A"/>
+                </a:solidFill>
+                <a:latin typeface="맑은 고딕"/>
+              </a:rPr>
+              <a:t>Q. 비밀번호 분실?</a:t>
+            </a:r>
+          </a:p>
+        </p:txBody>
+      </p:sp>
+      <p:sp>
+        <p:nvSpPr>
+          <p:cNvPr id="11" name="TextBox 10"/>
+          <p:cNvSpPr txBox="1"/>
+          <p:nvPr/>
+        </p:nvSpPr>
+        <p:spPr>
+          <a:xfrm>
+            <a:off x="6766560" y="2194560"/>
+            <a:ext cx="5029200" cy="457200"/>
+          </a:xfrm>
+          <a:prstGeom prst="rect">
+            <a:avLst/>
+          </a:prstGeom>
+          <a:noFill/>
+        </p:spPr>
+        <p:txBody>
+          <a:bodyPr wrap="square" lIns="25400" rIns="25400" tIns="25400" bIns="25400" anchor="t">
+            <a:spAutoFit/>
+          </a:bodyPr>
+          <a:lstStyle/>
+          <a:p>
+            <a:pPr algn="l"/>
+            <a:r>
+              <a:rPr sz="1200" b="0">
+                <a:solidFill>
+                  <a:srgbClr val="777777"/>
+                </a:solidFill>
+                <a:latin typeface="맑은 고딕"/>
+              </a:rPr>
+              <a:t>→ 로그인 화면 [비밀번호 찾기]</a:t>
+            </a:r>
+          </a:p>
+        </p:txBody>
+      </p:sp>
+      <p:sp>
+        <p:nvSpPr>
+          <p:cNvPr id="12" name="TextBox 11"/>
+          <p:cNvSpPr txBox="1"/>
+          <p:nvPr/>
+        </p:nvSpPr>
+        <p:spPr>
+          <a:xfrm>
+            <a:off x="6583680" y="2880360"/>
+            <a:ext cx="5212080" cy="365760"/>
+          </a:xfrm>
+          <a:prstGeom prst="rect">
+            <a:avLst/>
+          </a:prstGeom>
+          <a:noFill/>
+        </p:spPr>
+        <p:txBody>
+          <a:bodyPr wrap="square" lIns="25400" rIns="25400" tIns="25400" bIns="25400" anchor="t">
+            <a:spAutoFit/>
+          </a:bodyPr>
+          <a:lstStyle/>
+          <a:p>
+            <a:pPr algn="l"/>
+            <a:r>
+              <a:rPr sz="1300" b="1">
+                <a:solidFill>
+                  <a:srgbClr val="1A1A1A"/>
+                </a:solidFill>
+                <a:latin typeface="맑은 고딕"/>
+              </a:rPr>
+              <a:t>Q. 사번 등록 안 됨?</a:t>
+            </a:r>
+          </a:p>
+        </p:txBody>
+      </p:sp>
+      <p:sp>
+        <p:nvSpPr>
+          <p:cNvPr id="13" name="TextBox 12"/>
+          <p:cNvSpPr txBox="1"/>
+          <p:nvPr/>
+        </p:nvSpPr>
+        <p:spPr>
+          <a:xfrm>
+            <a:off x="6766560" y="3246120"/>
+            <a:ext cx="5029200" cy="457200"/>
+          </a:xfrm>
+          <a:prstGeom prst="rect">
+            <a:avLst/>
+          </a:prstGeom>
+          <a:noFill/>
+        </p:spPr>
+        <p:txBody>
+          <a:bodyPr wrap="square" lIns="25400" rIns="25400" tIns="25400" bIns="25400" anchor="t">
+            <a:spAutoFit/>
+          </a:bodyPr>
+          <a:lstStyle/>
+          <a:p>
+            <a:pPr algn="l"/>
+            <a:r>
+              <a:rPr sz="1200" b="0">
+                <a:solidFill>
+                  <a:srgbClr val="777777"/>
+                </a:solidFill>
+                <a:latin typeface="맑은 고딕"/>
+              </a:rPr>
+              <a:t>→ 관리자(이동준)에게 요청</a:t>
+            </a:r>
+          </a:p>
+        </p:txBody>
+      </p:sp>
+      <p:sp>
+        <p:nvSpPr>
+          <p:cNvPr id="14" name="TextBox 13"/>
+          <p:cNvSpPr txBox="1"/>
+          <p:nvPr/>
+        </p:nvSpPr>
+        <p:spPr>
+          <a:xfrm>
+            <a:off x="6583680" y="3931920"/>
+            <a:ext cx="5212080" cy="365760"/>
+          </a:xfrm>
+          <a:prstGeom prst="rect">
+            <a:avLst/>
+          </a:prstGeom>
+          <a:noFill/>
+        </p:spPr>
+        <p:txBody>
+          <a:bodyPr wrap="square" lIns="25400" rIns="25400" tIns="25400" bIns="25400" anchor="t">
+            <a:spAutoFit/>
+          </a:bodyPr>
+          <a:lstStyle/>
+          <a:p>
+            <a:pPr algn="l"/>
+            <a:r>
+              <a:rPr sz="1300" b="1">
+                <a:solidFill>
+                  <a:srgbClr val="1A1A1A"/>
+                </a:solidFill>
+                <a:latin typeface="맑은 고딕"/>
+              </a:rPr>
+              <a:t>Q. 화면이 옛 디자인?</a:t>
+            </a:r>
+          </a:p>
+        </p:txBody>
+      </p:sp>
+      <p:sp>
+        <p:nvSpPr>
+          <p:cNvPr id="15" name="TextBox 14"/>
+          <p:cNvSpPr txBox="1"/>
+          <p:nvPr/>
+        </p:nvSpPr>
+        <p:spPr>
+          <a:xfrm>
+            <a:off x="6766560" y="4297680"/>
+            <a:ext cx="5029200" cy="457200"/>
+          </a:xfrm>
+          <a:prstGeom prst="rect">
+            <a:avLst/>
+          </a:prstGeom>
+          <a:noFill/>
+        </p:spPr>
+        <p:txBody>
+          <a:bodyPr wrap="square" lIns="25400" rIns="25400" tIns="25400" bIns="25400" anchor="t">
+            <a:spAutoFit/>
+          </a:bodyPr>
+          <a:lstStyle/>
+          <a:p>
+            <a:pPr algn="l"/>
+            <a:r>
+              <a:rPr sz="1200" b="0">
+                <a:solidFill>
+                  <a:srgbClr val="777777"/>
+                </a:solidFill>
+                <a:latin typeface="맑은 고딕"/>
+              </a:rPr>
+              <a:t>→ 상단 ↻ 아이콘 클릭</a:t>
+            </a:r>
+          </a:p>
+        </p:txBody>
+      </p:sp>
+      <p:sp>
+        <p:nvSpPr>
+          <p:cNvPr id="16" name="TextBox 15"/>
+          <p:cNvSpPr txBox="1"/>
+          <p:nvPr/>
+        </p:nvSpPr>
+        <p:spPr>
+          <a:xfrm>
+            <a:off x="6583680" y="4983479"/>
+            <a:ext cx="5212080" cy="365760"/>
+          </a:xfrm>
+          <a:prstGeom prst="rect">
+            <a:avLst/>
+          </a:prstGeom>
+          <a:noFill/>
+        </p:spPr>
+        <p:txBody>
+          <a:bodyPr wrap="square" lIns="25400" rIns="25400" tIns="25400" bIns="25400" anchor="t">
+            <a:spAutoFit/>
+          </a:bodyPr>
+          <a:lstStyle/>
+          <a:p>
+            <a:pPr algn="l"/>
+            <a:r>
+              <a:rPr sz="1300" b="1">
+                <a:solidFill>
+                  <a:srgbClr val="1A1A1A"/>
+                </a:solidFill>
+                <a:latin typeface="맑은 고딕"/>
+              </a:rPr>
+              <a:t>Q. 서버 저장 실패?</a:t>
+            </a:r>
+          </a:p>
+        </p:txBody>
+      </p:sp>
+      <p:sp>
+        <p:nvSpPr>
+          <p:cNvPr id="17" name="TextBox 16"/>
+          <p:cNvSpPr txBox="1"/>
+          <p:nvPr/>
+        </p:nvSpPr>
+        <p:spPr>
+          <a:xfrm>
+            <a:off x="6766560" y="5349239"/>
+            <a:ext cx="5029200" cy="457200"/>
+          </a:xfrm>
+          <a:prstGeom prst="rect">
+            <a:avLst/>
+          </a:prstGeom>
+          <a:noFill/>
+        </p:spPr>
+        <p:txBody>
+          <a:bodyPr wrap="square" lIns="25400" rIns="25400" tIns="25400" bIns="25400" anchor="t">
+            <a:spAutoFit/>
+          </a:bodyPr>
+          <a:lstStyle/>
+          <a:p>
+            <a:pPr algn="l"/>
+            <a:r>
+              <a:rPr sz="1200" b="0">
+                <a:solidFill>
+                  <a:srgbClr val="777777"/>
+                </a:solidFill>
+                <a:latin typeface="맑은 고딕"/>
+              </a:rPr>
+              <a:t>→ 인터넷 확인 후 재작성</a:t>
+            </a:r>
+          </a:p>
+        </p:txBody>
+      </p:sp>
+      <p:sp>
+        <p:nvSpPr>
+          <p:cNvPr id="18" name="TextBox 17"/>
+          <p:cNvSpPr txBox="1"/>
+          <p:nvPr/>
+        </p:nvSpPr>
+        <p:spPr>
+          <a:xfrm>
+            <a:off x="365760" y="6400800"/>
+            <a:ext cx="11521440" cy="274320"/>
+          </a:xfrm>
+          <a:prstGeom prst="rect">
+            <a:avLst/>
+          </a:prstGeom>
+          <a:noFill/>
+        </p:spPr>
+        <p:txBody>
+          <a:bodyPr wrap="square" lIns="25400" rIns="25400" tIns="25400" bIns="25400" anchor="t">
+            <a:spAutoFit/>
+          </a:bodyPr>
+          <a:lstStyle/>
+          <a:p>
+            <a:pPr algn="r"/>
+            <a:r>
+              <a:rPr sz="900" b="0">
+                <a:solidFill>
+                  <a:srgbClr val="777777"/>
+                </a:solidFill>
+                <a:latin typeface="맑은 고딕"/>
+              </a:rPr>
+              <a:t>COSMAX · 생산3팀 파우더 성형실    |    6 / 7</a:t>
+            </a:r>
+          </a:p>
+        </p:txBody>
+      </p:sp>
+    </p:spTree>
+  </p:cSld>
+  <p:clrMapOvr>
+    <a:masterClrMapping/>
+  </p:clrMapOvr>
+</p:sld>
+</file>
+
+<file path=ppt/slides/slide7.xml><?xml version="1.0" encoding="utf-8"?>
 <p:sld xmlns:a="http://schemas.openxmlformats.org/drawingml/2006/main" xmlns:p="http://schemas.openxmlformats.org/presentationml/2006/main" xmlns:r="http://schemas.openxmlformats.org/officeDocument/2006/relationships">
   <p:cSld>
     <p:spTree>

--- a/docs/휴가증 자동 반영 프로그램 안내 (작업자용).pptx
+++ b/docs/휴가증 자동 반영 프로그램 안내 (작업자용).pptx
@@ -11,7 +11,6 @@
     <p:sldId id="259" r:id="rId10"/>
     <p:sldId id="260" r:id="rId11"/>
     <p:sldId id="261" r:id="rId12"/>
-    <p:sldId id="262" r:id="rId13"/>
   </p:sldIdLst>
   <p:sldSz cx="12191695" cy="6858000" type="screen4x3"/>
   <p:notesSz cx="6858000" cy="9144000"/>
@@ -3757,7 +3756,7 @@
                 </a:solidFill>
                 <a:latin typeface="맑은 고딕"/>
               </a:rPr>
-              <a:t>COSMAX · 생산3팀 파우더 성형실    |    2 / 7</a:t>
+              <a:t>COSMAX · 생산3팀 파우더 성형실    |    2 / 6</a:t>
             </a:r>
           </a:p>
         </p:txBody>
@@ -4504,7 +4503,7 @@
                 </a:solidFill>
                 <a:latin typeface="맑은 고딕"/>
               </a:rPr>
-              <a:t>COSMAX · 생산3팀 파우더 성형실    |    3 / 7</a:t>
+              <a:t>COSMAX · 생산3팀 파우더 성형실    |    3 / 6</a:t>
             </a:r>
           </a:p>
         </p:txBody>
@@ -4990,7 +4989,7 @@
                 </a:solidFill>
                 <a:latin typeface="맑은 고딕"/>
               </a:rPr>
-              <a:t>COSMAX · 생산3팀 파우더 성형실    |    4 / 7</a:t>
+              <a:t>COSMAX · 생산3팀 파우더 성형실    |    4 / 6</a:t>
             </a:r>
           </a:p>
         </p:txBody>
@@ -6493,7 +6492,7 @@
                 </a:solidFill>
                 <a:latin typeface="맑은 고딕"/>
               </a:rPr>
-              <a:t>COSMAX · 생산3팀 파우더 성형실    |    5 / 7</a:t>
+              <a:t>COSMAX · 생산3팀 파우더 성형실    |    5 / 6</a:t>
             </a:r>
           </a:p>
         </p:txBody>
@@ -7142,253 +7141,7 @@
                 </a:solidFill>
                 <a:latin typeface="맑은 고딕"/>
               </a:rPr>
-              <a:t>COSMAX · 생산3팀 파우더 성형실    |    6 / 7</a:t>
-            </a:r>
-          </a:p>
-        </p:txBody>
-      </p:sp>
-    </p:spTree>
-  </p:cSld>
-  <p:clrMapOvr>
-    <a:masterClrMapping/>
-  </p:clrMapOvr>
-</p:sld>
-</file>
-
-<file path=ppt/slides/slide7.xml><?xml version="1.0" encoding="utf-8"?>
-<p:sld xmlns:a="http://schemas.openxmlformats.org/drawingml/2006/main" xmlns:p="http://schemas.openxmlformats.org/presentationml/2006/main" xmlns:r="http://schemas.openxmlformats.org/officeDocument/2006/relationships">
-  <p:cSld>
-    <p:spTree>
-      <p:nvGrpSpPr>
-        <p:cNvPr id="1" name=""/>
-        <p:cNvGrpSpPr/>
-        <p:nvPr/>
-      </p:nvGrpSpPr>
-      <p:grpSpPr/>
-      <p:sp>
-        <p:nvSpPr>
-          <p:cNvPr id="2" name="Rectangle 1"/>
-          <p:cNvSpPr/>
-          <p:nvPr/>
-        </p:nvSpPr>
-        <p:spPr>
-          <a:xfrm>
-            <a:off x="0" y="0"/>
-            <a:ext cx="12191695" cy="6858000"/>
-          </a:xfrm>
-          <a:prstGeom prst="rect">
-            <a:avLst/>
-          </a:prstGeom>
-          <a:solidFill>
-            <a:srgbClr val="C8102E"/>
-          </a:solidFill>
-          <a:ln>
-            <a:noFill/>
-          </a:ln>
-          <a:effectLst/>
-        </p:spPr>
-        <p:style>
-          <a:lnRef idx="1">
-            <a:schemeClr val="accent1"/>
-          </a:lnRef>
-          <a:fillRef idx="3">
-            <a:schemeClr val="accent1"/>
-          </a:fillRef>
-          <a:effectRef idx="2">
-            <a:schemeClr val="accent1"/>
-          </a:effectRef>
-          <a:fontRef idx="minor">
-            <a:schemeClr val="lt1"/>
-          </a:fontRef>
-        </p:style>
-        <p:txBody>
-          <a:bodyPr rtlCol="0" anchor="ctr"/>
-          <a:lstStyle/>
-          <a:p>
-            <a:pPr algn="ctr"/>
-          </a:p>
-        </p:txBody>
-      </p:sp>
-      <p:sp>
-        <p:nvSpPr>
-          <p:cNvPr id="3" name="TextBox 2"/>
-          <p:cNvSpPr txBox="1"/>
-          <p:nvPr/>
-        </p:nvSpPr>
-        <p:spPr>
-          <a:xfrm>
-            <a:off x="457200" y="2011680"/>
-            <a:ext cx="11247120" cy="914400"/>
-          </a:xfrm>
-          <a:prstGeom prst="rect">
-            <a:avLst/>
-          </a:prstGeom>
-          <a:noFill/>
-        </p:spPr>
-        <p:txBody>
-          <a:bodyPr wrap="square" lIns="25400" rIns="25400" tIns="25400" bIns="25400" anchor="t">
-            <a:spAutoFit/>
-          </a:bodyPr>
-          <a:lstStyle/>
-          <a:p>
-            <a:pPr algn="ctr"/>
-            <a:r>
-              <a:rPr sz="5400" b="1">
-                <a:solidFill>
-                  <a:srgbClr val="FFFFFF"/>
-                </a:solidFill>
-                <a:latin typeface="맑은 고딕"/>
-              </a:rPr>
-              <a:t>감사합니다</a:t>
-            </a:r>
-          </a:p>
-        </p:txBody>
-      </p:sp>
-      <p:sp>
-        <p:nvSpPr>
-          <p:cNvPr id="4" name="Rectangle 3"/>
-          <p:cNvSpPr/>
-          <p:nvPr/>
-        </p:nvSpPr>
-        <p:spPr>
-          <a:xfrm>
-            <a:off x="5029200" y="3291840"/>
-            <a:ext cx="2103120" cy="38100"/>
-          </a:xfrm>
-          <a:prstGeom prst="rect">
-            <a:avLst/>
-          </a:prstGeom>
-          <a:solidFill>
-            <a:srgbClr val="FFFFFF"/>
-          </a:solidFill>
-          <a:ln>
-            <a:noFill/>
-          </a:ln>
-          <a:effectLst/>
-        </p:spPr>
-        <p:style>
-          <a:lnRef idx="1">
-            <a:schemeClr val="accent1"/>
-          </a:lnRef>
-          <a:fillRef idx="3">
-            <a:schemeClr val="accent1"/>
-          </a:fillRef>
-          <a:effectRef idx="2">
-            <a:schemeClr val="accent1"/>
-          </a:effectRef>
-          <a:fontRef idx="minor">
-            <a:schemeClr val="lt1"/>
-          </a:fontRef>
-        </p:style>
-        <p:txBody>
-          <a:bodyPr rtlCol="0" anchor="ctr"/>
-          <a:lstStyle/>
-          <a:p>
-            <a:pPr algn="ctr"/>
-          </a:p>
-        </p:txBody>
-      </p:sp>
-      <p:sp>
-        <p:nvSpPr>
-          <p:cNvPr id="5" name="TextBox 4"/>
-          <p:cNvSpPr txBox="1"/>
-          <p:nvPr/>
-        </p:nvSpPr>
-        <p:spPr>
-          <a:xfrm>
-            <a:off x="457200" y="3840480"/>
-            <a:ext cx="11247120" cy="548640"/>
-          </a:xfrm>
-          <a:prstGeom prst="rect">
-            <a:avLst/>
-          </a:prstGeom>
-          <a:noFill/>
-        </p:spPr>
-        <p:txBody>
-          <a:bodyPr wrap="square" lIns="25400" rIns="25400" tIns="25400" bIns="25400" anchor="t">
-            <a:spAutoFit/>
-          </a:bodyPr>
-          <a:lstStyle/>
-          <a:p>
-            <a:pPr algn="ctr"/>
-            <a:r>
-              <a:rPr sz="2000" b="0">
-                <a:solidFill>
-                  <a:srgbClr val="FFFFFF"/>
-                </a:solidFill>
-                <a:latin typeface="맑은 고딕"/>
-              </a:rPr>
-              <a:t>휴가증은 본인이 직접, 빠르고 정확하게.</a:t>
-            </a:r>
-          </a:p>
-        </p:txBody>
-      </p:sp>
-      <p:sp>
-        <p:nvSpPr>
-          <p:cNvPr id="6" name="TextBox 5"/>
-          <p:cNvSpPr txBox="1"/>
-          <p:nvPr/>
-        </p:nvSpPr>
-        <p:spPr>
-          <a:xfrm>
-            <a:off x="457200" y="5212080"/>
-            <a:ext cx="11247120" cy="457200"/>
-          </a:xfrm>
-          <a:prstGeom prst="rect">
-            <a:avLst/>
-          </a:prstGeom>
-          <a:noFill/>
-        </p:spPr>
-        <p:txBody>
-          <a:bodyPr wrap="square" lIns="25400" rIns="25400" tIns="25400" bIns="25400" anchor="t">
-            <a:spAutoFit/>
-          </a:bodyPr>
-          <a:lstStyle/>
-          <a:p>
-            <a:pPr algn="ctr"/>
-            <a:r>
-              <a:rPr sz="1400" b="0">
-                <a:solidFill>
-                  <a:srgbClr val="FFFFFF"/>
-                </a:solidFill>
-                <a:latin typeface="맑은 고딕"/>
-              </a:rPr>
-              <a:t>문의 — 관리자 이동준 (생산3팀)</a:t>
-            </a:r>
-          </a:p>
-        </p:txBody>
-      </p:sp>
-      <p:sp>
-        <p:nvSpPr>
-          <p:cNvPr id="7" name="TextBox 6"/>
-          <p:cNvSpPr txBox="1"/>
-          <p:nvPr/>
-        </p:nvSpPr>
-        <p:spPr>
-          <a:xfrm>
-            <a:off x="457200" y="5760720"/>
-            <a:ext cx="11247120" cy="365760"/>
-          </a:xfrm>
-          <a:prstGeom prst="rect">
-            <a:avLst/>
-          </a:prstGeom>
-          <a:noFill/>
-        </p:spPr>
-        <p:txBody>
-          <a:bodyPr wrap="square" lIns="25400" rIns="25400" tIns="25400" bIns="25400" anchor="t">
-            <a:spAutoFit/>
-          </a:bodyPr>
-          <a:lstStyle/>
-          <a:p>
-            <a:pPr algn="ctr"/>
-            <a:r>
-              <a:rPr sz="1200" b="0">
-                <a:solidFill>
-                  <a:srgbClr val="FFFFFF"/>
-                </a:solidFill>
-                <a:latin typeface="맑은 고딕"/>
-              </a:rPr>
-              <a:t>사이트:  djlee-cosmax.github.io/Vacation-Permit-Auto-System/</a:t>
+              <a:t>COSMAX · 생산3팀 파우더 성형실    |    6 / 6</a:t>
             </a:r>
           </a:p>
         </p:txBody>

--- a/docs/휴가증 자동 반영 프로그램 안내 (작업자용).pptx
+++ b/docs/휴가증 자동 반영 프로그램 안내 (작업자용).pptx
@@ -4468,7 +4468,7 @@
                 </a:solidFill>
                 <a:latin typeface="맑은 고딕"/>
               </a:rPr>
-              <a:t>⚠️ 첫 로그인 후 상단 [비밀번호 변경] → 새 비밀번호(숫자 6자리 이상) + 보안 질문 등록</a:t>
+              <a:t>⚠️ 첫 로그인 후 [내 정보] → [비밀번호 변경] → 새 비밀번호(숫자 6~10자리) + 보안 질문 등록</a:t>
             </a:r>
           </a:p>
         </p:txBody>
@@ -5624,7 +5624,8 @@
               </a:rPr>
               <a:t>• 이름·연락처는 자동 채움 (수정 불가)
 • 여러 유형은 휴가증 따로 작성
-  (예: 연차+반차 = 2건)</a:t>
+  (예: 연차+반차 = 2건)
+• 같은 날짜 합계 1일 초과 시 등록 차단</a:t>
             </a:r>
           </a:p>
         </p:txBody>
@@ -6706,8 +6707,8 @@
                 <a:latin typeface="맑은 고딕"/>
               </a:rPr>
               <a:t>① 상단 [내 휴가증] 클릭
-② 이름 + 휴대폰 마지막 4자리 입력
-③ 서무가 등록 완료한 본인 휴가증 표시
+② 서무가 등록 완료한 본인 휴가증이
+   바로 표시됩니다.
    (✓ 처리 완료 표시, 최근 14일)</a:t>
             </a:r>
           </a:p>

--- a/docs/휴가증 자동 반영 프로그램 안내 (작업자용).pptx
+++ b/docs/휴가증 자동 반영 프로그램 안내 (작업자용).pptx
@@ -3351,7 +3351,7 @@
                 </a:solidFill>
                 <a:latin typeface="맑은 고딕"/>
               </a:rPr>
-              <a:t>발행: 2026-05-22  ·  담당: 이동준</a:t>
+              <a:t>발행: 2026-05-28  ·  개정: 2026-08-24  ·  담당: 이동준</a:t>
             </a:r>
           </a:p>
         </p:txBody>
@@ -4400,8 +4400,8 @@
         </p:nvSpPr>
         <p:spPr>
           <a:xfrm>
-            <a:off x="914400" y="5212080"/>
-            <a:ext cx="10332720" cy="1005840"/>
+            <a:off x="914400" y="5074920"/>
+            <a:ext cx="10332720" cy="1234440"/>
           </a:xfrm>
           <a:prstGeom prst="roundRect">
             <a:avLst>
@@ -4446,8 +4446,8 @@
         </p:nvSpPr>
         <p:spPr>
           <a:xfrm>
-            <a:off x="1188720" y="5349240"/>
-            <a:ext cx="9875520" cy="731520"/>
+            <a:off x="1188720" y="5166360"/>
+            <a:ext cx="9875520" cy="1051560"/>
           </a:xfrm>
           <a:prstGeom prst="rect">
             <a:avLst/>
@@ -4468,7 +4468,8 @@
                 </a:solidFill>
                 <a:latin typeface="맑은 고딕"/>
               </a:rPr>
-              <a:t>⚠️ 첫 로그인 후 [내 정보] → [비밀번호 변경] → 새 비밀번호(숫자 6~10자리) + 보안 질문 등록</a:t>
+              <a:t>⚠️ 첫 로그인 후 [내 정보] → [비밀번호 변경] → 새 비밀번호(숫자 6~10자리)
+⏱ 10분 동안 조작이 없으면 자동 로그아웃됩니다 — 다시 로그인하면 됩니다.</a:t>
             </a:r>
           </a:p>
         </p:txBody>
@@ -5554,8 +5555,8 @@
         </p:nvSpPr>
         <p:spPr>
           <a:xfrm>
-            <a:off x="731520" y="4846320"/>
-            <a:ext cx="5486400" cy="1371600"/>
+            <a:off x="731520" y="4617720"/>
+            <a:ext cx="5486400" cy="1600200"/>
           </a:xfrm>
           <a:prstGeom prst="roundRect">
             <a:avLst>
@@ -5600,8 +5601,8 @@
         </p:nvSpPr>
         <p:spPr>
           <a:xfrm>
-            <a:off x="914400" y="4983480"/>
-            <a:ext cx="5120640" cy="1097280"/>
+            <a:off x="914400" y="4736592"/>
+            <a:ext cx="5120640" cy="1371600"/>
           </a:xfrm>
           <a:prstGeom prst="rect">
             <a:avLst/>
@@ -5623,9 +5624,10 @@
                 <a:latin typeface="맑은 고딕"/>
               </a:rPr>
               <a:t>• 이름·연락처는 자동 채움 (수정 불가)
-• 여러 유형은 휴가증 따로 작성
-  (예: 연차+반차 = 2건)
-• 같은 날짜 합계 1일 초과 시 등록 차단</a:t>
+• 여러 유형은 휴가증 따로 작성 (예: 연차+반차 = 2건)
+• 같은 날짜 합계 1일 초과 시 등록 차단
+• 잔여보다 많이 신청하면 작성 차단
+• 서무가 처리 완료한 휴가증은 재등록 불가</a:t>
             </a:r>
           </a:p>
         </p:txBody>
@@ -6709,7 +6711,9 @@
               <a:t>① 상단 [내 휴가증] 클릭
 ② 서무가 등록 완료한 본인 휴가증이
    바로 표시됩니다.
-   (✓ 처리 완료 표시, 최근 14일)</a:t>
+   (✓ 처리 완료 표시, 최근 14일)
+③ 위쪽에 내 잔여 휴가(개수)도 함께 표시
+   연차 · 생휴 · 하기휴가(5~10월)</a:t>
             </a:r>
           </a:p>
         </p:txBody>
@@ -6722,8 +6726,8 @@
         </p:nvSpPr>
         <p:spPr>
           <a:xfrm>
-            <a:off x="731520" y="4206240"/>
-            <a:ext cx="5486400" cy="1828800"/>
+            <a:off x="731520" y="4343400"/>
+            <a:ext cx="5486400" cy="1143000"/>
           </a:xfrm>
           <a:prstGeom prst="roundRect">
             <a:avLst>
@@ -6768,8 +6772,8 @@
         </p:nvSpPr>
         <p:spPr>
           <a:xfrm>
-            <a:off x="914400" y="4343400"/>
-            <a:ext cx="5120640" cy="1645920"/>
+            <a:off x="914400" y="4434840"/>
+            <a:ext cx="5120640" cy="960120"/>
           </a:xfrm>
           <a:prstGeom prst="rect">
             <a:avLst/>
@@ -6840,8 +6844,8 @@
         </p:nvSpPr>
         <p:spPr>
           <a:xfrm>
-            <a:off x="6583680" y="1828800"/>
-            <a:ext cx="5212080" cy="365760"/>
+            <a:off x="6583680" y="1783080"/>
+            <a:ext cx="5212080" cy="320040"/>
           </a:xfrm>
           <a:prstGeom prst="rect">
             <a:avLst/>
@@ -6875,8 +6879,8 @@
         </p:nvSpPr>
         <p:spPr>
           <a:xfrm>
-            <a:off x="6766560" y="2194560"/>
-            <a:ext cx="5029200" cy="457200"/>
+            <a:off x="6766560" y="2103120"/>
+            <a:ext cx="5029200" cy="502920"/>
           </a:xfrm>
           <a:prstGeom prst="rect">
             <a:avLst/>
@@ -6897,7 +6901,8 @@
                 </a:solidFill>
                 <a:latin typeface="맑은 고딕"/>
               </a:rPr>
-              <a:t>→ 로그인 화면 [비밀번호 찾기]</a:t>
+              <a:t>→ 서무에게 초기화 요청
+     (관리자 처리 후 1234로 로그인)</a:t>
             </a:r>
           </a:p>
         </p:txBody>
@@ -6910,8 +6915,8 @@
         </p:nvSpPr>
         <p:spPr>
           <a:xfrm>
-            <a:off x="6583680" y="2880360"/>
-            <a:ext cx="5212080" cy="365760"/>
+            <a:off x="6583680" y="2651760"/>
+            <a:ext cx="5212080" cy="320040"/>
           </a:xfrm>
           <a:prstGeom prst="rect">
             <a:avLst/>
@@ -6932,6 +6937,76 @@
                 </a:solidFill>
                 <a:latin typeface="맑은 고딕"/>
               </a:rPr>
+              <a:t>Q. 잔여가 부족하다고 나옴?</a:t>
+            </a:r>
+          </a:p>
+        </p:txBody>
+      </p:sp>
+      <p:sp>
+        <p:nvSpPr>
+          <p:cNvPr id="13" name="TextBox 12"/>
+          <p:cNvSpPr txBox="1"/>
+          <p:nvPr/>
+        </p:nvSpPr>
+        <p:spPr>
+          <a:xfrm>
+            <a:off x="6766560" y="2971800"/>
+            <a:ext cx="5029200" cy="502920"/>
+          </a:xfrm>
+          <a:prstGeom prst="rect">
+            <a:avLst/>
+          </a:prstGeom>
+          <a:noFill/>
+        </p:spPr>
+        <p:txBody>
+          <a:bodyPr wrap="square" lIns="25400" rIns="25400" tIns="25400" bIns="25400" anchor="t">
+            <a:spAutoFit/>
+          </a:bodyPr>
+          <a:lstStyle/>
+          <a:p>
+            <a:pPr algn="l"/>
+            <a:r>
+              <a:rPr sz="1200" b="0">
+                <a:solidFill>
+                  <a:srgbClr val="777777"/>
+                </a:solidFill>
+                <a:latin typeface="맑은 고딕"/>
+              </a:rPr>
+              <a:t>→ [내 휴가증] 상단에서 남은 개수 확인</a:t>
+            </a:r>
+          </a:p>
+        </p:txBody>
+      </p:sp>
+      <p:sp>
+        <p:nvSpPr>
+          <p:cNvPr id="14" name="TextBox 13"/>
+          <p:cNvSpPr txBox="1"/>
+          <p:nvPr/>
+        </p:nvSpPr>
+        <p:spPr>
+          <a:xfrm>
+            <a:off x="6583680" y="3520439"/>
+            <a:ext cx="5212080" cy="320040"/>
+          </a:xfrm>
+          <a:prstGeom prst="rect">
+            <a:avLst/>
+          </a:prstGeom>
+          <a:noFill/>
+        </p:spPr>
+        <p:txBody>
+          <a:bodyPr wrap="square" lIns="25400" rIns="25400" tIns="25400" bIns="25400" anchor="t">
+            <a:spAutoFit/>
+          </a:bodyPr>
+          <a:lstStyle/>
+          <a:p>
+            <a:pPr algn="l"/>
+            <a:r>
+              <a:rPr sz="1300" b="1">
+                <a:solidFill>
+                  <a:srgbClr val="1A1A1A"/>
+                </a:solidFill>
+                <a:latin typeface="맑은 고딕"/>
+              </a:rPr>
               <a:t>Q. 사번 등록 안 됨?</a:t>
             </a:r>
           </a:p>
@@ -6939,14 +7014,14 @@
       </p:sp>
       <p:sp>
         <p:nvSpPr>
-          <p:cNvPr id="13" name="TextBox 12"/>
-          <p:cNvSpPr txBox="1"/>
-          <p:nvPr/>
-        </p:nvSpPr>
-        <p:spPr>
-          <a:xfrm>
-            <a:off x="6766560" y="3246120"/>
-            <a:ext cx="5029200" cy="457200"/>
+          <p:cNvPr id="15" name="TextBox 14"/>
+          <p:cNvSpPr txBox="1"/>
+          <p:nvPr/>
+        </p:nvSpPr>
+        <p:spPr>
+          <a:xfrm>
+            <a:off x="6766560" y="3840479"/>
+            <a:ext cx="5029200" cy="502920"/>
           </a:xfrm>
           <a:prstGeom prst="rect">
             <a:avLst/>
@@ -6974,14 +7049,14 @@
       </p:sp>
       <p:sp>
         <p:nvSpPr>
-          <p:cNvPr id="14" name="TextBox 13"/>
-          <p:cNvSpPr txBox="1"/>
-          <p:nvPr/>
-        </p:nvSpPr>
-        <p:spPr>
-          <a:xfrm>
-            <a:off x="6583680" y="3931920"/>
-            <a:ext cx="5212080" cy="365760"/>
+          <p:cNvPr id="16" name="TextBox 15"/>
+          <p:cNvSpPr txBox="1"/>
+          <p:nvPr/>
+        </p:nvSpPr>
+        <p:spPr>
+          <a:xfrm>
+            <a:off x="6583680" y="4389120"/>
+            <a:ext cx="5212080" cy="320040"/>
           </a:xfrm>
           <a:prstGeom prst="rect">
             <a:avLst/>
@@ -7009,14 +7084,14 @@
       </p:sp>
       <p:sp>
         <p:nvSpPr>
-          <p:cNvPr id="15" name="TextBox 14"/>
-          <p:cNvSpPr txBox="1"/>
-          <p:nvPr/>
-        </p:nvSpPr>
-        <p:spPr>
-          <a:xfrm>
-            <a:off x="6766560" y="4297680"/>
-            <a:ext cx="5029200" cy="457200"/>
+          <p:cNvPr id="17" name="TextBox 16"/>
+          <p:cNvSpPr txBox="1"/>
+          <p:nvPr/>
+        </p:nvSpPr>
+        <p:spPr>
+          <a:xfrm>
+            <a:off x="6766560" y="4709160"/>
+            <a:ext cx="5029200" cy="502920"/>
           </a:xfrm>
           <a:prstGeom prst="rect">
             <a:avLst/>
@@ -7044,14 +7119,14 @@
       </p:sp>
       <p:sp>
         <p:nvSpPr>
-          <p:cNvPr id="16" name="TextBox 15"/>
-          <p:cNvSpPr txBox="1"/>
-          <p:nvPr/>
-        </p:nvSpPr>
-        <p:spPr>
-          <a:xfrm>
-            <a:off x="6583680" y="4983479"/>
-            <a:ext cx="5212080" cy="365760"/>
+          <p:cNvPr id="18" name="TextBox 17"/>
+          <p:cNvSpPr txBox="1"/>
+          <p:nvPr/>
+        </p:nvSpPr>
+        <p:spPr>
+          <a:xfrm>
+            <a:off x="6583680" y="5257800"/>
+            <a:ext cx="5212080" cy="320040"/>
           </a:xfrm>
           <a:prstGeom prst="rect">
             <a:avLst/>
@@ -7079,14 +7154,14 @@
       </p:sp>
       <p:sp>
         <p:nvSpPr>
-          <p:cNvPr id="17" name="TextBox 16"/>
-          <p:cNvSpPr txBox="1"/>
-          <p:nvPr/>
-        </p:nvSpPr>
-        <p:spPr>
-          <a:xfrm>
-            <a:off x="6766560" y="5349239"/>
-            <a:ext cx="5029200" cy="457200"/>
+          <p:cNvPr id="19" name="TextBox 18"/>
+          <p:cNvSpPr txBox="1"/>
+          <p:nvPr/>
+        </p:nvSpPr>
+        <p:spPr>
+          <a:xfrm>
+            <a:off x="6766560" y="5577840"/>
+            <a:ext cx="5029200" cy="502920"/>
           </a:xfrm>
           <a:prstGeom prst="rect">
             <a:avLst/>
@@ -7114,7 +7189,7 @@
       </p:sp>
       <p:sp>
         <p:nvSpPr>
-          <p:cNvPr id="18" name="TextBox 17"/>
+          <p:cNvPr id="20" name="TextBox 19"/>
           <p:cNvSpPr txBox="1"/>
           <p:nvPr/>
         </p:nvSpPr>

--- a/docs/휴가증 자동 반영 프로그램 안내 (작업자용).pptx
+++ b/docs/휴가증 자동 반영 프로그램 안내 (작업자용).pptx
@@ -3351,7 +3351,7 @@
                 </a:solidFill>
                 <a:latin typeface="맑은 고딕"/>
               </a:rPr>
-              <a:t>발행: 2026-05-28  ·  개정: 2026-08-24  ·  담당: 이동준</a:t>
+              <a:t>발행: 2026-05-28  ·  개정: 2026-08-26  ·  담당: 이동준</a:t>
             </a:r>
           </a:p>
         </p:txBody>
@@ -5627,7 +5627,8 @@
 • 여러 유형은 휴가증 따로 작성 (예: 연차+반차 = 2건)
 • 같은 날짜 합계 1일 초과 시 등록 차단
 • 잔여보다 많이 신청하면 작성 차단
-• 서무가 처리 완료한 휴가증은 재등록 불가</a:t>
+• 서무가 처리 완료한 휴가증은 재등록 불가
+• 하기휴가는 1개 = 연속 3일 — 종료일 자동, 한 장으로 작성</a:t>
             </a:r>
           </a:p>
         </p:txBody>

--- a/docs/휴가증 자동 반영 프로그램 안내 (작업자용).pptx
+++ b/docs/휴가증 자동 반영 프로그램 안내 (작업자용).pptx
@@ -3461,8 +3461,8 @@
         </p:nvSpPr>
         <p:spPr>
           <a:xfrm>
-            <a:off x="731520" y="1554480"/>
-            <a:ext cx="5212080" cy="3931920"/>
+            <a:off x="655167" y="1554480"/>
+            <a:ext cx="5303520" cy="3931920"/>
           </a:xfrm>
           <a:prstGeom prst="roundRect">
             <a:avLst>
@@ -3507,8 +3507,8 @@
         </p:nvSpPr>
         <p:spPr>
           <a:xfrm>
-            <a:off x="914400" y="1828800"/>
-            <a:ext cx="4846320" cy="548640"/>
+            <a:off x="838047" y="1828800"/>
+            <a:ext cx="4937759" cy="548640"/>
           </a:xfrm>
           <a:prstGeom prst="rect">
             <a:avLst/>
@@ -3542,8 +3542,8 @@
         </p:nvSpPr>
         <p:spPr>
           <a:xfrm>
-            <a:off x="914400" y="2651760"/>
-            <a:ext cx="4846320" cy="2743200"/>
+            <a:off x="838047" y="2651760"/>
+            <a:ext cx="4937759" cy="2743200"/>
           </a:xfrm>
           <a:prstGeom prst="rect">
             <a:avLst/>
@@ -3580,8 +3580,8 @@
         </p:nvSpPr>
         <p:spPr>
           <a:xfrm>
-            <a:off x="6217920" y="1554480"/>
-            <a:ext cx="5212080" cy="3931920"/>
+            <a:off x="6233007" y="1554480"/>
+            <a:ext cx="5303520" cy="3931920"/>
           </a:xfrm>
           <a:prstGeom prst="roundRect">
             <a:avLst>
@@ -3626,8 +3626,8 @@
         </p:nvSpPr>
         <p:spPr>
           <a:xfrm>
-            <a:off x="6400800" y="1828800"/>
-            <a:ext cx="4846320" cy="548640"/>
+            <a:off x="6415887" y="1828800"/>
+            <a:ext cx="4937759" cy="548640"/>
           </a:xfrm>
           <a:prstGeom prst="rect">
             <a:avLst/>
@@ -3661,8 +3661,8 @@
         </p:nvSpPr>
         <p:spPr>
           <a:xfrm>
-            <a:off x="6400800" y="2651760"/>
-            <a:ext cx="4846320" cy="2743200"/>
+            <a:off x="6415887" y="2651760"/>
+            <a:ext cx="4937759" cy="2743200"/>
           </a:xfrm>
           <a:prstGeom prst="rect">
             <a:avLst/>
@@ -3699,8 +3699,8 @@
         </p:nvSpPr>
         <p:spPr>
           <a:xfrm>
-            <a:off x="731520" y="5760720"/>
-            <a:ext cx="10698480" cy="457200"/>
+            <a:off x="655167" y="5760720"/>
+            <a:ext cx="10881360" cy="457200"/>
           </a:xfrm>
           <a:prstGeom prst="rect">
             <a:avLst/>
@@ -3866,8 +3866,8 @@
         </p:nvSpPr>
         <p:spPr>
           <a:xfrm>
-            <a:off x="914400" y="1371600"/>
-            <a:ext cx="10332720" cy="822960"/>
+            <a:off x="655167" y="1371600"/>
+            <a:ext cx="10881360" cy="822960"/>
           </a:xfrm>
           <a:prstGeom prst="roundRect">
             <a:avLst>
@@ -3912,8 +3912,8 @@
         </p:nvSpPr>
         <p:spPr>
           <a:xfrm>
-            <a:off x="914400" y="1371600"/>
-            <a:ext cx="10332720" cy="822960"/>
+            <a:off x="655167" y="1371600"/>
+            <a:ext cx="10881360" cy="822960"/>
           </a:xfrm>
           <a:prstGeom prst="rect">
             <a:avLst/>
@@ -3947,8 +3947,8 @@
         </p:nvSpPr>
         <p:spPr>
           <a:xfrm>
-            <a:off x="731520" y="2560320"/>
-            <a:ext cx="3566160" cy="2377440"/>
+            <a:off x="655167" y="2560320"/>
+            <a:ext cx="3444240" cy="2377440"/>
           </a:xfrm>
           <a:prstGeom prst="roundRect">
             <a:avLst>
@@ -3993,8 +3993,8 @@
         </p:nvSpPr>
         <p:spPr>
           <a:xfrm>
-            <a:off x="731520" y="2743200"/>
-            <a:ext cx="3566160" cy="640080"/>
+            <a:off x="655167" y="2743200"/>
+            <a:ext cx="3444240" cy="640080"/>
           </a:xfrm>
           <a:prstGeom prst="rect">
             <a:avLst/>
@@ -4028,8 +4028,8 @@
         </p:nvSpPr>
         <p:spPr>
           <a:xfrm>
-            <a:off x="731520" y="3566160"/>
-            <a:ext cx="3566160" cy="457200"/>
+            <a:off x="655167" y="3566160"/>
+            <a:ext cx="3444240" cy="457200"/>
           </a:xfrm>
           <a:prstGeom prst="rect">
             <a:avLst/>
@@ -4063,8 +4063,8 @@
         </p:nvSpPr>
         <p:spPr>
           <a:xfrm>
-            <a:off x="731520" y="4114800"/>
-            <a:ext cx="3566160" cy="548640"/>
+            <a:off x="655167" y="4114800"/>
+            <a:ext cx="3444240" cy="548640"/>
           </a:xfrm>
           <a:prstGeom prst="rect">
             <a:avLst/>
@@ -4098,8 +4098,8 @@
         </p:nvSpPr>
         <p:spPr>
           <a:xfrm>
-            <a:off x="4572000" y="2560320"/>
-            <a:ext cx="3566160" cy="2377440"/>
+            <a:off x="4373727" y="2560320"/>
+            <a:ext cx="3444240" cy="2377440"/>
           </a:xfrm>
           <a:prstGeom prst="roundRect">
             <a:avLst>
@@ -4144,8 +4144,8 @@
         </p:nvSpPr>
         <p:spPr>
           <a:xfrm>
-            <a:off x="4572000" y="2743200"/>
-            <a:ext cx="3566160" cy="640080"/>
+            <a:off x="4373727" y="2743200"/>
+            <a:ext cx="3444240" cy="640080"/>
           </a:xfrm>
           <a:prstGeom prst="rect">
             <a:avLst/>
@@ -4179,8 +4179,8 @@
         </p:nvSpPr>
         <p:spPr>
           <a:xfrm>
-            <a:off x="4572000" y="3566160"/>
-            <a:ext cx="3566160" cy="457200"/>
+            <a:off x="4373727" y="3566160"/>
+            <a:ext cx="3444240" cy="457200"/>
           </a:xfrm>
           <a:prstGeom prst="rect">
             <a:avLst/>
@@ -4214,8 +4214,8 @@
         </p:nvSpPr>
         <p:spPr>
           <a:xfrm>
-            <a:off x="4572000" y="4114800"/>
-            <a:ext cx="3566160" cy="548640"/>
+            <a:off x="4373727" y="4114800"/>
+            <a:ext cx="3444240" cy="548640"/>
           </a:xfrm>
           <a:prstGeom prst="rect">
             <a:avLst/>
@@ -4249,8 +4249,8 @@
         </p:nvSpPr>
         <p:spPr>
           <a:xfrm>
-            <a:off x="8412480" y="2560320"/>
-            <a:ext cx="3566160" cy="2377440"/>
+            <a:off x="8092287" y="2560320"/>
+            <a:ext cx="3444240" cy="2377440"/>
           </a:xfrm>
           <a:prstGeom prst="roundRect">
             <a:avLst>
@@ -4295,8 +4295,8 @@
         </p:nvSpPr>
         <p:spPr>
           <a:xfrm>
-            <a:off x="8412480" y="2743200"/>
-            <a:ext cx="3566160" cy="640080"/>
+            <a:off x="8092287" y="2743200"/>
+            <a:ext cx="3444240" cy="640080"/>
           </a:xfrm>
           <a:prstGeom prst="rect">
             <a:avLst/>
@@ -4330,8 +4330,8 @@
         </p:nvSpPr>
         <p:spPr>
           <a:xfrm>
-            <a:off x="8412480" y="3566160"/>
-            <a:ext cx="3566160" cy="457200"/>
+            <a:off x="8092287" y="3566160"/>
+            <a:ext cx="3444240" cy="457200"/>
           </a:xfrm>
           <a:prstGeom prst="rect">
             <a:avLst/>
@@ -4365,8 +4365,8 @@
         </p:nvSpPr>
         <p:spPr>
           <a:xfrm>
-            <a:off x="8412480" y="4114800"/>
-            <a:ext cx="3566160" cy="548640"/>
+            <a:off x="8092287" y="4114800"/>
+            <a:ext cx="3444240" cy="548640"/>
           </a:xfrm>
           <a:prstGeom prst="rect">
             <a:avLst/>
@@ -4400,8 +4400,8 @@
         </p:nvSpPr>
         <p:spPr>
           <a:xfrm>
-            <a:off x="914400" y="5074920"/>
-            <a:ext cx="10332720" cy="1234440"/>
+            <a:off x="655167" y="5074920"/>
+            <a:ext cx="10881360" cy="1234440"/>
           </a:xfrm>
           <a:prstGeom prst="roundRect">
             <a:avLst>
@@ -4446,8 +4446,8 @@
         </p:nvSpPr>
         <p:spPr>
           <a:xfrm>
-            <a:off x="1188720" y="5166360"/>
-            <a:ext cx="9875520" cy="1051560"/>
+            <a:off x="929487" y="5166360"/>
+            <a:ext cx="10332720" cy="1051560"/>
           </a:xfrm>
           <a:prstGeom prst="rect">
             <a:avLst/>
@@ -4614,8 +4614,8 @@
         </p:nvSpPr>
         <p:spPr>
           <a:xfrm>
-            <a:off x="731520" y="1280160"/>
-            <a:ext cx="10698480" cy="548640"/>
+            <a:off x="655167" y="1280160"/>
+            <a:ext cx="10881360" cy="548640"/>
           </a:xfrm>
           <a:prstGeom prst="rect">
             <a:avLst/>
@@ -4649,8 +4649,8 @@
         </p:nvSpPr>
         <p:spPr>
           <a:xfrm>
-            <a:off x="731520" y="2103120"/>
-            <a:ext cx="5394960" cy="3474720"/>
+            <a:off x="655167" y="2103120"/>
+            <a:ext cx="5303520" cy="3474720"/>
           </a:xfrm>
           <a:prstGeom prst="roundRect">
             <a:avLst>
@@ -4695,8 +4695,8 @@
         </p:nvSpPr>
         <p:spPr>
           <a:xfrm>
-            <a:off x="914400" y="2286000"/>
-            <a:ext cx="5029200" cy="548640"/>
+            <a:off x="838047" y="2286000"/>
+            <a:ext cx="4937759" cy="548640"/>
           </a:xfrm>
           <a:prstGeom prst="rect">
             <a:avLst/>
@@ -4730,8 +4730,8 @@
         </p:nvSpPr>
         <p:spPr>
           <a:xfrm>
-            <a:off x="914400" y="3017520"/>
-            <a:ext cx="5029200" cy="2468880"/>
+            <a:off x="838047" y="3017520"/>
+            <a:ext cx="4937759" cy="2468880"/>
           </a:xfrm>
           <a:prstGeom prst="rect">
             <a:avLst/>
@@ -4768,8 +4768,8 @@
         </p:nvSpPr>
         <p:spPr>
           <a:xfrm>
-            <a:off x="6217920" y="2103120"/>
-            <a:ext cx="5394960" cy="3474720"/>
+            <a:off x="6233007" y="2103120"/>
+            <a:ext cx="5303520" cy="3474720"/>
           </a:xfrm>
           <a:prstGeom prst="roundRect">
             <a:avLst>
@@ -4814,8 +4814,8 @@
         </p:nvSpPr>
         <p:spPr>
           <a:xfrm>
-            <a:off x="6400800" y="2286000"/>
-            <a:ext cx="5029200" cy="548640"/>
+            <a:off x="6415887" y="2286000"/>
+            <a:ext cx="4937759" cy="548640"/>
           </a:xfrm>
           <a:prstGeom prst="rect">
             <a:avLst/>
@@ -4849,8 +4849,8 @@
         </p:nvSpPr>
         <p:spPr>
           <a:xfrm>
-            <a:off x="6400800" y="3017520"/>
-            <a:ext cx="5029200" cy="2468880"/>
+            <a:off x="6415887" y="3017520"/>
+            <a:ext cx="4937759" cy="2468880"/>
           </a:xfrm>
           <a:prstGeom prst="rect">
             <a:avLst/>
@@ -4887,7 +4887,7 @@
         </p:nvSpPr>
         <p:spPr>
           <a:xfrm>
-            <a:off x="731520" y="5760720"/>
+            <a:off x="655167" y="5760720"/>
             <a:ext cx="10881360" cy="640080"/>
           </a:xfrm>
           <a:prstGeom prst="roundRect">
@@ -4933,7 +4933,7 @@
         </p:nvSpPr>
         <p:spPr>
           <a:xfrm>
-            <a:off x="914400" y="5760720"/>
+            <a:off x="838047" y="5760720"/>
             <a:ext cx="10515600" cy="640080"/>
           </a:xfrm>
           <a:prstGeom prst="rect">
@@ -5100,7 +5100,7 @@
         </p:nvSpPr>
         <p:spPr>
           <a:xfrm>
-            <a:off x="731520" y="1371600"/>
+            <a:off x="655167" y="1371600"/>
             <a:ext cx="5486400" cy="457200"/>
           </a:xfrm>
           <a:prstGeom prst="rect">
@@ -5135,7 +5135,7 @@
         </p:nvSpPr>
         <p:spPr>
           <a:xfrm>
-            <a:off x="731520" y="1920240"/>
+            <a:off x="655167" y="1920240"/>
             <a:ext cx="365760" cy="457200"/>
           </a:xfrm>
           <a:prstGeom prst="rect">
@@ -5170,7 +5170,7 @@
         </p:nvSpPr>
         <p:spPr>
           <a:xfrm>
-            <a:off x="1188720" y="1920240"/>
+            <a:off x="1112367" y="1920240"/>
             <a:ext cx="2011680" cy="457200"/>
           </a:xfrm>
           <a:prstGeom prst="rect">
@@ -5205,7 +5205,7 @@
         </p:nvSpPr>
         <p:spPr>
           <a:xfrm>
-            <a:off x="3291840" y="1920240"/>
+            <a:off x="3215487" y="1920240"/>
             <a:ext cx="2926080" cy="457200"/>
           </a:xfrm>
           <a:prstGeom prst="rect">
@@ -5240,7 +5240,7 @@
         </p:nvSpPr>
         <p:spPr>
           <a:xfrm>
-            <a:off x="731520" y="2560320"/>
+            <a:off x="655167" y="2560320"/>
             <a:ext cx="365760" cy="457200"/>
           </a:xfrm>
           <a:prstGeom prst="rect">
@@ -5275,7 +5275,7 @@
         </p:nvSpPr>
         <p:spPr>
           <a:xfrm>
-            <a:off x="1188720" y="2560320"/>
+            <a:off x="1112367" y="2560320"/>
             <a:ext cx="2011680" cy="457200"/>
           </a:xfrm>
           <a:prstGeom prst="rect">
@@ -5310,7 +5310,7 @@
         </p:nvSpPr>
         <p:spPr>
           <a:xfrm>
-            <a:off x="3291840" y="2560320"/>
+            <a:off x="3215487" y="2560320"/>
             <a:ext cx="2926080" cy="457200"/>
           </a:xfrm>
           <a:prstGeom prst="rect">
@@ -5345,7 +5345,7 @@
         </p:nvSpPr>
         <p:spPr>
           <a:xfrm>
-            <a:off x="731520" y="3200400"/>
+            <a:off x="655167" y="3200400"/>
             <a:ext cx="365760" cy="457200"/>
           </a:xfrm>
           <a:prstGeom prst="rect">
@@ -5380,7 +5380,7 @@
         </p:nvSpPr>
         <p:spPr>
           <a:xfrm>
-            <a:off x="1188720" y="3200400"/>
+            <a:off x="1112367" y="3200400"/>
             <a:ext cx="2011680" cy="457200"/>
           </a:xfrm>
           <a:prstGeom prst="rect">
@@ -5415,7 +5415,7 @@
         </p:nvSpPr>
         <p:spPr>
           <a:xfrm>
-            <a:off x="3291840" y="3200400"/>
+            <a:off x="3215487" y="3200400"/>
             <a:ext cx="2926080" cy="457200"/>
           </a:xfrm>
           <a:prstGeom prst="rect">
@@ -5450,7 +5450,7 @@
         </p:nvSpPr>
         <p:spPr>
           <a:xfrm>
-            <a:off x="731520" y="3840479"/>
+            <a:off x="655167" y="3840479"/>
             <a:ext cx="365760" cy="457200"/>
           </a:xfrm>
           <a:prstGeom prst="rect">
@@ -5485,7 +5485,7 @@
         </p:nvSpPr>
         <p:spPr>
           <a:xfrm>
-            <a:off x="1188720" y="3840479"/>
+            <a:off x="1112367" y="3840479"/>
             <a:ext cx="2011680" cy="457200"/>
           </a:xfrm>
           <a:prstGeom prst="rect">
@@ -5520,7 +5520,7 @@
         </p:nvSpPr>
         <p:spPr>
           <a:xfrm>
-            <a:off x="3291840" y="3840479"/>
+            <a:off x="3215487" y="3840479"/>
             <a:ext cx="2926080" cy="457200"/>
           </a:xfrm>
           <a:prstGeom prst="rect">
@@ -5555,7 +5555,7 @@
         </p:nvSpPr>
         <p:spPr>
           <a:xfrm>
-            <a:off x="731520" y="4617720"/>
+            <a:off x="655167" y="4617720"/>
             <a:ext cx="5486400" cy="1600200"/>
           </a:xfrm>
           <a:prstGeom prst="roundRect">
@@ -5601,7 +5601,7 @@
         </p:nvSpPr>
         <p:spPr>
           <a:xfrm>
-            <a:off x="914400" y="4736592"/>
+            <a:off x="838047" y="4736592"/>
             <a:ext cx="5120640" cy="1371600"/>
           </a:xfrm>
           <a:prstGeom prst="rect">
@@ -5641,7 +5641,7 @@
         </p:nvSpPr>
         <p:spPr>
           <a:xfrm>
-            <a:off x="6583680" y="1371600"/>
+            <a:off x="6507327" y="1371600"/>
             <a:ext cx="5029200" cy="457200"/>
           </a:xfrm>
           <a:prstGeom prst="rect">
@@ -5676,7 +5676,7 @@
         </p:nvSpPr>
         <p:spPr>
           <a:xfrm>
-            <a:off x="6583680" y="1920240"/>
+            <a:off x="6507327" y="1920240"/>
             <a:ext cx="5029200" cy="502920"/>
           </a:xfrm>
           <a:prstGeom prst="rect">
@@ -5720,7 +5720,7 @@
         </p:nvSpPr>
         <p:spPr>
           <a:xfrm>
-            <a:off x="6766560" y="1920240"/>
+            <a:off x="6690207" y="1920240"/>
             <a:ext cx="3017520" cy="502920"/>
           </a:xfrm>
           <a:prstGeom prst="rect">
@@ -5755,7 +5755,7 @@
         </p:nvSpPr>
         <p:spPr>
           <a:xfrm>
-            <a:off x="9966960" y="1920240"/>
+            <a:off x="9890607" y="1920240"/>
             <a:ext cx="1645920" cy="502920"/>
           </a:xfrm>
           <a:prstGeom prst="rect">
@@ -5790,7 +5790,7 @@
         </p:nvSpPr>
         <p:spPr>
           <a:xfrm>
-            <a:off x="6583680" y="2423160"/>
+            <a:off x="6507327" y="2423160"/>
             <a:ext cx="5029200" cy="502920"/>
           </a:xfrm>
           <a:prstGeom prst="rect">
@@ -5834,7 +5834,7 @@
         </p:nvSpPr>
         <p:spPr>
           <a:xfrm>
-            <a:off x="6766560" y="2423160"/>
+            <a:off x="6690207" y="2423160"/>
             <a:ext cx="3017520" cy="502920"/>
           </a:xfrm>
           <a:prstGeom prst="rect">
@@ -5869,7 +5869,7 @@
         </p:nvSpPr>
         <p:spPr>
           <a:xfrm>
-            <a:off x="9966960" y="2423160"/>
+            <a:off x="9890607" y="2423160"/>
             <a:ext cx="1645920" cy="502920"/>
           </a:xfrm>
           <a:prstGeom prst="rect">
@@ -5904,7 +5904,7 @@
         </p:nvSpPr>
         <p:spPr>
           <a:xfrm>
-            <a:off x="6583680" y="2926080"/>
+            <a:off x="6507327" y="2926080"/>
             <a:ext cx="5029200" cy="502920"/>
           </a:xfrm>
           <a:prstGeom prst="rect">
@@ -5948,7 +5948,7 @@
         </p:nvSpPr>
         <p:spPr>
           <a:xfrm>
-            <a:off x="6766560" y="2926080"/>
+            <a:off x="6690207" y="2926080"/>
             <a:ext cx="3017520" cy="502920"/>
           </a:xfrm>
           <a:prstGeom prst="rect">
@@ -5983,7 +5983,7 @@
         </p:nvSpPr>
         <p:spPr>
           <a:xfrm>
-            <a:off x="9966960" y="2926080"/>
+            <a:off x="9890607" y="2926080"/>
             <a:ext cx="1645920" cy="502920"/>
           </a:xfrm>
           <a:prstGeom prst="rect">
@@ -6018,7 +6018,7 @@
         </p:nvSpPr>
         <p:spPr>
           <a:xfrm>
-            <a:off x="6583680" y="3429000"/>
+            <a:off x="6507327" y="3429000"/>
             <a:ext cx="5029200" cy="502920"/>
           </a:xfrm>
           <a:prstGeom prst="rect">
@@ -6062,7 +6062,7 @@
         </p:nvSpPr>
         <p:spPr>
           <a:xfrm>
-            <a:off x="6766560" y="3429000"/>
+            <a:off x="6690207" y="3429000"/>
             <a:ext cx="3017520" cy="502920"/>
           </a:xfrm>
           <a:prstGeom prst="rect">
@@ -6097,7 +6097,7 @@
         </p:nvSpPr>
         <p:spPr>
           <a:xfrm>
-            <a:off x="9966960" y="3429000"/>
+            <a:off x="9890607" y="3429000"/>
             <a:ext cx="1645920" cy="502920"/>
           </a:xfrm>
           <a:prstGeom prst="rect">
@@ -6132,7 +6132,7 @@
         </p:nvSpPr>
         <p:spPr>
           <a:xfrm>
-            <a:off x="6583680" y="3931920"/>
+            <a:off x="6507327" y="3931920"/>
             <a:ext cx="5029200" cy="502920"/>
           </a:xfrm>
           <a:prstGeom prst="rect">
@@ -6176,7 +6176,7 @@
         </p:nvSpPr>
         <p:spPr>
           <a:xfrm>
-            <a:off x="6766560" y="3931920"/>
+            <a:off x="6690207" y="3931920"/>
             <a:ext cx="3017520" cy="502920"/>
           </a:xfrm>
           <a:prstGeom prst="rect">
@@ -6211,7 +6211,7 @@
         </p:nvSpPr>
         <p:spPr>
           <a:xfrm>
-            <a:off x="9966960" y="3931920"/>
+            <a:off x="9890607" y="3931920"/>
             <a:ext cx="1645920" cy="502920"/>
           </a:xfrm>
           <a:prstGeom prst="rect">
@@ -6246,7 +6246,7 @@
         </p:nvSpPr>
         <p:spPr>
           <a:xfrm>
-            <a:off x="6583680" y="4434840"/>
+            <a:off x="6507327" y="4434840"/>
             <a:ext cx="5029200" cy="502920"/>
           </a:xfrm>
           <a:prstGeom prst="rect">
@@ -6290,7 +6290,7 @@
         </p:nvSpPr>
         <p:spPr>
           <a:xfrm>
-            <a:off x="6766560" y="4434840"/>
+            <a:off x="6690207" y="4434840"/>
             <a:ext cx="3017520" cy="502920"/>
           </a:xfrm>
           <a:prstGeom prst="rect">
@@ -6325,7 +6325,7 @@
         </p:nvSpPr>
         <p:spPr>
           <a:xfrm>
-            <a:off x="9966960" y="4434840"/>
+            <a:off x="9890607" y="4434840"/>
             <a:ext cx="1645920" cy="502920"/>
           </a:xfrm>
           <a:prstGeom prst="rect">
@@ -6360,7 +6360,7 @@
         </p:nvSpPr>
         <p:spPr>
           <a:xfrm>
-            <a:off x="6583680" y="4937760"/>
+            <a:off x="6507327" y="4937760"/>
             <a:ext cx="5029200" cy="502920"/>
           </a:xfrm>
           <a:prstGeom prst="rect">
@@ -6404,7 +6404,7 @@
         </p:nvSpPr>
         <p:spPr>
           <a:xfrm>
-            <a:off x="6766560" y="4937760"/>
+            <a:off x="6690207" y="4937760"/>
             <a:ext cx="3017520" cy="502920"/>
           </a:xfrm>
           <a:prstGeom prst="rect">
@@ -6439,7 +6439,7 @@
         </p:nvSpPr>
         <p:spPr>
           <a:xfrm>
-            <a:off x="9966960" y="4937760"/>
+            <a:off x="9890607" y="4937760"/>
             <a:ext cx="1645920" cy="502920"/>
           </a:xfrm>
           <a:prstGeom prst="rect">
@@ -6606,7 +6606,7 @@
         </p:nvSpPr>
         <p:spPr>
           <a:xfrm>
-            <a:off x="731520" y="1280160"/>
+            <a:off x="655167" y="1280160"/>
             <a:ext cx="5486400" cy="457200"/>
           </a:xfrm>
           <a:prstGeom prst="rect">
@@ -6641,7 +6641,7 @@
         </p:nvSpPr>
         <p:spPr>
           <a:xfrm>
-            <a:off x="731520" y="1828800"/>
+            <a:off x="655167" y="1828800"/>
             <a:ext cx="5486400" cy="2194560"/>
           </a:xfrm>
           <a:prstGeom prst="roundRect">
@@ -6687,7 +6687,7 @@
         </p:nvSpPr>
         <p:spPr>
           <a:xfrm>
-            <a:off x="914400" y="1965960"/>
+            <a:off x="838047" y="1965960"/>
             <a:ext cx="5120640" cy="2011680"/>
           </a:xfrm>
           <a:prstGeom prst="rect">
@@ -6727,7 +6727,7 @@
         </p:nvSpPr>
         <p:spPr>
           <a:xfrm>
-            <a:off x="731520" y="4343400"/>
+            <a:off x="655167" y="4343400"/>
             <a:ext cx="5486400" cy="1143000"/>
           </a:xfrm>
           <a:prstGeom prst="roundRect">
@@ -6773,7 +6773,7 @@
         </p:nvSpPr>
         <p:spPr>
           <a:xfrm>
-            <a:off x="914400" y="4434840"/>
+            <a:off x="838047" y="4434840"/>
             <a:ext cx="5120640" cy="960120"/>
           </a:xfrm>
           <a:prstGeom prst="rect">
@@ -6810,8 +6810,8 @@
         </p:nvSpPr>
         <p:spPr>
           <a:xfrm>
-            <a:off x="6583680" y="1280160"/>
-            <a:ext cx="5212080" cy="457200"/>
+            <a:off x="6507327" y="1280160"/>
+            <a:ext cx="5029200" cy="457200"/>
           </a:xfrm>
           <a:prstGeom prst="rect">
             <a:avLst/>
@@ -6845,8 +6845,8 @@
         </p:nvSpPr>
         <p:spPr>
           <a:xfrm>
-            <a:off x="6583680" y="1783080"/>
-            <a:ext cx="5212080" cy="320040"/>
+            <a:off x="6507327" y="1783080"/>
+            <a:ext cx="5029200" cy="320040"/>
           </a:xfrm>
           <a:prstGeom prst="rect">
             <a:avLst/>
@@ -6880,8 +6880,8 @@
         </p:nvSpPr>
         <p:spPr>
           <a:xfrm>
-            <a:off x="6766560" y="2103120"/>
-            <a:ext cx="5029200" cy="502920"/>
+            <a:off x="6690207" y="2103120"/>
+            <a:ext cx="4846320" cy="502920"/>
           </a:xfrm>
           <a:prstGeom prst="rect">
             <a:avLst/>
@@ -6916,8 +6916,8 @@
         </p:nvSpPr>
         <p:spPr>
           <a:xfrm>
-            <a:off x="6583680" y="2651760"/>
-            <a:ext cx="5212080" cy="320040"/>
+            <a:off x="6507327" y="2651760"/>
+            <a:ext cx="5029200" cy="320040"/>
           </a:xfrm>
           <a:prstGeom prst="rect">
             <a:avLst/>
@@ -6951,8 +6951,8 @@
         </p:nvSpPr>
         <p:spPr>
           <a:xfrm>
-            <a:off x="6766560" y="2971800"/>
-            <a:ext cx="5029200" cy="502920"/>
+            <a:off x="6690207" y="2971800"/>
+            <a:ext cx="4846320" cy="502920"/>
           </a:xfrm>
           <a:prstGeom prst="rect">
             <a:avLst/>
@@ -6986,8 +6986,8 @@
         </p:nvSpPr>
         <p:spPr>
           <a:xfrm>
-            <a:off x="6583680" y="3520439"/>
-            <a:ext cx="5212080" cy="320040"/>
+            <a:off x="6507327" y="3520439"/>
+            <a:ext cx="5029200" cy="320040"/>
           </a:xfrm>
           <a:prstGeom prst="rect">
             <a:avLst/>
@@ -7021,8 +7021,8 @@
         </p:nvSpPr>
         <p:spPr>
           <a:xfrm>
-            <a:off x="6766560" y="3840479"/>
-            <a:ext cx="5029200" cy="502920"/>
+            <a:off x="6690207" y="3840479"/>
+            <a:ext cx="4846320" cy="502920"/>
           </a:xfrm>
           <a:prstGeom prst="rect">
             <a:avLst/>
@@ -7056,8 +7056,8 @@
         </p:nvSpPr>
         <p:spPr>
           <a:xfrm>
-            <a:off x="6583680" y="4389120"/>
-            <a:ext cx="5212080" cy="320040"/>
+            <a:off x="6507327" y="4389120"/>
+            <a:ext cx="5029200" cy="320040"/>
           </a:xfrm>
           <a:prstGeom prst="rect">
             <a:avLst/>
@@ -7091,8 +7091,8 @@
         </p:nvSpPr>
         <p:spPr>
           <a:xfrm>
-            <a:off x="6766560" y="4709160"/>
-            <a:ext cx="5029200" cy="502920"/>
+            <a:off x="6690207" y="4709160"/>
+            <a:ext cx="4846320" cy="502920"/>
           </a:xfrm>
           <a:prstGeom prst="rect">
             <a:avLst/>
@@ -7126,8 +7126,8 @@
         </p:nvSpPr>
         <p:spPr>
           <a:xfrm>
-            <a:off x="6583680" y="5257800"/>
-            <a:ext cx="5212080" cy="320040"/>
+            <a:off x="6507327" y="5257800"/>
+            <a:ext cx="5029200" cy="320040"/>
           </a:xfrm>
           <a:prstGeom prst="rect">
             <a:avLst/>
@@ -7161,8 +7161,8 @@
         </p:nvSpPr>
         <p:spPr>
           <a:xfrm>
-            <a:off x="6766560" y="5577840"/>
-            <a:ext cx="5029200" cy="502920"/>
+            <a:off x="6690207" y="5577840"/>
+            <a:ext cx="4846320" cy="502920"/>
           </a:xfrm>
           <a:prstGeom prst="rect">
             <a:avLst/>

--- a/docs/휴가증 자동 반영 프로그램 안내 (작업자용).pptx
+++ b/docs/휴가증 자동 반영 프로그램 안내 (작업자용).pptx
@@ -3167,7 +3167,7 @@
                 </a:solidFill>
                 <a:latin typeface="맑은 고딕"/>
               </a:rPr>
-              <a:t>COSMAX · 생산3팀 파우더 성형실</a:t>
+              <a:t>COSMAX</a:t>
             </a:r>
           </a:p>
         </p:txBody>
@@ -3351,7 +3351,7 @@
                 </a:solidFill>
                 <a:latin typeface="맑은 고딕"/>
               </a:rPr>
-              <a:t>발행: 2026-05-28  ·  개정: 2026-08-26  ·  담당: 이동준</a:t>
+              <a:t>발행: 2026-05-28  ·  개정: 2026-08-26</a:t>
             </a:r>
           </a:p>
         </p:txBody>
@@ -3756,7 +3756,7 @@
                 </a:solidFill>
                 <a:latin typeface="맑은 고딕"/>
               </a:rPr>
-              <a:t>COSMAX · 생산3팀 파우더 성형실    |    2 / 6</a:t>
+              <a:t>COSMAX    |    2 / 6</a:t>
             </a:r>
           </a:p>
         </p:txBody>
@@ -4504,7 +4504,7 @@
                 </a:solidFill>
                 <a:latin typeface="맑은 고딕"/>
               </a:rPr>
-              <a:t>COSMAX · 생산3팀 파우더 성형실    |    3 / 6</a:t>
+              <a:t>COSMAX    |    3 / 6</a:t>
             </a:r>
           </a:p>
         </p:txBody>
@@ -4990,7 +4990,7 @@
                 </a:solidFill>
                 <a:latin typeface="맑은 고딕"/>
               </a:rPr>
-              <a:t>COSMAX · 생산3팀 파우더 성형실    |    4 / 6</a:t>
+              <a:t>COSMAX    |    4 / 6</a:t>
             </a:r>
           </a:p>
         </p:txBody>
@@ -6496,7 +6496,7 @@
                 </a:solidFill>
                 <a:latin typeface="맑은 고딕"/>
               </a:rPr>
-              <a:t>COSMAX · 생산3팀 파우더 성형실    |    5 / 6</a:t>
+              <a:t>COSMAX    |    5 / 6</a:t>
             </a:r>
           </a:p>
         </p:txBody>
@@ -7043,7 +7043,7 @@
                 </a:solidFill>
                 <a:latin typeface="맑은 고딕"/>
               </a:rPr>
-              <a:t>→ 관리자(이동준)에게 요청</a:t>
+              <a:t>→ 관리자에게 요청</a:t>
             </a:r>
           </a:p>
         </p:txBody>
@@ -7218,7 +7218,7 @@
                 </a:solidFill>
                 <a:latin typeface="맑은 고딕"/>
               </a:rPr>
-              <a:t>COSMAX · 생산3팀 파우더 성형실    |    6 / 6</a:t>
+              <a:t>COSMAX    |    6 / 6</a:t>
             </a:r>
           </a:p>
         </p:txBody>
